--- a/folien/14-speicher.pptx
+++ b/folien/14-speicher.pptx
@@ -22,9 +22,12 @@
     <p:sldId id="270" r:id="rId16"/>
     <p:sldId id="271" r:id="rId17"/>
     <p:sldId id="272" r:id="rId18"/>
+    <p:sldId id="273" r:id="rId19"/>
+    <p:sldId id="274" r:id="rId20"/>
+    <p:sldId id="275" r:id="rId21"/>
   </p:sldIdLst>
   <p:notesMasterIdLst>
-    <p:notesMasterId r:id="rId19"/>
+    <p:notesMasterId r:id="rId22"/>
   </p:notesMasterIdLst>
   <p:sldSz cx="9144000" cy="5143500"/>
   <p:notesSz cx="5143500" cy="9144000"/>
@@ -1264,6 +1267,182 @@
 </p:notes>
 </file>
 
+<file path=ppt/notesSlides/notesSlide18.xml><?xml version="1.0" encoding="utf-8"?>
+<p:notes xmlns:a="http://schemas.openxmlformats.org/drawingml/2006/main" xmlns:r="http://schemas.openxmlformats.org/officeDocument/2006/relationships" xmlns:p="http://schemas.openxmlformats.org/presentationml/2006/main">
+  <p:cSld>
+    <p:spTree>
+      <p:nvGrpSpPr>
+        <p:cNvPr id="1" name=""/>
+        <p:cNvGrpSpPr/>
+        <p:nvPr/>
+      </p:nvGrpSpPr>
+      <p:grpSpPr>
+        <a:xfrm>
+          <a:off x="0" y="0"/>
+          <a:ext cx="0" cy="0"/>
+          <a:chOff x="0" y="0"/>
+          <a:chExt cx="0" cy="0"/>
+        </a:xfrm>
+      </p:grpSpPr>
+      <p:sp>
+        <p:nvSpPr>
+          <p:cNvPr id="2" name="Slide Image Placeholder 1"/>
+          <p:cNvSpPr>
+            <a:spLocks noGrp="1" noRot="1" noChangeAspect="1"/>
+          </p:cNvSpPr>
+          <p:nvPr>
+            <p:ph type="sldImg"/>
+          </p:nvPr>
+        </p:nvSpPr>
+        <p:spPr/>
+      </p:sp>
+      <p:sp>
+        <p:nvSpPr>
+          <p:cNvPr id="3" name="Notes Placeholder 2"/>
+          <p:cNvSpPr>
+            <a:spLocks noGrp="1"/>
+          </p:cNvSpPr>
+          <p:nvPr>
+            <p:ph type="body" idx="1"/>
+          </p:nvPr>
+        </p:nvSpPr>
+        <p:spPr/>
+        <p:txBody>
+          <a:bodyPr/>
+          <a:lstStyle/>
+          <a:p>
+            <a:r>
+              <a:rPr lang="en-US" dirty="0"/>
+              <a:t/>
+            </a:r>
+            <a:endParaRPr lang="en-US" dirty="0"/>
+          </a:p>
+        </p:txBody>
+      </p:sp>
+      <p:sp>
+        <p:nvSpPr>
+          <p:cNvPr id="4" name="Slide Number Placeholder 3"/>
+          <p:cNvSpPr>
+            <a:spLocks noGrp="1"/>
+          </p:cNvSpPr>
+          <p:nvPr>
+            <p:ph type="sldNum" sz="quarter" idx="10"/>
+          </p:nvPr>
+        </p:nvSpPr>
+        <p:spPr/>
+        <p:txBody>
+          <a:bodyPr/>
+          <a:lstStyle/>
+          <a:p>
+            <a:fld id="{F7021451-1387-4CA6-816F-3879F97B5CBC}" type="slidenum">
+              <a:rPr lang="en-US"/>
+              <a:t>18</a:t>
+            </a:fld>
+            <a:endParaRPr lang="en-US"/>
+          </a:p>
+        </p:txBody>
+      </p:sp>
+    </p:spTree>
+    <p:extLst>
+      <p:ext uri="{BB962C8B-B14F-4D97-AF65-F5344CB8AC3E}">
+        <p14:creationId xmlns:p14="http://schemas.microsoft.com/office/powerpoint/2010/main" val="1024086991"/>
+      </p:ext>
+    </p:extLst>
+  </p:cSld>
+  <p:clrMapOvr>
+    <a:masterClrMapping/>
+  </p:clrMapOvr>
+</p:notes>
+</file>
+
+<file path=ppt/notesSlides/notesSlide19.xml><?xml version="1.0" encoding="utf-8"?>
+<p:notes xmlns:a="http://schemas.openxmlformats.org/drawingml/2006/main" xmlns:r="http://schemas.openxmlformats.org/officeDocument/2006/relationships" xmlns:p="http://schemas.openxmlformats.org/presentationml/2006/main">
+  <p:cSld>
+    <p:spTree>
+      <p:nvGrpSpPr>
+        <p:cNvPr id="1" name=""/>
+        <p:cNvGrpSpPr/>
+        <p:nvPr/>
+      </p:nvGrpSpPr>
+      <p:grpSpPr>
+        <a:xfrm>
+          <a:off x="0" y="0"/>
+          <a:ext cx="0" cy="0"/>
+          <a:chOff x="0" y="0"/>
+          <a:chExt cx="0" cy="0"/>
+        </a:xfrm>
+      </p:grpSpPr>
+      <p:sp>
+        <p:nvSpPr>
+          <p:cNvPr id="2" name="Slide Image Placeholder 1"/>
+          <p:cNvSpPr>
+            <a:spLocks noGrp="1" noRot="1" noChangeAspect="1"/>
+          </p:cNvSpPr>
+          <p:nvPr>
+            <p:ph type="sldImg"/>
+          </p:nvPr>
+        </p:nvSpPr>
+        <p:spPr/>
+      </p:sp>
+      <p:sp>
+        <p:nvSpPr>
+          <p:cNvPr id="3" name="Notes Placeholder 2"/>
+          <p:cNvSpPr>
+            <a:spLocks noGrp="1"/>
+          </p:cNvSpPr>
+          <p:nvPr>
+            <p:ph type="body" idx="1"/>
+          </p:nvPr>
+        </p:nvSpPr>
+        <p:spPr/>
+        <p:txBody>
+          <a:bodyPr/>
+          <a:lstStyle/>
+          <a:p>
+            <a:r>
+              <a:rPr lang="en-US" dirty="0"/>
+              <a:t/>
+            </a:r>
+            <a:endParaRPr lang="en-US" dirty="0"/>
+          </a:p>
+        </p:txBody>
+      </p:sp>
+      <p:sp>
+        <p:nvSpPr>
+          <p:cNvPr id="4" name="Slide Number Placeholder 3"/>
+          <p:cNvSpPr>
+            <a:spLocks noGrp="1"/>
+          </p:cNvSpPr>
+          <p:nvPr>
+            <p:ph type="sldNum" sz="quarter" idx="10"/>
+          </p:nvPr>
+        </p:nvSpPr>
+        <p:spPr/>
+        <p:txBody>
+          <a:bodyPr/>
+          <a:lstStyle/>
+          <a:p>
+            <a:fld id="{F7021451-1387-4CA6-816F-3879F97B5CBC}" type="slidenum">
+              <a:rPr lang="en-US"/>
+              <a:t>19</a:t>
+            </a:fld>
+            <a:endParaRPr lang="en-US"/>
+          </a:p>
+        </p:txBody>
+      </p:sp>
+    </p:spTree>
+    <p:extLst>
+      <p:ext uri="{BB962C8B-B14F-4D97-AF65-F5344CB8AC3E}">
+        <p14:creationId xmlns:p14="http://schemas.microsoft.com/office/powerpoint/2010/main" val="1024086991"/>
+      </p:ext>
+    </p:extLst>
+  </p:cSld>
+  <p:clrMapOvr>
+    <a:masterClrMapping/>
+  </p:clrMapOvr>
+</p:notes>
+</file>
+
 <file path=ppt/notesSlides/notesSlide2.xml><?xml version="1.0" encoding="utf-8"?>
 <p:notes xmlns:a="http://schemas.openxmlformats.org/drawingml/2006/main" xmlns:r="http://schemas.openxmlformats.org/officeDocument/2006/relationships" xmlns:p="http://schemas.openxmlformats.org/presentationml/2006/main">
   <p:cSld>
@@ -1334,6 +1513,94 @@
             <a:fld id="{F7021451-1387-4CA6-816F-3879F97B5CBC}" type="slidenum">
               <a:rPr lang="en-US"/>
               <a:t>2</a:t>
+            </a:fld>
+            <a:endParaRPr lang="en-US"/>
+          </a:p>
+        </p:txBody>
+      </p:sp>
+    </p:spTree>
+    <p:extLst>
+      <p:ext uri="{BB962C8B-B14F-4D97-AF65-F5344CB8AC3E}">
+        <p14:creationId xmlns:p14="http://schemas.microsoft.com/office/powerpoint/2010/main" val="1024086991"/>
+      </p:ext>
+    </p:extLst>
+  </p:cSld>
+  <p:clrMapOvr>
+    <a:masterClrMapping/>
+  </p:clrMapOvr>
+</p:notes>
+</file>
+
+<file path=ppt/notesSlides/notesSlide20.xml><?xml version="1.0" encoding="utf-8"?>
+<p:notes xmlns:a="http://schemas.openxmlformats.org/drawingml/2006/main" xmlns:r="http://schemas.openxmlformats.org/officeDocument/2006/relationships" xmlns:p="http://schemas.openxmlformats.org/presentationml/2006/main">
+  <p:cSld>
+    <p:spTree>
+      <p:nvGrpSpPr>
+        <p:cNvPr id="1" name=""/>
+        <p:cNvGrpSpPr/>
+        <p:nvPr/>
+      </p:nvGrpSpPr>
+      <p:grpSpPr>
+        <a:xfrm>
+          <a:off x="0" y="0"/>
+          <a:ext cx="0" cy="0"/>
+          <a:chOff x="0" y="0"/>
+          <a:chExt cx="0" cy="0"/>
+        </a:xfrm>
+      </p:grpSpPr>
+      <p:sp>
+        <p:nvSpPr>
+          <p:cNvPr id="2" name="Slide Image Placeholder 1"/>
+          <p:cNvSpPr>
+            <a:spLocks noGrp="1" noRot="1" noChangeAspect="1"/>
+          </p:cNvSpPr>
+          <p:nvPr>
+            <p:ph type="sldImg"/>
+          </p:nvPr>
+        </p:nvSpPr>
+        <p:spPr/>
+      </p:sp>
+      <p:sp>
+        <p:nvSpPr>
+          <p:cNvPr id="3" name="Notes Placeholder 2"/>
+          <p:cNvSpPr>
+            <a:spLocks noGrp="1"/>
+          </p:cNvSpPr>
+          <p:nvPr>
+            <p:ph type="body" idx="1"/>
+          </p:nvPr>
+        </p:nvSpPr>
+        <p:spPr/>
+        <p:txBody>
+          <a:bodyPr/>
+          <a:lstStyle/>
+          <a:p>
+            <a:r>
+              <a:rPr lang="en-US" dirty="0"/>
+              <a:t/>
+            </a:r>
+            <a:endParaRPr lang="en-US" dirty="0"/>
+          </a:p>
+        </p:txBody>
+      </p:sp>
+      <p:sp>
+        <p:nvSpPr>
+          <p:cNvPr id="4" name="Slide Number Placeholder 3"/>
+          <p:cNvSpPr>
+            <a:spLocks noGrp="1"/>
+          </p:cNvSpPr>
+          <p:nvPr>
+            <p:ph type="sldNum" sz="quarter" idx="10"/>
+          </p:nvPr>
+        </p:nvSpPr>
+        <p:spPr/>
+        <p:txBody>
+          <a:bodyPr/>
+          <a:lstStyle/>
+          <a:p>
+            <a:fld id="{F7021451-1387-4CA6-816F-3879F97B5CBC}" type="slidenum">
+              <a:rPr lang="en-US"/>
+              <a:t>20</a:t>
             </a:fld>
             <a:endParaRPr lang="en-US"/>
           </a:p>
@@ -2569,7 +2836,7 @@
             <a:avLst/>
           </a:prstGeom>
           <a:solidFill>
-            <a:srgbClr val="3843AF"/>
+            <a:srgbClr val="0F7C86"/>
           </a:solidFill>
           <a:ln/>
         </p:spPr>
@@ -2601,13 +2868,13 @@
             <a:r>
               <a:rPr lang="en-US" sz="1150" b="1" spc="180" kern="0" dirty="0">
                 <a:solidFill>
-                  <a:srgbClr val="3843AF"/>
-                </a:solidFill>
-                <a:latin typeface="Arial" pitchFamily="34" charset="0"/>
-                <a:ea typeface="Arial" pitchFamily="34" charset="-122"/>
-                <a:cs typeface="Arial" pitchFamily="34" charset="-120"/>
-              </a:rPr>
-              <a:t>EINE KARTE, DREI FRAGEN</a:t>
+                  <a:srgbClr val="0F7C86"/>
+                </a:solidFill>
+                <a:latin typeface="Arial" pitchFamily="34" charset="0"/>
+                <a:ea typeface="Arial" pitchFamily="34" charset="-122"/>
+                <a:cs typeface="Arial" pitchFamily="34" charset="-120"/>
+              </a:rPr>
+              <a:t>DAS, NAS ODER SAN? ANTWORTEN IN DEN CHAT</a:t>
             </a:r>
             <a:endParaRPr lang="en-US" sz="1150" dirty="0"/>
           </a:p>
@@ -2646,39 +2913,641 @@
                 <a:ea typeface="Arial" pitchFamily="34" charset="-122"/>
                 <a:cs typeface="Arial" pitchFamily="34" charset="-120"/>
               </a:rPr>
-              <a:t>Euer Auftrag</a:t>
+              <a:t>Zuordnungsrunde</a:t>
             </a:r>
             <a:endParaRPr lang="en-US" sz="2600" dirty="0"/>
           </a:p>
         </p:txBody>
       </p:sp>
-      <p:pic>
-        <p:nvPicPr>
-          <p:cNvPr id="5" name="Image 0" descr="/Users/jacobmenge/Desktop/kurs-26.2b-orga/folienwerkstatt/assets/diagramme/speicher-auftrag.png">    </p:cNvPr>
-          <p:cNvPicPr>
-            <a:picLocks noChangeAspect="1"/>
-          </p:cNvPicPr>
-          <p:nvPr/>
-        </p:nvPicPr>
-        <p:blipFill>
-          <a:blip r:embed="rId1"/>
-          <a:stretch>
-            <a:fillRect/>
-          </a:stretch>
-        </p:blipFill>
-        <p:spPr>
-          <a:xfrm>
-            <a:off x="566928" y="1335024"/>
-            <a:ext cx="8010144" cy="2743200"/>
-          </a:xfrm>
-          <a:prstGeom prst="rect">
-            <a:avLst/>
-          </a:prstGeom>
-        </p:spPr>
-      </p:pic>
-      <p:sp>
-        <p:nvSpPr>
-          <p:cNvPr id="6" name="Shape 3"/>
+      <p:sp>
+        <p:nvSpPr>
+          <p:cNvPr id="5" name="Text 3"/>
+          <p:cNvSpPr/>
+          <p:nvPr/>
+        </p:nvSpPr>
+        <p:spPr>
+          <a:xfrm>
+            <a:off x="566928" y="1444752"/>
+            <a:ext cx="8010144" cy="438912"/>
+          </a:xfrm>
+          <a:prstGeom prst="rect">
+            <a:avLst/>
+          </a:prstGeom>
+          <a:noFill/>
+          <a:ln/>
+        </p:spPr>
+        <p:txBody>
+          <a:bodyPr wrap="square" lIns="0" tIns="0" rIns="0" bIns="0" rtlCol="0" anchor="t"/>
+          <a:lstStyle/>
+          <a:p>
+            <a:pPr indent="0" marL="0">
+              <a:buNone/>
+            </a:pPr>
+            <a:r>
+              <a:rPr lang="en-US" sz="1300" dirty="0">
+                <a:solidFill>
+                  <a:srgbClr val="5C6377"/>
+                </a:solidFill>
+                <a:latin typeface="Arial" pitchFamily="34" charset="0"/>
+                <a:ea typeface="Arial" pitchFamily="34" charset="-122"/>
+                <a:cs typeface="Arial" pitchFamily="34" charset="-120"/>
+              </a:rPr>
+              <a:t>Schreibt zu jedem Buchstaben DAS, NAS oder SAN in den Chat.</a:t>
+            </a:r>
+            <a:endParaRPr lang="en-US" sz="1300" dirty="0"/>
+          </a:p>
+        </p:txBody>
+      </p:sp>
+      <p:sp>
+        <p:nvSpPr>
+          <p:cNvPr id="6" name="Shape 4"/>
+          <p:cNvSpPr/>
+          <p:nvPr/>
+        </p:nvSpPr>
+        <p:spPr>
+          <a:xfrm>
+            <a:off x="438912" y="1920240"/>
+            <a:ext cx="8266176" cy="329184"/>
+          </a:xfrm>
+          <a:prstGeom prst="rect">
+            <a:avLst/>
+          </a:prstGeom>
+          <a:solidFill>
+            <a:srgbClr val="F5F6FC"/>
+          </a:solidFill>
+          <a:ln/>
+        </p:spPr>
+      </p:sp>
+      <p:sp>
+        <p:nvSpPr>
+          <p:cNvPr id="7" name="Text 5"/>
+          <p:cNvSpPr/>
+          <p:nvPr/>
+        </p:nvSpPr>
+        <p:spPr>
+          <a:xfrm>
+            <a:off x="566928" y="1920240"/>
+            <a:ext cx="548640" cy="329184"/>
+          </a:xfrm>
+          <a:prstGeom prst="rect">
+            <a:avLst/>
+          </a:prstGeom>
+          <a:noFill/>
+          <a:ln/>
+        </p:spPr>
+        <p:txBody>
+          <a:bodyPr wrap="square" lIns="0" tIns="0" rIns="0" bIns="0" rtlCol="0" anchor="ctr"/>
+          <a:lstStyle/>
+          <a:p>
+            <a:pPr indent="0" marL="0">
+              <a:buNone/>
+            </a:pPr>
+            <a:r>
+              <a:rPr lang="en-US" sz="1200" b="1" dirty="0">
+                <a:solidFill>
+                  <a:srgbClr val="0F7C86"/>
+                </a:solidFill>
+                <a:latin typeface="Courier New" pitchFamily="34" charset="0"/>
+                <a:ea typeface="Courier New" pitchFamily="34" charset="-122"/>
+                <a:cs typeface="Courier New" pitchFamily="34" charset="-120"/>
+              </a:rPr>
+              <a:t>A</a:t>
+            </a:r>
+            <a:endParaRPr lang="en-US" sz="1200" dirty="0"/>
+          </a:p>
+        </p:txBody>
+      </p:sp>
+      <p:sp>
+        <p:nvSpPr>
+          <p:cNvPr id="8" name="Text 6"/>
+          <p:cNvSpPr/>
+          <p:nvPr/>
+        </p:nvSpPr>
+        <p:spPr>
+          <a:xfrm>
+            <a:off x="1115568" y="1920240"/>
+            <a:ext cx="7461504" cy="329184"/>
+          </a:xfrm>
+          <a:prstGeom prst="rect">
+            <a:avLst/>
+          </a:prstGeom>
+          <a:noFill/>
+          <a:ln/>
+        </p:spPr>
+        <p:txBody>
+          <a:bodyPr wrap="square" lIns="0" tIns="0" rIns="0" bIns="0" rtlCol="0" anchor="ctr"/>
+          <a:lstStyle/>
+          <a:p>
+            <a:pPr indent="0" marL="0">
+              <a:buNone/>
+            </a:pPr>
+            <a:r>
+              <a:rPr lang="en-US" sz="1200" dirty="0">
+                <a:solidFill>
+                  <a:srgbClr val="434A63"/>
+                </a:solidFill>
+                <a:latin typeface="Arial" pitchFamily="34" charset="0"/>
+                <a:ea typeface="Arial" pitchFamily="34" charset="-122"/>
+                <a:cs typeface="Arial" pitchFamily="34" charset="-120"/>
+              </a:rPr>
+              <a:t>Eine USB-Festplatte am Laptop der Geschäftsführerin</a:t>
+            </a:r>
+            <a:endParaRPr lang="en-US" sz="1200" dirty="0"/>
+          </a:p>
+        </p:txBody>
+      </p:sp>
+      <p:sp>
+        <p:nvSpPr>
+          <p:cNvPr id="9" name="Text 7"/>
+          <p:cNvSpPr/>
+          <p:nvPr/>
+        </p:nvSpPr>
+        <p:spPr>
+          <a:xfrm>
+            <a:off x="566928" y="2249424"/>
+            <a:ext cx="548640" cy="329184"/>
+          </a:xfrm>
+          <a:prstGeom prst="rect">
+            <a:avLst/>
+          </a:prstGeom>
+          <a:noFill/>
+          <a:ln/>
+        </p:spPr>
+        <p:txBody>
+          <a:bodyPr wrap="square" lIns="0" tIns="0" rIns="0" bIns="0" rtlCol="0" anchor="ctr"/>
+          <a:lstStyle/>
+          <a:p>
+            <a:pPr indent="0" marL="0">
+              <a:buNone/>
+            </a:pPr>
+            <a:r>
+              <a:rPr lang="en-US" sz="1200" b="1" dirty="0">
+                <a:solidFill>
+                  <a:srgbClr val="0F7C86"/>
+                </a:solidFill>
+                <a:latin typeface="Courier New" pitchFamily="34" charset="0"/>
+                <a:ea typeface="Courier New" pitchFamily="34" charset="-122"/>
+                <a:cs typeface="Courier New" pitchFamily="34" charset="-120"/>
+              </a:rPr>
+              <a:t>B</a:t>
+            </a:r>
+            <a:endParaRPr lang="en-US" sz="1200" dirty="0"/>
+          </a:p>
+        </p:txBody>
+      </p:sp>
+      <p:sp>
+        <p:nvSpPr>
+          <p:cNvPr id="10" name="Text 8"/>
+          <p:cNvSpPr/>
+          <p:nvPr/>
+        </p:nvSpPr>
+        <p:spPr>
+          <a:xfrm>
+            <a:off x="1115568" y="2249424"/>
+            <a:ext cx="7461504" cy="329184"/>
+          </a:xfrm>
+          <a:prstGeom prst="rect">
+            <a:avLst/>
+          </a:prstGeom>
+          <a:noFill/>
+          <a:ln/>
+        </p:spPr>
+        <p:txBody>
+          <a:bodyPr wrap="square" lIns="0" tIns="0" rIns="0" bIns="0" rtlCol="0" anchor="ctr"/>
+          <a:lstStyle/>
+          <a:p>
+            <a:pPr indent="0" marL="0">
+              <a:buNone/>
+            </a:pPr>
+            <a:r>
+              <a:rPr lang="en-US" sz="1200" dirty="0">
+                <a:solidFill>
+                  <a:srgbClr val="434A63"/>
+                </a:solidFill>
+                <a:latin typeface="Arial" pitchFamily="34" charset="0"/>
+                <a:ea typeface="Arial" pitchFamily="34" charset="-122"/>
+                <a:cs typeface="Arial" pitchFamily="34" charset="-120"/>
+              </a:rPr>
+              <a:t>Ein gemeinsamer Ordner im Büronetz, auf den ein ganzes Team zugreift</a:t>
+            </a:r>
+            <a:endParaRPr lang="en-US" sz="1200" dirty="0"/>
+          </a:p>
+        </p:txBody>
+      </p:sp>
+      <p:sp>
+        <p:nvSpPr>
+          <p:cNvPr id="11" name="Shape 9"/>
+          <p:cNvSpPr/>
+          <p:nvPr/>
+        </p:nvSpPr>
+        <p:spPr>
+          <a:xfrm>
+            <a:off x="438912" y="2578608"/>
+            <a:ext cx="8266176" cy="329184"/>
+          </a:xfrm>
+          <a:prstGeom prst="rect">
+            <a:avLst/>
+          </a:prstGeom>
+          <a:solidFill>
+            <a:srgbClr val="F5F6FC"/>
+          </a:solidFill>
+          <a:ln/>
+        </p:spPr>
+      </p:sp>
+      <p:sp>
+        <p:nvSpPr>
+          <p:cNvPr id="12" name="Text 10"/>
+          <p:cNvSpPr/>
+          <p:nvPr/>
+        </p:nvSpPr>
+        <p:spPr>
+          <a:xfrm>
+            <a:off x="566928" y="2578608"/>
+            <a:ext cx="548640" cy="329184"/>
+          </a:xfrm>
+          <a:prstGeom prst="rect">
+            <a:avLst/>
+          </a:prstGeom>
+          <a:noFill/>
+          <a:ln/>
+        </p:spPr>
+        <p:txBody>
+          <a:bodyPr wrap="square" lIns="0" tIns="0" rIns="0" bIns="0" rtlCol="0" anchor="ctr"/>
+          <a:lstStyle/>
+          <a:p>
+            <a:pPr indent="0" marL="0">
+              <a:buNone/>
+            </a:pPr>
+            <a:r>
+              <a:rPr lang="en-US" sz="1200" b="1" dirty="0">
+                <a:solidFill>
+                  <a:srgbClr val="0F7C86"/>
+                </a:solidFill>
+                <a:latin typeface="Courier New" pitchFamily="34" charset="0"/>
+                <a:ea typeface="Courier New" pitchFamily="34" charset="-122"/>
+                <a:cs typeface="Courier New" pitchFamily="34" charset="-120"/>
+              </a:rPr>
+              <a:t>C</a:t>
+            </a:r>
+            <a:endParaRPr lang="en-US" sz="1200" dirty="0"/>
+          </a:p>
+        </p:txBody>
+      </p:sp>
+      <p:sp>
+        <p:nvSpPr>
+          <p:cNvPr id="13" name="Text 11"/>
+          <p:cNvSpPr/>
+          <p:nvPr/>
+        </p:nvSpPr>
+        <p:spPr>
+          <a:xfrm>
+            <a:off x="1115568" y="2578608"/>
+            <a:ext cx="7461504" cy="329184"/>
+          </a:xfrm>
+          <a:prstGeom prst="rect">
+            <a:avLst/>
+          </a:prstGeom>
+          <a:noFill/>
+          <a:ln/>
+        </p:spPr>
+        <p:txBody>
+          <a:bodyPr wrap="square" lIns="0" tIns="0" rIns="0" bIns="0" rtlCol="0" anchor="ctr"/>
+          <a:lstStyle/>
+          <a:p>
+            <a:pPr indent="0" marL="0">
+              <a:buNone/>
+            </a:pPr>
+            <a:r>
+              <a:rPr lang="en-US" sz="1200" dirty="0">
+                <a:solidFill>
+                  <a:srgbClr val="434A63"/>
+                </a:solidFill>
+                <a:latin typeface="Arial" pitchFamily="34" charset="0"/>
+                <a:ea typeface="Arial" pitchFamily="34" charset="-122"/>
+                <a:cs typeface="Arial" pitchFamily="34" charset="-120"/>
+              </a:rPr>
+              <a:t>Drei Hosts, deren virtuelle Maschinen bei einem Ausfall auf einen anderen Host wechseln</a:t>
+            </a:r>
+            <a:endParaRPr lang="en-US" sz="1200" dirty="0"/>
+          </a:p>
+        </p:txBody>
+      </p:sp>
+      <p:sp>
+        <p:nvSpPr>
+          <p:cNvPr id="14" name="Text 12"/>
+          <p:cNvSpPr/>
+          <p:nvPr/>
+        </p:nvSpPr>
+        <p:spPr>
+          <a:xfrm>
+            <a:off x="566928" y="2907792"/>
+            <a:ext cx="548640" cy="329184"/>
+          </a:xfrm>
+          <a:prstGeom prst="rect">
+            <a:avLst/>
+          </a:prstGeom>
+          <a:noFill/>
+          <a:ln/>
+        </p:spPr>
+        <p:txBody>
+          <a:bodyPr wrap="square" lIns="0" tIns="0" rIns="0" bIns="0" rtlCol="0" anchor="ctr"/>
+          <a:lstStyle/>
+          <a:p>
+            <a:pPr indent="0" marL="0">
+              <a:buNone/>
+            </a:pPr>
+            <a:r>
+              <a:rPr lang="en-US" sz="1200" b="1" dirty="0">
+                <a:solidFill>
+                  <a:srgbClr val="0F7C86"/>
+                </a:solidFill>
+                <a:latin typeface="Courier New" pitchFamily="34" charset="0"/>
+                <a:ea typeface="Courier New" pitchFamily="34" charset="-122"/>
+                <a:cs typeface="Courier New" pitchFamily="34" charset="-120"/>
+              </a:rPr>
+              <a:t>D</a:t>
+            </a:r>
+            <a:endParaRPr lang="en-US" sz="1200" dirty="0"/>
+          </a:p>
+        </p:txBody>
+      </p:sp>
+      <p:sp>
+        <p:nvSpPr>
+          <p:cNvPr id="15" name="Text 13"/>
+          <p:cNvSpPr/>
+          <p:nvPr/>
+        </p:nvSpPr>
+        <p:spPr>
+          <a:xfrm>
+            <a:off x="1115568" y="2907792"/>
+            <a:ext cx="7461504" cy="329184"/>
+          </a:xfrm>
+          <a:prstGeom prst="rect">
+            <a:avLst/>
+          </a:prstGeom>
+          <a:noFill/>
+          <a:ln/>
+        </p:spPr>
+        <p:txBody>
+          <a:bodyPr wrap="square" lIns="0" tIns="0" rIns="0" bIns="0" rtlCol="0" anchor="ctr"/>
+          <a:lstStyle/>
+          <a:p>
+            <a:pPr indent="0" marL="0">
+              <a:buNone/>
+            </a:pPr>
+            <a:r>
+              <a:rPr lang="en-US" sz="1200" dirty="0">
+                <a:solidFill>
+                  <a:srgbClr val="434A63"/>
+                </a:solidFill>
+                <a:latin typeface="Arial" pitchFamily="34" charset="0"/>
+                <a:ea typeface="Arial" pitchFamily="34" charset="-122"/>
+                <a:cs typeface="Arial" pitchFamily="34" charset="-120"/>
+              </a:rPr>
+              <a:t>Zwei gespiegelte Festplatten fest im Datenbankserver eingebaut</a:t>
+            </a:r>
+            <a:endParaRPr lang="en-US" sz="1200" dirty="0"/>
+          </a:p>
+        </p:txBody>
+      </p:sp>
+      <p:sp>
+        <p:nvSpPr>
+          <p:cNvPr id="16" name="Shape 14"/>
+          <p:cNvSpPr/>
+          <p:nvPr/>
+        </p:nvSpPr>
+        <p:spPr>
+          <a:xfrm>
+            <a:off x="438912" y="3236976"/>
+            <a:ext cx="8266176" cy="329184"/>
+          </a:xfrm>
+          <a:prstGeom prst="rect">
+            <a:avLst/>
+          </a:prstGeom>
+          <a:solidFill>
+            <a:srgbClr val="F5F6FC"/>
+          </a:solidFill>
+          <a:ln/>
+        </p:spPr>
+      </p:sp>
+      <p:sp>
+        <p:nvSpPr>
+          <p:cNvPr id="17" name="Text 15"/>
+          <p:cNvSpPr/>
+          <p:nvPr/>
+        </p:nvSpPr>
+        <p:spPr>
+          <a:xfrm>
+            <a:off x="566928" y="3236976"/>
+            <a:ext cx="548640" cy="329184"/>
+          </a:xfrm>
+          <a:prstGeom prst="rect">
+            <a:avLst/>
+          </a:prstGeom>
+          <a:noFill/>
+          <a:ln/>
+        </p:spPr>
+        <p:txBody>
+          <a:bodyPr wrap="square" lIns="0" tIns="0" rIns="0" bIns="0" rtlCol="0" anchor="ctr"/>
+          <a:lstStyle/>
+          <a:p>
+            <a:pPr indent="0" marL="0">
+              <a:buNone/>
+            </a:pPr>
+            <a:r>
+              <a:rPr lang="en-US" sz="1200" b="1" dirty="0">
+                <a:solidFill>
+                  <a:srgbClr val="0F7C86"/>
+                </a:solidFill>
+                <a:latin typeface="Courier New" pitchFamily="34" charset="0"/>
+                <a:ea typeface="Courier New" pitchFamily="34" charset="-122"/>
+                <a:cs typeface="Courier New" pitchFamily="34" charset="-120"/>
+              </a:rPr>
+              <a:t>E</a:t>
+            </a:r>
+            <a:endParaRPr lang="en-US" sz="1200" dirty="0"/>
+          </a:p>
+        </p:txBody>
+      </p:sp>
+      <p:sp>
+        <p:nvSpPr>
+          <p:cNvPr id="18" name="Text 16"/>
+          <p:cNvSpPr/>
+          <p:nvPr/>
+        </p:nvSpPr>
+        <p:spPr>
+          <a:xfrm>
+            <a:off x="1115568" y="3236976"/>
+            <a:ext cx="7461504" cy="329184"/>
+          </a:xfrm>
+          <a:prstGeom prst="rect">
+            <a:avLst/>
+          </a:prstGeom>
+          <a:noFill/>
+          <a:ln/>
+        </p:spPr>
+        <p:txBody>
+          <a:bodyPr wrap="square" lIns="0" tIns="0" rIns="0" bIns="0" rtlCol="0" anchor="ctr"/>
+          <a:lstStyle/>
+          <a:p>
+            <a:pPr indent="0" marL="0">
+              <a:buNone/>
+            </a:pPr>
+            <a:r>
+              <a:rPr lang="en-US" sz="1200" dirty="0">
+                <a:solidFill>
+                  <a:srgbClr val="434A63"/>
+                </a:solidFill>
+                <a:latin typeface="Arial" pitchFamily="34" charset="0"/>
+                <a:ea typeface="Arial" pitchFamily="34" charset="-122"/>
+                <a:cs typeface="Arial" pitchFamily="34" charset="-120"/>
+              </a:rPr>
+              <a:t>Ein kleines Gerät im Büro, auf dem alle ihre Scans in Ordnern ablegen</a:t>
+            </a:r>
+            <a:endParaRPr lang="en-US" sz="1200" dirty="0"/>
+          </a:p>
+        </p:txBody>
+      </p:sp>
+      <p:sp>
+        <p:nvSpPr>
+          <p:cNvPr id="19" name="Text 17"/>
+          <p:cNvSpPr/>
+          <p:nvPr/>
+        </p:nvSpPr>
+        <p:spPr>
+          <a:xfrm>
+            <a:off x="566928" y="3566160"/>
+            <a:ext cx="548640" cy="329184"/>
+          </a:xfrm>
+          <a:prstGeom prst="rect">
+            <a:avLst/>
+          </a:prstGeom>
+          <a:noFill/>
+          <a:ln/>
+        </p:spPr>
+        <p:txBody>
+          <a:bodyPr wrap="square" lIns="0" tIns="0" rIns="0" bIns="0" rtlCol="0" anchor="ctr"/>
+          <a:lstStyle/>
+          <a:p>
+            <a:pPr indent="0" marL="0">
+              <a:buNone/>
+            </a:pPr>
+            <a:r>
+              <a:rPr lang="en-US" sz="1200" b="1" dirty="0">
+                <a:solidFill>
+                  <a:srgbClr val="0F7C86"/>
+                </a:solidFill>
+                <a:latin typeface="Courier New" pitchFamily="34" charset="0"/>
+                <a:ea typeface="Courier New" pitchFamily="34" charset="-122"/>
+                <a:cs typeface="Courier New" pitchFamily="34" charset="-120"/>
+              </a:rPr>
+              <a:t>F</a:t>
+            </a:r>
+            <a:endParaRPr lang="en-US" sz="1200" dirty="0"/>
+          </a:p>
+        </p:txBody>
+      </p:sp>
+      <p:sp>
+        <p:nvSpPr>
+          <p:cNvPr id="20" name="Text 18"/>
+          <p:cNvSpPr/>
+          <p:nvPr/>
+        </p:nvSpPr>
+        <p:spPr>
+          <a:xfrm>
+            <a:off x="1115568" y="3566160"/>
+            <a:ext cx="7461504" cy="329184"/>
+          </a:xfrm>
+          <a:prstGeom prst="rect">
+            <a:avLst/>
+          </a:prstGeom>
+          <a:noFill/>
+          <a:ln/>
+        </p:spPr>
+        <p:txBody>
+          <a:bodyPr wrap="square" lIns="0" tIns="0" rIns="0" bIns="0" rtlCol="0" anchor="ctr"/>
+          <a:lstStyle/>
+          <a:p>
+            <a:pPr indent="0" marL="0">
+              <a:buNone/>
+            </a:pPr>
+            <a:r>
+              <a:rPr lang="en-US" sz="1200" dirty="0">
+                <a:solidFill>
+                  <a:srgbClr val="434A63"/>
+                </a:solidFill>
+                <a:latin typeface="Arial" pitchFamily="34" charset="0"/>
+                <a:ea typeface="Arial" pitchFamily="34" charset="-122"/>
+                <a:cs typeface="Arial" pitchFamily="34" charset="-120"/>
+              </a:rPr>
+              <a:t>Ein Speicher, den ein Server über iSCSI als eigenes Laufwerk sieht</a:t>
+            </a:r>
+            <a:endParaRPr lang="en-US" sz="1200" dirty="0"/>
+          </a:p>
+        </p:txBody>
+      </p:sp>
+      <p:sp>
+        <p:nvSpPr>
+          <p:cNvPr id="21" name="Shape 19"/>
+          <p:cNvSpPr/>
+          <p:nvPr/>
+        </p:nvSpPr>
+        <p:spPr>
+          <a:xfrm>
+            <a:off x="566928" y="4123944"/>
+            <a:ext cx="32004" cy="256032"/>
+          </a:xfrm>
+          <a:prstGeom prst="rect">
+            <a:avLst/>
+          </a:prstGeom>
+          <a:solidFill>
+            <a:srgbClr val="0F7C86"/>
+          </a:solidFill>
+          <a:ln/>
+        </p:spPr>
+      </p:sp>
+      <p:sp>
+        <p:nvSpPr>
+          <p:cNvPr id="22" name="Text 20"/>
+          <p:cNvSpPr/>
+          <p:nvPr/>
+        </p:nvSpPr>
+        <p:spPr>
+          <a:xfrm>
+            <a:off x="749808" y="4078224"/>
+            <a:ext cx="7827264" cy="402336"/>
+          </a:xfrm>
+          <a:prstGeom prst="rect">
+            <a:avLst/>
+          </a:prstGeom>
+          <a:noFill/>
+          <a:ln/>
+        </p:spPr>
+        <p:txBody>
+          <a:bodyPr wrap="square" lIns="0" tIns="0" rIns="0" bIns="0" rtlCol="0" anchor="ctr"/>
+          <a:lstStyle/>
+          <a:p>
+            <a:pPr indent="0" marL="0">
+              <a:buNone/>
+            </a:pPr>
+            <a:r>
+              <a:rPr lang="en-US" sz="1200" b="1" dirty="0">
+                <a:solidFill>
+                  <a:srgbClr val="5C6377"/>
+                </a:solidFill>
+                <a:latin typeface="Arial" pitchFamily="34" charset="0"/>
+                <a:ea typeface="Arial" pitchFamily="34" charset="-122"/>
+                <a:cs typeface="Arial" pitchFamily="34" charset="-120"/>
+              </a:rPr>
+              <a:t>Tipp: Fragt euch, wer zugreift und ob Dateien oder Blöcke ankommen.</a:t>
+            </a:r>
+            <a:endParaRPr lang="en-US" sz="1200" dirty="0"/>
+          </a:p>
+        </p:txBody>
+      </p:sp>
+      <p:sp>
+        <p:nvSpPr>
+          <p:cNvPr id="23" name="Shape 21"/>
           <p:cNvSpPr/>
           <p:nvPr/>
         </p:nvSpPr>
@@ -2701,7 +3570,7 @@
       </p:sp>
       <p:sp>
         <p:nvSpPr>
-          <p:cNvPr id="7" name="Text 4"/>
+          <p:cNvPr id="24" name="Text 22"/>
           <p:cNvSpPr/>
           <p:nvPr/>
         </p:nvSpPr>
@@ -2732,7 +3601,7 @@
                 <a:ea typeface="Arial" pitchFamily="34" charset="-122"/>
                 <a:cs typeface="Arial" pitchFamily="34" charset="-120"/>
               </a:rPr>
-              <a:t>Heute plant ihr</a:t>
+              <a:t>Speicher planen</a:t>
             </a:r>
             <a:endParaRPr lang="en-US" sz="1050" dirty="0"/>
           </a:p>
@@ -2740,7 +3609,7 @@
       </p:sp>
       <p:sp>
         <p:nvSpPr>
-          <p:cNvPr id="8" name="Text 5"/>
+          <p:cNvPr id="25" name="Text 23"/>
           <p:cNvSpPr/>
           <p:nvPr/>
         </p:nvSpPr>
@@ -2771,7 +3640,7 @@
                 <a:ea typeface="Arial" pitchFamily="34" charset="-122"/>
                 <a:cs typeface="Arial" pitchFamily="34" charset="-120"/>
               </a:rPr>
-              <a:t>7/13</a:t>
+              <a:t>8/16</a:t>
             </a:r>
             <a:endParaRPr lang="en-US" sz="1050" dirty="0"/>
           </a:p>
@@ -2824,7 +3693,7 @@
             <a:avLst/>
           </a:prstGeom>
           <a:solidFill>
-            <a:srgbClr val="3843AF"/>
+            <a:srgbClr val="0F7C86"/>
           </a:solidFill>
           <a:ln/>
         </p:spPr>
@@ -2856,13 +3725,13 @@
             <a:r>
               <a:rPr lang="en-US" sz="1150" b="1" spc="180" kern="0" dirty="0">
                 <a:solidFill>
-                  <a:srgbClr val="3843AF"/>
-                </a:solidFill>
-                <a:latin typeface="Arial" pitchFamily="34" charset="0"/>
-                <a:ea typeface="Arial" pitchFamily="34" charset="-122"/>
-                <a:cs typeface="Arial" pitchFamily="34" charset="-120"/>
-              </a:rPr>
-              <a:t>BREAKOUT · 19:10 BIS 20:10</a:t>
+                  <a:srgbClr val="0F7C86"/>
+                </a:solidFill>
+                <a:latin typeface="Arial" pitchFamily="34" charset="0"/>
+                <a:ea typeface="Arial" pitchFamily="34" charset="-122"/>
+                <a:cs typeface="Arial" pitchFamily="34" charset="-120"/>
+              </a:rPr>
+              <a:t>AUFLÖSUNG</a:t>
             </a:r>
             <a:endParaRPr lang="en-US" sz="1150" dirty="0"/>
           </a:p>
@@ -2901,7 +3770,7 @@
                 <a:ea typeface="Arial" pitchFamily="34" charset="-122"/>
                 <a:cs typeface="Arial" pitchFamily="34" charset="-120"/>
               </a:rPr>
-              <a:t>So läuft die Praxiszeit</a:t>
+              <a:t>Zuordnungsrunde</a:t>
             </a:r>
             <a:endParaRPr lang="en-US" sz="2600" dirty="0"/>
           </a:p>
@@ -2915,8 +3784,8 @@
         </p:nvSpPr>
         <p:spPr>
           <a:xfrm>
-            <a:off x="438912" y="1645920"/>
-            <a:ext cx="8266176" cy="310896"/>
+            <a:off x="566928" y="1572768"/>
+            <a:ext cx="2523744" cy="2048256"/>
           </a:xfrm>
           <a:prstGeom prst="rect">
             <a:avLst/>
@@ -2929,366 +3798,14 @@
       </p:sp>
       <p:sp>
         <p:nvSpPr>
-          <p:cNvPr id="6" name="Text 4"/>
-          <p:cNvSpPr/>
-          <p:nvPr/>
-        </p:nvSpPr>
-        <p:spPr>
-          <a:xfrm>
-            <a:off x="566928" y="1645920"/>
-            <a:ext cx="1097280" cy="310896"/>
-          </a:xfrm>
-          <a:prstGeom prst="rect">
-            <a:avLst/>
-          </a:prstGeom>
-          <a:noFill/>
-          <a:ln/>
-        </p:spPr>
-        <p:txBody>
-          <a:bodyPr wrap="square" lIns="0" tIns="0" rIns="0" bIns="0" rtlCol="0" anchor="ctr"/>
-          <a:lstStyle/>
-          <a:p>
-            <a:pPr indent="0" marL="0">
-              <a:buNone/>
-            </a:pPr>
-            <a:r>
-              <a:rPr lang="en-US" sz="1050" b="1" dirty="0">
-                <a:solidFill>
-                  <a:srgbClr val="3843AF"/>
-                </a:solidFill>
-                <a:latin typeface="Courier New" pitchFamily="34" charset="0"/>
-                <a:ea typeface="Courier New" pitchFamily="34" charset="-122"/>
-                <a:cs typeface="Courier New" pitchFamily="34" charset="-120"/>
-              </a:rPr>
-              <a:t>Station 1</a:t>
-            </a:r>
-            <a:endParaRPr lang="en-US" sz="1050" dirty="0"/>
-          </a:p>
-        </p:txBody>
-      </p:sp>
-      <p:sp>
-        <p:nvSpPr>
-          <p:cNvPr id="7" name="Text 5"/>
-          <p:cNvSpPr/>
-          <p:nvPr/>
-        </p:nvSpPr>
-        <p:spPr>
-          <a:xfrm>
-            <a:off x="1664208" y="1645920"/>
-            <a:ext cx="6912864" cy="310896"/>
-          </a:xfrm>
-          <a:prstGeom prst="rect">
-            <a:avLst/>
-          </a:prstGeom>
-          <a:noFill/>
-          <a:ln/>
-        </p:spPr>
-        <p:txBody>
-          <a:bodyPr wrap="square" lIns="0" tIns="0" rIns="0" bIns="0" rtlCol="0" anchor="ctr"/>
-          <a:lstStyle/>
-          <a:p>
-            <a:pPr indent="0" marL="0">
-              <a:buNone/>
-            </a:pPr>
-            <a:r>
-              <a:rPr lang="en-US" sz="1050" dirty="0">
-                <a:solidFill>
-                  <a:srgbClr val="434A63"/>
-                </a:solidFill>
-                <a:latin typeface="Arial" pitchFamily="34" charset="0"/>
-                <a:ea typeface="Arial" pitchFamily="34" charset="-122"/>
-                <a:cs typeface="Arial" pitchFamily="34" charset="-120"/>
-              </a:rPr>
-              <a:t>Wie viel? Den Netto-Bedarf in drei Jahren ausrechnen · 15 Min.</a:t>
-            </a:r>
-            <a:endParaRPr lang="en-US" sz="1050" dirty="0"/>
-          </a:p>
-        </p:txBody>
-      </p:sp>
-      <p:sp>
-        <p:nvSpPr>
-          <p:cNvPr id="8" name="Text 6"/>
-          <p:cNvSpPr/>
-          <p:nvPr/>
-        </p:nvSpPr>
-        <p:spPr>
-          <a:xfrm>
-            <a:off x="566928" y="1956816"/>
-            <a:ext cx="1097280" cy="310896"/>
-          </a:xfrm>
-          <a:prstGeom prst="rect">
-            <a:avLst/>
-          </a:prstGeom>
-          <a:noFill/>
-          <a:ln/>
-        </p:spPr>
-        <p:txBody>
-          <a:bodyPr wrap="square" lIns="0" tIns="0" rIns="0" bIns="0" rtlCol="0" anchor="ctr"/>
-          <a:lstStyle/>
-          <a:p>
-            <a:pPr indent="0" marL="0">
-              <a:buNone/>
-            </a:pPr>
-            <a:r>
-              <a:rPr lang="en-US" sz="1050" b="1" dirty="0">
-                <a:solidFill>
-                  <a:srgbClr val="3843AF"/>
-                </a:solidFill>
-                <a:latin typeface="Courier New" pitchFamily="34" charset="0"/>
-                <a:ea typeface="Courier New" pitchFamily="34" charset="-122"/>
-                <a:cs typeface="Courier New" pitchFamily="34" charset="-120"/>
-              </a:rPr>
-              <a:t>Station 2</a:t>
-            </a:r>
-            <a:endParaRPr lang="en-US" sz="1050" dirty="0"/>
-          </a:p>
-        </p:txBody>
-      </p:sp>
-      <p:sp>
-        <p:nvSpPr>
-          <p:cNvPr id="9" name="Text 7"/>
-          <p:cNvSpPr/>
-          <p:nvPr/>
-        </p:nvSpPr>
-        <p:spPr>
-          <a:xfrm>
-            <a:off x="1664208" y="1956816"/>
-            <a:ext cx="6912864" cy="310896"/>
-          </a:xfrm>
-          <a:prstGeom prst="rect">
-            <a:avLst/>
-          </a:prstGeom>
-          <a:noFill/>
-          <a:ln/>
-        </p:spPr>
-        <p:txBody>
-          <a:bodyPr wrap="square" lIns="0" tIns="0" rIns="0" bIns="0" rtlCol="0" anchor="ctr"/>
-          <a:lstStyle/>
-          <a:p>
-            <a:pPr indent="0" marL="0">
-              <a:buNone/>
-            </a:pPr>
-            <a:r>
-              <a:rPr lang="en-US" sz="1050" dirty="0">
-                <a:solidFill>
-                  <a:srgbClr val="434A63"/>
-                </a:solidFill>
-                <a:latin typeface="Arial" pitchFamily="34" charset="0"/>
-                <a:ea typeface="Arial" pitchFamily="34" charset="-122"/>
-                <a:cs typeface="Arial" pitchFamily="34" charset="-120"/>
-              </a:rPr>
-              <a:t>Wie sicher? Ein RAID-Level wählen und die Platten zählen · 15 Min.</a:t>
-            </a:r>
-            <a:endParaRPr lang="en-US" sz="1050" dirty="0"/>
-          </a:p>
-        </p:txBody>
-      </p:sp>
-      <p:sp>
-        <p:nvSpPr>
-          <p:cNvPr id="10" name="Shape 8"/>
-          <p:cNvSpPr/>
-          <p:nvPr/>
-        </p:nvSpPr>
-        <p:spPr>
-          <a:xfrm>
-            <a:off x="438912" y="2267712"/>
-            <a:ext cx="8266176" cy="310896"/>
-          </a:xfrm>
-          <a:prstGeom prst="rect">
-            <a:avLst/>
-          </a:prstGeom>
-          <a:solidFill>
-            <a:srgbClr val="F5F6FC"/>
-          </a:solidFill>
-          <a:ln/>
-        </p:spPr>
-      </p:sp>
-      <p:sp>
-        <p:nvSpPr>
-          <p:cNvPr id="11" name="Text 9"/>
-          <p:cNvSpPr/>
-          <p:nvPr/>
-        </p:nvSpPr>
-        <p:spPr>
-          <a:xfrm>
-            <a:off x="566928" y="2267712"/>
-            <a:ext cx="1097280" cy="310896"/>
-          </a:xfrm>
-          <a:prstGeom prst="rect">
-            <a:avLst/>
-          </a:prstGeom>
-          <a:noFill/>
-          <a:ln/>
-        </p:spPr>
-        <p:txBody>
-          <a:bodyPr wrap="square" lIns="0" tIns="0" rIns="0" bIns="0" rtlCol="0" anchor="ctr"/>
-          <a:lstStyle/>
-          <a:p>
-            <a:pPr indent="0" marL="0">
-              <a:buNone/>
-            </a:pPr>
-            <a:r>
-              <a:rPr lang="en-US" sz="1050" b="1" dirty="0">
-                <a:solidFill>
-                  <a:srgbClr val="3843AF"/>
-                </a:solidFill>
-                <a:latin typeface="Courier New" pitchFamily="34" charset="0"/>
-                <a:ea typeface="Courier New" pitchFamily="34" charset="-122"/>
-                <a:cs typeface="Courier New" pitchFamily="34" charset="-120"/>
-              </a:rPr>
-              <a:t>Station 3</a:t>
-            </a:r>
-            <a:endParaRPr lang="en-US" sz="1050" dirty="0"/>
-          </a:p>
-        </p:txBody>
-      </p:sp>
-      <p:sp>
-        <p:nvSpPr>
-          <p:cNvPr id="12" name="Text 10"/>
-          <p:cNvSpPr/>
-          <p:nvPr/>
-        </p:nvSpPr>
-        <p:spPr>
-          <a:xfrm>
-            <a:off x="1664208" y="2267712"/>
-            <a:ext cx="6912864" cy="310896"/>
-          </a:xfrm>
-          <a:prstGeom prst="rect">
-            <a:avLst/>
-          </a:prstGeom>
-          <a:noFill/>
-          <a:ln/>
-        </p:spPr>
-        <p:txBody>
-          <a:bodyPr wrap="square" lIns="0" tIns="0" rIns="0" bIns="0" rtlCol="0" anchor="ctr"/>
-          <a:lstStyle/>
-          <a:p>
-            <a:pPr indent="0" marL="0">
-              <a:buNone/>
-            </a:pPr>
-            <a:r>
-              <a:rPr lang="en-US" sz="1050" dirty="0">
-                <a:solidFill>
-                  <a:srgbClr val="434A63"/>
-                </a:solidFill>
-                <a:latin typeface="Arial" pitchFamily="34" charset="0"/>
-                <a:ea typeface="Arial" pitchFamily="34" charset="-122"/>
-                <a:cs typeface="Arial" pitchFamily="34" charset="-120"/>
-              </a:rPr>
-              <a:t>Wie angebunden? Für drei Bedarfe DAS, NAS oder SAN wählen · 10 Min.</a:t>
-            </a:r>
-            <a:endParaRPr lang="en-US" sz="1050" dirty="0"/>
-          </a:p>
-        </p:txBody>
-      </p:sp>
-      <p:sp>
-        <p:nvSpPr>
-          <p:cNvPr id="13" name="Text 11"/>
-          <p:cNvSpPr/>
-          <p:nvPr/>
-        </p:nvSpPr>
-        <p:spPr>
-          <a:xfrm>
-            <a:off x="566928" y="2578608"/>
-            <a:ext cx="1097280" cy="310896"/>
-          </a:xfrm>
-          <a:prstGeom prst="rect">
-            <a:avLst/>
-          </a:prstGeom>
-          <a:noFill/>
-          <a:ln/>
-        </p:spPr>
-        <p:txBody>
-          <a:bodyPr wrap="square" lIns="0" tIns="0" rIns="0" bIns="0" rtlCol="0" anchor="ctr"/>
-          <a:lstStyle/>
-          <a:p>
-            <a:pPr indent="0" marL="0">
-              <a:buNone/>
-            </a:pPr>
-            <a:r>
-              <a:rPr lang="en-US" sz="1050" b="1" dirty="0">
-                <a:solidFill>
-                  <a:srgbClr val="3843AF"/>
-                </a:solidFill>
-                <a:latin typeface="Courier New" pitchFamily="34" charset="0"/>
-                <a:ea typeface="Courier New" pitchFamily="34" charset="-122"/>
-                <a:cs typeface="Courier New" pitchFamily="34" charset="-120"/>
-              </a:rPr>
-              <a:t>Bonus</a:t>
-            </a:r>
-            <a:endParaRPr lang="en-US" sz="1050" dirty="0"/>
-          </a:p>
-        </p:txBody>
-      </p:sp>
-      <p:sp>
-        <p:nvSpPr>
-          <p:cNvPr id="14" name="Text 12"/>
-          <p:cNvSpPr/>
-          <p:nvPr/>
-        </p:nvSpPr>
-        <p:spPr>
-          <a:xfrm>
-            <a:off x="1664208" y="2578608"/>
-            <a:ext cx="6912864" cy="310896"/>
-          </a:xfrm>
-          <a:prstGeom prst="rect">
-            <a:avLst/>
-          </a:prstGeom>
-          <a:noFill/>
-          <a:ln/>
-        </p:spPr>
-        <p:txBody>
-          <a:bodyPr wrap="square" lIns="0" tIns="0" rIns="0" bIns="0" rtlCol="0" anchor="ctr"/>
-          <a:lstStyle/>
-          <a:p>
-            <a:pPr indent="0" marL="0">
-              <a:buNone/>
-            </a:pPr>
-            <a:r>
-              <a:rPr lang="en-US" sz="1050" dirty="0">
-                <a:solidFill>
-                  <a:srgbClr val="434A63"/>
-                </a:solidFill>
-                <a:latin typeface="Arial" pitchFamily="34" charset="0"/>
-                <a:ea typeface="Arial" pitchFamily="34" charset="-122"/>
-                <a:cs typeface="Arial" pitchFamily="34" charset="-120"/>
-              </a:rPr>
-              <a:t>Prozentuales Wachstum, Hot Spare, 3-2-1 für Voltrad, die Frage der Chefin</a:t>
-            </a:r>
-            <a:endParaRPr lang="en-US" sz="1050" dirty="0"/>
-          </a:p>
-        </p:txBody>
-      </p:sp>
-      <p:sp>
-        <p:nvSpPr>
-          <p:cNvPr id="15" name="Shape 13"/>
-          <p:cNvSpPr/>
-          <p:nvPr/>
-        </p:nvSpPr>
-        <p:spPr>
-          <a:xfrm>
-            <a:off x="566928" y="3127248"/>
-            <a:ext cx="8010144" cy="1298448"/>
-          </a:xfrm>
-          <a:prstGeom prst="rect">
-            <a:avLst/>
-          </a:prstGeom>
-          <a:solidFill>
-            <a:srgbClr val="EEF0FB"/>
-          </a:solidFill>
-          <a:ln/>
-        </p:spPr>
-      </p:sp>
-      <p:sp>
-        <p:nvSpPr>
-          <p:cNvPr id="16" name="Shape 14"/>
-          <p:cNvSpPr/>
-          <p:nvPr/>
-        </p:nvSpPr>
-        <p:spPr>
-          <a:xfrm>
-            <a:off x="566928" y="3127248"/>
-            <a:ext cx="41148" cy="1298448"/>
+          <p:cNvPr id="6" name="Shape 4"/>
+          <p:cNvSpPr/>
+          <p:nvPr/>
+        </p:nvSpPr>
+        <p:spPr>
+          <a:xfrm>
+            <a:off x="566928" y="1572768"/>
+            <a:ext cx="41148" cy="2048256"/>
           </a:xfrm>
           <a:prstGeom prst="rect">
             <a:avLst/>
@@ -3301,14 +3818,14 @@
       </p:sp>
       <p:sp>
         <p:nvSpPr>
-          <p:cNvPr id="17" name="Text 15"/>
-          <p:cNvSpPr/>
-          <p:nvPr/>
-        </p:nvSpPr>
-        <p:spPr>
-          <a:xfrm>
-            <a:off x="804672" y="3273552"/>
-            <a:ext cx="7607808" cy="242062"/>
+          <p:cNvPr id="7" name="Text 5"/>
+          <p:cNvSpPr/>
+          <p:nvPr/>
+        </p:nvSpPr>
+        <p:spPr>
+          <a:xfrm>
+            <a:off x="804672" y="1719072"/>
+            <a:ext cx="2121408" cy="274320"/>
           </a:xfrm>
           <a:prstGeom prst="rect">
             <a:avLst/>
@@ -3332,7 +3849,7 @@
                 <a:ea typeface="Arial" pitchFamily="34" charset="-122"/>
                 <a:cs typeface="Arial" pitchFamily="34" charset="-120"/>
               </a:rPr>
-              <a:t>Jetzt öffnen, alles steht auf der Kursseite</a:t>
+              <a:t>DAS: A und D</a:t>
             </a:r>
             <a:endParaRPr lang="en-US" sz="1300" dirty="0"/>
           </a:p>
@@ -3340,14 +3857,14 @@
       </p:sp>
       <p:sp>
         <p:nvSpPr>
-          <p:cNvPr id="18" name="Text 16"/>
-          <p:cNvSpPr/>
-          <p:nvPr/>
-        </p:nvSpPr>
-        <p:spPr>
-          <a:xfrm>
-            <a:off x="804672" y="3561334"/>
-            <a:ext cx="7607808" cy="745490"/>
+          <p:cNvPr id="8" name="Text 6"/>
+          <p:cNvSpPr/>
+          <p:nvPr/>
+        </p:nvSpPr>
+        <p:spPr>
+          <a:xfrm>
+            <a:off x="804672" y="2039112"/>
+            <a:ext cx="2121408" cy="1463040"/>
           </a:xfrm>
           <a:prstGeom prst="rect">
             <a:avLst/>
@@ -3369,7 +3886,7 @@
               <a:buNone/>
             </a:pPr>
             <a:r>
-              <a:rPr lang="en-US" sz="1000" dirty="0">
+              <a:rPr lang="en-US" sz="1150" dirty="0">
                 <a:solidFill>
                   <a:srgbClr val="434A63"/>
                 </a:solidFill>
@@ -3377,9 +3894,9 @@
                 <a:ea typeface="Arial" pitchFamily="34" charset="-122"/>
                 <a:cs typeface="Arial" pitchFamily="34" charset="-120"/>
               </a:rPr>
-              <a:t>Übung:  jacobmenge.github.io/kurs-unterlagen/infrastruktur-planung/praxis-speicher/</a:t>
-            </a:r>
-            <a:endParaRPr lang="en-US" sz="1000" dirty="0"/>
+              <a:t>A: USB-Platte am Laptop</a:t>
+            </a:r>
+            <a:endParaRPr lang="en-US" sz="1150" dirty="0"/>
           </a:p>
           <a:p>
             <a:pPr indent="0" marL="0">
@@ -3392,7 +3909,7 @@
               <a:buNone/>
             </a:pPr>
             <a:r>
-              <a:rPr lang="en-US" sz="1000" dirty="0">
+              <a:rPr lang="en-US" sz="1150" dirty="0">
                 <a:solidFill>
                   <a:srgbClr val="434A63"/>
                 </a:solidFill>
@@ -3400,9 +3917,9 @@
                 <a:ea typeface="Arial" pitchFamily="34" charset="-122"/>
                 <a:cs typeface="Arial" pitchFamily="34" charset="-120"/>
               </a:rPr>
-              <a:t>Theorie:  jacobmenge.github.io/kurs-unterlagen/infrastruktur-planung/speicherloesungen/</a:t>
-            </a:r>
-            <a:endParaRPr lang="en-US" sz="1000" dirty="0"/>
+              <a:t>D: Platten im Datenbankserver</a:t>
+            </a:r>
+            <a:endParaRPr lang="en-US" sz="1150" dirty="0"/>
           </a:p>
           <a:p>
             <a:pPr indent="0" marL="0">
@@ -3415,7 +3932,7 @@
               <a:buNone/>
             </a:pPr>
             <a:r>
-              <a:rPr lang="en-US" sz="1000" dirty="0">
+              <a:rPr lang="en-US" sz="1150" dirty="0">
                 <a:solidFill>
                   <a:srgbClr val="434A63"/>
                 </a:solidFill>
@@ -3423,9 +3940,408 @@
                 <a:ea typeface="Arial" pitchFamily="34" charset="-122"/>
                 <a:cs typeface="Arial" pitchFamily="34" charset="-120"/>
               </a:rPr>
-              <a:t>Um 20:10 sind alle wieder hier. Bringt eure drei Antworten mit.</a:t>
-            </a:r>
-            <a:endParaRPr lang="en-US" sz="1000" dirty="0"/>
+              <a:t>Direkt an einem Gerät. Nur dieses Gerät kommt an die Daten.</a:t>
+            </a:r>
+            <a:endParaRPr lang="en-US" sz="1150" dirty="0"/>
+          </a:p>
+        </p:txBody>
+      </p:sp>
+      <p:sp>
+        <p:nvSpPr>
+          <p:cNvPr id="9" name="Shape 7"/>
+          <p:cNvSpPr/>
+          <p:nvPr/>
+        </p:nvSpPr>
+        <p:spPr>
+          <a:xfrm>
+            <a:off x="3310128" y="1572768"/>
+            <a:ext cx="2523744" cy="2048256"/>
+          </a:xfrm>
+          <a:prstGeom prst="rect">
+            <a:avLst/>
+          </a:prstGeom>
+          <a:solidFill>
+            <a:srgbClr val="F5F6FC"/>
+          </a:solidFill>
+          <a:ln/>
+        </p:spPr>
+      </p:sp>
+      <p:sp>
+        <p:nvSpPr>
+          <p:cNvPr id="10" name="Shape 8"/>
+          <p:cNvSpPr/>
+          <p:nvPr/>
+        </p:nvSpPr>
+        <p:spPr>
+          <a:xfrm>
+            <a:off x="3310128" y="1572768"/>
+            <a:ext cx="41148" cy="2048256"/>
+          </a:xfrm>
+          <a:prstGeom prst="rect">
+            <a:avLst/>
+          </a:prstGeom>
+          <a:solidFill>
+            <a:srgbClr val="0F7C86"/>
+          </a:solidFill>
+          <a:ln/>
+        </p:spPr>
+      </p:sp>
+      <p:sp>
+        <p:nvSpPr>
+          <p:cNvPr id="11" name="Text 9"/>
+          <p:cNvSpPr/>
+          <p:nvPr/>
+        </p:nvSpPr>
+        <p:spPr>
+          <a:xfrm>
+            <a:off x="3547872" y="1719072"/>
+            <a:ext cx="2121408" cy="274320"/>
+          </a:xfrm>
+          <a:prstGeom prst="rect">
+            <a:avLst/>
+          </a:prstGeom>
+          <a:noFill/>
+          <a:ln/>
+        </p:spPr>
+        <p:txBody>
+          <a:bodyPr wrap="square" lIns="0" tIns="0" rIns="0" bIns="0" rtlCol="0" anchor="t"/>
+          <a:lstStyle/>
+          <a:p>
+            <a:pPr indent="0" marL="0">
+              <a:buNone/>
+            </a:pPr>
+            <a:r>
+              <a:rPr lang="en-US" sz="1300" b="1" dirty="0">
+                <a:solidFill>
+                  <a:srgbClr val="272E52"/>
+                </a:solidFill>
+                <a:latin typeface="Arial" pitchFamily="34" charset="0"/>
+                <a:ea typeface="Arial" pitchFamily="34" charset="-122"/>
+                <a:cs typeface="Arial" pitchFamily="34" charset="-120"/>
+              </a:rPr>
+              <a:t>NAS: B und E</a:t>
+            </a:r>
+            <a:endParaRPr lang="en-US" sz="1300" dirty="0"/>
+          </a:p>
+        </p:txBody>
+      </p:sp>
+      <p:sp>
+        <p:nvSpPr>
+          <p:cNvPr id="12" name="Text 10"/>
+          <p:cNvSpPr/>
+          <p:nvPr/>
+        </p:nvSpPr>
+        <p:spPr>
+          <a:xfrm>
+            <a:off x="3547872" y="2039112"/>
+            <a:ext cx="2121408" cy="1463040"/>
+          </a:xfrm>
+          <a:prstGeom prst="rect">
+            <a:avLst/>
+          </a:prstGeom>
+          <a:noFill/>
+          <a:ln/>
+        </p:spPr>
+        <p:txBody>
+          <a:bodyPr wrap="square" lIns="0" tIns="0" rIns="0" bIns="0" rtlCol="0" anchor="t"/>
+          <a:lstStyle/>
+          <a:p>
+            <a:pPr indent="0" marL="0">
+              <a:lnSpc>
+                <a:spcPct val="92000"/>
+              </a:lnSpc>
+              <a:spcAft>
+                <a:spcPts val="500"/>
+              </a:spcAft>
+              <a:buNone/>
+            </a:pPr>
+            <a:r>
+              <a:rPr lang="en-US" sz="1150" dirty="0">
+                <a:solidFill>
+                  <a:srgbClr val="434A63"/>
+                </a:solidFill>
+                <a:latin typeface="Arial" pitchFamily="34" charset="0"/>
+                <a:ea typeface="Arial" pitchFamily="34" charset="-122"/>
+                <a:cs typeface="Arial" pitchFamily="34" charset="-120"/>
+              </a:rPr>
+              <a:t>B: Team-Ordner im Büronetz</a:t>
+            </a:r>
+            <a:endParaRPr lang="en-US" sz="1150" dirty="0"/>
+          </a:p>
+          <a:p>
+            <a:pPr indent="0" marL="0">
+              <a:lnSpc>
+                <a:spcPct val="92000"/>
+              </a:lnSpc>
+              <a:spcAft>
+                <a:spcPts val="500"/>
+              </a:spcAft>
+              <a:buNone/>
+            </a:pPr>
+            <a:r>
+              <a:rPr lang="en-US" sz="1150" dirty="0">
+                <a:solidFill>
+                  <a:srgbClr val="434A63"/>
+                </a:solidFill>
+                <a:latin typeface="Arial" pitchFamily="34" charset="0"/>
+                <a:ea typeface="Arial" pitchFamily="34" charset="-122"/>
+                <a:cs typeface="Arial" pitchFamily="34" charset="-120"/>
+              </a:rPr>
+              <a:t>E: Scans im Büro</a:t>
+            </a:r>
+            <a:endParaRPr lang="en-US" sz="1150" dirty="0"/>
+          </a:p>
+          <a:p>
+            <a:pPr indent="0" marL="0">
+              <a:lnSpc>
+                <a:spcPct val="92000"/>
+              </a:lnSpc>
+              <a:spcAft>
+                <a:spcPts val="500"/>
+              </a:spcAft>
+              <a:buNone/>
+            </a:pPr>
+            <a:r>
+              <a:rPr lang="en-US" sz="1150" dirty="0">
+                <a:solidFill>
+                  <a:srgbClr val="434A63"/>
+                </a:solidFill>
+                <a:latin typeface="Arial" pitchFamily="34" charset="0"/>
+                <a:ea typeface="Arial" pitchFamily="34" charset="-122"/>
+                <a:cs typeface="Arial" pitchFamily="34" charset="-120"/>
+              </a:rPr>
+              <a:t>Ein Gerät im normalen Netz gibt Ordner frei. Viele teilen sich Dateien.</a:t>
+            </a:r>
+            <a:endParaRPr lang="en-US" sz="1150" dirty="0"/>
+          </a:p>
+        </p:txBody>
+      </p:sp>
+      <p:sp>
+        <p:nvSpPr>
+          <p:cNvPr id="13" name="Shape 11"/>
+          <p:cNvSpPr/>
+          <p:nvPr/>
+        </p:nvSpPr>
+        <p:spPr>
+          <a:xfrm>
+            <a:off x="6053328" y="1572768"/>
+            <a:ext cx="2523744" cy="2048256"/>
+          </a:xfrm>
+          <a:prstGeom prst="rect">
+            <a:avLst/>
+          </a:prstGeom>
+          <a:solidFill>
+            <a:srgbClr val="F5F6FC"/>
+          </a:solidFill>
+          <a:ln/>
+        </p:spPr>
+      </p:sp>
+      <p:sp>
+        <p:nvSpPr>
+          <p:cNvPr id="14" name="Shape 12"/>
+          <p:cNvSpPr/>
+          <p:nvPr/>
+        </p:nvSpPr>
+        <p:spPr>
+          <a:xfrm>
+            <a:off x="6053328" y="1572768"/>
+            <a:ext cx="41148" cy="2048256"/>
+          </a:xfrm>
+          <a:prstGeom prst="rect">
+            <a:avLst/>
+          </a:prstGeom>
+          <a:solidFill>
+            <a:srgbClr val="3843AF"/>
+          </a:solidFill>
+          <a:ln/>
+        </p:spPr>
+      </p:sp>
+      <p:sp>
+        <p:nvSpPr>
+          <p:cNvPr id="15" name="Text 13"/>
+          <p:cNvSpPr/>
+          <p:nvPr/>
+        </p:nvSpPr>
+        <p:spPr>
+          <a:xfrm>
+            <a:off x="6291072" y="1719072"/>
+            <a:ext cx="2121408" cy="274320"/>
+          </a:xfrm>
+          <a:prstGeom prst="rect">
+            <a:avLst/>
+          </a:prstGeom>
+          <a:noFill/>
+          <a:ln/>
+        </p:spPr>
+        <p:txBody>
+          <a:bodyPr wrap="square" lIns="0" tIns="0" rIns="0" bIns="0" rtlCol="0" anchor="t"/>
+          <a:lstStyle/>
+          <a:p>
+            <a:pPr indent="0" marL="0">
+              <a:buNone/>
+            </a:pPr>
+            <a:r>
+              <a:rPr lang="en-US" sz="1300" b="1" dirty="0">
+                <a:solidFill>
+                  <a:srgbClr val="272E52"/>
+                </a:solidFill>
+                <a:latin typeface="Arial" pitchFamily="34" charset="0"/>
+                <a:ea typeface="Arial" pitchFamily="34" charset="-122"/>
+                <a:cs typeface="Arial" pitchFamily="34" charset="-120"/>
+              </a:rPr>
+              <a:t>SAN: C und F</a:t>
+            </a:r>
+            <a:endParaRPr lang="en-US" sz="1300" dirty="0"/>
+          </a:p>
+        </p:txBody>
+      </p:sp>
+      <p:sp>
+        <p:nvSpPr>
+          <p:cNvPr id="16" name="Text 14"/>
+          <p:cNvSpPr/>
+          <p:nvPr/>
+        </p:nvSpPr>
+        <p:spPr>
+          <a:xfrm>
+            <a:off x="6291072" y="2039112"/>
+            <a:ext cx="2121408" cy="1463040"/>
+          </a:xfrm>
+          <a:prstGeom prst="rect">
+            <a:avLst/>
+          </a:prstGeom>
+          <a:noFill/>
+          <a:ln/>
+        </p:spPr>
+        <p:txBody>
+          <a:bodyPr wrap="square" lIns="0" tIns="0" rIns="0" bIns="0" rtlCol="0" anchor="t"/>
+          <a:lstStyle/>
+          <a:p>
+            <a:pPr indent="0" marL="0">
+              <a:lnSpc>
+                <a:spcPct val="92000"/>
+              </a:lnSpc>
+              <a:spcAft>
+                <a:spcPts val="500"/>
+              </a:spcAft>
+              <a:buNone/>
+            </a:pPr>
+            <a:r>
+              <a:rPr lang="en-US" sz="1150" dirty="0">
+                <a:solidFill>
+                  <a:srgbClr val="434A63"/>
+                </a:solidFill>
+                <a:latin typeface="Arial" pitchFamily="34" charset="0"/>
+                <a:ea typeface="Arial" pitchFamily="34" charset="-122"/>
+                <a:cs typeface="Arial" pitchFamily="34" charset="-120"/>
+              </a:rPr>
+              <a:t>C: Hosts mit wechselnden VMs</a:t>
+            </a:r>
+            <a:endParaRPr lang="en-US" sz="1150" dirty="0"/>
+          </a:p>
+          <a:p>
+            <a:pPr indent="0" marL="0">
+              <a:lnSpc>
+                <a:spcPct val="92000"/>
+              </a:lnSpc>
+              <a:spcAft>
+                <a:spcPts val="500"/>
+              </a:spcAft>
+              <a:buNone/>
+            </a:pPr>
+            <a:r>
+              <a:rPr lang="en-US" sz="1150" dirty="0">
+                <a:solidFill>
+                  <a:srgbClr val="434A63"/>
+                </a:solidFill>
+                <a:latin typeface="Arial" pitchFamily="34" charset="0"/>
+                <a:ea typeface="Arial" pitchFamily="34" charset="-122"/>
+                <a:cs typeface="Arial" pitchFamily="34" charset="-120"/>
+              </a:rPr>
+              <a:t>F: Laufwerk über iSCSI</a:t>
+            </a:r>
+            <a:endParaRPr lang="en-US" sz="1150" dirty="0"/>
+          </a:p>
+          <a:p>
+            <a:pPr indent="0" marL="0">
+              <a:lnSpc>
+                <a:spcPct val="92000"/>
+              </a:lnSpc>
+              <a:spcAft>
+                <a:spcPts val="500"/>
+              </a:spcAft>
+              <a:buNone/>
+            </a:pPr>
+            <a:r>
+              <a:rPr lang="en-US" sz="1150" dirty="0">
+                <a:solidFill>
+                  <a:srgbClr val="434A63"/>
+                </a:solidFill>
+                <a:latin typeface="Arial" pitchFamily="34" charset="0"/>
+                <a:ea typeface="Arial" pitchFamily="34" charset="-122"/>
+                <a:cs typeface="Arial" pitchFamily="34" charset="-120"/>
+              </a:rPr>
+              <a:t>Eigenes Speichernetz. Jeder Host sieht Blöcke wie eine eigene Platte.</a:t>
+            </a:r>
+            <a:endParaRPr lang="en-US" sz="1150" dirty="0"/>
+          </a:p>
+        </p:txBody>
+      </p:sp>
+      <p:sp>
+        <p:nvSpPr>
+          <p:cNvPr id="17" name="Shape 15"/>
+          <p:cNvSpPr/>
+          <p:nvPr/>
+        </p:nvSpPr>
+        <p:spPr>
+          <a:xfrm>
+            <a:off x="566928" y="3922776"/>
+            <a:ext cx="32004" cy="256032"/>
+          </a:xfrm>
+          <a:prstGeom prst="rect">
+            <a:avLst/>
+          </a:prstGeom>
+          <a:solidFill>
+            <a:srgbClr val="0F7C86"/>
+          </a:solidFill>
+          <a:ln/>
+        </p:spPr>
+      </p:sp>
+      <p:sp>
+        <p:nvSpPr>
+          <p:cNvPr id="18" name="Text 16"/>
+          <p:cNvSpPr/>
+          <p:nvPr/>
+        </p:nvSpPr>
+        <p:spPr>
+          <a:xfrm>
+            <a:off x="749808" y="3877056"/>
+            <a:ext cx="7827264" cy="402336"/>
+          </a:xfrm>
+          <a:prstGeom prst="rect">
+            <a:avLst/>
+          </a:prstGeom>
+          <a:noFill/>
+          <a:ln/>
+        </p:spPr>
+        <p:txBody>
+          <a:bodyPr wrap="square" lIns="0" tIns="0" rIns="0" bIns="0" rtlCol="0" anchor="ctr"/>
+          <a:lstStyle/>
+          <a:p>
+            <a:pPr indent="0" marL="0">
+              <a:buNone/>
+            </a:pPr>
+            <a:r>
+              <a:rPr lang="en-US" sz="1200" b="1" dirty="0">
+                <a:solidFill>
+                  <a:srgbClr val="434A63"/>
+                </a:solidFill>
+                <a:latin typeface="Arial" pitchFamily="34" charset="0"/>
+                <a:ea typeface="Arial" pitchFamily="34" charset="-122"/>
+                <a:cs typeface="Arial" pitchFamily="34" charset="-120"/>
+              </a:rPr>
+              <a:t>Streitfälle: C geht auch mit NFS-Freigaben, F kann ein NAS mit iSCSI sein. Es zählt, was ankommt: Blöcke oder Dateien.</a:t>
+            </a:r>
+            <a:endParaRPr lang="en-US" sz="1200" dirty="0"/>
           </a:p>
         </p:txBody>
       </p:sp>
@@ -3485,7 +4401,7 @@
                 <a:ea typeface="Arial" pitchFamily="34" charset="-122"/>
                 <a:cs typeface="Arial" pitchFamily="34" charset="-120"/>
               </a:rPr>
-              <a:t>Heute plant ihr</a:t>
+              <a:t>Speicher planen</a:t>
             </a:r>
             <a:endParaRPr lang="en-US" sz="1050" dirty="0"/>
           </a:p>
@@ -3524,7 +4440,7 @@
                 <a:ea typeface="Arial" pitchFamily="34" charset="-122"/>
                 <a:cs typeface="Arial" pitchFamily="34" charset="-120"/>
               </a:rPr>
-              <a:t>8/13</a:t>
+              <a:t>9/16</a:t>
             </a:r>
             <a:endParaRPr lang="en-US" sz="1050" dirty="0"/>
           </a:p>
@@ -3570,67 +4486,107 @@
         </p:nvSpPr>
         <p:spPr>
           <a:xfrm>
-            <a:off x="566928" y="201168"/>
+            <a:off x="6355080" y="0"/>
+            <a:ext cx="2788920" cy="5143500"/>
+          </a:xfrm>
+          <a:prstGeom prst="rect">
+            <a:avLst/>
+          </a:prstGeom>
+          <a:solidFill>
+            <a:srgbClr val="EEF0FB"/>
+          </a:solidFill>
+          <a:ln/>
+        </p:spPr>
+      </p:sp>
+      <p:sp>
+        <p:nvSpPr>
+          <p:cNvPr id="3" name="Shape 1"/>
+          <p:cNvSpPr/>
+          <p:nvPr/>
+        </p:nvSpPr>
+        <p:spPr>
+          <a:xfrm>
+            <a:off x="6355080" y="0"/>
+            <a:ext cx="45720" cy="5143500"/>
+          </a:xfrm>
+          <a:prstGeom prst="rect">
+            <a:avLst/>
+          </a:prstGeom>
+          <a:solidFill>
+            <a:srgbClr val="3843AF"/>
+          </a:solidFill>
+          <a:ln/>
+        </p:spPr>
+      </p:sp>
+      <p:sp>
+        <p:nvSpPr>
+          <p:cNvPr id="4" name="Text 2"/>
+          <p:cNvSpPr/>
+          <p:nvPr/>
+        </p:nvSpPr>
+        <p:spPr>
+          <a:xfrm>
+            <a:off x="6629400" y="1463040"/>
+            <a:ext cx="2194560" cy="1737360"/>
+          </a:xfrm>
+          <a:prstGeom prst="rect">
+            <a:avLst/>
+          </a:prstGeom>
+          <a:noFill/>
+          <a:ln/>
+        </p:spPr>
+        <p:txBody>
+          <a:bodyPr wrap="square" lIns="0" tIns="0" rIns="0" bIns="0" rtlCol="0" anchor="ctr"/>
+          <a:lstStyle/>
+          <a:p>
+            <a:pPr algn="ctr" indent="0" marL="0">
+              <a:buNone/>
+            </a:pPr>
+            <a:r>
+              <a:rPr lang="en-US" sz="8400" b="1" dirty="0">
+                <a:solidFill>
+                  <a:srgbClr val="3843AF"/>
+                </a:solidFill>
+                <a:latin typeface="Arial" pitchFamily="34" charset="0"/>
+                <a:ea typeface="Arial" pitchFamily="34" charset="-122"/>
+                <a:cs typeface="Arial" pitchFamily="34" charset="-120"/>
+              </a:rPr>
+              <a:t>02</a:t>
+            </a:r>
+            <a:endParaRPr lang="en-US" sz="8400" dirty="0"/>
+          </a:p>
+        </p:txBody>
+      </p:sp>
+      <p:sp>
+        <p:nvSpPr>
+          <p:cNvPr id="5" name="Shape 3"/>
+          <p:cNvSpPr/>
+          <p:nvPr/>
+        </p:nvSpPr>
+        <p:spPr>
+          <a:xfrm>
+            <a:off x="566928" y="1883664"/>
             <a:ext cx="475488" cy="50292"/>
           </a:xfrm>
           <a:prstGeom prst="rect">
             <a:avLst/>
           </a:prstGeom>
           <a:solidFill>
-            <a:srgbClr val="0F7C86"/>
+            <a:srgbClr val="3843AF"/>
           </a:solidFill>
           <a:ln/>
         </p:spPr>
       </p:sp>
       <p:sp>
         <p:nvSpPr>
-          <p:cNvPr id="3" name="Text 1"/>
-          <p:cNvSpPr/>
-          <p:nvPr/>
-        </p:nvSpPr>
-        <p:spPr>
-          <a:xfrm>
-            <a:off x="566928" y="384048"/>
-            <a:ext cx="8010144" cy="237744"/>
-          </a:xfrm>
-          <a:prstGeom prst="rect">
-            <a:avLst/>
-          </a:prstGeom>
-          <a:noFill/>
-          <a:ln/>
-        </p:spPr>
-        <p:txBody>
-          <a:bodyPr wrap="square" lIns="0" tIns="0" rIns="0" bIns="0" rtlCol="0" anchor="ctr"/>
-          <a:lstStyle/>
-          <a:p>
-            <a:pPr indent="0" marL="0">
-              <a:buNone/>
-            </a:pPr>
-            <a:r>
-              <a:rPr lang="en-US" sz="1150" b="1" spc="180" kern="0" dirty="0">
-                <a:solidFill>
-                  <a:srgbClr val="0F7C86"/>
-                </a:solidFill>
-                <a:latin typeface="Arial" pitchFamily="34" charset="0"/>
-                <a:ea typeface="Arial" pitchFamily="34" charset="-122"/>
-                <a:cs typeface="Arial" pitchFamily="34" charset="-120"/>
-              </a:rPr>
-              <a:t>ERST EURE ANTWORTEN, DANN DIE LÖSUNG</a:t>
-            </a:r>
-            <a:endParaRPr lang="en-US" sz="1150" dirty="0"/>
-          </a:p>
-        </p:txBody>
-      </p:sp>
-      <p:sp>
-        <p:nvSpPr>
-          <p:cNvPr id="4" name="Text 2"/>
-          <p:cNvSpPr/>
-          <p:nvPr/>
-        </p:nvSpPr>
-        <p:spPr>
-          <a:xfrm>
-            <a:off x="566928" y="731520"/>
-            <a:ext cx="8010144" cy="603504"/>
+          <p:cNvPr id="6" name="Text 4"/>
+          <p:cNvSpPr/>
+          <p:nvPr/>
+        </p:nvSpPr>
+        <p:spPr>
+          <a:xfrm>
+            <a:off x="566928" y="2084832"/>
+            <a:ext cx="5394960" cy="868680"/>
           </a:xfrm>
           <a:prstGeom prst="rect">
             <a:avLst/>
@@ -3646,7 +4602,7 @@
               <a:buNone/>
             </a:pPr>
             <a:r>
-              <a:rPr lang="en-US" sz="2600" b="1" dirty="0">
+              <a:rPr lang="en-US" sz="3000" b="1" dirty="0">
                 <a:solidFill>
                   <a:srgbClr val="272E52"/>
                 </a:solidFill>
@@ -3654,68 +4610,9 @@
                 <a:ea typeface="Arial" pitchFamily="34" charset="-122"/>
                 <a:cs typeface="Arial" pitchFamily="34" charset="-120"/>
               </a:rPr>
-              <a:t>Auswertung</a:t>
-            </a:r>
-            <a:endParaRPr lang="en-US" sz="2600" dirty="0"/>
-          </a:p>
-        </p:txBody>
-      </p:sp>
-      <p:sp>
-        <p:nvSpPr>
-          <p:cNvPr id="5" name="Shape 3"/>
-          <p:cNvSpPr/>
-          <p:nvPr/>
-        </p:nvSpPr>
-        <p:spPr>
-          <a:xfrm>
-            <a:off x="438912" y="1737360"/>
-            <a:ext cx="8266176" cy="438912"/>
-          </a:xfrm>
-          <a:prstGeom prst="rect">
-            <a:avLst/>
-          </a:prstGeom>
-          <a:solidFill>
-            <a:srgbClr val="F5F6FC"/>
-          </a:solidFill>
-          <a:ln/>
-        </p:spPr>
-      </p:sp>
-      <p:sp>
-        <p:nvSpPr>
-          <p:cNvPr id="6" name="Text 4"/>
-          <p:cNvSpPr/>
-          <p:nvPr/>
-        </p:nvSpPr>
-        <p:spPr>
-          <a:xfrm>
-            <a:off x="566928" y="1737360"/>
-            <a:ext cx="1097280" cy="438912"/>
-          </a:xfrm>
-          <a:prstGeom prst="rect">
-            <a:avLst/>
-          </a:prstGeom>
-          <a:noFill/>
-          <a:ln/>
-        </p:spPr>
-        <p:txBody>
-          <a:bodyPr wrap="square" lIns="0" tIns="0" rIns="0" bIns="0" rtlCol="0" anchor="ctr"/>
-          <a:lstStyle/>
-          <a:p>
-            <a:pPr indent="0" marL="0">
-              <a:buNone/>
-            </a:pPr>
-            <a:r>
-              <a:rPr lang="en-US" sz="1150" b="1" dirty="0">
-                <a:solidFill>
-                  <a:srgbClr val="0F7C86"/>
-                </a:solidFill>
-                <a:latin typeface="Courier New" pitchFamily="34" charset="0"/>
-                <a:ea typeface="Courier New" pitchFamily="34" charset="-122"/>
-                <a:cs typeface="Courier New" pitchFamily="34" charset="-120"/>
-              </a:rPr>
-              <a:t>Station 1</a:t>
-            </a:r>
-            <a:endParaRPr lang="en-US" sz="1150" dirty="0"/>
+              <a:t>Heute plant ihr</a:t>
+            </a:r>
+            <a:endParaRPr lang="en-US" sz="3000" dirty="0"/>
           </a:p>
         </p:txBody>
       </p:sp>
@@ -3727,399 +4624,24 @@
         </p:nvSpPr>
         <p:spPr>
           <a:xfrm>
-            <a:off x="1664208" y="1737360"/>
-            <a:ext cx="6912864" cy="438912"/>
-          </a:xfrm>
-          <a:prstGeom prst="rect">
-            <a:avLst/>
-          </a:prstGeom>
-          <a:noFill/>
-          <a:ln/>
-        </p:spPr>
-        <p:txBody>
-          <a:bodyPr wrap="square" lIns="0" tIns="0" rIns="0" bIns="0" rtlCol="0" anchor="ctr"/>
-          <a:lstStyle/>
-          <a:p>
-            <a:pPr indent="0" marL="0">
-              <a:buNone/>
-            </a:pPr>
-            <a:r>
-              <a:rPr lang="en-US" sz="1150" dirty="0">
-                <a:solidFill>
-                  <a:srgbClr val="434A63"/>
-                </a:solidFill>
-                <a:latin typeface="Arial" pitchFamily="34" charset="0"/>
-                <a:ea typeface="Arial" pitchFamily="34" charset="-122"/>
-                <a:cs typeface="Arial" pitchFamily="34" charset="-120"/>
-              </a:rPr>
-              <a:t>Wie viel Speicher braucht Voltrad netto? Wie habt ihr gerechnet?</a:t>
-            </a:r>
-            <a:endParaRPr lang="en-US" sz="1150" dirty="0"/>
-          </a:p>
-        </p:txBody>
-      </p:sp>
-      <p:sp>
-        <p:nvSpPr>
-          <p:cNvPr id="8" name="Text 6"/>
-          <p:cNvSpPr/>
-          <p:nvPr/>
-        </p:nvSpPr>
-        <p:spPr>
-          <a:xfrm>
-            <a:off x="566928" y="2176272"/>
-            <a:ext cx="1097280" cy="438912"/>
-          </a:xfrm>
-          <a:prstGeom prst="rect">
-            <a:avLst/>
-          </a:prstGeom>
-          <a:noFill/>
-          <a:ln/>
-        </p:spPr>
-        <p:txBody>
-          <a:bodyPr wrap="square" lIns="0" tIns="0" rIns="0" bIns="0" rtlCol="0" anchor="ctr"/>
-          <a:lstStyle/>
-          <a:p>
-            <a:pPr indent="0" marL="0">
-              <a:buNone/>
-            </a:pPr>
-            <a:r>
-              <a:rPr lang="en-US" sz="1150" b="1" dirty="0">
-                <a:solidFill>
-                  <a:srgbClr val="0F7C86"/>
-                </a:solidFill>
-                <a:latin typeface="Courier New" pitchFamily="34" charset="0"/>
-                <a:ea typeface="Courier New" pitchFamily="34" charset="-122"/>
-                <a:cs typeface="Courier New" pitchFamily="34" charset="-120"/>
-              </a:rPr>
-              <a:t>Station 2</a:t>
-            </a:r>
-            <a:endParaRPr lang="en-US" sz="1150" dirty="0"/>
-          </a:p>
-        </p:txBody>
-      </p:sp>
-      <p:sp>
-        <p:nvSpPr>
-          <p:cNvPr id="9" name="Text 7"/>
-          <p:cNvSpPr/>
-          <p:nvPr/>
-        </p:nvSpPr>
-        <p:spPr>
-          <a:xfrm>
-            <a:off x="1664208" y="2176272"/>
-            <a:ext cx="6912864" cy="438912"/>
-          </a:xfrm>
-          <a:prstGeom prst="rect">
-            <a:avLst/>
-          </a:prstGeom>
-          <a:noFill/>
-          <a:ln/>
-        </p:spPr>
-        <p:txBody>
-          <a:bodyPr wrap="square" lIns="0" tIns="0" rIns="0" bIns="0" rtlCol="0" anchor="ctr"/>
-          <a:lstStyle/>
-          <a:p>
-            <a:pPr indent="0" marL="0">
-              <a:buNone/>
-            </a:pPr>
-            <a:r>
-              <a:rPr lang="en-US" sz="1150" dirty="0">
-                <a:solidFill>
-                  <a:srgbClr val="434A63"/>
-                </a:solidFill>
-                <a:latin typeface="Arial" pitchFamily="34" charset="0"/>
-                <a:ea typeface="Arial" pitchFamily="34" charset="-122"/>
-                <a:cs typeface="Arial" pitchFamily="34" charset="-120"/>
-              </a:rPr>
-              <a:t>Welches RAID-Level, wie viele Platten? Wie viel kauft Voltrad brutto?</a:t>
-            </a:r>
-            <a:endParaRPr lang="en-US" sz="1150" dirty="0"/>
-          </a:p>
-        </p:txBody>
-      </p:sp>
-      <p:sp>
-        <p:nvSpPr>
-          <p:cNvPr id="10" name="Shape 8"/>
-          <p:cNvSpPr/>
-          <p:nvPr/>
-        </p:nvSpPr>
-        <p:spPr>
-          <a:xfrm>
-            <a:off x="438912" y="2615184"/>
-            <a:ext cx="8266176" cy="438912"/>
-          </a:xfrm>
-          <a:prstGeom prst="rect">
-            <a:avLst/>
-          </a:prstGeom>
-          <a:solidFill>
-            <a:srgbClr val="F5F6FC"/>
-          </a:solidFill>
-          <a:ln/>
-        </p:spPr>
-      </p:sp>
-      <p:sp>
-        <p:nvSpPr>
-          <p:cNvPr id="11" name="Text 9"/>
-          <p:cNvSpPr/>
-          <p:nvPr/>
-        </p:nvSpPr>
-        <p:spPr>
-          <a:xfrm>
-            <a:off x="566928" y="2615184"/>
-            <a:ext cx="1097280" cy="438912"/>
-          </a:xfrm>
-          <a:prstGeom prst="rect">
-            <a:avLst/>
-          </a:prstGeom>
-          <a:noFill/>
-          <a:ln/>
-        </p:spPr>
-        <p:txBody>
-          <a:bodyPr wrap="square" lIns="0" tIns="0" rIns="0" bIns="0" rtlCol="0" anchor="ctr"/>
-          <a:lstStyle/>
-          <a:p>
-            <a:pPr indent="0" marL="0">
-              <a:buNone/>
-            </a:pPr>
-            <a:r>
-              <a:rPr lang="en-US" sz="1150" b="1" dirty="0">
-                <a:solidFill>
-                  <a:srgbClr val="0F7C86"/>
-                </a:solidFill>
-                <a:latin typeface="Courier New" pitchFamily="34" charset="0"/>
-                <a:ea typeface="Courier New" pitchFamily="34" charset="-122"/>
-                <a:cs typeface="Courier New" pitchFamily="34" charset="-120"/>
-              </a:rPr>
-              <a:t>Station 3</a:t>
-            </a:r>
-            <a:endParaRPr lang="en-US" sz="1150" dirty="0"/>
-          </a:p>
-        </p:txBody>
-      </p:sp>
-      <p:sp>
-        <p:nvSpPr>
-          <p:cNvPr id="12" name="Text 10"/>
-          <p:cNvSpPr/>
-          <p:nvPr/>
-        </p:nvSpPr>
-        <p:spPr>
-          <a:xfrm>
-            <a:off x="1664208" y="2615184"/>
-            <a:ext cx="6912864" cy="438912"/>
-          </a:xfrm>
-          <a:prstGeom prst="rect">
-            <a:avLst/>
-          </a:prstGeom>
-          <a:noFill/>
-          <a:ln/>
-        </p:spPr>
-        <p:txBody>
-          <a:bodyPr wrap="square" lIns="0" tIns="0" rIns="0" bIns="0" rtlCol="0" anchor="ctr"/>
-          <a:lstStyle/>
-          <a:p>
-            <a:pPr indent="0" marL="0">
-              <a:buNone/>
-            </a:pPr>
-            <a:r>
-              <a:rPr lang="en-US" sz="1150" dirty="0">
-                <a:solidFill>
-                  <a:srgbClr val="434A63"/>
-                </a:solidFill>
-                <a:latin typeface="Arial" pitchFamily="34" charset="0"/>
-                <a:ea typeface="Arial" pitchFamily="34" charset="-122"/>
-                <a:cs typeface="Arial" pitchFamily="34" charset="-120"/>
-              </a:rPr>
-              <a:t>Welche Anbindung für die virtuellen Maschinen, die Zeichnungen und die Sicherung?</a:t>
-            </a:r>
-            <a:endParaRPr lang="en-US" sz="1150" dirty="0"/>
-          </a:p>
-        </p:txBody>
-      </p:sp>
-      <p:sp>
-        <p:nvSpPr>
-          <p:cNvPr id="13" name="Text 11"/>
-          <p:cNvSpPr/>
-          <p:nvPr/>
-        </p:nvSpPr>
-        <p:spPr>
-          <a:xfrm>
-            <a:off x="566928" y="3054096"/>
-            <a:ext cx="1097280" cy="438912"/>
-          </a:xfrm>
-          <a:prstGeom prst="rect">
-            <a:avLst/>
-          </a:prstGeom>
-          <a:noFill/>
-          <a:ln/>
-        </p:spPr>
-        <p:txBody>
-          <a:bodyPr wrap="square" lIns="0" tIns="0" rIns="0" bIns="0" rtlCol="0" anchor="ctr"/>
-          <a:lstStyle/>
-          <a:p>
-            <a:pPr indent="0" marL="0">
-              <a:buNone/>
-            </a:pPr>
-            <a:r>
-              <a:rPr lang="en-US" sz="1150" b="1" dirty="0">
-                <a:solidFill>
-                  <a:srgbClr val="0F7C86"/>
-                </a:solidFill>
-                <a:latin typeface="Courier New" pitchFamily="34" charset="0"/>
-                <a:ea typeface="Courier New" pitchFamily="34" charset="-122"/>
-                <a:cs typeface="Courier New" pitchFamily="34" charset="-120"/>
-              </a:rPr>
-              <a:t>Offen</a:t>
-            </a:r>
-            <a:endParaRPr lang="en-US" sz="1150" dirty="0"/>
-          </a:p>
-        </p:txBody>
-      </p:sp>
-      <p:sp>
-        <p:nvSpPr>
-          <p:cNvPr id="14" name="Text 12"/>
-          <p:cNvSpPr/>
-          <p:nvPr/>
-        </p:nvSpPr>
-        <p:spPr>
-          <a:xfrm>
-            <a:off x="1664208" y="3054096"/>
-            <a:ext cx="6912864" cy="438912"/>
-          </a:xfrm>
-          <a:prstGeom prst="rect">
-            <a:avLst/>
-          </a:prstGeom>
-          <a:noFill/>
-          <a:ln/>
-        </p:spPr>
-        <p:txBody>
-          <a:bodyPr wrap="square" lIns="0" tIns="0" rIns="0" bIns="0" rtlCol="0" anchor="ctr"/>
-          <a:lstStyle/>
-          <a:p>
-            <a:pPr indent="0" marL="0">
-              <a:buNone/>
-            </a:pPr>
-            <a:r>
-              <a:rPr lang="en-US" sz="1150" dirty="0">
-                <a:solidFill>
-                  <a:srgbClr val="434A63"/>
-                </a:solidFill>
-                <a:latin typeface="Arial" pitchFamily="34" charset="0"/>
-                <a:ea typeface="Arial" pitchFamily="34" charset="-122"/>
-                <a:cs typeface="Arial" pitchFamily="34" charset="-120"/>
-              </a:rPr>
-              <a:t>Was kostet das alles? Wer baut es mit zwei Personen in der IT auf?</a:t>
-            </a:r>
-            <a:endParaRPr lang="en-US" sz="1150" dirty="0"/>
-          </a:p>
-        </p:txBody>
-      </p:sp>
-      <p:sp>
-        <p:nvSpPr>
-          <p:cNvPr id="15" name="Shape 13"/>
-          <p:cNvSpPr/>
-          <p:nvPr/>
-        </p:nvSpPr>
-        <p:spPr>
-          <a:xfrm>
-            <a:off x="566928" y="4069080"/>
-            <a:ext cx="32004" cy="256032"/>
-          </a:xfrm>
-          <a:prstGeom prst="rect">
-            <a:avLst/>
-          </a:prstGeom>
-          <a:solidFill>
-            <a:srgbClr val="0F7C86"/>
-          </a:solidFill>
-          <a:ln/>
-        </p:spPr>
-      </p:sp>
-      <p:sp>
-        <p:nvSpPr>
-          <p:cNvPr id="16" name="Text 14"/>
-          <p:cNvSpPr/>
-          <p:nvPr/>
-        </p:nvSpPr>
-        <p:spPr>
-          <a:xfrm>
-            <a:off x="749808" y="4023360"/>
-            <a:ext cx="7827264" cy="402336"/>
-          </a:xfrm>
-          <a:prstGeom prst="rect">
-            <a:avLst/>
-          </a:prstGeom>
-          <a:noFill/>
-          <a:ln/>
-        </p:spPr>
-        <p:txBody>
-          <a:bodyPr wrap="square" lIns="0" tIns="0" rIns="0" bIns="0" rtlCol="0" anchor="ctr"/>
-          <a:lstStyle/>
-          <a:p>
-            <a:pPr indent="0" marL="0">
-              <a:buNone/>
-            </a:pPr>
-            <a:r>
-              <a:rPr lang="en-US" sz="1200" b="1" dirty="0">
-                <a:solidFill>
-                  <a:srgbClr val="434A63"/>
-                </a:solidFill>
-                <a:latin typeface="Arial" pitchFamily="34" charset="0"/>
-                <a:ea typeface="Arial" pitchFamily="34" charset="-122"/>
-                <a:cs typeface="Arial" pitchFamily="34" charset="-120"/>
-              </a:rPr>
-              <a:t>Die letzte Frage bleibt offen. Mit ihr steigen wir am Mittwoch ein.</a:t>
-            </a:r>
-            <a:endParaRPr lang="en-US" sz="1200" dirty="0"/>
-          </a:p>
-        </p:txBody>
-      </p:sp>
-      <p:sp>
-        <p:nvSpPr>
-          <p:cNvPr id="17" name="Shape 15"/>
-          <p:cNvSpPr/>
-          <p:nvPr/>
-        </p:nvSpPr>
-        <p:spPr>
-          <a:xfrm>
-            <a:off x="566928" y="4631436"/>
-            <a:ext cx="8010144" cy="0"/>
-          </a:xfrm>
-          <a:prstGeom prst="line">
-            <a:avLst/>
-          </a:prstGeom>
-          <a:noFill/>
-          <a:ln w="9525">
-            <a:solidFill>
-              <a:srgbClr val="DFE3F0"/>
-            </a:solidFill>
-            <a:prstDash val="solid"/>
-          </a:ln>
-        </p:spPr>
-      </p:sp>
-      <p:sp>
-        <p:nvSpPr>
-          <p:cNvPr id="18" name="Text 16"/>
-          <p:cNvSpPr/>
-          <p:nvPr/>
-        </p:nvSpPr>
-        <p:spPr>
-          <a:xfrm>
-            <a:off x="566928" y="4722876"/>
-            <a:ext cx="5029200" cy="237744"/>
-          </a:xfrm>
-          <a:prstGeom prst="rect">
-            <a:avLst/>
-          </a:prstGeom>
-          <a:noFill/>
-          <a:ln/>
-        </p:spPr>
-        <p:txBody>
-          <a:bodyPr wrap="square" lIns="0" tIns="0" rIns="0" bIns="0" rtlCol="0" anchor="ctr"/>
-          <a:lstStyle/>
-          <a:p>
-            <a:pPr indent="0" marL="0">
-              <a:buNone/>
-            </a:pPr>
-            <a:r>
-              <a:rPr lang="en-US" sz="1050" spc="30" kern="0" dirty="0">
+            <a:off x="566928" y="3017520"/>
+            <a:ext cx="5394960" cy="548640"/>
+          </a:xfrm>
+          <a:prstGeom prst="rect">
+            <a:avLst/>
+          </a:prstGeom>
+          <a:noFill/>
+          <a:ln/>
+        </p:spPr>
+        <p:txBody>
+          <a:bodyPr wrap="square" lIns="0" tIns="0" rIns="0" bIns="0" rtlCol="0" anchor="t"/>
+          <a:lstStyle/>
+          <a:p>
+            <a:pPr indent="0" marL="0">
+              <a:buNone/>
+            </a:pPr>
+            <a:r>
+              <a:rPr lang="en-US" sz="1350" dirty="0">
                 <a:solidFill>
                   <a:srgbClr val="5C6377"/>
                 </a:solidFill>
@@ -4127,48 +4649,9 @@
                 <a:ea typeface="Arial" pitchFamily="34" charset="-122"/>
                 <a:cs typeface="Arial" pitchFamily="34" charset="-120"/>
               </a:rPr>
-              <a:t>Auswertung</a:t>
-            </a:r>
-            <a:endParaRPr lang="en-US" sz="1050" dirty="0"/>
-          </a:p>
-        </p:txBody>
-      </p:sp>
-      <p:sp>
-        <p:nvSpPr>
-          <p:cNvPr id="19" name="Text 17"/>
-          <p:cNvSpPr/>
-          <p:nvPr/>
-        </p:nvSpPr>
-        <p:spPr>
-          <a:xfrm>
-            <a:off x="8028432" y="4722876"/>
-            <a:ext cx="548640" cy="237744"/>
-          </a:xfrm>
-          <a:prstGeom prst="rect">
-            <a:avLst/>
-          </a:prstGeom>
-          <a:noFill/>
-          <a:ln/>
-        </p:spPr>
-        <p:txBody>
-          <a:bodyPr wrap="square" lIns="0" tIns="0" rIns="0" bIns="0" rtlCol="0" anchor="ctr"/>
-          <a:lstStyle/>
-          <a:p>
-            <a:pPr algn="r" indent="0" marL="0">
-              <a:buNone/>
-            </a:pPr>
-            <a:r>
-              <a:rPr lang="en-US" sz="1050" dirty="0">
-                <a:solidFill>
-                  <a:srgbClr val="5C6377"/>
-                </a:solidFill>
-                <a:latin typeface="Arial" pitchFamily="34" charset="0"/>
-                <a:ea typeface="Arial" pitchFamily="34" charset="-122"/>
-                <a:cs typeface="Arial" pitchFamily="34" charset="-120"/>
-              </a:rPr>
-              <a:t>9/13</a:t>
-            </a:r>
-            <a:endParaRPr lang="en-US" sz="1050" dirty="0"/>
+              <a:t>Speicher für Voltrad</a:t>
+            </a:r>
+            <a:endParaRPr lang="en-US" sz="1350" dirty="0"/>
           </a:p>
         </p:txBody>
       </p:sp>
@@ -4219,7 +4702,7 @@
             <a:avLst/>
           </a:prstGeom>
           <a:solidFill>
-            <a:srgbClr val="0F7C86"/>
+            <a:srgbClr val="3843AF"/>
           </a:solidFill>
           <a:ln/>
         </p:spPr>
@@ -4251,13 +4734,13 @@
             <a:r>
               <a:rPr lang="en-US" sz="1150" b="1" spc="180" kern="0" dirty="0">
                 <a:solidFill>
-                  <a:srgbClr val="0F7C86"/>
-                </a:solidFill>
-                <a:latin typeface="Arial" pitchFamily="34" charset="0"/>
-                <a:ea typeface="Arial" pitchFamily="34" charset="-122"/>
-                <a:cs typeface="Arial" pitchFamily="34" charset="-120"/>
-              </a:rPr>
-              <a:t>STATION 1 · LÖSUNG</a:t>
+                  <a:srgbClr val="3843AF"/>
+                </a:solidFill>
+                <a:latin typeface="Arial" pitchFamily="34" charset="0"/>
+                <a:ea typeface="Arial" pitchFamily="34" charset="-122"/>
+                <a:cs typeface="Arial" pitchFamily="34" charset="-120"/>
+              </a:rPr>
+              <a:t>EINE KARTE, DREI FRAGEN</a:t>
             </a:r>
             <a:endParaRPr lang="en-US" sz="1150" dirty="0"/>
           </a:p>
@@ -4296,7 +4779,7 @@
                 <a:ea typeface="Arial" pitchFamily="34" charset="-122"/>
                 <a:cs typeface="Arial" pitchFamily="34" charset="-120"/>
               </a:rPr>
-              <a:t>Wie viel?</a:t>
+              <a:t>Euer Auftrag</a:t>
             </a:r>
             <a:endParaRPr lang="en-US" sz="2600" dirty="0"/>
           </a:p>
@@ -4304,7 +4787,7 @@
       </p:sp>
       <p:pic>
         <p:nvPicPr>
-          <p:cNvPr id="5" name="Image 0" descr="/Users/jacobmenge/Desktop/kurs-26.2b-orga/folienwerkstatt/assets/diagramme/speicher-loesung-rechnung.png">    </p:cNvPr>
+          <p:cNvPr id="5" name="Image 0" descr="/Users/jacobmenge/Desktop/kurs-26.2b-orga/folienwerkstatt/assets/diagramme/speicher-auftrag.png">    </p:cNvPr>
           <p:cNvPicPr>
             <a:picLocks noChangeAspect="1"/>
           </p:cNvPicPr>
@@ -4318,8 +4801,8 @@
         </p:blipFill>
         <p:spPr>
           <a:xfrm>
-            <a:off x="566928" y="1371600"/>
-            <a:ext cx="8010144" cy="2468880"/>
+            <a:off x="566928" y="1335024"/>
+            <a:ext cx="8010144" cy="2743200"/>
           </a:xfrm>
           <a:prstGeom prst="rect">
             <a:avLst/>
@@ -4329,65 +4812,6 @@
       <p:sp>
         <p:nvSpPr>
           <p:cNvPr id="6" name="Shape 3"/>
-          <p:cNvSpPr/>
-          <p:nvPr/>
-        </p:nvSpPr>
-        <p:spPr>
-          <a:xfrm>
-            <a:off x="566928" y="4069080"/>
-            <a:ext cx="32004" cy="256032"/>
-          </a:xfrm>
-          <a:prstGeom prst="rect">
-            <a:avLst/>
-          </a:prstGeom>
-          <a:solidFill>
-            <a:srgbClr val="0F7C86"/>
-          </a:solidFill>
-          <a:ln/>
-        </p:spPr>
-      </p:sp>
-      <p:sp>
-        <p:nvSpPr>
-          <p:cNvPr id="7" name="Text 4"/>
-          <p:cNvSpPr/>
-          <p:nvPr/>
-        </p:nvSpPr>
-        <p:spPr>
-          <a:xfrm>
-            <a:off x="749808" y="4023360"/>
-            <a:ext cx="7827264" cy="402336"/>
-          </a:xfrm>
-          <a:prstGeom prst="rect">
-            <a:avLst/>
-          </a:prstGeom>
-          <a:noFill/>
-          <a:ln/>
-        </p:spPr>
-        <p:txBody>
-          <a:bodyPr wrap="square" lIns="0" tIns="0" rIns="0" bIns="0" rtlCol="0" anchor="ctr"/>
-          <a:lstStyle/>
-          <a:p>
-            <a:pPr indent="0" marL="0">
-              <a:buNone/>
-            </a:pPr>
-            <a:r>
-              <a:rPr lang="en-US" sz="1200" b="1" dirty="0">
-                <a:solidFill>
-                  <a:srgbClr val="434A63"/>
-                </a:solidFill>
-                <a:latin typeface="Arial" pitchFamily="34" charset="0"/>
-                <a:ea typeface="Arial" pitchFamily="34" charset="-122"/>
-                <a:cs typeface="Arial" pitchFamily="34" charset="-120"/>
-              </a:rPr>
-              <a:t>Wer Maschinen und Zeichnungen einzeln rechnet und dann addiert, kommt auf dasselbe Ergebnis.</a:t>
-            </a:r>
-            <a:endParaRPr lang="en-US" sz="1200" dirty="0"/>
-          </a:p>
-        </p:txBody>
-      </p:sp>
-      <p:sp>
-        <p:nvSpPr>
-          <p:cNvPr id="8" name="Shape 5"/>
           <p:cNvSpPr/>
           <p:nvPr/>
         </p:nvSpPr>
@@ -4410,7 +4834,7 @@
       </p:sp>
       <p:sp>
         <p:nvSpPr>
-          <p:cNvPr id="9" name="Text 6"/>
+          <p:cNvPr id="7" name="Text 4"/>
           <p:cNvSpPr/>
           <p:nvPr/>
         </p:nvSpPr>
@@ -4441,7 +4865,7 @@
                 <a:ea typeface="Arial" pitchFamily="34" charset="-122"/>
                 <a:cs typeface="Arial" pitchFamily="34" charset="-120"/>
               </a:rPr>
-              <a:t>Auswertung</a:t>
+              <a:t>Heute plant ihr</a:t>
             </a:r>
             <a:endParaRPr lang="en-US" sz="1050" dirty="0"/>
           </a:p>
@@ -4449,7 +4873,7 @@
       </p:sp>
       <p:sp>
         <p:nvSpPr>
-          <p:cNvPr id="10" name="Text 7"/>
+          <p:cNvPr id="8" name="Text 5"/>
           <p:cNvSpPr/>
           <p:nvPr/>
         </p:nvSpPr>
@@ -4480,7 +4904,7 @@
                 <a:ea typeface="Arial" pitchFamily="34" charset="-122"/>
                 <a:cs typeface="Arial" pitchFamily="34" charset="-120"/>
               </a:rPr>
-              <a:t>10/13</a:t>
+              <a:t>10/16</a:t>
             </a:r>
             <a:endParaRPr lang="en-US" sz="1050" dirty="0"/>
           </a:p>
@@ -4533,7 +4957,7 @@
             <a:avLst/>
           </a:prstGeom>
           <a:solidFill>
-            <a:srgbClr val="0F7C86"/>
+            <a:srgbClr val="3843AF"/>
           </a:solidFill>
           <a:ln/>
         </p:spPr>
@@ -4565,13 +4989,13 @@
             <a:r>
               <a:rPr lang="en-US" sz="1150" b="1" spc="180" kern="0" dirty="0">
                 <a:solidFill>
-                  <a:srgbClr val="0F7C86"/>
-                </a:solidFill>
-                <a:latin typeface="Arial" pitchFamily="34" charset="0"/>
-                <a:ea typeface="Arial" pitchFamily="34" charset="-122"/>
-                <a:cs typeface="Arial" pitchFamily="34" charset="-120"/>
-              </a:rPr>
-              <a:t>STATION 2 · LÖSUNG</a:t>
+                  <a:srgbClr val="3843AF"/>
+                </a:solidFill>
+                <a:latin typeface="Arial" pitchFamily="34" charset="0"/>
+                <a:ea typeface="Arial" pitchFamily="34" charset="-122"/>
+                <a:cs typeface="Arial" pitchFamily="34" charset="-120"/>
+              </a:rPr>
+              <a:t>BREAKOUT · 19:10 BIS 20:10</a:t>
             </a:r>
             <a:endParaRPr lang="en-US" sz="1150" dirty="0"/>
           </a:p>
@@ -4610,39 +5034,635 @@
                 <a:ea typeface="Arial" pitchFamily="34" charset="-122"/>
                 <a:cs typeface="Arial" pitchFamily="34" charset="-120"/>
               </a:rPr>
-              <a:t>Wie sicher?</a:t>
+              <a:t>So läuft die Praxiszeit</a:t>
             </a:r>
             <a:endParaRPr lang="en-US" sz="2600" dirty="0"/>
           </a:p>
         </p:txBody>
       </p:sp>
-      <p:pic>
-        <p:nvPicPr>
-          <p:cNvPr id="5" name="Image 0" descr="/Users/jacobmenge/Desktop/kurs-26.2b-orga/folienwerkstatt/assets/diagramme/speicher-loesung-raid.png">    </p:cNvPr>
-          <p:cNvPicPr>
-            <a:picLocks noChangeAspect="1"/>
-          </p:cNvPicPr>
-          <p:nvPr/>
-        </p:nvPicPr>
-        <p:blipFill>
-          <a:blip r:embed="rId1"/>
-          <a:stretch>
-            <a:fillRect/>
-          </a:stretch>
-        </p:blipFill>
-        <p:spPr>
-          <a:xfrm>
-            <a:off x="566928" y="1335024"/>
-            <a:ext cx="8010144" cy="2651760"/>
-          </a:xfrm>
-          <a:prstGeom prst="rect">
-            <a:avLst/>
-          </a:prstGeom>
-        </p:spPr>
-      </p:pic>
-      <p:sp>
-        <p:nvSpPr>
-          <p:cNvPr id="6" name="Shape 3"/>
+      <p:sp>
+        <p:nvSpPr>
+          <p:cNvPr id="5" name="Shape 3"/>
+          <p:cNvSpPr/>
+          <p:nvPr/>
+        </p:nvSpPr>
+        <p:spPr>
+          <a:xfrm>
+            <a:off x="438912" y="1572768"/>
+            <a:ext cx="8266176" cy="274320"/>
+          </a:xfrm>
+          <a:prstGeom prst="rect">
+            <a:avLst/>
+          </a:prstGeom>
+          <a:solidFill>
+            <a:srgbClr val="F5F6FC"/>
+          </a:solidFill>
+          <a:ln/>
+        </p:spPr>
+      </p:sp>
+      <p:sp>
+        <p:nvSpPr>
+          <p:cNvPr id="6" name="Text 4"/>
+          <p:cNvSpPr/>
+          <p:nvPr/>
+        </p:nvSpPr>
+        <p:spPr>
+          <a:xfrm>
+            <a:off x="566928" y="1572768"/>
+            <a:ext cx="1097280" cy="274320"/>
+          </a:xfrm>
+          <a:prstGeom prst="rect">
+            <a:avLst/>
+          </a:prstGeom>
+          <a:noFill/>
+          <a:ln/>
+        </p:spPr>
+        <p:txBody>
+          <a:bodyPr wrap="square" lIns="0" tIns="0" rIns="0" bIns="0" rtlCol="0" anchor="ctr"/>
+          <a:lstStyle/>
+          <a:p>
+            <a:pPr indent="0" marL="0">
+              <a:buNone/>
+            </a:pPr>
+            <a:r>
+              <a:rPr lang="en-US" sz="1050" b="1" dirty="0">
+                <a:solidFill>
+                  <a:srgbClr val="3843AF"/>
+                </a:solidFill>
+                <a:latin typeface="Courier New" pitchFamily="34" charset="0"/>
+                <a:ea typeface="Courier New" pitchFamily="34" charset="-122"/>
+                <a:cs typeface="Courier New" pitchFamily="34" charset="-120"/>
+              </a:rPr>
+              <a:t>Station 1</a:t>
+            </a:r>
+            <a:endParaRPr lang="en-US" sz="1050" dirty="0"/>
+          </a:p>
+        </p:txBody>
+      </p:sp>
+      <p:sp>
+        <p:nvSpPr>
+          <p:cNvPr id="7" name="Text 5"/>
+          <p:cNvSpPr/>
+          <p:nvPr/>
+        </p:nvSpPr>
+        <p:spPr>
+          <a:xfrm>
+            <a:off x="1664208" y="1572768"/>
+            <a:ext cx="6912864" cy="274320"/>
+          </a:xfrm>
+          <a:prstGeom prst="rect">
+            <a:avLst/>
+          </a:prstGeom>
+          <a:noFill/>
+          <a:ln/>
+        </p:spPr>
+        <p:txBody>
+          <a:bodyPr wrap="square" lIns="0" tIns="0" rIns="0" bIns="0" rtlCol="0" anchor="ctr"/>
+          <a:lstStyle/>
+          <a:p>
+            <a:pPr indent="0" marL="0">
+              <a:buNone/>
+            </a:pPr>
+            <a:r>
+              <a:rPr lang="en-US" sz="1050" dirty="0">
+                <a:solidFill>
+                  <a:srgbClr val="434A63"/>
+                </a:solidFill>
+                <a:latin typeface="Arial" pitchFamily="34" charset="0"/>
+                <a:ea typeface="Arial" pitchFamily="34" charset="-122"/>
+                <a:cs typeface="Arial" pitchFamily="34" charset="-120"/>
+              </a:rPr>
+              <a:t>Wie viel? Den Netto-Bedarf in drei Jahren ausrechnen · 15 Min.</a:t>
+            </a:r>
+            <a:endParaRPr lang="en-US" sz="1050" dirty="0"/>
+          </a:p>
+        </p:txBody>
+      </p:sp>
+      <p:sp>
+        <p:nvSpPr>
+          <p:cNvPr id="8" name="Text 6"/>
+          <p:cNvSpPr/>
+          <p:nvPr/>
+        </p:nvSpPr>
+        <p:spPr>
+          <a:xfrm>
+            <a:off x="566928" y="1847088"/>
+            <a:ext cx="1097280" cy="274320"/>
+          </a:xfrm>
+          <a:prstGeom prst="rect">
+            <a:avLst/>
+          </a:prstGeom>
+          <a:noFill/>
+          <a:ln/>
+        </p:spPr>
+        <p:txBody>
+          <a:bodyPr wrap="square" lIns="0" tIns="0" rIns="0" bIns="0" rtlCol="0" anchor="ctr"/>
+          <a:lstStyle/>
+          <a:p>
+            <a:pPr indent="0" marL="0">
+              <a:buNone/>
+            </a:pPr>
+            <a:r>
+              <a:rPr lang="en-US" sz="1050" b="1" dirty="0">
+                <a:solidFill>
+                  <a:srgbClr val="3843AF"/>
+                </a:solidFill>
+                <a:latin typeface="Courier New" pitchFamily="34" charset="0"/>
+                <a:ea typeface="Courier New" pitchFamily="34" charset="-122"/>
+                <a:cs typeface="Courier New" pitchFamily="34" charset="-120"/>
+              </a:rPr>
+              <a:t>Station 2</a:t>
+            </a:r>
+            <a:endParaRPr lang="en-US" sz="1050" dirty="0"/>
+          </a:p>
+        </p:txBody>
+      </p:sp>
+      <p:sp>
+        <p:nvSpPr>
+          <p:cNvPr id="9" name="Text 7"/>
+          <p:cNvSpPr/>
+          <p:nvPr/>
+        </p:nvSpPr>
+        <p:spPr>
+          <a:xfrm>
+            <a:off x="1664208" y="1847088"/>
+            <a:ext cx="6912864" cy="274320"/>
+          </a:xfrm>
+          <a:prstGeom prst="rect">
+            <a:avLst/>
+          </a:prstGeom>
+          <a:noFill/>
+          <a:ln/>
+        </p:spPr>
+        <p:txBody>
+          <a:bodyPr wrap="square" lIns="0" tIns="0" rIns="0" bIns="0" rtlCol="0" anchor="ctr"/>
+          <a:lstStyle/>
+          <a:p>
+            <a:pPr indent="0" marL="0">
+              <a:buNone/>
+            </a:pPr>
+            <a:r>
+              <a:rPr lang="en-US" sz="1050" dirty="0">
+                <a:solidFill>
+                  <a:srgbClr val="434A63"/>
+                </a:solidFill>
+                <a:latin typeface="Arial" pitchFamily="34" charset="0"/>
+                <a:ea typeface="Arial" pitchFamily="34" charset="-122"/>
+                <a:cs typeface="Arial" pitchFamily="34" charset="-120"/>
+              </a:rPr>
+              <a:t>Wie sicher? Ein RAID-Level wählen und die Platten zählen · 15 Min.</a:t>
+            </a:r>
+            <a:endParaRPr lang="en-US" sz="1050" dirty="0"/>
+          </a:p>
+        </p:txBody>
+      </p:sp>
+      <p:sp>
+        <p:nvSpPr>
+          <p:cNvPr id="10" name="Shape 8"/>
+          <p:cNvSpPr/>
+          <p:nvPr/>
+        </p:nvSpPr>
+        <p:spPr>
+          <a:xfrm>
+            <a:off x="438912" y="2121408"/>
+            <a:ext cx="8266176" cy="274320"/>
+          </a:xfrm>
+          <a:prstGeom prst="rect">
+            <a:avLst/>
+          </a:prstGeom>
+          <a:solidFill>
+            <a:srgbClr val="F5F6FC"/>
+          </a:solidFill>
+          <a:ln/>
+        </p:spPr>
+      </p:sp>
+      <p:sp>
+        <p:nvSpPr>
+          <p:cNvPr id="11" name="Text 9"/>
+          <p:cNvSpPr/>
+          <p:nvPr/>
+        </p:nvSpPr>
+        <p:spPr>
+          <a:xfrm>
+            <a:off x="566928" y="2121408"/>
+            <a:ext cx="1097280" cy="274320"/>
+          </a:xfrm>
+          <a:prstGeom prst="rect">
+            <a:avLst/>
+          </a:prstGeom>
+          <a:noFill/>
+          <a:ln/>
+        </p:spPr>
+        <p:txBody>
+          <a:bodyPr wrap="square" lIns="0" tIns="0" rIns="0" bIns="0" rtlCol="0" anchor="ctr"/>
+          <a:lstStyle/>
+          <a:p>
+            <a:pPr indent="0" marL="0">
+              <a:buNone/>
+            </a:pPr>
+            <a:r>
+              <a:rPr lang="en-US" sz="1050" b="1" dirty="0">
+                <a:solidFill>
+                  <a:srgbClr val="3843AF"/>
+                </a:solidFill>
+                <a:latin typeface="Courier New" pitchFamily="34" charset="0"/>
+                <a:ea typeface="Courier New" pitchFamily="34" charset="-122"/>
+                <a:cs typeface="Courier New" pitchFamily="34" charset="-120"/>
+              </a:rPr>
+              <a:t>Station 3</a:t>
+            </a:r>
+            <a:endParaRPr lang="en-US" sz="1050" dirty="0"/>
+          </a:p>
+        </p:txBody>
+      </p:sp>
+      <p:sp>
+        <p:nvSpPr>
+          <p:cNvPr id="12" name="Text 10"/>
+          <p:cNvSpPr/>
+          <p:nvPr/>
+        </p:nvSpPr>
+        <p:spPr>
+          <a:xfrm>
+            <a:off x="1664208" y="2121408"/>
+            <a:ext cx="6912864" cy="274320"/>
+          </a:xfrm>
+          <a:prstGeom prst="rect">
+            <a:avLst/>
+          </a:prstGeom>
+          <a:noFill/>
+          <a:ln/>
+        </p:spPr>
+        <p:txBody>
+          <a:bodyPr wrap="square" lIns="0" tIns="0" rIns="0" bIns="0" rtlCol="0" anchor="ctr"/>
+          <a:lstStyle/>
+          <a:p>
+            <a:pPr indent="0" marL="0">
+              <a:buNone/>
+            </a:pPr>
+            <a:r>
+              <a:rPr lang="en-US" sz="1050" dirty="0">
+                <a:solidFill>
+                  <a:srgbClr val="434A63"/>
+                </a:solidFill>
+                <a:latin typeface="Arial" pitchFamily="34" charset="0"/>
+                <a:ea typeface="Arial" pitchFamily="34" charset="-122"/>
+                <a:cs typeface="Arial" pitchFamily="34" charset="-120"/>
+              </a:rPr>
+              <a:t>Wie angebunden? Für drei Bedarfe DAS, NAS oder SAN wählen · 10 Min.</a:t>
+            </a:r>
+            <a:endParaRPr lang="en-US" sz="1050" dirty="0"/>
+          </a:p>
+        </p:txBody>
+      </p:sp>
+      <p:sp>
+        <p:nvSpPr>
+          <p:cNvPr id="13" name="Text 11"/>
+          <p:cNvSpPr/>
+          <p:nvPr/>
+        </p:nvSpPr>
+        <p:spPr>
+          <a:xfrm>
+            <a:off x="566928" y="2395728"/>
+            <a:ext cx="1097280" cy="274320"/>
+          </a:xfrm>
+          <a:prstGeom prst="rect">
+            <a:avLst/>
+          </a:prstGeom>
+          <a:noFill/>
+          <a:ln/>
+        </p:spPr>
+        <p:txBody>
+          <a:bodyPr wrap="square" lIns="0" tIns="0" rIns="0" bIns="0" rtlCol="0" anchor="ctr"/>
+          <a:lstStyle/>
+          <a:p>
+            <a:pPr indent="0" marL="0">
+              <a:buNone/>
+            </a:pPr>
+            <a:r>
+              <a:rPr lang="en-US" sz="1050" b="1" dirty="0">
+                <a:solidFill>
+                  <a:srgbClr val="3843AF"/>
+                </a:solidFill>
+                <a:latin typeface="Courier New" pitchFamily="34" charset="0"/>
+                <a:ea typeface="Courier New" pitchFamily="34" charset="-122"/>
+                <a:cs typeface="Courier New" pitchFamily="34" charset="-120"/>
+              </a:rPr>
+              <a:t>Danach</a:t>
+            </a:r>
+            <a:endParaRPr lang="en-US" sz="1050" dirty="0"/>
+          </a:p>
+        </p:txBody>
+      </p:sp>
+      <p:sp>
+        <p:nvSpPr>
+          <p:cNvPr id="14" name="Text 12"/>
+          <p:cNvSpPr/>
+          <p:nvPr/>
+        </p:nvSpPr>
+        <p:spPr>
+          <a:xfrm>
+            <a:off x="1664208" y="2395728"/>
+            <a:ext cx="6912864" cy="274320"/>
+          </a:xfrm>
+          <a:prstGeom prst="rect">
+            <a:avLst/>
+          </a:prstGeom>
+          <a:noFill/>
+          <a:ln/>
+        </p:spPr>
+        <p:txBody>
+          <a:bodyPr wrap="square" lIns="0" tIns="0" rIns="0" bIns="0" rtlCol="0" anchor="ctr"/>
+          <a:lstStyle/>
+          <a:p>
+            <a:pPr indent="0" marL="0">
+              <a:buNone/>
+            </a:pPr>
+            <a:r>
+              <a:rPr lang="en-US" sz="1050" dirty="0">
+                <a:solidFill>
+                  <a:srgbClr val="434A63"/>
+                </a:solidFill>
+                <a:latin typeface="Arial" pitchFamily="34" charset="0"/>
+                <a:ea typeface="Arial" pitchFamily="34" charset="-122"/>
+                <a:cs typeface="Arial" pitchFamily="34" charset="-120"/>
+              </a:rPr>
+              <a:t>Vorstellung vorbereiten: drei Antworten für fünf Minuten Vortrag · 5 Min.</a:t>
+            </a:r>
+            <a:endParaRPr lang="en-US" sz="1050" dirty="0"/>
+          </a:p>
+        </p:txBody>
+      </p:sp>
+      <p:sp>
+        <p:nvSpPr>
+          <p:cNvPr id="15" name="Shape 13"/>
+          <p:cNvSpPr/>
+          <p:nvPr/>
+        </p:nvSpPr>
+        <p:spPr>
+          <a:xfrm>
+            <a:off x="438912" y="2670048"/>
+            <a:ext cx="8266176" cy="274320"/>
+          </a:xfrm>
+          <a:prstGeom prst="rect">
+            <a:avLst/>
+          </a:prstGeom>
+          <a:solidFill>
+            <a:srgbClr val="F5F6FC"/>
+          </a:solidFill>
+          <a:ln/>
+        </p:spPr>
+      </p:sp>
+      <p:sp>
+        <p:nvSpPr>
+          <p:cNvPr id="16" name="Text 14"/>
+          <p:cNvSpPr/>
+          <p:nvPr/>
+        </p:nvSpPr>
+        <p:spPr>
+          <a:xfrm>
+            <a:off x="566928" y="2670048"/>
+            <a:ext cx="1097280" cy="274320"/>
+          </a:xfrm>
+          <a:prstGeom prst="rect">
+            <a:avLst/>
+          </a:prstGeom>
+          <a:noFill/>
+          <a:ln/>
+        </p:spPr>
+        <p:txBody>
+          <a:bodyPr wrap="square" lIns="0" tIns="0" rIns="0" bIns="0" rtlCol="0" anchor="ctr"/>
+          <a:lstStyle/>
+          <a:p>
+            <a:pPr indent="0" marL="0">
+              <a:buNone/>
+            </a:pPr>
+            <a:r>
+              <a:rPr lang="en-US" sz="1050" b="1" dirty="0">
+                <a:solidFill>
+                  <a:srgbClr val="3843AF"/>
+                </a:solidFill>
+                <a:latin typeface="Courier New" pitchFamily="34" charset="0"/>
+                <a:ea typeface="Courier New" pitchFamily="34" charset="-122"/>
+                <a:cs typeface="Courier New" pitchFamily="34" charset="-120"/>
+              </a:rPr>
+              <a:t>Bonus</a:t>
+            </a:r>
+            <a:endParaRPr lang="en-US" sz="1050" dirty="0"/>
+          </a:p>
+        </p:txBody>
+      </p:sp>
+      <p:sp>
+        <p:nvSpPr>
+          <p:cNvPr id="17" name="Text 15"/>
+          <p:cNvSpPr/>
+          <p:nvPr/>
+        </p:nvSpPr>
+        <p:spPr>
+          <a:xfrm>
+            <a:off x="1664208" y="2670048"/>
+            <a:ext cx="6912864" cy="274320"/>
+          </a:xfrm>
+          <a:prstGeom prst="rect">
+            <a:avLst/>
+          </a:prstGeom>
+          <a:noFill/>
+          <a:ln/>
+        </p:spPr>
+        <p:txBody>
+          <a:bodyPr wrap="square" lIns="0" tIns="0" rIns="0" bIns="0" rtlCol="0" anchor="ctr"/>
+          <a:lstStyle/>
+          <a:p>
+            <a:pPr indent="0" marL="0">
+              <a:buNone/>
+            </a:pPr>
+            <a:r>
+              <a:rPr lang="en-US" sz="1050" dirty="0">
+                <a:solidFill>
+                  <a:srgbClr val="434A63"/>
+                </a:solidFill>
+                <a:latin typeface="Arial" pitchFamily="34" charset="0"/>
+                <a:ea typeface="Arial" pitchFamily="34" charset="-122"/>
+                <a:cs typeface="Arial" pitchFamily="34" charset="-120"/>
+              </a:rPr>
+              <a:t>Prozentuales Wachstum, Hot Spare, 3-2-1 für Voltrad, die Frage der Chefin</a:t>
+            </a:r>
+            <a:endParaRPr lang="en-US" sz="1050" dirty="0"/>
+          </a:p>
+        </p:txBody>
+      </p:sp>
+      <p:sp>
+        <p:nvSpPr>
+          <p:cNvPr id="18" name="Shape 16"/>
+          <p:cNvSpPr/>
+          <p:nvPr/>
+        </p:nvSpPr>
+        <p:spPr>
+          <a:xfrm>
+            <a:off x="566928" y="3200400"/>
+            <a:ext cx="8010144" cy="1243584"/>
+          </a:xfrm>
+          <a:prstGeom prst="rect">
+            <a:avLst/>
+          </a:prstGeom>
+          <a:solidFill>
+            <a:srgbClr val="EEF0FB"/>
+          </a:solidFill>
+          <a:ln/>
+        </p:spPr>
+      </p:sp>
+      <p:sp>
+        <p:nvSpPr>
+          <p:cNvPr id="19" name="Shape 17"/>
+          <p:cNvSpPr/>
+          <p:nvPr/>
+        </p:nvSpPr>
+        <p:spPr>
+          <a:xfrm>
+            <a:off x="566928" y="3200400"/>
+            <a:ext cx="41148" cy="1243584"/>
+          </a:xfrm>
+          <a:prstGeom prst="rect">
+            <a:avLst/>
+          </a:prstGeom>
+          <a:solidFill>
+            <a:srgbClr val="9A6310"/>
+          </a:solidFill>
+          <a:ln/>
+        </p:spPr>
+      </p:sp>
+      <p:sp>
+        <p:nvSpPr>
+          <p:cNvPr id="20" name="Text 18"/>
+          <p:cNvSpPr/>
+          <p:nvPr/>
+        </p:nvSpPr>
+        <p:spPr>
+          <a:xfrm>
+            <a:off x="804672" y="3346704"/>
+            <a:ext cx="7607808" cy="242062"/>
+          </a:xfrm>
+          <a:prstGeom prst="rect">
+            <a:avLst/>
+          </a:prstGeom>
+          <a:noFill/>
+          <a:ln/>
+        </p:spPr>
+        <p:txBody>
+          <a:bodyPr wrap="square" lIns="0" tIns="0" rIns="0" bIns="0" rtlCol="0" anchor="t"/>
+          <a:lstStyle/>
+          <a:p>
+            <a:pPr indent="0" marL="0">
+              <a:buNone/>
+            </a:pPr>
+            <a:r>
+              <a:rPr lang="en-US" sz="1300" b="1" dirty="0">
+                <a:solidFill>
+                  <a:srgbClr val="272E52"/>
+                </a:solidFill>
+                <a:latin typeface="Arial" pitchFamily="34" charset="0"/>
+                <a:ea typeface="Arial" pitchFamily="34" charset="-122"/>
+                <a:cs typeface="Arial" pitchFamily="34" charset="-120"/>
+              </a:rPr>
+              <a:t>Jetzt öffnen, alles steht auf der Kursseite</a:t>
+            </a:r>
+            <a:endParaRPr lang="en-US" sz="1300" dirty="0"/>
+          </a:p>
+        </p:txBody>
+      </p:sp>
+      <p:sp>
+        <p:nvSpPr>
+          <p:cNvPr id="21" name="Text 19"/>
+          <p:cNvSpPr/>
+          <p:nvPr/>
+        </p:nvSpPr>
+        <p:spPr>
+          <a:xfrm>
+            <a:off x="804672" y="3634486"/>
+            <a:ext cx="7607808" cy="690626"/>
+          </a:xfrm>
+          <a:prstGeom prst="rect">
+            <a:avLst/>
+          </a:prstGeom>
+          <a:noFill/>
+          <a:ln/>
+        </p:spPr>
+        <p:txBody>
+          <a:bodyPr wrap="square" lIns="0" tIns="0" rIns="0" bIns="0" rtlCol="0" anchor="t"/>
+          <a:lstStyle/>
+          <a:p>
+            <a:pPr indent="0" marL="0">
+              <a:lnSpc>
+                <a:spcPct val="92000"/>
+              </a:lnSpc>
+              <a:spcAft>
+                <a:spcPts val="500"/>
+              </a:spcAft>
+              <a:buNone/>
+            </a:pPr>
+            <a:r>
+              <a:rPr lang="en-US" sz="1000" dirty="0">
+                <a:solidFill>
+                  <a:srgbClr val="434A63"/>
+                </a:solidFill>
+                <a:latin typeface="Arial" pitchFamily="34" charset="0"/>
+                <a:ea typeface="Arial" pitchFamily="34" charset="-122"/>
+                <a:cs typeface="Arial" pitchFamily="34" charset="-120"/>
+              </a:rPr>
+              <a:t>Übung:  jacobmenge.github.io/kurs-unterlagen/infrastruktur-planung/praxis-speicher/</a:t>
+            </a:r>
+            <a:endParaRPr lang="en-US" sz="1000" dirty="0"/>
+          </a:p>
+          <a:p>
+            <a:pPr indent="0" marL="0">
+              <a:lnSpc>
+                <a:spcPct val="92000"/>
+              </a:lnSpc>
+              <a:spcAft>
+                <a:spcPts val="500"/>
+              </a:spcAft>
+              <a:buNone/>
+            </a:pPr>
+            <a:r>
+              <a:rPr lang="en-US" sz="1000" dirty="0">
+                <a:solidFill>
+                  <a:srgbClr val="434A63"/>
+                </a:solidFill>
+                <a:latin typeface="Arial" pitchFamily="34" charset="0"/>
+                <a:ea typeface="Arial" pitchFamily="34" charset="-122"/>
+                <a:cs typeface="Arial" pitchFamily="34" charset="-120"/>
+              </a:rPr>
+              <a:t>Theorie:  jacobmenge.github.io/kurs-unterlagen/infrastruktur-planung/speicherloesungen/</a:t>
+            </a:r>
+            <a:endParaRPr lang="en-US" sz="1000" dirty="0"/>
+          </a:p>
+          <a:p>
+            <a:pPr indent="0" marL="0">
+              <a:lnSpc>
+                <a:spcPct val="92000"/>
+              </a:lnSpc>
+              <a:spcAft>
+                <a:spcPts val="500"/>
+              </a:spcAft>
+              <a:buNone/>
+            </a:pPr>
+            <a:r>
+              <a:rPr lang="en-US" sz="1000" dirty="0">
+                <a:solidFill>
+                  <a:srgbClr val="434A63"/>
+                </a:solidFill>
+                <a:latin typeface="Arial" pitchFamily="34" charset="0"/>
+                <a:ea typeface="Arial" pitchFamily="34" charset="-122"/>
+                <a:cs typeface="Arial" pitchFamily="34" charset="-120"/>
+              </a:rPr>
+              <a:t>Um 20:10 sind alle wieder hier. Jede Gruppe stellt ihre drei Antworten in fünf Minuten vor.</a:t>
+            </a:r>
+            <a:endParaRPr lang="en-US" sz="1000" dirty="0"/>
+          </a:p>
+        </p:txBody>
+      </p:sp>
+      <p:sp>
+        <p:nvSpPr>
+          <p:cNvPr id="22" name="Shape 20"/>
           <p:cNvSpPr/>
           <p:nvPr/>
         </p:nvSpPr>
@@ -4665,7 +5685,7 @@
       </p:sp>
       <p:sp>
         <p:nvSpPr>
-          <p:cNvPr id="7" name="Text 4"/>
+          <p:cNvPr id="23" name="Text 21"/>
           <p:cNvSpPr/>
           <p:nvPr/>
         </p:nvSpPr>
@@ -4696,7 +5716,7 @@
                 <a:ea typeface="Arial" pitchFamily="34" charset="-122"/>
                 <a:cs typeface="Arial" pitchFamily="34" charset="-120"/>
               </a:rPr>
-              <a:t>Auswertung</a:t>
+              <a:t>Heute plant ihr</a:t>
             </a:r>
             <a:endParaRPr lang="en-US" sz="1050" dirty="0"/>
           </a:p>
@@ -4704,7 +5724,7 @@
       </p:sp>
       <p:sp>
         <p:nvSpPr>
-          <p:cNvPr id="8" name="Text 5"/>
+          <p:cNvPr id="24" name="Text 22"/>
           <p:cNvSpPr/>
           <p:nvPr/>
         </p:nvSpPr>
@@ -4735,7 +5755,7 @@
                 <a:ea typeface="Arial" pitchFamily="34" charset="-122"/>
                 <a:cs typeface="Arial" pitchFamily="34" charset="-120"/>
               </a:rPr>
-              <a:t>11/13</a:t>
+              <a:t>11/16</a:t>
             </a:r>
             <a:endParaRPr lang="en-US" sz="1050" dirty="0"/>
           </a:p>
@@ -4826,7 +5846,7 @@
                 <a:ea typeface="Arial" pitchFamily="34" charset="-122"/>
                 <a:cs typeface="Arial" pitchFamily="34" charset="-120"/>
               </a:rPr>
-              <a:t>STATION 3 · LÖSUNG</a:t>
+              <a:t>FÜNF MINUTEN JE GRUPPE</a:t>
             </a:r>
             <a:endParaRPr lang="en-US" sz="1150" dirty="0"/>
           </a:p>
@@ -4865,45 +5885,373 @@
                 <a:ea typeface="Arial" pitchFamily="34" charset="-122"/>
                 <a:cs typeface="Arial" pitchFamily="34" charset="-120"/>
               </a:rPr>
-              <a:t>Wie angebunden?</a:t>
+              <a:t>Jede Gruppe stellt vor</a:t>
             </a:r>
             <a:endParaRPr lang="en-US" sz="2600" dirty="0"/>
           </a:p>
         </p:txBody>
       </p:sp>
-      <p:pic>
-        <p:nvPicPr>
-          <p:cNvPr id="5" name="Image 0" descr="/Users/jacobmenge/Desktop/kurs-26.2b-orga/folienwerkstatt/assets/diagramme/speicher-loesung-anbindung.png">    </p:cNvPr>
-          <p:cNvPicPr>
-            <a:picLocks noChangeAspect="1"/>
-          </p:cNvPicPr>
-          <p:nvPr/>
-        </p:nvPicPr>
-        <p:blipFill>
-          <a:blip r:embed="rId1"/>
-          <a:stretch>
-            <a:fillRect/>
-          </a:stretch>
-        </p:blipFill>
-        <p:spPr>
-          <a:xfrm>
-            <a:off x="566928" y="1371600"/>
-            <a:ext cx="8010144" cy="2523744"/>
-          </a:xfrm>
-          <a:prstGeom prst="rect">
-            <a:avLst/>
-          </a:prstGeom>
-        </p:spPr>
-      </p:pic>
-      <p:sp>
-        <p:nvSpPr>
-          <p:cNvPr id="6" name="Shape 3"/>
-          <p:cNvSpPr/>
-          <p:nvPr/>
-        </p:nvSpPr>
-        <p:spPr>
-          <a:xfrm>
-            <a:off x="566928" y="4105656"/>
+      <p:sp>
+        <p:nvSpPr>
+          <p:cNvPr id="5" name="Shape 3"/>
+          <p:cNvSpPr/>
+          <p:nvPr/>
+        </p:nvSpPr>
+        <p:spPr>
+          <a:xfrm>
+            <a:off x="438912" y="1737360"/>
+            <a:ext cx="8266176" cy="438912"/>
+          </a:xfrm>
+          <a:prstGeom prst="rect">
+            <a:avLst/>
+          </a:prstGeom>
+          <a:solidFill>
+            <a:srgbClr val="F5F6FC"/>
+          </a:solidFill>
+          <a:ln/>
+        </p:spPr>
+      </p:sp>
+      <p:sp>
+        <p:nvSpPr>
+          <p:cNvPr id="6" name="Text 4"/>
+          <p:cNvSpPr/>
+          <p:nvPr/>
+        </p:nvSpPr>
+        <p:spPr>
+          <a:xfrm>
+            <a:off x="566928" y="1737360"/>
+            <a:ext cx="914400" cy="438912"/>
+          </a:xfrm>
+          <a:prstGeom prst="rect">
+            <a:avLst/>
+          </a:prstGeom>
+          <a:noFill/>
+          <a:ln/>
+        </p:spPr>
+        <p:txBody>
+          <a:bodyPr wrap="square" lIns="0" tIns="0" rIns="0" bIns="0" rtlCol="0" anchor="ctr"/>
+          <a:lstStyle/>
+          <a:p>
+            <a:pPr indent="0" marL="0">
+              <a:buNone/>
+            </a:pPr>
+            <a:r>
+              <a:rPr lang="en-US" sz="1150" b="1" dirty="0">
+                <a:solidFill>
+                  <a:srgbClr val="0F7C86"/>
+                </a:solidFill>
+                <a:latin typeface="Courier New" pitchFamily="34" charset="0"/>
+                <a:ea typeface="Courier New" pitchFamily="34" charset="-122"/>
+                <a:cs typeface="Courier New" pitchFamily="34" charset="-120"/>
+              </a:rPr>
+              <a:t>1</a:t>
+            </a:r>
+            <a:endParaRPr lang="en-US" sz="1150" dirty="0"/>
+          </a:p>
+        </p:txBody>
+      </p:sp>
+      <p:sp>
+        <p:nvSpPr>
+          <p:cNvPr id="7" name="Text 5"/>
+          <p:cNvSpPr/>
+          <p:nvPr/>
+        </p:nvSpPr>
+        <p:spPr>
+          <a:xfrm>
+            <a:off x="1481328" y="1737360"/>
+            <a:ext cx="7095744" cy="438912"/>
+          </a:xfrm>
+          <a:prstGeom prst="rect">
+            <a:avLst/>
+          </a:prstGeom>
+          <a:noFill/>
+          <a:ln/>
+        </p:spPr>
+        <p:txBody>
+          <a:bodyPr wrap="square" lIns="0" tIns="0" rIns="0" bIns="0" rtlCol="0" anchor="ctr"/>
+          <a:lstStyle/>
+          <a:p>
+            <a:pPr indent="0" marL="0">
+              <a:buNone/>
+            </a:pPr>
+            <a:r>
+              <a:rPr lang="en-US" sz="1150" dirty="0">
+                <a:solidFill>
+                  <a:srgbClr val="434A63"/>
+                </a:solidFill>
+                <a:latin typeface="Arial" pitchFamily="34" charset="0"/>
+                <a:ea typeface="Arial" pitchFamily="34" charset="-122"/>
+                <a:cs typeface="Arial" pitchFamily="34" charset="-120"/>
+              </a:rPr>
+              <a:t>Wie viel? Unser Netto-Bedarf in drei Jahren und wie wir gerechnet haben</a:t>
+            </a:r>
+            <a:endParaRPr lang="en-US" sz="1150" dirty="0"/>
+          </a:p>
+        </p:txBody>
+      </p:sp>
+      <p:sp>
+        <p:nvSpPr>
+          <p:cNvPr id="8" name="Text 6"/>
+          <p:cNvSpPr/>
+          <p:nvPr/>
+        </p:nvSpPr>
+        <p:spPr>
+          <a:xfrm>
+            <a:off x="566928" y="2176272"/>
+            <a:ext cx="914400" cy="438912"/>
+          </a:xfrm>
+          <a:prstGeom prst="rect">
+            <a:avLst/>
+          </a:prstGeom>
+          <a:noFill/>
+          <a:ln/>
+        </p:spPr>
+        <p:txBody>
+          <a:bodyPr wrap="square" lIns="0" tIns="0" rIns="0" bIns="0" rtlCol="0" anchor="ctr"/>
+          <a:lstStyle/>
+          <a:p>
+            <a:pPr indent="0" marL="0">
+              <a:buNone/>
+            </a:pPr>
+            <a:r>
+              <a:rPr lang="en-US" sz="1150" b="1" dirty="0">
+                <a:solidFill>
+                  <a:srgbClr val="0F7C86"/>
+                </a:solidFill>
+                <a:latin typeface="Courier New" pitchFamily="34" charset="0"/>
+                <a:ea typeface="Courier New" pitchFamily="34" charset="-122"/>
+                <a:cs typeface="Courier New" pitchFamily="34" charset="-120"/>
+              </a:rPr>
+              <a:t>2</a:t>
+            </a:r>
+            <a:endParaRPr lang="en-US" sz="1150" dirty="0"/>
+          </a:p>
+        </p:txBody>
+      </p:sp>
+      <p:sp>
+        <p:nvSpPr>
+          <p:cNvPr id="9" name="Text 7"/>
+          <p:cNvSpPr/>
+          <p:nvPr/>
+        </p:nvSpPr>
+        <p:spPr>
+          <a:xfrm>
+            <a:off x="1481328" y="2176272"/>
+            <a:ext cx="7095744" cy="438912"/>
+          </a:xfrm>
+          <a:prstGeom prst="rect">
+            <a:avLst/>
+          </a:prstGeom>
+          <a:noFill/>
+          <a:ln/>
+        </p:spPr>
+        <p:txBody>
+          <a:bodyPr wrap="square" lIns="0" tIns="0" rIns="0" bIns="0" rtlCol="0" anchor="ctr"/>
+          <a:lstStyle/>
+          <a:p>
+            <a:pPr indent="0" marL="0">
+              <a:buNone/>
+            </a:pPr>
+            <a:r>
+              <a:rPr lang="en-US" sz="1150" dirty="0">
+                <a:solidFill>
+                  <a:srgbClr val="434A63"/>
+                </a:solidFill>
+                <a:latin typeface="Arial" pitchFamily="34" charset="0"/>
+                <a:ea typeface="Arial" pitchFamily="34" charset="-122"/>
+                <a:cs typeface="Arial" pitchFamily="34" charset="-120"/>
+              </a:rPr>
+              <a:t>Wie sicher? Unser RAID-Level, wie viele Platten, wie viel Voltrad brutto kauft</a:t>
+            </a:r>
+            <a:endParaRPr lang="en-US" sz="1150" dirty="0"/>
+          </a:p>
+        </p:txBody>
+      </p:sp>
+      <p:sp>
+        <p:nvSpPr>
+          <p:cNvPr id="10" name="Shape 8"/>
+          <p:cNvSpPr/>
+          <p:nvPr/>
+        </p:nvSpPr>
+        <p:spPr>
+          <a:xfrm>
+            <a:off x="438912" y="2615184"/>
+            <a:ext cx="8266176" cy="438912"/>
+          </a:xfrm>
+          <a:prstGeom prst="rect">
+            <a:avLst/>
+          </a:prstGeom>
+          <a:solidFill>
+            <a:srgbClr val="F5F6FC"/>
+          </a:solidFill>
+          <a:ln/>
+        </p:spPr>
+      </p:sp>
+      <p:sp>
+        <p:nvSpPr>
+          <p:cNvPr id="11" name="Text 9"/>
+          <p:cNvSpPr/>
+          <p:nvPr/>
+        </p:nvSpPr>
+        <p:spPr>
+          <a:xfrm>
+            <a:off x="566928" y="2615184"/>
+            <a:ext cx="914400" cy="438912"/>
+          </a:xfrm>
+          <a:prstGeom prst="rect">
+            <a:avLst/>
+          </a:prstGeom>
+          <a:noFill/>
+          <a:ln/>
+        </p:spPr>
+        <p:txBody>
+          <a:bodyPr wrap="square" lIns="0" tIns="0" rIns="0" bIns="0" rtlCol="0" anchor="ctr"/>
+          <a:lstStyle/>
+          <a:p>
+            <a:pPr indent="0" marL="0">
+              <a:buNone/>
+            </a:pPr>
+            <a:r>
+              <a:rPr lang="en-US" sz="1150" b="1" dirty="0">
+                <a:solidFill>
+                  <a:srgbClr val="0F7C86"/>
+                </a:solidFill>
+                <a:latin typeface="Courier New" pitchFamily="34" charset="0"/>
+                <a:ea typeface="Courier New" pitchFamily="34" charset="-122"/>
+                <a:cs typeface="Courier New" pitchFamily="34" charset="-120"/>
+              </a:rPr>
+              <a:t>3</a:t>
+            </a:r>
+            <a:endParaRPr lang="en-US" sz="1150" dirty="0"/>
+          </a:p>
+        </p:txBody>
+      </p:sp>
+      <p:sp>
+        <p:nvSpPr>
+          <p:cNvPr id="12" name="Text 10"/>
+          <p:cNvSpPr/>
+          <p:nvPr/>
+        </p:nvSpPr>
+        <p:spPr>
+          <a:xfrm>
+            <a:off x="1481328" y="2615184"/>
+            <a:ext cx="7095744" cy="438912"/>
+          </a:xfrm>
+          <a:prstGeom prst="rect">
+            <a:avLst/>
+          </a:prstGeom>
+          <a:noFill/>
+          <a:ln/>
+        </p:spPr>
+        <p:txBody>
+          <a:bodyPr wrap="square" lIns="0" tIns="0" rIns="0" bIns="0" rtlCol="0" anchor="ctr"/>
+          <a:lstStyle/>
+          <a:p>
+            <a:pPr indent="0" marL="0">
+              <a:buNone/>
+            </a:pPr>
+            <a:r>
+              <a:rPr lang="en-US" sz="1150" dirty="0">
+                <a:solidFill>
+                  <a:srgbClr val="434A63"/>
+                </a:solidFill>
+                <a:latin typeface="Arial" pitchFamily="34" charset="0"/>
+                <a:ea typeface="Arial" pitchFamily="34" charset="-122"/>
+                <a:cs typeface="Arial" pitchFamily="34" charset="-120"/>
+              </a:rPr>
+              <a:t>Wie angebunden? Unsere Wahl für die Maschinen, die Zeichnungen und die Sicherung</a:t>
+            </a:r>
+            <a:endParaRPr lang="en-US" sz="1150" dirty="0"/>
+          </a:p>
+        </p:txBody>
+      </p:sp>
+      <p:sp>
+        <p:nvSpPr>
+          <p:cNvPr id="13" name="Text 11"/>
+          <p:cNvSpPr/>
+          <p:nvPr/>
+        </p:nvSpPr>
+        <p:spPr>
+          <a:xfrm>
+            <a:off x="566928" y="3054096"/>
+            <a:ext cx="914400" cy="438912"/>
+          </a:xfrm>
+          <a:prstGeom prst="rect">
+            <a:avLst/>
+          </a:prstGeom>
+          <a:noFill/>
+          <a:ln/>
+        </p:spPr>
+        <p:txBody>
+          <a:bodyPr wrap="square" lIns="0" tIns="0" rIns="0" bIns="0" rtlCol="0" anchor="ctr"/>
+          <a:lstStyle/>
+          <a:p>
+            <a:pPr indent="0" marL="0">
+              <a:buNone/>
+            </a:pPr>
+            <a:r>
+              <a:rPr lang="en-US" sz="1150" b="1" dirty="0">
+                <a:solidFill>
+                  <a:srgbClr val="0F7C86"/>
+                </a:solidFill>
+                <a:latin typeface="Courier New" pitchFamily="34" charset="0"/>
+                <a:ea typeface="Courier New" pitchFamily="34" charset="-122"/>
+                <a:cs typeface="Courier New" pitchFamily="34" charset="-120"/>
+              </a:rPr>
+              <a:t>Offen</a:t>
+            </a:r>
+            <a:endParaRPr lang="en-US" sz="1150" dirty="0"/>
+          </a:p>
+        </p:txBody>
+      </p:sp>
+      <p:sp>
+        <p:nvSpPr>
+          <p:cNvPr id="14" name="Text 12"/>
+          <p:cNvSpPr/>
+          <p:nvPr/>
+        </p:nvSpPr>
+        <p:spPr>
+          <a:xfrm>
+            <a:off x="1481328" y="3054096"/>
+            <a:ext cx="7095744" cy="438912"/>
+          </a:xfrm>
+          <a:prstGeom prst="rect">
+            <a:avLst/>
+          </a:prstGeom>
+          <a:noFill/>
+          <a:ln/>
+        </p:spPr>
+        <p:txBody>
+          <a:bodyPr wrap="square" lIns="0" tIns="0" rIns="0" bIns="0" rtlCol="0" anchor="ctr"/>
+          <a:lstStyle/>
+          <a:p>
+            <a:pPr indent="0" marL="0">
+              <a:buNone/>
+            </a:pPr>
+            <a:r>
+              <a:rPr lang="en-US" sz="1150" dirty="0">
+                <a:solidFill>
+                  <a:srgbClr val="434A63"/>
+                </a:solidFill>
+                <a:latin typeface="Arial" pitchFamily="34" charset="0"/>
+                <a:ea typeface="Arial" pitchFamily="34" charset="-122"/>
+                <a:cs typeface="Arial" pitchFamily="34" charset="-120"/>
+              </a:rPr>
+              <a:t>Was kostet das alles? Wer baut es mit zwei Personen in der IT auf?</a:t>
+            </a:r>
+            <a:endParaRPr lang="en-US" sz="1150" dirty="0"/>
+          </a:p>
+        </p:txBody>
+      </p:sp>
+      <p:sp>
+        <p:nvSpPr>
+          <p:cNvPr id="15" name="Shape 13"/>
+          <p:cNvSpPr/>
+          <p:nvPr/>
+        </p:nvSpPr>
+        <p:spPr>
+          <a:xfrm>
+            <a:off x="566928" y="3977640"/>
             <a:ext cx="32004" cy="256032"/>
           </a:xfrm>
           <a:prstGeom prst="rect">
@@ -4917,13 +6265,13 @@
       </p:sp>
       <p:sp>
         <p:nvSpPr>
-          <p:cNvPr id="7" name="Text 4"/>
-          <p:cNvSpPr/>
-          <p:nvPr/>
-        </p:nvSpPr>
-        <p:spPr>
-          <a:xfrm>
-            <a:off x="749808" y="4059936"/>
+          <p:cNvPr id="16" name="Text 14"/>
+          <p:cNvSpPr/>
+          <p:nvPr/>
+        </p:nvSpPr>
+        <p:spPr>
+          <a:xfrm>
+            <a:off x="749808" y="3931920"/>
             <a:ext cx="7827264" cy="402336"/>
           </a:xfrm>
           <a:prstGeom prst="rect">
@@ -4948,7 +6296,7 @@
                 <a:ea typeface="Arial" pitchFamily="34" charset="-122"/>
                 <a:cs typeface="Arial" pitchFamily="34" charset="-120"/>
               </a:rPr>
-              <a:t>Befund 9 der Bestandsaufnahme: Eine Sicherung zählt erst, wenn sie getrennt liegt und geprüft ist.</a:t>
+              <a:t>Ab der zweiten Gruppe nur noch: Was habt ihr anders entschieden und warum? Die letzte Frage bleibt offen für Mittwoch.</a:t>
             </a:r>
             <a:endParaRPr lang="en-US" sz="1200" dirty="0"/>
           </a:p>
@@ -4956,7 +6304,7 @@
       </p:sp>
       <p:sp>
         <p:nvSpPr>
-          <p:cNvPr id="8" name="Shape 5"/>
+          <p:cNvPr id="17" name="Shape 15"/>
           <p:cNvSpPr/>
           <p:nvPr/>
         </p:nvSpPr>
@@ -4979,7 +6327,7 @@
       </p:sp>
       <p:sp>
         <p:nvSpPr>
-          <p:cNvPr id="9" name="Text 6"/>
+          <p:cNvPr id="18" name="Text 16"/>
           <p:cNvSpPr/>
           <p:nvPr/>
         </p:nvSpPr>
@@ -5018,7 +6366,7 @@
       </p:sp>
       <p:sp>
         <p:nvSpPr>
-          <p:cNvPr id="10" name="Text 7"/>
+          <p:cNvPr id="19" name="Text 17"/>
           <p:cNvSpPr/>
           <p:nvPr/>
         </p:nvSpPr>
@@ -5049,7 +6397,7 @@
                 <a:ea typeface="Arial" pitchFamily="34" charset="-122"/>
                 <a:cs typeface="Arial" pitchFamily="34" charset="-120"/>
               </a:rPr>
-              <a:t>12/13</a:t>
+              <a:t>12/16</a:t>
             </a:r>
             <a:endParaRPr lang="en-US" sz="1050" dirty="0"/>
           </a:p>
@@ -5140,7 +6488,7 @@
                 <a:ea typeface="Arial" pitchFamily="34" charset="-122"/>
                 <a:cs typeface="Arial" pitchFamily="34" charset="-120"/>
               </a:rPr>
-              <a:t>AUSBLICK</a:t>
+              <a:t>STATION 1 · LÖSUNG</a:t>
             </a:r>
             <a:endParaRPr lang="en-US" sz="1150" dirty="0"/>
           </a:p>
@@ -5179,81 +6527,46 @@
                 <a:ea typeface="Arial" pitchFamily="34" charset="-122"/>
                 <a:cs typeface="Arial" pitchFamily="34" charset="-120"/>
               </a:rPr>
-              <a:t>Bis Mittwoch</a:t>
+              <a:t>Wie viel?</a:t>
             </a:r>
             <a:endParaRPr lang="en-US" sz="2600" dirty="0"/>
           </a:p>
         </p:txBody>
       </p:sp>
-      <p:sp>
-        <p:nvSpPr>
-          <p:cNvPr id="5" name="Text 3"/>
-          <p:cNvSpPr/>
-          <p:nvPr/>
-        </p:nvSpPr>
-        <p:spPr>
-          <a:xfrm>
-            <a:off x="566928" y="1444752"/>
-            <a:ext cx="8010144" cy="438912"/>
-          </a:xfrm>
-          <a:prstGeom prst="rect">
-            <a:avLst/>
-          </a:prstGeom>
-          <a:noFill/>
-          <a:ln/>
-        </p:spPr>
-        <p:txBody>
-          <a:bodyPr wrap="square" lIns="0" tIns="0" rIns="0" bIns="0" rtlCol="0" anchor="t"/>
-          <a:lstStyle/>
-          <a:p>
-            <a:pPr indent="0" marL="0">
-              <a:buNone/>
-            </a:pPr>
-            <a:r>
-              <a:rPr lang="en-US" sz="1300" dirty="0">
-                <a:solidFill>
-                  <a:srgbClr val="5C6377"/>
-                </a:solidFill>
-                <a:latin typeface="Arial" pitchFamily="34" charset="0"/>
-                <a:ea typeface="Arial" pitchFamily="34" charset="-122"/>
-                <a:cs typeface="Arial" pitchFamily="34" charset="-120"/>
-              </a:rPr>
-              <a:t>Am Mittwoch geht es um das Geld und die Menschen hinter dem Konzept: Ressourcen und Lizenzen.</a:t>
-            </a:r>
-            <a:endParaRPr lang="en-US" sz="1300" dirty="0"/>
-          </a:p>
-        </p:txBody>
-      </p:sp>
-      <p:sp>
-        <p:nvSpPr>
-          <p:cNvPr id="6" name="Shape 4"/>
-          <p:cNvSpPr/>
-          <p:nvPr/>
-        </p:nvSpPr>
-        <p:spPr>
-          <a:xfrm>
-            <a:off x="566928" y="1975104"/>
-            <a:ext cx="2523744" cy="1645920"/>
-          </a:xfrm>
-          <a:prstGeom prst="rect">
-            <a:avLst/>
-          </a:prstGeom>
-          <a:solidFill>
-            <a:srgbClr val="F5F6FC"/>
-          </a:solidFill>
-          <a:ln/>
-        </p:spPr>
-      </p:sp>
-      <p:sp>
-        <p:nvSpPr>
-          <p:cNvPr id="7" name="Shape 5"/>
-          <p:cNvSpPr/>
-          <p:nvPr/>
-        </p:nvSpPr>
-        <p:spPr>
-          <a:xfrm>
-            <a:off x="566928" y="1975104"/>
-            <a:ext cx="41148" cy="1645920"/>
+      <p:pic>
+        <p:nvPicPr>
+          <p:cNvPr id="5" name="Image 0" descr="/Users/jacobmenge/Desktop/kurs-26.2b-orga/folienwerkstatt/assets/diagramme/speicher-loesung-rechnung.png">    </p:cNvPr>
+          <p:cNvPicPr>
+            <a:picLocks noChangeAspect="1"/>
+          </p:cNvPicPr>
+          <p:nvPr/>
+        </p:nvPicPr>
+        <p:blipFill>
+          <a:blip r:embed="rId1"/>
+          <a:stretch>
+            <a:fillRect/>
+          </a:stretch>
+        </p:blipFill>
+        <p:spPr>
+          <a:xfrm>
+            <a:off x="566928" y="1371600"/>
+            <a:ext cx="8010144" cy="2468880"/>
+          </a:xfrm>
+          <a:prstGeom prst="rect">
+            <a:avLst/>
+          </a:prstGeom>
+        </p:spPr>
+      </p:pic>
+      <p:sp>
+        <p:nvSpPr>
+          <p:cNvPr id="6" name="Shape 3"/>
+          <p:cNvSpPr/>
+          <p:nvPr/>
+        </p:nvSpPr>
+        <p:spPr>
+          <a:xfrm>
+            <a:off x="566928" y="4069080"/>
+            <a:ext cx="32004" cy="256032"/>
           </a:xfrm>
           <a:prstGeom prst="rect">
             <a:avLst/>
@@ -5266,72 +6579,30 @@
       </p:sp>
       <p:sp>
         <p:nvSpPr>
-          <p:cNvPr id="8" name="Text 6"/>
-          <p:cNvSpPr/>
-          <p:nvPr/>
-        </p:nvSpPr>
-        <p:spPr>
-          <a:xfrm>
-            <a:off x="804672" y="2121408"/>
-            <a:ext cx="2121408" cy="457200"/>
-          </a:xfrm>
-          <a:prstGeom prst="rect">
-            <a:avLst/>
-          </a:prstGeom>
-          <a:noFill/>
-          <a:ln/>
-        </p:spPr>
-        <p:txBody>
-          <a:bodyPr wrap="square" lIns="0" tIns="0" rIns="0" bIns="0" rtlCol="0" anchor="t"/>
-          <a:lstStyle/>
-          <a:p>
-            <a:pPr indent="0" marL="0">
-              <a:buNone/>
-            </a:pPr>
-            <a:r>
-              <a:rPr lang="en-US" sz="1300" b="1" dirty="0">
-                <a:solidFill>
-                  <a:srgbClr val="272E52"/>
-                </a:solidFill>
-                <a:latin typeface="Arial" pitchFamily="34" charset="0"/>
-                <a:ea typeface="Arial" pitchFamily="34" charset="-122"/>
-                <a:cs typeface="Arial" pitchFamily="34" charset="-120"/>
-              </a:rPr>
-              <a:t>Zum Nachlesen</a:t>
-            </a:r>
-            <a:endParaRPr lang="en-US" sz="1300" dirty="0"/>
-          </a:p>
-        </p:txBody>
-      </p:sp>
-      <p:sp>
-        <p:nvSpPr>
-          <p:cNvPr id="9" name="Text 7"/>
-          <p:cNvSpPr/>
-          <p:nvPr/>
-        </p:nvSpPr>
-        <p:spPr>
-          <a:xfrm>
-            <a:off x="804672" y="2624328"/>
-            <a:ext cx="2121408" cy="877824"/>
-          </a:xfrm>
-          <a:prstGeom prst="rect">
-            <a:avLst/>
-          </a:prstGeom>
-          <a:noFill/>
-          <a:ln/>
-        </p:spPr>
-        <p:txBody>
-          <a:bodyPr wrap="square" lIns="0" tIns="0" rIns="0" bIns="0" rtlCol="0" anchor="t"/>
-          <a:lstStyle/>
-          <a:p>
-            <a:pPr indent="0" marL="0">
-              <a:lnSpc>
-                <a:spcPct val="92000"/>
-              </a:lnSpc>
-              <a:buNone/>
-            </a:pPr>
-            <a:r>
-              <a:rPr lang="en-US" sz="1100" dirty="0">
+          <p:cNvPr id="7" name="Text 4"/>
+          <p:cNvSpPr/>
+          <p:nvPr/>
+        </p:nvSpPr>
+        <p:spPr>
+          <a:xfrm>
+            <a:off x="749808" y="4023360"/>
+            <a:ext cx="7827264" cy="402336"/>
+          </a:xfrm>
+          <a:prstGeom prst="rect">
+            <a:avLst/>
+          </a:prstGeom>
+          <a:noFill/>
+          <a:ln/>
+        </p:spPr>
+        <p:txBody>
+          <a:bodyPr wrap="square" lIns="0" tIns="0" rIns="0" bIns="0" rtlCol="0" anchor="ctr"/>
+          <a:lstStyle/>
+          <a:p>
+            <a:pPr indent="0" marL="0">
+              <a:buNone/>
+            </a:pPr>
+            <a:r>
+              <a:rPr lang="en-US" sz="1200" b="1" dirty="0">
                 <a:solidFill>
                   <a:srgbClr val="434A63"/>
                 </a:solidFill>
@@ -5339,308 +6610,7 @@
                 <a:ea typeface="Arial" pitchFamily="34" charset="-122"/>
                 <a:cs typeface="Arial" pitchFamily="34" charset="-120"/>
               </a:rPr>
-              <a:t>Die Übung und die Theorie zu Speicherlösungen mit acht weiteren Rechenaufgaben stehen auf der Kursseite.</a:t>
-            </a:r>
-            <a:endParaRPr lang="en-US" sz="1100" dirty="0"/>
-          </a:p>
-        </p:txBody>
-      </p:sp>
-      <p:sp>
-        <p:nvSpPr>
-          <p:cNvPr id="10" name="Shape 8"/>
-          <p:cNvSpPr/>
-          <p:nvPr/>
-        </p:nvSpPr>
-        <p:spPr>
-          <a:xfrm>
-            <a:off x="3310128" y="1975104"/>
-            <a:ext cx="2523744" cy="1645920"/>
-          </a:xfrm>
-          <a:prstGeom prst="rect">
-            <a:avLst/>
-          </a:prstGeom>
-          <a:solidFill>
-            <a:srgbClr val="F5F6FC"/>
-          </a:solidFill>
-          <a:ln/>
-        </p:spPr>
-      </p:sp>
-      <p:sp>
-        <p:nvSpPr>
-          <p:cNvPr id="11" name="Shape 9"/>
-          <p:cNvSpPr/>
-          <p:nvPr/>
-        </p:nvSpPr>
-        <p:spPr>
-          <a:xfrm>
-            <a:off x="3310128" y="1975104"/>
-            <a:ext cx="41148" cy="1645920"/>
-          </a:xfrm>
-          <a:prstGeom prst="rect">
-            <a:avLst/>
-          </a:prstGeom>
-          <a:solidFill>
-            <a:srgbClr val="0F7C86"/>
-          </a:solidFill>
-          <a:ln/>
-        </p:spPr>
-      </p:sp>
-      <p:sp>
-        <p:nvSpPr>
-          <p:cNvPr id="12" name="Text 10"/>
-          <p:cNvSpPr/>
-          <p:nvPr/>
-        </p:nvSpPr>
-        <p:spPr>
-          <a:xfrm>
-            <a:off x="3547872" y="2121408"/>
-            <a:ext cx="2121408" cy="457200"/>
-          </a:xfrm>
-          <a:prstGeom prst="rect">
-            <a:avLst/>
-          </a:prstGeom>
-          <a:noFill/>
-          <a:ln/>
-        </p:spPr>
-        <p:txBody>
-          <a:bodyPr wrap="square" lIns="0" tIns="0" rIns="0" bIns="0" rtlCol="0" anchor="t"/>
-          <a:lstStyle/>
-          <a:p>
-            <a:pPr indent="0" marL="0">
-              <a:buNone/>
-            </a:pPr>
-            <a:r>
-              <a:rPr lang="en-US" sz="1300" b="1" dirty="0">
-                <a:solidFill>
-                  <a:srgbClr val="272E52"/>
-                </a:solidFill>
-                <a:latin typeface="Arial" pitchFamily="34" charset="0"/>
-                <a:ea typeface="Arial" pitchFamily="34" charset="-122"/>
-                <a:cs typeface="Arial" pitchFamily="34" charset="-120"/>
-              </a:rPr>
-              <a:t>Das braucht ihr von heute</a:t>
-            </a:r>
-            <a:endParaRPr lang="en-US" sz="1300" dirty="0"/>
-          </a:p>
-        </p:txBody>
-      </p:sp>
-      <p:sp>
-        <p:nvSpPr>
-          <p:cNvPr id="13" name="Text 11"/>
-          <p:cNvSpPr/>
-          <p:nvPr/>
-        </p:nvSpPr>
-        <p:spPr>
-          <a:xfrm>
-            <a:off x="3547872" y="2624328"/>
-            <a:ext cx="2121408" cy="877824"/>
-          </a:xfrm>
-          <a:prstGeom prst="rect">
-            <a:avLst/>
-          </a:prstGeom>
-          <a:noFill/>
-          <a:ln/>
-        </p:spPr>
-        <p:txBody>
-          <a:bodyPr wrap="square" lIns="0" tIns="0" rIns="0" bIns="0" rtlCol="0" anchor="t"/>
-          <a:lstStyle/>
-          <a:p>
-            <a:pPr indent="0" marL="0">
-              <a:lnSpc>
-                <a:spcPct val="92000"/>
-              </a:lnSpc>
-              <a:buNone/>
-            </a:pPr>
-            <a:r>
-              <a:rPr lang="en-US" sz="1100" dirty="0">
-                <a:solidFill>
-                  <a:srgbClr val="434A63"/>
-                </a:solidFill>
-                <a:latin typeface="Arial" pitchFamily="34" charset="0"/>
-                <a:ea typeface="Arial" pitchFamily="34" charset="-122"/>
-                <a:cs typeface="Arial" pitchFamily="34" charset="-120"/>
-              </a:rPr>
-              <a:t>Rund 3,6 TB netto, vier Platten in RAID 6 oder 10 plus Hot Spare, eine eigene Sicherung mit Kopie außer Haus.</a:t>
-            </a:r>
-            <a:endParaRPr lang="en-US" sz="1100" dirty="0"/>
-          </a:p>
-        </p:txBody>
-      </p:sp>
-      <p:sp>
-        <p:nvSpPr>
-          <p:cNvPr id="14" name="Shape 12"/>
-          <p:cNvSpPr/>
-          <p:nvPr/>
-        </p:nvSpPr>
-        <p:spPr>
-          <a:xfrm>
-            <a:off x="6053328" y="1975104"/>
-            <a:ext cx="2523744" cy="1645920"/>
-          </a:xfrm>
-          <a:prstGeom prst="rect">
-            <a:avLst/>
-          </a:prstGeom>
-          <a:solidFill>
-            <a:srgbClr val="F5F6FC"/>
-          </a:solidFill>
-          <a:ln/>
-        </p:spPr>
-      </p:sp>
-      <p:sp>
-        <p:nvSpPr>
-          <p:cNvPr id="15" name="Shape 13"/>
-          <p:cNvSpPr/>
-          <p:nvPr/>
-        </p:nvSpPr>
-        <p:spPr>
-          <a:xfrm>
-            <a:off x="6053328" y="1975104"/>
-            <a:ext cx="41148" cy="1645920"/>
-          </a:xfrm>
-          <a:prstGeom prst="rect">
-            <a:avLst/>
-          </a:prstGeom>
-          <a:solidFill>
-            <a:srgbClr val="0F7C86"/>
-          </a:solidFill>
-          <a:ln/>
-        </p:spPr>
-      </p:sp>
-      <p:sp>
-        <p:nvSpPr>
-          <p:cNvPr id="16" name="Text 14"/>
-          <p:cNvSpPr/>
-          <p:nvPr/>
-        </p:nvSpPr>
-        <p:spPr>
-          <a:xfrm>
-            <a:off x="6291072" y="2121408"/>
-            <a:ext cx="2121408" cy="457200"/>
-          </a:xfrm>
-          <a:prstGeom prst="rect">
-            <a:avLst/>
-          </a:prstGeom>
-          <a:noFill/>
-          <a:ln/>
-        </p:spPr>
-        <p:txBody>
-          <a:bodyPr wrap="square" lIns="0" tIns="0" rIns="0" bIns="0" rtlCol="0" anchor="t"/>
-          <a:lstStyle/>
-          <a:p>
-            <a:pPr indent="0" marL="0">
-              <a:buNone/>
-            </a:pPr>
-            <a:r>
-              <a:rPr lang="en-US" sz="1300" b="1" dirty="0">
-                <a:solidFill>
-                  <a:srgbClr val="272E52"/>
-                </a:solidFill>
-                <a:latin typeface="Arial" pitchFamily="34" charset="0"/>
-                <a:ea typeface="Arial" pitchFamily="34" charset="-122"/>
-                <a:cs typeface="Arial" pitchFamily="34" charset="-120"/>
-              </a:rPr>
-              <a:t>Am Mittwoch</a:t>
-            </a:r>
-            <a:endParaRPr lang="en-US" sz="1300" dirty="0"/>
-          </a:p>
-        </p:txBody>
-      </p:sp>
-      <p:sp>
-        <p:nvSpPr>
-          <p:cNvPr id="17" name="Text 15"/>
-          <p:cNvSpPr/>
-          <p:nvPr/>
-        </p:nvSpPr>
-        <p:spPr>
-          <a:xfrm>
-            <a:off x="6291072" y="2624328"/>
-            <a:ext cx="2121408" cy="877824"/>
-          </a:xfrm>
-          <a:prstGeom prst="rect">
-            <a:avLst/>
-          </a:prstGeom>
-          <a:noFill/>
-          <a:ln/>
-        </p:spPr>
-        <p:txBody>
-          <a:bodyPr wrap="square" lIns="0" tIns="0" rIns="0" bIns="0" rtlCol="0" anchor="t"/>
-          <a:lstStyle/>
-          <a:p>
-            <a:pPr indent="0" marL="0">
-              <a:lnSpc>
-                <a:spcPct val="92000"/>
-              </a:lnSpc>
-              <a:buNone/>
-            </a:pPr>
-            <a:r>
-              <a:rPr lang="en-US" sz="1100" dirty="0">
-                <a:solidFill>
-                  <a:srgbClr val="434A63"/>
-                </a:solidFill>
-                <a:latin typeface="Arial" pitchFamily="34" charset="0"/>
-                <a:ea typeface="Arial" pitchFamily="34" charset="-122"/>
-                <a:cs typeface="Arial" pitchFamily="34" charset="-120"/>
-              </a:rPr>
-              <a:t>Was kostet das, wer baut es auf und welche Lizenzen braucht Voltrad dafür?</a:t>
-            </a:r>
-            <a:endParaRPr lang="en-US" sz="1100" dirty="0"/>
-          </a:p>
-        </p:txBody>
-      </p:sp>
-      <p:sp>
-        <p:nvSpPr>
-          <p:cNvPr id="18" name="Shape 16"/>
-          <p:cNvSpPr/>
-          <p:nvPr/>
-        </p:nvSpPr>
-        <p:spPr>
-          <a:xfrm>
-            <a:off x="566928" y="3886200"/>
-            <a:ext cx="32004" cy="256032"/>
-          </a:xfrm>
-          <a:prstGeom prst="rect">
-            <a:avLst/>
-          </a:prstGeom>
-          <a:solidFill>
-            <a:srgbClr val="0F7C86"/>
-          </a:solidFill>
-          <a:ln/>
-        </p:spPr>
-      </p:sp>
-      <p:sp>
-        <p:nvSpPr>
-          <p:cNvPr id="19" name="Text 17"/>
-          <p:cNvSpPr/>
-          <p:nvPr/>
-        </p:nvSpPr>
-        <p:spPr>
-          <a:xfrm>
-            <a:off x="749808" y="3840480"/>
-            <a:ext cx="7827264" cy="402336"/>
-          </a:xfrm>
-          <a:prstGeom prst="rect">
-            <a:avLst/>
-          </a:prstGeom>
-          <a:noFill/>
-          <a:ln/>
-        </p:spPr>
-        <p:txBody>
-          <a:bodyPr wrap="square" lIns="0" tIns="0" rIns="0" bIns="0" rtlCol="0" anchor="ctr"/>
-          <a:lstStyle/>
-          <a:p>
-            <a:pPr indent="0" marL="0">
-              <a:buNone/>
-            </a:pPr>
-            <a:r>
-              <a:rPr lang="en-US" sz="1200" b="1" dirty="0">
-                <a:solidFill>
-                  <a:srgbClr val="434A63"/>
-                </a:solidFill>
-                <a:latin typeface="Arial" pitchFamily="34" charset="0"/>
-                <a:ea typeface="Arial" pitchFamily="34" charset="-122"/>
-                <a:cs typeface="Arial" pitchFamily="34" charset="-120"/>
-              </a:rPr>
-              <a:t>Nächster Termin: Mittwoch, 21. Oktober um 18:00 Uhr.</a:t>
+              <a:t>Wer Maschinen und Zeichnungen einzeln rechnet und dann addiert, kommt auf dasselbe Ergebnis.</a:t>
             </a:r>
             <a:endParaRPr lang="en-US" sz="1200" dirty="0"/>
           </a:p>
@@ -5648,7 +6618,7 @@
       </p:sp>
       <p:sp>
         <p:nvSpPr>
-          <p:cNvPr id="20" name="Shape 18"/>
+          <p:cNvPr id="8" name="Shape 5"/>
           <p:cNvSpPr/>
           <p:nvPr/>
         </p:nvSpPr>
@@ -5671,7 +6641,7 @@
       </p:sp>
       <p:sp>
         <p:nvSpPr>
-          <p:cNvPr id="21" name="Text 19"/>
+          <p:cNvPr id="9" name="Text 6"/>
           <p:cNvSpPr/>
           <p:nvPr/>
         </p:nvSpPr>
@@ -5702,7 +6672,7 @@
                 <a:ea typeface="Arial" pitchFamily="34" charset="-122"/>
                 <a:cs typeface="Arial" pitchFamily="34" charset="-120"/>
               </a:rPr>
-              <a:t>Abschluss</a:t>
+              <a:t>Auswertung</a:t>
             </a:r>
             <a:endParaRPr lang="en-US" sz="1050" dirty="0"/>
           </a:p>
@@ -5710,7 +6680,7 @@
       </p:sp>
       <p:sp>
         <p:nvSpPr>
-          <p:cNvPr id="22" name="Text 20"/>
+          <p:cNvPr id="10" name="Text 7"/>
           <p:cNvSpPr/>
           <p:nvPr/>
         </p:nvSpPr>
@@ -5741,7 +6711,7 @@
                 <a:ea typeface="Arial" pitchFamily="34" charset="-122"/>
                 <a:cs typeface="Arial" pitchFamily="34" charset="-120"/>
               </a:rPr>
-              <a:t>13/13</a:t>
+              <a:t>13/16</a:t>
             </a:r>
             <a:endParaRPr lang="en-US" sz="1050" dirty="0"/>
           </a:p>
@@ -5761,7 +6731,7 @@
     <p:bg>
       <p:bgPr>
         <a:solidFill>
-          <a:srgbClr val="F5F6FC"/>
+          <a:srgbClr val="FFFFFF"/>
         </a:solidFill>
       </p:bgPr>
     </p:bg>
@@ -5787,8 +6757,8 @@
         </p:nvSpPr>
         <p:spPr>
           <a:xfrm>
-            <a:off x="0" y="5015484"/>
-            <a:ext cx="9144000" cy="128016"/>
+            <a:off x="566928" y="201168"/>
+            <a:ext cx="475488" cy="50292"/>
           </a:xfrm>
           <a:prstGeom prst="rect">
             <a:avLst/>
@@ -5807,8 +6777,8 @@
         </p:nvSpPr>
         <p:spPr>
           <a:xfrm>
-            <a:off x="566928" y="1828800"/>
-            <a:ext cx="8010144" cy="914400"/>
+            <a:off x="566928" y="384048"/>
+            <a:ext cx="8010144" cy="237744"/>
           </a:xfrm>
           <a:prstGeom prst="rect">
             <a:avLst/>
@@ -5820,11 +6790,50 @@
           <a:bodyPr wrap="square" lIns="0" tIns="0" rIns="0" bIns="0" rtlCol="0" anchor="ctr"/>
           <a:lstStyle/>
           <a:p>
-            <a:pPr algn="ctr" indent="0" marL="0">
-              <a:buNone/>
-            </a:pPr>
-            <a:r>
-              <a:rPr lang="en-US" sz="3200" b="1" dirty="0">
+            <a:pPr indent="0" marL="0">
+              <a:buNone/>
+            </a:pPr>
+            <a:r>
+              <a:rPr lang="en-US" sz="1150" b="1" spc="180" kern="0" dirty="0">
+                <a:solidFill>
+                  <a:srgbClr val="0F7C86"/>
+                </a:solidFill>
+                <a:latin typeface="Arial" pitchFamily="34" charset="0"/>
+                <a:ea typeface="Arial" pitchFamily="34" charset="-122"/>
+                <a:cs typeface="Arial" pitchFamily="34" charset="-120"/>
+              </a:rPr>
+              <a:t>STATION 2 · LÖSUNG</a:t>
+            </a:r>
+            <a:endParaRPr lang="en-US" sz="1150" dirty="0"/>
+          </a:p>
+        </p:txBody>
+      </p:sp>
+      <p:sp>
+        <p:nvSpPr>
+          <p:cNvPr id="4" name="Text 2"/>
+          <p:cNvSpPr/>
+          <p:nvPr/>
+        </p:nvSpPr>
+        <p:spPr>
+          <a:xfrm>
+            <a:off x="566928" y="731520"/>
+            <a:ext cx="8010144" cy="603504"/>
+          </a:xfrm>
+          <a:prstGeom prst="rect">
+            <a:avLst/>
+          </a:prstGeom>
+          <a:noFill/>
+          <a:ln/>
+        </p:spPr>
+        <p:txBody>
+          <a:bodyPr wrap="square" lIns="0" tIns="0" rIns="0" bIns="0" rtlCol="0" anchor="t"/>
+          <a:lstStyle/>
+          <a:p>
+            <a:pPr indent="0" marL="0">
+              <a:buNone/>
+            </a:pPr>
+            <a:r>
+              <a:rPr lang="en-US" sz="2600" b="1" dirty="0">
                 <a:solidFill>
                   <a:srgbClr val="272E52"/>
                 </a:solidFill>
@@ -5832,9 +6841,225 @@
                 <a:ea typeface="Arial" pitchFamily="34" charset="-122"/>
                 <a:cs typeface="Arial" pitchFamily="34" charset="-120"/>
               </a:rPr>
-              <a:t>Netto planen, brutto kaufen.</a:t>
-            </a:r>
-            <a:endParaRPr lang="en-US" sz="3200" dirty="0"/>
+              <a:t>Wie sicher?</a:t>
+            </a:r>
+            <a:endParaRPr lang="en-US" sz="2600" dirty="0"/>
+          </a:p>
+        </p:txBody>
+      </p:sp>
+      <p:pic>
+        <p:nvPicPr>
+          <p:cNvPr id="5" name="Image 0" descr="/Users/jacobmenge/Desktop/kurs-26.2b-orga/folienwerkstatt/assets/diagramme/speicher-loesung-raid.png">    </p:cNvPr>
+          <p:cNvPicPr>
+            <a:picLocks noChangeAspect="1"/>
+          </p:cNvPicPr>
+          <p:nvPr/>
+        </p:nvPicPr>
+        <p:blipFill>
+          <a:blip r:embed="rId1"/>
+          <a:stretch>
+            <a:fillRect/>
+          </a:stretch>
+        </p:blipFill>
+        <p:spPr>
+          <a:xfrm>
+            <a:off x="566928" y="1335024"/>
+            <a:ext cx="8010144" cy="2651760"/>
+          </a:xfrm>
+          <a:prstGeom prst="rect">
+            <a:avLst/>
+          </a:prstGeom>
+        </p:spPr>
+      </p:pic>
+      <p:sp>
+        <p:nvSpPr>
+          <p:cNvPr id="6" name="Shape 3"/>
+          <p:cNvSpPr/>
+          <p:nvPr/>
+        </p:nvSpPr>
+        <p:spPr>
+          <a:xfrm>
+            <a:off x="566928" y="4631436"/>
+            <a:ext cx="8010144" cy="0"/>
+          </a:xfrm>
+          <a:prstGeom prst="line">
+            <a:avLst/>
+          </a:prstGeom>
+          <a:noFill/>
+          <a:ln w="9525">
+            <a:solidFill>
+              <a:srgbClr val="DFE3F0"/>
+            </a:solidFill>
+            <a:prstDash val="solid"/>
+          </a:ln>
+        </p:spPr>
+      </p:sp>
+      <p:sp>
+        <p:nvSpPr>
+          <p:cNvPr id="7" name="Text 4"/>
+          <p:cNvSpPr/>
+          <p:nvPr/>
+        </p:nvSpPr>
+        <p:spPr>
+          <a:xfrm>
+            <a:off x="566928" y="4722876"/>
+            <a:ext cx="5029200" cy="237744"/>
+          </a:xfrm>
+          <a:prstGeom prst="rect">
+            <a:avLst/>
+          </a:prstGeom>
+          <a:noFill/>
+          <a:ln/>
+        </p:spPr>
+        <p:txBody>
+          <a:bodyPr wrap="square" lIns="0" tIns="0" rIns="0" bIns="0" rtlCol="0" anchor="ctr"/>
+          <a:lstStyle/>
+          <a:p>
+            <a:pPr indent="0" marL="0">
+              <a:buNone/>
+            </a:pPr>
+            <a:r>
+              <a:rPr lang="en-US" sz="1050" spc="30" kern="0" dirty="0">
+                <a:solidFill>
+                  <a:srgbClr val="5C6377"/>
+                </a:solidFill>
+                <a:latin typeface="Arial" pitchFamily="34" charset="0"/>
+                <a:ea typeface="Arial" pitchFamily="34" charset="-122"/>
+                <a:cs typeface="Arial" pitchFamily="34" charset="-120"/>
+              </a:rPr>
+              <a:t>Auswertung</a:t>
+            </a:r>
+            <a:endParaRPr lang="en-US" sz="1050" dirty="0"/>
+          </a:p>
+        </p:txBody>
+      </p:sp>
+      <p:sp>
+        <p:nvSpPr>
+          <p:cNvPr id="8" name="Text 5"/>
+          <p:cNvSpPr/>
+          <p:nvPr/>
+        </p:nvSpPr>
+        <p:spPr>
+          <a:xfrm>
+            <a:off x="8028432" y="4722876"/>
+            <a:ext cx="548640" cy="237744"/>
+          </a:xfrm>
+          <a:prstGeom prst="rect">
+            <a:avLst/>
+          </a:prstGeom>
+          <a:noFill/>
+          <a:ln/>
+        </p:spPr>
+        <p:txBody>
+          <a:bodyPr wrap="square" lIns="0" tIns="0" rIns="0" bIns="0" rtlCol="0" anchor="ctr"/>
+          <a:lstStyle/>
+          <a:p>
+            <a:pPr algn="r" indent="0" marL="0">
+              <a:buNone/>
+            </a:pPr>
+            <a:r>
+              <a:rPr lang="en-US" sz="1050" dirty="0">
+                <a:solidFill>
+                  <a:srgbClr val="5C6377"/>
+                </a:solidFill>
+                <a:latin typeface="Arial" pitchFamily="34" charset="0"/>
+                <a:ea typeface="Arial" pitchFamily="34" charset="-122"/>
+                <a:cs typeface="Arial" pitchFamily="34" charset="-120"/>
+              </a:rPr>
+              <a:t>14/16</a:t>
+            </a:r>
+            <a:endParaRPr lang="en-US" sz="1050" dirty="0"/>
+          </a:p>
+        </p:txBody>
+      </p:sp>
+    </p:spTree>
+  </p:cSld>
+  <p:clrMapOvr>
+    <a:masterClrMapping/>
+  </p:clrMapOvr>
+</p:sld>
+</file>
+
+<file path=ppt/slides/slide18.xml><?xml version="1.0" encoding="utf-8"?>
+<p:sld xmlns:a="http://schemas.openxmlformats.org/drawingml/2006/main" xmlns:r="http://schemas.openxmlformats.org/officeDocument/2006/relationships" xmlns:p="http://schemas.openxmlformats.org/presentationml/2006/main">
+  <p:cSld name="Slide 18">
+    <p:bg>
+      <p:bgPr>
+        <a:solidFill>
+          <a:srgbClr val="FFFFFF"/>
+        </a:solidFill>
+      </p:bgPr>
+    </p:bg>
+    <p:spTree>
+      <p:nvGrpSpPr>
+        <p:cNvPr id="1" name=""/>
+        <p:cNvGrpSpPr/>
+        <p:nvPr/>
+      </p:nvGrpSpPr>
+      <p:grpSpPr>
+        <a:xfrm>
+          <a:off x="0" y="0"/>
+          <a:ext cx="0" cy="0"/>
+          <a:chOff x="0" y="0"/>
+          <a:chExt cx="0" cy="0"/>
+        </a:xfrm>
+      </p:grpSpPr>
+      <p:sp>
+        <p:nvSpPr>
+          <p:cNvPr id="2" name="Shape 0"/>
+          <p:cNvSpPr/>
+          <p:nvPr/>
+        </p:nvSpPr>
+        <p:spPr>
+          <a:xfrm>
+            <a:off x="566928" y="201168"/>
+            <a:ext cx="475488" cy="50292"/>
+          </a:xfrm>
+          <a:prstGeom prst="rect">
+            <a:avLst/>
+          </a:prstGeom>
+          <a:solidFill>
+            <a:srgbClr val="0F7C86"/>
+          </a:solidFill>
+          <a:ln/>
+        </p:spPr>
+      </p:sp>
+      <p:sp>
+        <p:nvSpPr>
+          <p:cNvPr id="3" name="Text 1"/>
+          <p:cNvSpPr/>
+          <p:nvPr/>
+        </p:nvSpPr>
+        <p:spPr>
+          <a:xfrm>
+            <a:off x="566928" y="384048"/>
+            <a:ext cx="8010144" cy="237744"/>
+          </a:xfrm>
+          <a:prstGeom prst="rect">
+            <a:avLst/>
+          </a:prstGeom>
+          <a:noFill/>
+          <a:ln/>
+        </p:spPr>
+        <p:txBody>
+          <a:bodyPr wrap="square" lIns="0" tIns="0" rIns="0" bIns="0" rtlCol="0" anchor="ctr"/>
+          <a:lstStyle/>
+          <a:p>
+            <a:pPr indent="0" marL="0">
+              <a:buNone/>
+            </a:pPr>
+            <a:r>
+              <a:rPr lang="en-US" sz="1150" b="1" spc="180" kern="0" dirty="0">
+                <a:solidFill>
+                  <a:srgbClr val="0F7C86"/>
+                </a:solidFill>
+                <a:latin typeface="Arial" pitchFamily="34" charset="0"/>
+                <a:ea typeface="Arial" pitchFamily="34" charset="-122"/>
+                <a:cs typeface="Arial" pitchFamily="34" charset="-120"/>
+              </a:rPr>
+              <a:t>STATION 3 · LÖSUNG</a:t>
+            </a:r>
+            <a:endParaRPr lang="en-US" sz="1150" dirty="0"/>
           </a:p>
         </p:txBody>
       </p:sp>
@@ -5846,8 +7071,8 @@
         </p:nvSpPr>
         <p:spPr>
           <a:xfrm>
-            <a:off x="566928" y="2788920"/>
-            <a:ext cx="8010144" cy="457200"/>
+            <a:off x="566928" y="731520"/>
+            <a:ext cx="8010144" cy="603504"/>
           </a:xfrm>
           <a:prstGeom prst="rect">
             <a:avLst/>
@@ -5859,11 +7084,156 @@
           <a:bodyPr wrap="square" lIns="0" tIns="0" rIns="0" bIns="0" rtlCol="0" anchor="t"/>
           <a:lstStyle/>
           <a:p>
-            <a:pPr algn="ctr" indent="0" marL="0">
-              <a:buNone/>
-            </a:pPr>
-            <a:r>
-              <a:rPr lang="en-US" sz="1400" dirty="0">
+            <a:pPr indent="0" marL="0">
+              <a:buNone/>
+            </a:pPr>
+            <a:r>
+              <a:rPr lang="en-US" sz="2600" b="1" dirty="0">
+                <a:solidFill>
+                  <a:srgbClr val="272E52"/>
+                </a:solidFill>
+                <a:latin typeface="Arial" pitchFamily="34" charset="0"/>
+                <a:ea typeface="Arial" pitchFamily="34" charset="-122"/>
+                <a:cs typeface="Arial" pitchFamily="34" charset="-120"/>
+              </a:rPr>
+              <a:t>Wie angebunden?</a:t>
+            </a:r>
+            <a:endParaRPr lang="en-US" sz="2600" dirty="0"/>
+          </a:p>
+        </p:txBody>
+      </p:sp>
+      <p:pic>
+        <p:nvPicPr>
+          <p:cNvPr id="5" name="Image 0" descr="/Users/jacobmenge/Desktop/kurs-26.2b-orga/folienwerkstatt/assets/diagramme/speicher-loesung-anbindung.png">    </p:cNvPr>
+          <p:cNvPicPr>
+            <a:picLocks noChangeAspect="1"/>
+          </p:cNvPicPr>
+          <p:nvPr/>
+        </p:nvPicPr>
+        <p:blipFill>
+          <a:blip r:embed="rId1"/>
+          <a:stretch>
+            <a:fillRect/>
+          </a:stretch>
+        </p:blipFill>
+        <p:spPr>
+          <a:xfrm>
+            <a:off x="566928" y="1371600"/>
+            <a:ext cx="8010144" cy="2523744"/>
+          </a:xfrm>
+          <a:prstGeom prst="rect">
+            <a:avLst/>
+          </a:prstGeom>
+        </p:spPr>
+      </p:pic>
+      <p:sp>
+        <p:nvSpPr>
+          <p:cNvPr id="6" name="Shape 3"/>
+          <p:cNvSpPr/>
+          <p:nvPr/>
+        </p:nvSpPr>
+        <p:spPr>
+          <a:xfrm>
+            <a:off x="566928" y="4105656"/>
+            <a:ext cx="32004" cy="256032"/>
+          </a:xfrm>
+          <a:prstGeom prst="rect">
+            <a:avLst/>
+          </a:prstGeom>
+          <a:solidFill>
+            <a:srgbClr val="0F7C86"/>
+          </a:solidFill>
+          <a:ln/>
+        </p:spPr>
+      </p:sp>
+      <p:sp>
+        <p:nvSpPr>
+          <p:cNvPr id="7" name="Text 4"/>
+          <p:cNvSpPr/>
+          <p:nvPr/>
+        </p:nvSpPr>
+        <p:spPr>
+          <a:xfrm>
+            <a:off x="749808" y="4059936"/>
+            <a:ext cx="7827264" cy="402336"/>
+          </a:xfrm>
+          <a:prstGeom prst="rect">
+            <a:avLst/>
+          </a:prstGeom>
+          <a:noFill/>
+          <a:ln/>
+        </p:spPr>
+        <p:txBody>
+          <a:bodyPr wrap="square" lIns="0" tIns="0" rIns="0" bIns="0" rtlCol="0" anchor="ctr"/>
+          <a:lstStyle/>
+          <a:p>
+            <a:pPr indent="0" marL="0">
+              <a:buNone/>
+            </a:pPr>
+            <a:r>
+              <a:rPr lang="en-US" sz="1200" b="1" dirty="0">
+                <a:solidFill>
+                  <a:srgbClr val="434A63"/>
+                </a:solidFill>
+                <a:latin typeface="Arial" pitchFamily="34" charset="0"/>
+                <a:ea typeface="Arial" pitchFamily="34" charset="-122"/>
+                <a:cs typeface="Arial" pitchFamily="34" charset="-120"/>
+              </a:rPr>
+              <a:t>Befund 9: Eine Sicherung zählt erst, wenn sie getrennt liegt und geprüft ist.</a:t>
+            </a:r>
+            <a:endParaRPr lang="en-US" sz="1200" dirty="0"/>
+          </a:p>
+        </p:txBody>
+      </p:sp>
+      <p:sp>
+        <p:nvSpPr>
+          <p:cNvPr id="8" name="Shape 5"/>
+          <p:cNvSpPr/>
+          <p:nvPr/>
+        </p:nvSpPr>
+        <p:spPr>
+          <a:xfrm>
+            <a:off x="566928" y="4631436"/>
+            <a:ext cx="8010144" cy="0"/>
+          </a:xfrm>
+          <a:prstGeom prst="line">
+            <a:avLst/>
+          </a:prstGeom>
+          <a:noFill/>
+          <a:ln w="9525">
+            <a:solidFill>
+              <a:srgbClr val="DFE3F0"/>
+            </a:solidFill>
+            <a:prstDash val="solid"/>
+          </a:ln>
+        </p:spPr>
+      </p:sp>
+      <p:sp>
+        <p:nvSpPr>
+          <p:cNvPr id="9" name="Text 6"/>
+          <p:cNvSpPr/>
+          <p:nvPr/>
+        </p:nvSpPr>
+        <p:spPr>
+          <a:xfrm>
+            <a:off x="566928" y="4722876"/>
+            <a:ext cx="5029200" cy="237744"/>
+          </a:xfrm>
+          <a:prstGeom prst="rect">
+            <a:avLst/>
+          </a:prstGeom>
+          <a:noFill/>
+          <a:ln/>
+        </p:spPr>
+        <p:txBody>
+          <a:bodyPr wrap="square" lIns="0" tIns="0" rIns="0" bIns="0" rtlCol="0" anchor="ctr"/>
+          <a:lstStyle/>
+          <a:p>
+            <a:pPr indent="0" marL="0">
+              <a:buNone/>
+            </a:pPr>
+            <a:r>
+              <a:rPr lang="en-US" sz="1050" spc="30" kern="0" dirty="0">
                 <a:solidFill>
                   <a:srgbClr val="5C6377"/>
                 </a:solidFill>
@@ -5871,9 +7241,178 @@
                 <a:ea typeface="Arial" pitchFamily="34" charset="-122"/>
                 <a:cs typeface="Arial" pitchFamily="34" charset="-120"/>
               </a:rPr>
-              <a:t>Übung und Theorie bleiben zum Nachlesen auf der Kursseite.</a:t>
-            </a:r>
-            <a:endParaRPr lang="en-US" sz="1400" dirty="0"/>
+              <a:t>Auswertung</a:t>
+            </a:r>
+            <a:endParaRPr lang="en-US" sz="1050" dirty="0"/>
+          </a:p>
+        </p:txBody>
+      </p:sp>
+      <p:sp>
+        <p:nvSpPr>
+          <p:cNvPr id="10" name="Text 7"/>
+          <p:cNvSpPr/>
+          <p:nvPr/>
+        </p:nvSpPr>
+        <p:spPr>
+          <a:xfrm>
+            <a:off x="8028432" y="4722876"/>
+            <a:ext cx="548640" cy="237744"/>
+          </a:xfrm>
+          <a:prstGeom prst="rect">
+            <a:avLst/>
+          </a:prstGeom>
+          <a:noFill/>
+          <a:ln/>
+        </p:spPr>
+        <p:txBody>
+          <a:bodyPr wrap="square" lIns="0" tIns="0" rIns="0" bIns="0" rtlCol="0" anchor="ctr"/>
+          <a:lstStyle/>
+          <a:p>
+            <a:pPr algn="r" indent="0" marL="0">
+              <a:buNone/>
+            </a:pPr>
+            <a:r>
+              <a:rPr lang="en-US" sz="1050" dirty="0">
+                <a:solidFill>
+                  <a:srgbClr val="5C6377"/>
+                </a:solidFill>
+                <a:latin typeface="Arial" pitchFamily="34" charset="0"/>
+                <a:ea typeface="Arial" pitchFamily="34" charset="-122"/>
+                <a:cs typeface="Arial" pitchFamily="34" charset="-120"/>
+              </a:rPr>
+              <a:t>15/16</a:t>
+            </a:r>
+            <a:endParaRPr lang="en-US" sz="1050" dirty="0"/>
+          </a:p>
+        </p:txBody>
+      </p:sp>
+    </p:spTree>
+  </p:cSld>
+  <p:clrMapOvr>
+    <a:masterClrMapping/>
+  </p:clrMapOvr>
+</p:sld>
+</file>
+
+<file path=ppt/slides/slide19.xml><?xml version="1.0" encoding="utf-8"?>
+<p:sld xmlns:a="http://schemas.openxmlformats.org/drawingml/2006/main" xmlns:r="http://schemas.openxmlformats.org/officeDocument/2006/relationships" xmlns:p="http://schemas.openxmlformats.org/presentationml/2006/main">
+  <p:cSld name="Slide 19">
+    <p:bg>
+      <p:bgPr>
+        <a:solidFill>
+          <a:srgbClr val="FFFFFF"/>
+        </a:solidFill>
+      </p:bgPr>
+    </p:bg>
+    <p:spTree>
+      <p:nvGrpSpPr>
+        <p:cNvPr id="1" name=""/>
+        <p:cNvGrpSpPr/>
+        <p:nvPr/>
+      </p:nvGrpSpPr>
+      <p:grpSpPr>
+        <a:xfrm>
+          <a:off x="0" y="0"/>
+          <a:ext cx="0" cy="0"/>
+          <a:chOff x="0" y="0"/>
+          <a:chExt cx="0" cy="0"/>
+        </a:xfrm>
+      </p:grpSpPr>
+      <p:sp>
+        <p:nvSpPr>
+          <p:cNvPr id="2" name="Shape 0"/>
+          <p:cNvSpPr/>
+          <p:nvPr/>
+        </p:nvSpPr>
+        <p:spPr>
+          <a:xfrm>
+            <a:off x="566928" y="201168"/>
+            <a:ext cx="475488" cy="50292"/>
+          </a:xfrm>
+          <a:prstGeom prst="rect">
+            <a:avLst/>
+          </a:prstGeom>
+          <a:solidFill>
+            <a:srgbClr val="0F7C86"/>
+          </a:solidFill>
+          <a:ln/>
+        </p:spPr>
+      </p:sp>
+      <p:sp>
+        <p:nvSpPr>
+          <p:cNvPr id="3" name="Text 1"/>
+          <p:cNvSpPr/>
+          <p:nvPr/>
+        </p:nvSpPr>
+        <p:spPr>
+          <a:xfrm>
+            <a:off x="566928" y="384048"/>
+            <a:ext cx="8010144" cy="237744"/>
+          </a:xfrm>
+          <a:prstGeom prst="rect">
+            <a:avLst/>
+          </a:prstGeom>
+          <a:noFill/>
+          <a:ln/>
+        </p:spPr>
+        <p:txBody>
+          <a:bodyPr wrap="square" lIns="0" tIns="0" rIns="0" bIns="0" rtlCol="0" anchor="ctr"/>
+          <a:lstStyle/>
+          <a:p>
+            <a:pPr indent="0" marL="0">
+              <a:buNone/>
+            </a:pPr>
+            <a:r>
+              <a:rPr lang="en-US" sz="1150" b="1" spc="180" kern="0" dirty="0">
+                <a:solidFill>
+                  <a:srgbClr val="0F7C86"/>
+                </a:solidFill>
+                <a:latin typeface="Arial" pitchFamily="34" charset="0"/>
+                <a:ea typeface="Arial" pitchFamily="34" charset="-122"/>
+                <a:cs typeface="Arial" pitchFamily="34" charset="-120"/>
+              </a:rPr>
+              <a:t>AUSBLICK</a:t>
+            </a:r>
+            <a:endParaRPr lang="en-US" sz="1150" dirty="0"/>
+          </a:p>
+        </p:txBody>
+      </p:sp>
+      <p:sp>
+        <p:nvSpPr>
+          <p:cNvPr id="4" name="Text 2"/>
+          <p:cNvSpPr/>
+          <p:nvPr/>
+        </p:nvSpPr>
+        <p:spPr>
+          <a:xfrm>
+            <a:off x="566928" y="731520"/>
+            <a:ext cx="8010144" cy="603504"/>
+          </a:xfrm>
+          <a:prstGeom prst="rect">
+            <a:avLst/>
+          </a:prstGeom>
+          <a:noFill/>
+          <a:ln/>
+        </p:spPr>
+        <p:txBody>
+          <a:bodyPr wrap="square" lIns="0" tIns="0" rIns="0" bIns="0" rtlCol="0" anchor="t"/>
+          <a:lstStyle/>
+          <a:p>
+            <a:pPr indent="0" marL="0">
+              <a:buNone/>
+            </a:pPr>
+            <a:r>
+              <a:rPr lang="en-US" sz="2600" b="1" dirty="0">
+                <a:solidFill>
+                  <a:srgbClr val="272E52"/>
+                </a:solidFill>
+                <a:latin typeface="Arial" pitchFamily="34" charset="0"/>
+                <a:ea typeface="Arial" pitchFamily="34" charset="-122"/>
+                <a:cs typeface="Arial" pitchFamily="34" charset="-120"/>
+              </a:rPr>
+              <a:t>Bis Mittwoch</a:t>
+            </a:r>
+            <a:endParaRPr lang="en-US" sz="2600" dirty="0"/>
           </a:p>
         </p:txBody>
       </p:sp>
@@ -5885,8 +7424,8 @@
         </p:nvSpPr>
         <p:spPr>
           <a:xfrm>
-            <a:off x="566928" y="3401568"/>
-            <a:ext cx="8010144" cy="457200"/>
+            <a:off x="566928" y="1444752"/>
+            <a:ext cx="8010144" cy="438912"/>
           </a:xfrm>
           <a:prstGeom prst="rect">
             <a:avLst/>
@@ -5898,21 +7437,544 @@
           <a:bodyPr wrap="square" lIns="0" tIns="0" rIns="0" bIns="0" rtlCol="0" anchor="t"/>
           <a:lstStyle/>
           <a:p>
-            <a:pPr algn="ctr" indent="0" marL="0">
-              <a:buNone/>
-            </a:pPr>
-            <a:r>
-              <a:rPr lang="en-US" sz="1600" b="1" dirty="0">
-                <a:solidFill>
-                  <a:srgbClr val="0F7C86"/>
-                </a:solidFill>
-                <a:latin typeface="Arial" pitchFamily="34" charset="0"/>
-                <a:ea typeface="Arial" pitchFamily="34" charset="-122"/>
-                <a:cs typeface="Arial" pitchFamily="34" charset="-120"/>
-              </a:rPr>
-              <a:t>Mittwoch, 21. Oktober · Ressourcen und Lizenzen</a:t>
-            </a:r>
-            <a:endParaRPr lang="en-US" sz="1600" dirty="0"/>
+            <a:pPr indent="0" marL="0">
+              <a:buNone/>
+            </a:pPr>
+            <a:r>
+              <a:rPr lang="en-US" sz="1300" dirty="0">
+                <a:solidFill>
+                  <a:srgbClr val="5C6377"/>
+                </a:solidFill>
+                <a:latin typeface="Arial" pitchFamily="34" charset="0"/>
+                <a:ea typeface="Arial" pitchFamily="34" charset="-122"/>
+                <a:cs typeface="Arial" pitchFamily="34" charset="-120"/>
+              </a:rPr>
+              <a:t>Am Mittwoch geht es um das Geld und die Menschen hinter dem Konzept: Ressourcen und Lizenzen.</a:t>
+            </a:r>
+            <a:endParaRPr lang="en-US" sz="1300" dirty="0"/>
+          </a:p>
+        </p:txBody>
+      </p:sp>
+      <p:sp>
+        <p:nvSpPr>
+          <p:cNvPr id="6" name="Shape 4"/>
+          <p:cNvSpPr/>
+          <p:nvPr/>
+        </p:nvSpPr>
+        <p:spPr>
+          <a:xfrm>
+            <a:off x="566928" y="1975104"/>
+            <a:ext cx="2523744" cy="1645920"/>
+          </a:xfrm>
+          <a:prstGeom prst="rect">
+            <a:avLst/>
+          </a:prstGeom>
+          <a:solidFill>
+            <a:srgbClr val="F5F6FC"/>
+          </a:solidFill>
+          <a:ln/>
+        </p:spPr>
+      </p:sp>
+      <p:sp>
+        <p:nvSpPr>
+          <p:cNvPr id="7" name="Shape 5"/>
+          <p:cNvSpPr/>
+          <p:nvPr/>
+        </p:nvSpPr>
+        <p:spPr>
+          <a:xfrm>
+            <a:off x="566928" y="1975104"/>
+            <a:ext cx="41148" cy="1645920"/>
+          </a:xfrm>
+          <a:prstGeom prst="rect">
+            <a:avLst/>
+          </a:prstGeom>
+          <a:solidFill>
+            <a:srgbClr val="0F7C86"/>
+          </a:solidFill>
+          <a:ln/>
+        </p:spPr>
+      </p:sp>
+      <p:sp>
+        <p:nvSpPr>
+          <p:cNvPr id="8" name="Text 6"/>
+          <p:cNvSpPr/>
+          <p:nvPr/>
+        </p:nvSpPr>
+        <p:spPr>
+          <a:xfrm>
+            <a:off x="804672" y="2121408"/>
+            <a:ext cx="2121408" cy="457200"/>
+          </a:xfrm>
+          <a:prstGeom prst="rect">
+            <a:avLst/>
+          </a:prstGeom>
+          <a:noFill/>
+          <a:ln/>
+        </p:spPr>
+        <p:txBody>
+          <a:bodyPr wrap="square" lIns="0" tIns="0" rIns="0" bIns="0" rtlCol="0" anchor="t"/>
+          <a:lstStyle/>
+          <a:p>
+            <a:pPr indent="0" marL="0">
+              <a:buNone/>
+            </a:pPr>
+            <a:r>
+              <a:rPr lang="en-US" sz="1300" b="1" dirty="0">
+                <a:solidFill>
+                  <a:srgbClr val="272E52"/>
+                </a:solidFill>
+                <a:latin typeface="Arial" pitchFamily="34" charset="0"/>
+                <a:ea typeface="Arial" pitchFamily="34" charset="-122"/>
+                <a:cs typeface="Arial" pitchFamily="34" charset="-120"/>
+              </a:rPr>
+              <a:t>Zum Nachlesen</a:t>
+            </a:r>
+            <a:endParaRPr lang="en-US" sz="1300" dirty="0"/>
+          </a:p>
+        </p:txBody>
+      </p:sp>
+      <p:sp>
+        <p:nvSpPr>
+          <p:cNvPr id="9" name="Text 7"/>
+          <p:cNvSpPr/>
+          <p:nvPr/>
+        </p:nvSpPr>
+        <p:spPr>
+          <a:xfrm>
+            <a:off x="804672" y="2624328"/>
+            <a:ext cx="2121408" cy="877824"/>
+          </a:xfrm>
+          <a:prstGeom prst="rect">
+            <a:avLst/>
+          </a:prstGeom>
+          <a:noFill/>
+          <a:ln/>
+        </p:spPr>
+        <p:txBody>
+          <a:bodyPr wrap="square" lIns="0" tIns="0" rIns="0" bIns="0" rtlCol="0" anchor="t"/>
+          <a:lstStyle/>
+          <a:p>
+            <a:pPr indent="0" marL="0">
+              <a:lnSpc>
+                <a:spcPct val="92000"/>
+              </a:lnSpc>
+              <a:buNone/>
+            </a:pPr>
+            <a:r>
+              <a:rPr lang="en-US" sz="1100" dirty="0">
+                <a:solidFill>
+                  <a:srgbClr val="434A63"/>
+                </a:solidFill>
+                <a:latin typeface="Arial" pitchFamily="34" charset="0"/>
+                <a:ea typeface="Arial" pitchFamily="34" charset="-122"/>
+                <a:cs typeface="Arial" pitchFamily="34" charset="-120"/>
+              </a:rPr>
+              <a:t>Die Übung und die Theorie zu Speicherlösungen mit acht weiteren Aufgaben stehen auf der Kursseite.</a:t>
+            </a:r>
+            <a:endParaRPr lang="en-US" sz="1100" dirty="0"/>
+          </a:p>
+        </p:txBody>
+      </p:sp>
+      <p:sp>
+        <p:nvSpPr>
+          <p:cNvPr id="10" name="Shape 8"/>
+          <p:cNvSpPr/>
+          <p:nvPr/>
+        </p:nvSpPr>
+        <p:spPr>
+          <a:xfrm>
+            <a:off x="3310128" y="1975104"/>
+            <a:ext cx="2523744" cy="1645920"/>
+          </a:xfrm>
+          <a:prstGeom prst="rect">
+            <a:avLst/>
+          </a:prstGeom>
+          <a:solidFill>
+            <a:srgbClr val="F5F6FC"/>
+          </a:solidFill>
+          <a:ln/>
+        </p:spPr>
+      </p:sp>
+      <p:sp>
+        <p:nvSpPr>
+          <p:cNvPr id="11" name="Shape 9"/>
+          <p:cNvSpPr/>
+          <p:nvPr/>
+        </p:nvSpPr>
+        <p:spPr>
+          <a:xfrm>
+            <a:off x="3310128" y="1975104"/>
+            <a:ext cx="41148" cy="1645920"/>
+          </a:xfrm>
+          <a:prstGeom prst="rect">
+            <a:avLst/>
+          </a:prstGeom>
+          <a:solidFill>
+            <a:srgbClr val="0F7C86"/>
+          </a:solidFill>
+          <a:ln/>
+        </p:spPr>
+      </p:sp>
+      <p:sp>
+        <p:nvSpPr>
+          <p:cNvPr id="12" name="Text 10"/>
+          <p:cNvSpPr/>
+          <p:nvPr/>
+        </p:nvSpPr>
+        <p:spPr>
+          <a:xfrm>
+            <a:off x="3547872" y="2121408"/>
+            <a:ext cx="2121408" cy="457200"/>
+          </a:xfrm>
+          <a:prstGeom prst="rect">
+            <a:avLst/>
+          </a:prstGeom>
+          <a:noFill/>
+          <a:ln/>
+        </p:spPr>
+        <p:txBody>
+          <a:bodyPr wrap="square" lIns="0" tIns="0" rIns="0" bIns="0" rtlCol="0" anchor="t"/>
+          <a:lstStyle/>
+          <a:p>
+            <a:pPr indent="0" marL="0">
+              <a:buNone/>
+            </a:pPr>
+            <a:r>
+              <a:rPr lang="en-US" sz="1300" b="1" dirty="0">
+                <a:solidFill>
+                  <a:srgbClr val="272E52"/>
+                </a:solidFill>
+                <a:latin typeface="Arial" pitchFamily="34" charset="0"/>
+                <a:ea typeface="Arial" pitchFamily="34" charset="-122"/>
+                <a:cs typeface="Arial" pitchFamily="34" charset="-120"/>
+              </a:rPr>
+              <a:t>Das braucht ihr von heute</a:t>
+            </a:r>
+            <a:endParaRPr lang="en-US" sz="1300" dirty="0"/>
+          </a:p>
+        </p:txBody>
+      </p:sp>
+      <p:sp>
+        <p:nvSpPr>
+          <p:cNvPr id="13" name="Text 11"/>
+          <p:cNvSpPr/>
+          <p:nvPr/>
+        </p:nvSpPr>
+        <p:spPr>
+          <a:xfrm>
+            <a:off x="3547872" y="2624328"/>
+            <a:ext cx="2121408" cy="877824"/>
+          </a:xfrm>
+          <a:prstGeom prst="rect">
+            <a:avLst/>
+          </a:prstGeom>
+          <a:noFill/>
+          <a:ln/>
+        </p:spPr>
+        <p:txBody>
+          <a:bodyPr wrap="square" lIns="0" tIns="0" rIns="0" bIns="0" rtlCol="0" anchor="t"/>
+          <a:lstStyle/>
+          <a:p>
+            <a:pPr indent="0" marL="0">
+              <a:lnSpc>
+                <a:spcPct val="92000"/>
+              </a:lnSpc>
+              <a:buNone/>
+            </a:pPr>
+            <a:r>
+              <a:rPr lang="en-US" sz="1100" dirty="0">
+                <a:solidFill>
+                  <a:srgbClr val="434A63"/>
+                </a:solidFill>
+                <a:latin typeface="Arial" pitchFamily="34" charset="0"/>
+                <a:ea typeface="Arial" pitchFamily="34" charset="-122"/>
+                <a:cs typeface="Arial" pitchFamily="34" charset="-120"/>
+              </a:rPr>
+              <a:t>Rund 3,6 TB netto, vier Platten in RAID 6 oder 10 plus Hot Spare, eine eigene Sicherung mit Kopie außer Haus.</a:t>
+            </a:r>
+            <a:endParaRPr lang="en-US" sz="1100" dirty="0"/>
+          </a:p>
+        </p:txBody>
+      </p:sp>
+      <p:sp>
+        <p:nvSpPr>
+          <p:cNvPr id="14" name="Shape 12"/>
+          <p:cNvSpPr/>
+          <p:nvPr/>
+        </p:nvSpPr>
+        <p:spPr>
+          <a:xfrm>
+            <a:off x="6053328" y="1975104"/>
+            <a:ext cx="2523744" cy="1645920"/>
+          </a:xfrm>
+          <a:prstGeom prst="rect">
+            <a:avLst/>
+          </a:prstGeom>
+          <a:solidFill>
+            <a:srgbClr val="F5F6FC"/>
+          </a:solidFill>
+          <a:ln/>
+        </p:spPr>
+      </p:sp>
+      <p:sp>
+        <p:nvSpPr>
+          <p:cNvPr id="15" name="Shape 13"/>
+          <p:cNvSpPr/>
+          <p:nvPr/>
+        </p:nvSpPr>
+        <p:spPr>
+          <a:xfrm>
+            <a:off x="6053328" y="1975104"/>
+            <a:ext cx="41148" cy="1645920"/>
+          </a:xfrm>
+          <a:prstGeom prst="rect">
+            <a:avLst/>
+          </a:prstGeom>
+          <a:solidFill>
+            <a:srgbClr val="0F7C86"/>
+          </a:solidFill>
+          <a:ln/>
+        </p:spPr>
+      </p:sp>
+      <p:sp>
+        <p:nvSpPr>
+          <p:cNvPr id="16" name="Text 14"/>
+          <p:cNvSpPr/>
+          <p:nvPr/>
+        </p:nvSpPr>
+        <p:spPr>
+          <a:xfrm>
+            <a:off x="6291072" y="2121408"/>
+            <a:ext cx="2121408" cy="457200"/>
+          </a:xfrm>
+          <a:prstGeom prst="rect">
+            <a:avLst/>
+          </a:prstGeom>
+          <a:noFill/>
+          <a:ln/>
+        </p:spPr>
+        <p:txBody>
+          <a:bodyPr wrap="square" lIns="0" tIns="0" rIns="0" bIns="0" rtlCol="0" anchor="t"/>
+          <a:lstStyle/>
+          <a:p>
+            <a:pPr indent="0" marL="0">
+              <a:buNone/>
+            </a:pPr>
+            <a:r>
+              <a:rPr lang="en-US" sz="1300" b="1" dirty="0">
+                <a:solidFill>
+                  <a:srgbClr val="272E52"/>
+                </a:solidFill>
+                <a:latin typeface="Arial" pitchFamily="34" charset="0"/>
+                <a:ea typeface="Arial" pitchFamily="34" charset="-122"/>
+                <a:cs typeface="Arial" pitchFamily="34" charset="-120"/>
+              </a:rPr>
+              <a:t>Am Mittwoch</a:t>
+            </a:r>
+            <a:endParaRPr lang="en-US" sz="1300" dirty="0"/>
+          </a:p>
+        </p:txBody>
+      </p:sp>
+      <p:sp>
+        <p:nvSpPr>
+          <p:cNvPr id="17" name="Text 15"/>
+          <p:cNvSpPr/>
+          <p:nvPr/>
+        </p:nvSpPr>
+        <p:spPr>
+          <a:xfrm>
+            <a:off x="6291072" y="2624328"/>
+            <a:ext cx="2121408" cy="877824"/>
+          </a:xfrm>
+          <a:prstGeom prst="rect">
+            <a:avLst/>
+          </a:prstGeom>
+          <a:noFill/>
+          <a:ln/>
+        </p:spPr>
+        <p:txBody>
+          <a:bodyPr wrap="square" lIns="0" tIns="0" rIns="0" bIns="0" rtlCol="0" anchor="t"/>
+          <a:lstStyle/>
+          <a:p>
+            <a:pPr indent="0" marL="0">
+              <a:lnSpc>
+                <a:spcPct val="92000"/>
+              </a:lnSpc>
+              <a:buNone/>
+            </a:pPr>
+            <a:r>
+              <a:rPr lang="en-US" sz="1100" dirty="0">
+                <a:solidFill>
+                  <a:srgbClr val="434A63"/>
+                </a:solidFill>
+                <a:latin typeface="Arial" pitchFamily="34" charset="0"/>
+                <a:ea typeface="Arial" pitchFamily="34" charset="-122"/>
+                <a:cs typeface="Arial" pitchFamily="34" charset="-120"/>
+              </a:rPr>
+              <a:t>Was kostet das, wer baut es auf und welche Lizenzen braucht Voltrad dafür?</a:t>
+            </a:r>
+            <a:endParaRPr lang="en-US" sz="1100" dirty="0"/>
+          </a:p>
+        </p:txBody>
+      </p:sp>
+      <p:sp>
+        <p:nvSpPr>
+          <p:cNvPr id="18" name="Shape 16"/>
+          <p:cNvSpPr/>
+          <p:nvPr/>
+        </p:nvSpPr>
+        <p:spPr>
+          <a:xfrm>
+            <a:off x="566928" y="3886200"/>
+            <a:ext cx="32004" cy="256032"/>
+          </a:xfrm>
+          <a:prstGeom prst="rect">
+            <a:avLst/>
+          </a:prstGeom>
+          <a:solidFill>
+            <a:srgbClr val="0F7C86"/>
+          </a:solidFill>
+          <a:ln/>
+        </p:spPr>
+      </p:sp>
+      <p:sp>
+        <p:nvSpPr>
+          <p:cNvPr id="19" name="Text 17"/>
+          <p:cNvSpPr/>
+          <p:nvPr/>
+        </p:nvSpPr>
+        <p:spPr>
+          <a:xfrm>
+            <a:off x="749808" y="3840480"/>
+            <a:ext cx="7827264" cy="402336"/>
+          </a:xfrm>
+          <a:prstGeom prst="rect">
+            <a:avLst/>
+          </a:prstGeom>
+          <a:noFill/>
+          <a:ln/>
+        </p:spPr>
+        <p:txBody>
+          <a:bodyPr wrap="square" lIns="0" tIns="0" rIns="0" bIns="0" rtlCol="0" anchor="ctr"/>
+          <a:lstStyle/>
+          <a:p>
+            <a:pPr indent="0" marL="0">
+              <a:buNone/>
+            </a:pPr>
+            <a:r>
+              <a:rPr lang="en-US" sz="1200" b="1" dirty="0">
+                <a:solidFill>
+                  <a:srgbClr val="434A63"/>
+                </a:solidFill>
+                <a:latin typeface="Arial" pitchFamily="34" charset="0"/>
+                <a:ea typeface="Arial" pitchFamily="34" charset="-122"/>
+                <a:cs typeface="Arial" pitchFamily="34" charset="-120"/>
+              </a:rPr>
+              <a:t>Nächster Termin: Mittwoch, 21. Oktober um 18:00 Uhr.</a:t>
+            </a:r>
+            <a:endParaRPr lang="en-US" sz="1200" dirty="0"/>
+          </a:p>
+        </p:txBody>
+      </p:sp>
+      <p:sp>
+        <p:nvSpPr>
+          <p:cNvPr id="20" name="Shape 18"/>
+          <p:cNvSpPr/>
+          <p:nvPr/>
+        </p:nvSpPr>
+        <p:spPr>
+          <a:xfrm>
+            <a:off x="566928" y="4631436"/>
+            <a:ext cx="8010144" cy="0"/>
+          </a:xfrm>
+          <a:prstGeom prst="line">
+            <a:avLst/>
+          </a:prstGeom>
+          <a:noFill/>
+          <a:ln w="9525">
+            <a:solidFill>
+              <a:srgbClr val="DFE3F0"/>
+            </a:solidFill>
+            <a:prstDash val="solid"/>
+          </a:ln>
+        </p:spPr>
+      </p:sp>
+      <p:sp>
+        <p:nvSpPr>
+          <p:cNvPr id="21" name="Text 19"/>
+          <p:cNvSpPr/>
+          <p:nvPr/>
+        </p:nvSpPr>
+        <p:spPr>
+          <a:xfrm>
+            <a:off x="566928" y="4722876"/>
+            <a:ext cx="5029200" cy="237744"/>
+          </a:xfrm>
+          <a:prstGeom prst="rect">
+            <a:avLst/>
+          </a:prstGeom>
+          <a:noFill/>
+          <a:ln/>
+        </p:spPr>
+        <p:txBody>
+          <a:bodyPr wrap="square" lIns="0" tIns="0" rIns="0" bIns="0" rtlCol="0" anchor="ctr"/>
+          <a:lstStyle/>
+          <a:p>
+            <a:pPr indent="0" marL="0">
+              <a:buNone/>
+            </a:pPr>
+            <a:r>
+              <a:rPr lang="en-US" sz="1050" spc="30" kern="0" dirty="0">
+                <a:solidFill>
+                  <a:srgbClr val="5C6377"/>
+                </a:solidFill>
+                <a:latin typeface="Arial" pitchFamily="34" charset="0"/>
+                <a:ea typeface="Arial" pitchFamily="34" charset="-122"/>
+                <a:cs typeface="Arial" pitchFamily="34" charset="-120"/>
+              </a:rPr>
+              <a:t>Abschluss</a:t>
+            </a:r>
+            <a:endParaRPr lang="en-US" sz="1050" dirty="0"/>
+          </a:p>
+        </p:txBody>
+      </p:sp>
+      <p:sp>
+        <p:nvSpPr>
+          <p:cNvPr id="22" name="Text 20"/>
+          <p:cNvSpPr/>
+          <p:nvPr/>
+        </p:nvSpPr>
+        <p:spPr>
+          <a:xfrm>
+            <a:off x="8028432" y="4722876"/>
+            <a:ext cx="548640" cy="237744"/>
+          </a:xfrm>
+          <a:prstGeom prst="rect">
+            <a:avLst/>
+          </a:prstGeom>
+          <a:noFill/>
+          <a:ln/>
+        </p:spPr>
+        <p:txBody>
+          <a:bodyPr wrap="square" lIns="0" tIns="0" rIns="0" bIns="0" rtlCol="0" anchor="ctr"/>
+          <a:lstStyle/>
+          <a:p>
+            <a:pPr algn="r" indent="0" marL="0">
+              <a:buNone/>
+            </a:pPr>
+            <a:r>
+              <a:rPr lang="en-US" sz="1050" dirty="0">
+                <a:solidFill>
+                  <a:srgbClr val="5C6377"/>
+                </a:solidFill>
+                <a:latin typeface="Arial" pitchFamily="34" charset="0"/>
+                <a:ea typeface="Arial" pitchFamily="34" charset="-122"/>
+                <a:cs typeface="Arial" pitchFamily="34" charset="-120"/>
+              </a:rPr>
+              <a:t>16/16</a:t>
+            </a:r>
+            <a:endParaRPr lang="en-US" sz="1050" dirty="0"/>
           </a:p>
         </p:txBody>
       </p:sp>
@@ -6138,7 +8200,7 @@
                 <a:ea typeface="Arial" pitchFamily="34" charset="-122"/>
                 <a:cs typeface="Arial" pitchFamily="34" charset="-120"/>
               </a:rPr>
-              <a:t>Die offene Frage aus der Bestandsaufnahme: Wie viel Speicher braucht Voltrad?</a:t>
+              <a:t>Warmup: Die Dateiablage ist zu 92 % voll. Was tut ihr?</a:t>
             </a:r>
             <a:endParaRPr lang="en-US" sz="1050" dirty="0"/>
           </a:p>
@@ -6353,7 +8415,7 @@
                 <a:ea typeface="Courier New" pitchFamily="34" charset="-122"/>
                 <a:cs typeface="Courier New" pitchFamily="34" charset="-120"/>
               </a:rPr>
-              <a:t>18:45</a:t>
+              <a:t>18:40</a:t>
             </a:r>
             <a:endParaRPr lang="en-US" sz="1050" dirty="0"/>
           </a:p>
@@ -6392,7 +8454,7 @@
                 <a:ea typeface="Arial" pitchFamily="34" charset="-122"/>
                 <a:cs typeface="Arial" pitchFamily="34" charset="-120"/>
               </a:rPr>
-              <a:t>Wie angebunden? DAS, NAS und SAN</a:t>
+              <a:t>Wie angebunden? DAS, NAS und SAN, mit Zuordnungsrunde</a:t>
             </a:r>
             <a:endParaRPr lang="en-US" sz="1050" dirty="0"/>
           </a:p>
@@ -6666,7 +8728,7 @@
                 <a:ea typeface="Arial" pitchFamily="34" charset="-122"/>
                 <a:cs typeface="Arial" pitchFamily="34" charset="-120"/>
               </a:rPr>
-              <a:t>Auswertung und Lösung</a:t>
+              <a:t>Jede Gruppe stellt vor, dann die Lösung</a:t>
             </a:r>
             <a:endParaRPr lang="en-US" sz="1050" dirty="0"/>
           </a:p>
@@ -6705,7 +8767,7 @@
                 <a:ea typeface="Courier New" pitchFamily="34" charset="-122"/>
                 <a:cs typeface="Courier New" pitchFamily="34" charset="-120"/>
               </a:rPr>
-              <a:t>20:45</a:t>
+              <a:t>20:50</a:t>
             </a:r>
             <a:endParaRPr lang="en-US" sz="1050" dirty="0"/>
           </a:p>
@@ -6803,7 +8865,7 @@
                 <a:ea typeface="Arial" pitchFamily="34" charset="-122"/>
                 <a:cs typeface="Arial" pitchFamily="34" charset="-120"/>
               </a:rPr>
-              <a:t>Heute ein Theorieblock und eine Übung mit wenig Lesestoff, die Lösung am Ende.</a:t>
+              <a:t>Heute ein Theorieblock zum Mitmachen und eine Übung mit wenig Lesestoff.</a:t>
             </a:r>
             <a:endParaRPr lang="en-US" sz="1200" dirty="0"/>
           </a:p>
@@ -6904,9 +8966,178 @@
                 <a:ea typeface="Arial" pitchFamily="34" charset="-122"/>
                 <a:cs typeface="Arial" pitchFamily="34" charset="-120"/>
               </a:rPr>
-              <a:t>1/13</a:t>
+              <a:t>1/16</a:t>
             </a:r>
             <a:endParaRPr lang="en-US" sz="1050" dirty="0"/>
+          </a:p>
+        </p:txBody>
+      </p:sp>
+    </p:spTree>
+  </p:cSld>
+  <p:clrMapOvr>
+    <a:masterClrMapping/>
+  </p:clrMapOvr>
+</p:sld>
+</file>
+
+<file path=ppt/slides/slide20.xml><?xml version="1.0" encoding="utf-8"?>
+<p:sld xmlns:a="http://schemas.openxmlformats.org/drawingml/2006/main" xmlns:r="http://schemas.openxmlformats.org/officeDocument/2006/relationships" xmlns:p="http://schemas.openxmlformats.org/presentationml/2006/main">
+  <p:cSld name="Slide 20">
+    <p:bg>
+      <p:bgPr>
+        <a:solidFill>
+          <a:srgbClr val="F5F6FC"/>
+        </a:solidFill>
+      </p:bgPr>
+    </p:bg>
+    <p:spTree>
+      <p:nvGrpSpPr>
+        <p:cNvPr id="1" name=""/>
+        <p:cNvGrpSpPr/>
+        <p:nvPr/>
+      </p:nvGrpSpPr>
+      <p:grpSpPr>
+        <a:xfrm>
+          <a:off x="0" y="0"/>
+          <a:ext cx="0" cy="0"/>
+          <a:chOff x="0" y="0"/>
+          <a:chExt cx="0" cy="0"/>
+        </a:xfrm>
+      </p:grpSpPr>
+      <p:sp>
+        <p:nvSpPr>
+          <p:cNvPr id="2" name="Shape 0"/>
+          <p:cNvSpPr/>
+          <p:nvPr/>
+        </p:nvSpPr>
+        <p:spPr>
+          <a:xfrm>
+            <a:off x="0" y="5015484"/>
+            <a:ext cx="9144000" cy="128016"/>
+          </a:xfrm>
+          <a:prstGeom prst="rect">
+            <a:avLst/>
+          </a:prstGeom>
+          <a:solidFill>
+            <a:srgbClr val="0F7C86"/>
+          </a:solidFill>
+          <a:ln/>
+        </p:spPr>
+      </p:sp>
+      <p:sp>
+        <p:nvSpPr>
+          <p:cNvPr id="3" name="Text 1"/>
+          <p:cNvSpPr/>
+          <p:nvPr/>
+        </p:nvSpPr>
+        <p:spPr>
+          <a:xfrm>
+            <a:off x="566928" y="1828800"/>
+            <a:ext cx="8010144" cy="914400"/>
+          </a:xfrm>
+          <a:prstGeom prst="rect">
+            <a:avLst/>
+          </a:prstGeom>
+          <a:noFill/>
+          <a:ln/>
+        </p:spPr>
+        <p:txBody>
+          <a:bodyPr wrap="square" lIns="0" tIns="0" rIns="0" bIns="0" rtlCol="0" anchor="ctr"/>
+          <a:lstStyle/>
+          <a:p>
+            <a:pPr algn="ctr" indent="0" marL="0">
+              <a:buNone/>
+            </a:pPr>
+            <a:r>
+              <a:rPr lang="en-US" sz="3200" b="1" dirty="0">
+                <a:solidFill>
+                  <a:srgbClr val="272E52"/>
+                </a:solidFill>
+                <a:latin typeface="Arial" pitchFamily="34" charset="0"/>
+                <a:ea typeface="Arial" pitchFamily="34" charset="-122"/>
+                <a:cs typeface="Arial" pitchFamily="34" charset="-120"/>
+              </a:rPr>
+              <a:t>Netto planen, brutto kaufen.</a:t>
+            </a:r>
+            <a:endParaRPr lang="en-US" sz="3200" dirty="0"/>
+          </a:p>
+        </p:txBody>
+      </p:sp>
+      <p:sp>
+        <p:nvSpPr>
+          <p:cNvPr id="4" name="Text 2"/>
+          <p:cNvSpPr/>
+          <p:nvPr/>
+        </p:nvSpPr>
+        <p:spPr>
+          <a:xfrm>
+            <a:off x="566928" y="2788920"/>
+            <a:ext cx="8010144" cy="457200"/>
+          </a:xfrm>
+          <a:prstGeom prst="rect">
+            <a:avLst/>
+          </a:prstGeom>
+          <a:noFill/>
+          <a:ln/>
+        </p:spPr>
+        <p:txBody>
+          <a:bodyPr wrap="square" lIns="0" tIns="0" rIns="0" bIns="0" rtlCol="0" anchor="t"/>
+          <a:lstStyle/>
+          <a:p>
+            <a:pPr algn="ctr" indent="0" marL="0">
+              <a:buNone/>
+            </a:pPr>
+            <a:r>
+              <a:rPr lang="en-US" sz="1400" dirty="0">
+                <a:solidFill>
+                  <a:srgbClr val="5C6377"/>
+                </a:solidFill>
+                <a:latin typeface="Arial" pitchFamily="34" charset="0"/>
+                <a:ea typeface="Arial" pitchFamily="34" charset="-122"/>
+                <a:cs typeface="Arial" pitchFamily="34" charset="-120"/>
+              </a:rPr>
+              <a:t>Übung und Theorie bleiben zum Nachlesen auf der Kursseite.</a:t>
+            </a:r>
+            <a:endParaRPr lang="en-US" sz="1400" dirty="0"/>
+          </a:p>
+        </p:txBody>
+      </p:sp>
+      <p:sp>
+        <p:nvSpPr>
+          <p:cNvPr id="5" name="Text 3"/>
+          <p:cNvSpPr/>
+          <p:nvPr/>
+        </p:nvSpPr>
+        <p:spPr>
+          <a:xfrm>
+            <a:off x="566928" y="3401568"/>
+            <a:ext cx="8010144" cy="457200"/>
+          </a:xfrm>
+          <a:prstGeom prst="rect">
+            <a:avLst/>
+          </a:prstGeom>
+          <a:noFill/>
+          <a:ln/>
+        </p:spPr>
+        <p:txBody>
+          <a:bodyPr wrap="square" lIns="0" tIns="0" rIns="0" bIns="0" rtlCol="0" anchor="t"/>
+          <a:lstStyle/>
+          <a:p>
+            <a:pPr algn="ctr" indent="0" marL="0">
+              <a:buNone/>
+            </a:pPr>
+            <a:r>
+              <a:rPr lang="en-US" sz="1600" b="1" dirty="0">
+                <a:solidFill>
+                  <a:srgbClr val="0F7C86"/>
+                </a:solidFill>
+                <a:latin typeface="Arial" pitchFamily="34" charset="0"/>
+                <a:ea typeface="Arial" pitchFamily="34" charset="-122"/>
+                <a:cs typeface="Arial" pitchFamily="34" charset="-120"/>
+              </a:rPr>
+              <a:t>Mittwoch, 21. Oktober · Ressourcen und Lizenzen</a:t>
+            </a:r>
+            <a:endParaRPr lang="en-US" sz="1600" dirty="0"/>
           </a:p>
         </p:txBody>
       </p:sp>
@@ -6995,7 +9226,7 @@
                 <a:ea typeface="Arial" pitchFamily="34" charset="-122"/>
                 <a:cs typeface="Arial" pitchFamily="34" charset="-120"/>
               </a:rPr>
-              <a:t>EINSTIEG</a:t>
+              <a:t>STICHWORTE IN DEN CHAT, 60 SEKUNDEN</a:t>
             </a:r>
             <a:endParaRPr lang="en-US" sz="1150" dirty="0"/>
           </a:p>
@@ -7034,39 +9265,88 @@
                 <a:ea typeface="Arial" pitchFamily="34" charset="-122"/>
                 <a:cs typeface="Arial" pitchFamily="34" charset="-120"/>
               </a:rPr>
-              <a:t>Die offene Frage</a:t>
+              <a:t>Warmup</a:t>
             </a:r>
             <a:endParaRPr lang="en-US" sz="2600" dirty="0"/>
           </a:p>
         </p:txBody>
       </p:sp>
-      <p:pic>
-        <p:nvPicPr>
-          <p:cNvPr id="5" name="Image 0" descr="/Users/jacobmenge/Desktop/kurs-26.2b-orga/folienwerkstatt/assets/diagramme/speicher-frage.png">    </p:cNvPr>
-          <p:cNvPicPr>
-            <a:picLocks noChangeAspect="1"/>
-          </p:cNvPicPr>
-          <p:nvPr/>
-        </p:nvPicPr>
-        <p:blipFill>
-          <a:blip r:embed="rId1"/>
-          <a:stretch>
-            <a:fillRect/>
-          </a:stretch>
-        </p:blipFill>
-        <p:spPr>
-          <a:xfrm>
-            <a:off x="566928" y="1335024"/>
-            <a:ext cx="8010144" cy="2615184"/>
-          </a:xfrm>
-          <a:prstGeom prst="rect">
-            <a:avLst/>
-          </a:prstGeom>
-        </p:spPr>
-      </p:pic>
-      <p:sp>
-        <p:nvSpPr>
-          <p:cNvPr id="6" name="Shape 3"/>
+      <p:sp>
+        <p:nvSpPr>
+          <p:cNvPr id="5" name="Text 3"/>
+          <p:cNvSpPr/>
+          <p:nvPr/>
+        </p:nvSpPr>
+        <p:spPr>
+          <a:xfrm>
+            <a:off x="841248" y="1719072"/>
+            <a:ext cx="7461504" cy="1463040"/>
+          </a:xfrm>
+          <a:prstGeom prst="rect">
+            <a:avLst/>
+          </a:prstGeom>
+          <a:noFill/>
+          <a:ln/>
+        </p:spPr>
+        <p:txBody>
+          <a:bodyPr wrap="square" lIns="0" tIns="0" rIns="0" bIns="0" rtlCol="0" anchor="ctr"/>
+          <a:lstStyle/>
+          <a:p>
+            <a:pPr algn="ctr" indent="0" marL="0">
+              <a:buNone/>
+            </a:pPr>
+            <a:r>
+              <a:rPr lang="en-US" sz="2200" b="1" dirty="0">
+                <a:solidFill>
+                  <a:srgbClr val="0F7C86"/>
+                </a:solidFill>
+                <a:latin typeface="Arial" pitchFamily="34" charset="0"/>
+                <a:ea typeface="Arial" pitchFamily="34" charset="-122"/>
+                <a:cs typeface="Arial" pitchFamily="34" charset="-120"/>
+              </a:rPr>
+              <a:t>Die Dateiablage von Voltrad ist zu 92 % voll.</a:t>
+            </a:r>
+            <a:endParaRPr lang="en-US" sz="2200" dirty="0"/>
+          </a:p>
+          <a:p>
+            <a:pPr algn="ctr" indent="0" marL="0">
+              <a:buNone/>
+            </a:pPr>
+            <a:r>
+              <a:rPr lang="en-US" sz="2200" b="1" dirty="0">
+                <a:solidFill>
+                  <a:srgbClr val="0F7C86"/>
+                </a:solidFill>
+                <a:latin typeface="Arial" pitchFamily="34" charset="0"/>
+                <a:ea typeface="Arial" pitchFamily="34" charset="-122"/>
+                <a:cs typeface="Arial" pitchFamily="34" charset="-120"/>
+              </a:rPr>
+              <a:t>Jeden Monat kommen 25 GB dazu.</a:t>
+            </a:r>
+            <a:endParaRPr lang="en-US" sz="2200" dirty="0"/>
+          </a:p>
+          <a:p>
+            <a:pPr algn="ctr" indent="0" marL="0">
+              <a:buNone/>
+            </a:pPr>
+            <a:r>
+              <a:rPr lang="en-US" sz="2200" b="1" dirty="0">
+                <a:solidFill>
+                  <a:srgbClr val="0F7C86"/>
+                </a:solidFill>
+                <a:latin typeface="Arial" pitchFamily="34" charset="0"/>
+                <a:ea typeface="Arial" pitchFamily="34" charset="-122"/>
+                <a:cs typeface="Arial" pitchFamily="34" charset="-120"/>
+              </a:rPr>
+              <a:t>Was tut ihr als Erstes?</a:t>
+            </a:r>
+            <a:endParaRPr lang="en-US" sz="2200" dirty="0"/>
+          </a:p>
+        </p:txBody>
+      </p:sp>
+      <p:sp>
+        <p:nvSpPr>
+          <p:cNvPr id="6" name="Shape 4"/>
           <p:cNvSpPr/>
           <p:nvPr/>
         </p:nvSpPr>
@@ -7086,7 +9366,7 @@
       </p:sp>
       <p:sp>
         <p:nvSpPr>
-          <p:cNvPr id="7" name="Text 4"/>
+          <p:cNvPr id="7" name="Text 5"/>
           <p:cNvSpPr/>
           <p:nvPr/>
         </p:nvSpPr>
@@ -7111,13 +9391,13 @@
             <a:r>
               <a:rPr lang="en-US" sz="1200" b="1" dirty="0">
                 <a:solidFill>
-                  <a:srgbClr val="434A63"/>
-                </a:solidFill>
-                <a:latin typeface="Arial" pitchFamily="34" charset="0"/>
-                <a:ea typeface="Arial" pitchFamily="34" charset="-122"/>
-                <a:cs typeface="Arial" pitchFamily="34" charset="-120"/>
-              </a:rPr>
-              <a:t>Gerechnet wird nur, was im Werk bleibt. Die Bürodateien zählen nicht mehr mit.</a:t>
+                  <a:srgbClr val="5C6377"/>
+                </a:solidFill>
+                <a:latin typeface="Arial" pitchFamily="34" charset="0"/>
+                <a:ea typeface="Arial" pitchFamily="34" charset="-122"/>
+                <a:cs typeface="Arial" pitchFamily="34" charset="-120"/>
+              </a:rPr>
+              <a:t>Kleiner Tipp: Größere Platten kaufen ist eine Antwort. Ist es die beste?</a:t>
             </a:r>
             <a:endParaRPr lang="en-US" sz="1200" dirty="0"/>
           </a:p>
@@ -7125,7 +9405,7 @@
       </p:sp>
       <p:sp>
         <p:nvSpPr>
-          <p:cNvPr id="8" name="Shape 5"/>
+          <p:cNvPr id="8" name="Shape 6"/>
           <p:cNvSpPr/>
           <p:nvPr/>
         </p:nvSpPr>
@@ -7148,7 +9428,7 @@
       </p:sp>
       <p:sp>
         <p:nvSpPr>
-          <p:cNvPr id="9" name="Text 6"/>
+          <p:cNvPr id="9" name="Text 7"/>
           <p:cNvSpPr/>
           <p:nvPr/>
         </p:nvSpPr>
@@ -7187,7 +9467,7 @@
       </p:sp>
       <p:sp>
         <p:nvSpPr>
-          <p:cNvPr id="10" name="Text 7"/>
+          <p:cNvPr id="10" name="Text 8"/>
           <p:cNvSpPr/>
           <p:nvPr/>
         </p:nvSpPr>
@@ -7218,7 +9498,7 @@
                 <a:ea typeface="Arial" pitchFamily="34" charset="-122"/>
                 <a:cs typeface="Arial" pitchFamily="34" charset="-120"/>
               </a:rPr>
-              <a:t>2/13</a:t>
+              <a:t>2/16</a:t>
             </a:r>
             <a:endParaRPr lang="en-US" sz="1050" dirty="0"/>
           </a:p>
@@ -7264,28 +9544,8 @@
         </p:nvSpPr>
         <p:spPr>
           <a:xfrm>
-            <a:off x="6355080" y="0"/>
-            <a:ext cx="2788920" cy="5143500"/>
-          </a:xfrm>
-          <a:prstGeom prst="rect">
-            <a:avLst/>
-          </a:prstGeom>
-          <a:solidFill>
-            <a:srgbClr val="E6F4F5"/>
-          </a:solidFill>
-          <a:ln/>
-        </p:spPr>
-      </p:sp>
-      <p:sp>
-        <p:nvSpPr>
-          <p:cNvPr id="3" name="Shape 1"/>
-          <p:cNvSpPr/>
-          <p:nvPr/>
-        </p:nvSpPr>
-        <p:spPr>
-          <a:xfrm>
-            <a:off x="6355080" y="0"/>
-            <a:ext cx="45720" cy="5143500"/>
+            <a:off x="566928" y="201168"/>
+            <a:ext cx="475488" cy="50292"/>
           </a:xfrm>
           <a:prstGeom prst="rect">
             <a:avLst/>
@@ -7298,53 +9558,116 @@
       </p:sp>
       <p:sp>
         <p:nvSpPr>
+          <p:cNvPr id="3" name="Text 1"/>
+          <p:cNvSpPr/>
+          <p:nvPr/>
+        </p:nvSpPr>
+        <p:spPr>
+          <a:xfrm>
+            <a:off x="566928" y="384048"/>
+            <a:ext cx="8010144" cy="237744"/>
+          </a:xfrm>
+          <a:prstGeom prst="rect">
+            <a:avLst/>
+          </a:prstGeom>
+          <a:noFill/>
+          <a:ln/>
+        </p:spPr>
+        <p:txBody>
+          <a:bodyPr wrap="square" lIns="0" tIns="0" rIns="0" bIns="0" rtlCol="0" anchor="ctr"/>
+          <a:lstStyle/>
+          <a:p>
+            <a:pPr indent="0" marL="0">
+              <a:buNone/>
+            </a:pPr>
+            <a:r>
+              <a:rPr lang="en-US" sz="1150" b="1" spc="180" kern="0" dirty="0">
+                <a:solidFill>
+                  <a:srgbClr val="0F7C86"/>
+                </a:solidFill>
+                <a:latin typeface="Arial" pitchFamily="34" charset="0"/>
+                <a:ea typeface="Arial" pitchFamily="34" charset="-122"/>
+                <a:cs typeface="Arial" pitchFamily="34" charset="-120"/>
+              </a:rPr>
+              <a:t>WARMUP · AUFLÖSUNG</a:t>
+            </a:r>
+            <a:endParaRPr lang="en-US" sz="1150" dirty="0"/>
+          </a:p>
+        </p:txBody>
+      </p:sp>
+      <p:sp>
+        <p:nvSpPr>
           <p:cNvPr id="4" name="Text 2"/>
           <p:cNvSpPr/>
           <p:nvPr/>
         </p:nvSpPr>
         <p:spPr>
           <a:xfrm>
-            <a:off x="6629400" y="1463040"/>
-            <a:ext cx="2194560" cy="1737360"/>
-          </a:xfrm>
-          <a:prstGeom prst="rect">
-            <a:avLst/>
-          </a:prstGeom>
-          <a:noFill/>
-          <a:ln/>
-        </p:spPr>
-        <p:txBody>
-          <a:bodyPr wrap="square" lIns="0" tIns="0" rIns="0" bIns="0" rtlCol="0" anchor="ctr"/>
-          <a:lstStyle/>
-          <a:p>
-            <a:pPr algn="ctr" indent="0" marL="0">
-              <a:buNone/>
-            </a:pPr>
-            <a:r>
-              <a:rPr lang="en-US" sz="8400" b="1" dirty="0">
-                <a:solidFill>
-                  <a:srgbClr val="0F7C86"/>
-                </a:solidFill>
-                <a:latin typeface="Arial" pitchFamily="34" charset="0"/>
-                <a:ea typeface="Arial" pitchFamily="34" charset="-122"/>
-                <a:cs typeface="Arial" pitchFamily="34" charset="-120"/>
-              </a:rPr>
-              <a:t>01</a:t>
-            </a:r>
-            <a:endParaRPr lang="en-US" sz="8400" dirty="0"/>
-          </a:p>
-        </p:txBody>
-      </p:sp>
-      <p:sp>
-        <p:nvSpPr>
-          <p:cNvPr id="5" name="Shape 3"/>
-          <p:cNvSpPr/>
-          <p:nvPr/>
-        </p:nvSpPr>
-        <p:spPr>
-          <a:xfrm>
-            <a:off x="566928" y="1883664"/>
-            <a:ext cx="475488" cy="50292"/>
+            <a:off x="566928" y="731520"/>
+            <a:ext cx="8010144" cy="603504"/>
+          </a:xfrm>
+          <a:prstGeom prst="rect">
+            <a:avLst/>
+          </a:prstGeom>
+          <a:noFill/>
+          <a:ln/>
+        </p:spPr>
+        <p:txBody>
+          <a:bodyPr wrap="square" lIns="0" tIns="0" rIns="0" bIns="0" rtlCol="0" anchor="t"/>
+          <a:lstStyle/>
+          <a:p>
+            <a:pPr indent="0" marL="0">
+              <a:buNone/>
+            </a:pPr>
+            <a:r>
+              <a:rPr lang="en-US" sz="2600" b="1" dirty="0">
+                <a:solidFill>
+                  <a:srgbClr val="272E52"/>
+                </a:solidFill>
+                <a:latin typeface="Arial" pitchFamily="34" charset="0"/>
+                <a:ea typeface="Arial" pitchFamily="34" charset="-122"/>
+                <a:cs typeface="Arial" pitchFamily="34" charset="-120"/>
+              </a:rPr>
+              <a:t>Die offene Frage</a:t>
+            </a:r>
+            <a:endParaRPr lang="en-US" sz="2600" dirty="0"/>
+          </a:p>
+        </p:txBody>
+      </p:sp>
+      <p:pic>
+        <p:nvPicPr>
+          <p:cNvPr id="5" name="Image 0" descr="/Users/jacobmenge/Desktop/kurs-26.2b-orga/folienwerkstatt/assets/diagramme/speicher-frage.png">    </p:cNvPr>
+          <p:cNvPicPr>
+            <a:picLocks noChangeAspect="1"/>
+          </p:cNvPicPr>
+          <p:nvPr/>
+        </p:nvPicPr>
+        <p:blipFill>
+          <a:blip r:embed="rId1"/>
+          <a:stretch>
+            <a:fillRect/>
+          </a:stretch>
+        </p:blipFill>
+        <p:spPr>
+          <a:xfrm>
+            <a:off x="566928" y="1335024"/>
+            <a:ext cx="8010144" cy="2615184"/>
+          </a:xfrm>
+          <a:prstGeom prst="rect">
+            <a:avLst/>
+          </a:prstGeom>
+        </p:spPr>
+      </p:pic>
+      <p:sp>
+        <p:nvSpPr>
+          <p:cNvPr id="6" name="Shape 3"/>
+          <p:cNvSpPr/>
+          <p:nvPr/>
+        </p:nvSpPr>
+        <p:spPr>
+          <a:xfrm>
+            <a:off x="566928" y="4160520"/>
+            <a:ext cx="32004" cy="256032"/>
           </a:xfrm>
           <a:prstGeom prst="rect">
             <a:avLst/>
@@ -7357,69 +9680,92 @@
       </p:sp>
       <p:sp>
         <p:nvSpPr>
-          <p:cNvPr id="6" name="Text 4"/>
-          <p:cNvSpPr/>
-          <p:nvPr/>
-        </p:nvSpPr>
-        <p:spPr>
-          <a:xfrm>
-            <a:off x="566928" y="2084832"/>
-            <a:ext cx="5394960" cy="868680"/>
-          </a:xfrm>
-          <a:prstGeom prst="rect">
-            <a:avLst/>
-          </a:prstGeom>
-          <a:noFill/>
-          <a:ln/>
-        </p:spPr>
-        <p:txBody>
-          <a:bodyPr wrap="square" lIns="0" tIns="0" rIns="0" bIns="0" rtlCol="0" anchor="t"/>
-          <a:lstStyle/>
-          <a:p>
-            <a:pPr indent="0" marL="0">
-              <a:buNone/>
-            </a:pPr>
-            <a:r>
-              <a:rPr lang="en-US" sz="3000" b="1" dirty="0">
-                <a:solidFill>
-                  <a:srgbClr val="272E52"/>
-                </a:solidFill>
-                <a:latin typeface="Arial" pitchFamily="34" charset="0"/>
-                <a:ea typeface="Arial" pitchFamily="34" charset="-122"/>
-                <a:cs typeface="Arial" pitchFamily="34" charset="-120"/>
-              </a:rPr>
-              <a:t>Speicher planen</a:t>
-            </a:r>
-            <a:endParaRPr lang="en-US" sz="3000" dirty="0"/>
-          </a:p>
-        </p:txBody>
-      </p:sp>
-      <p:sp>
-        <p:nvSpPr>
-          <p:cNvPr id="7" name="Text 5"/>
-          <p:cNvSpPr/>
-          <p:nvPr/>
-        </p:nvSpPr>
-        <p:spPr>
-          <a:xfrm>
-            <a:off x="566928" y="3017520"/>
-            <a:ext cx="5394960" cy="548640"/>
-          </a:xfrm>
-          <a:prstGeom prst="rect">
-            <a:avLst/>
-          </a:prstGeom>
-          <a:noFill/>
-          <a:ln/>
-        </p:spPr>
-        <p:txBody>
-          <a:bodyPr wrap="square" lIns="0" tIns="0" rIns="0" bIns="0" rtlCol="0" anchor="t"/>
-          <a:lstStyle/>
-          <a:p>
-            <a:pPr indent="0" marL="0">
-              <a:buNone/>
-            </a:pPr>
-            <a:r>
-              <a:rPr lang="en-US" sz="1350" dirty="0">
+          <p:cNvPr id="7" name="Text 4"/>
+          <p:cNvSpPr/>
+          <p:nvPr/>
+        </p:nvSpPr>
+        <p:spPr>
+          <a:xfrm>
+            <a:off x="749808" y="4114800"/>
+            <a:ext cx="7827264" cy="402336"/>
+          </a:xfrm>
+          <a:prstGeom prst="rect">
+            <a:avLst/>
+          </a:prstGeom>
+          <a:noFill/>
+          <a:ln/>
+        </p:spPr>
+        <p:txBody>
+          <a:bodyPr wrap="square" lIns="0" tIns="0" rIns="0" bIns="0" rtlCol="0" anchor="ctr"/>
+          <a:lstStyle/>
+          <a:p>
+            <a:pPr indent="0" marL="0">
+              <a:buNone/>
+            </a:pPr>
+            <a:r>
+              <a:rPr lang="en-US" sz="1200" b="1" dirty="0">
+                <a:solidFill>
+                  <a:srgbClr val="434A63"/>
+                </a:solidFill>
+                <a:latin typeface="Arial" pitchFamily="34" charset="0"/>
+                <a:ea typeface="Arial" pitchFamily="34" charset="-122"/>
+                <a:cs typeface="Arial" pitchFamily="34" charset="-120"/>
+              </a:rPr>
+              <a:t>Gerechnet wird nur, was im Werk bleibt. Die Bürodateien zählen nicht mehr mit.</a:t>
+            </a:r>
+            <a:endParaRPr lang="en-US" sz="1200" dirty="0"/>
+          </a:p>
+        </p:txBody>
+      </p:sp>
+      <p:sp>
+        <p:nvSpPr>
+          <p:cNvPr id="8" name="Shape 5"/>
+          <p:cNvSpPr/>
+          <p:nvPr/>
+        </p:nvSpPr>
+        <p:spPr>
+          <a:xfrm>
+            <a:off x="566928" y="4631436"/>
+            <a:ext cx="8010144" cy="0"/>
+          </a:xfrm>
+          <a:prstGeom prst="line">
+            <a:avLst/>
+          </a:prstGeom>
+          <a:noFill/>
+          <a:ln w="9525">
+            <a:solidFill>
+              <a:srgbClr val="DFE3F0"/>
+            </a:solidFill>
+            <a:prstDash val="solid"/>
+          </a:ln>
+        </p:spPr>
+      </p:sp>
+      <p:sp>
+        <p:nvSpPr>
+          <p:cNvPr id="9" name="Text 6"/>
+          <p:cNvSpPr/>
+          <p:nvPr/>
+        </p:nvSpPr>
+        <p:spPr>
+          <a:xfrm>
+            <a:off x="566928" y="4722876"/>
+            <a:ext cx="5029200" cy="237744"/>
+          </a:xfrm>
+          <a:prstGeom prst="rect">
+            <a:avLst/>
+          </a:prstGeom>
+          <a:noFill/>
+          <a:ln/>
+        </p:spPr>
+        <p:txBody>
+          <a:bodyPr wrap="square" lIns="0" tIns="0" rIns="0" bIns="0" rtlCol="0" anchor="ctr"/>
+          <a:lstStyle/>
+          <a:p>
+            <a:pPr indent="0" marL="0">
+              <a:buNone/>
+            </a:pPr>
+            <a:r>
+              <a:rPr lang="en-US" sz="1050" spc="30" kern="0" dirty="0">
                 <a:solidFill>
                   <a:srgbClr val="5C6377"/>
                 </a:solidFill>
@@ -7427,9 +9773,48 @@
                 <a:ea typeface="Arial" pitchFamily="34" charset="-122"/>
                 <a:cs typeface="Arial" pitchFamily="34" charset="-120"/>
               </a:rPr>
-              <a:t>Wie viel, wie sicher, wie angebunden?</a:t>
-            </a:r>
-            <a:endParaRPr lang="en-US" sz="1350" dirty="0"/>
+              <a:t>Einstieg</a:t>
+            </a:r>
+            <a:endParaRPr lang="en-US" sz="1050" dirty="0"/>
+          </a:p>
+        </p:txBody>
+      </p:sp>
+      <p:sp>
+        <p:nvSpPr>
+          <p:cNvPr id="10" name="Text 7"/>
+          <p:cNvSpPr/>
+          <p:nvPr/>
+        </p:nvSpPr>
+        <p:spPr>
+          <a:xfrm>
+            <a:off x="8028432" y="4722876"/>
+            <a:ext cx="548640" cy="237744"/>
+          </a:xfrm>
+          <a:prstGeom prst="rect">
+            <a:avLst/>
+          </a:prstGeom>
+          <a:noFill/>
+          <a:ln/>
+        </p:spPr>
+        <p:txBody>
+          <a:bodyPr wrap="square" lIns="0" tIns="0" rIns="0" bIns="0" rtlCol="0" anchor="ctr"/>
+          <a:lstStyle/>
+          <a:p>
+            <a:pPr algn="r" indent="0" marL="0">
+              <a:buNone/>
+            </a:pPr>
+            <a:r>
+              <a:rPr lang="en-US" sz="1050" dirty="0">
+                <a:solidFill>
+                  <a:srgbClr val="5C6377"/>
+                </a:solidFill>
+                <a:latin typeface="Arial" pitchFamily="34" charset="0"/>
+                <a:ea typeface="Arial" pitchFamily="34" charset="-122"/>
+                <a:cs typeface="Arial" pitchFamily="34" charset="-120"/>
+              </a:rPr>
+              <a:t>3/16</a:t>
+            </a:r>
+            <a:endParaRPr lang="en-US" sz="1050" dirty="0"/>
           </a:p>
         </p:txBody>
       </p:sp>
@@ -7473,8 +9858,28 @@
         </p:nvSpPr>
         <p:spPr>
           <a:xfrm>
-            <a:off x="566928" y="201168"/>
-            <a:ext cx="475488" cy="50292"/>
+            <a:off x="6355080" y="0"/>
+            <a:ext cx="2788920" cy="5143500"/>
+          </a:xfrm>
+          <a:prstGeom prst="rect">
+            <a:avLst/>
+          </a:prstGeom>
+          <a:solidFill>
+            <a:srgbClr val="E6F4F5"/>
+          </a:solidFill>
+          <a:ln/>
+        </p:spPr>
+      </p:sp>
+      <p:sp>
+        <p:nvSpPr>
+          <p:cNvPr id="3" name="Shape 1"/>
+          <p:cNvSpPr/>
+          <p:nvPr/>
+        </p:nvSpPr>
+        <p:spPr>
+          <a:xfrm>
+            <a:off x="6355080" y="0"/>
+            <a:ext cx="45720" cy="5143500"/>
           </a:xfrm>
           <a:prstGeom prst="rect">
             <a:avLst/>
@@ -7487,14 +9892,14 @@
       </p:sp>
       <p:sp>
         <p:nvSpPr>
-          <p:cNvPr id="3" name="Text 1"/>
-          <p:cNvSpPr/>
-          <p:nvPr/>
-        </p:nvSpPr>
-        <p:spPr>
-          <a:xfrm>
-            <a:off x="566928" y="384048"/>
-            <a:ext cx="8010144" cy="237744"/>
+          <p:cNvPr id="4" name="Text 2"/>
+          <p:cNvSpPr/>
+          <p:nvPr/>
+        </p:nvSpPr>
+        <p:spPr>
+          <a:xfrm>
+            <a:off x="6629400" y="1463040"/>
+            <a:ext cx="2194560" cy="1737360"/>
           </a:xfrm>
           <a:prstGeom prst="rect">
             <a:avLst/>
@@ -7506,11 +9911,11 @@
           <a:bodyPr wrap="square" lIns="0" tIns="0" rIns="0" bIns="0" rtlCol="0" anchor="ctr"/>
           <a:lstStyle/>
           <a:p>
-            <a:pPr indent="0" marL="0">
-              <a:buNone/>
-            </a:pPr>
-            <a:r>
-              <a:rPr lang="en-US" sz="1150" b="1" spc="180" kern="0" dirty="0">
+            <a:pPr algn="ctr" indent="0" marL="0">
+              <a:buNone/>
+            </a:pPr>
+            <a:r>
+              <a:rPr lang="en-US" sz="8400" b="1" dirty="0">
                 <a:solidFill>
                   <a:srgbClr val="0F7C86"/>
                 </a:solidFill>
@@ -7518,85 +9923,22 @@
                 <a:ea typeface="Arial" pitchFamily="34" charset="-122"/>
                 <a:cs typeface="Arial" pitchFamily="34" charset="-120"/>
               </a:rPr>
-              <a:t>KAPAZITÄT PLANEN</a:t>
-            </a:r>
-            <a:endParaRPr lang="en-US" sz="1150" dirty="0"/>
-          </a:p>
-        </p:txBody>
-      </p:sp>
-      <p:sp>
-        <p:nvSpPr>
-          <p:cNvPr id="4" name="Text 2"/>
-          <p:cNvSpPr/>
-          <p:nvPr/>
-        </p:nvSpPr>
-        <p:spPr>
-          <a:xfrm>
-            <a:off x="566928" y="731520"/>
-            <a:ext cx="8010144" cy="603504"/>
-          </a:xfrm>
-          <a:prstGeom prst="rect">
-            <a:avLst/>
-          </a:prstGeom>
-          <a:noFill/>
-          <a:ln/>
-        </p:spPr>
-        <p:txBody>
-          <a:bodyPr wrap="square" lIns="0" tIns="0" rIns="0" bIns="0" rtlCol="0" anchor="t"/>
-          <a:lstStyle/>
-          <a:p>
-            <a:pPr indent="0" marL="0">
-              <a:buNone/>
-            </a:pPr>
-            <a:r>
-              <a:rPr lang="en-US" sz="2600" b="1" dirty="0">
-                <a:solidFill>
-                  <a:srgbClr val="272E52"/>
-                </a:solidFill>
-                <a:latin typeface="Arial" pitchFamily="34" charset="0"/>
-                <a:ea typeface="Arial" pitchFamily="34" charset="-122"/>
-                <a:cs typeface="Arial" pitchFamily="34" charset="-120"/>
-              </a:rPr>
-              <a:t>Wie viel Speicher?</a:t>
-            </a:r>
-            <a:endParaRPr lang="en-US" sz="2600" dirty="0"/>
-          </a:p>
-        </p:txBody>
-      </p:sp>
-      <p:pic>
-        <p:nvPicPr>
-          <p:cNvPr id="5" name="Image 0" descr="/Users/jacobmenge/Desktop/kurs-26.2b-orga/folienwerkstatt/assets/diagramme/speicher-kapazitaet.png">    </p:cNvPr>
-          <p:cNvPicPr>
-            <a:picLocks noChangeAspect="1"/>
-          </p:cNvPicPr>
-          <p:nvPr/>
-        </p:nvPicPr>
-        <p:blipFill>
-          <a:blip r:embed="rId1"/>
-          <a:stretch>
-            <a:fillRect/>
-          </a:stretch>
-        </p:blipFill>
-        <p:spPr>
-          <a:xfrm>
-            <a:off x="566928" y="1335024"/>
-            <a:ext cx="8010144" cy="2670048"/>
-          </a:xfrm>
-          <a:prstGeom prst="rect">
-            <a:avLst/>
-          </a:prstGeom>
-        </p:spPr>
-      </p:pic>
-      <p:sp>
-        <p:nvSpPr>
-          <p:cNvPr id="6" name="Shape 3"/>
-          <p:cNvSpPr/>
-          <p:nvPr/>
-        </p:nvSpPr>
-        <p:spPr>
-          <a:xfrm>
-            <a:off x="566928" y="4215384"/>
-            <a:ext cx="32004" cy="256032"/>
+              <a:t>01</a:t>
+            </a:r>
+            <a:endParaRPr lang="en-US" sz="8400" dirty="0"/>
+          </a:p>
+        </p:txBody>
+      </p:sp>
+      <p:sp>
+        <p:nvSpPr>
+          <p:cNvPr id="5" name="Shape 3"/>
+          <p:cNvSpPr/>
+          <p:nvPr/>
+        </p:nvSpPr>
+        <p:spPr>
+          <a:xfrm>
+            <a:off x="566928" y="1883664"/>
+            <a:ext cx="475488" cy="50292"/>
           </a:xfrm>
           <a:prstGeom prst="rect">
             <a:avLst/>
@@ -7609,92 +9951,69 @@
       </p:sp>
       <p:sp>
         <p:nvSpPr>
-          <p:cNvPr id="7" name="Text 4"/>
-          <p:cNvSpPr/>
-          <p:nvPr/>
-        </p:nvSpPr>
-        <p:spPr>
-          <a:xfrm>
-            <a:off x="749808" y="4169664"/>
-            <a:ext cx="7827264" cy="402336"/>
-          </a:xfrm>
-          <a:prstGeom prst="rect">
-            <a:avLst/>
-          </a:prstGeom>
-          <a:noFill/>
-          <a:ln/>
-        </p:spPr>
-        <p:txBody>
-          <a:bodyPr wrap="square" lIns="0" tIns="0" rIns="0" bIns="0" rtlCol="0" anchor="ctr"/>
-          <a:lstStyle/>
-          <a:p>
-            <a:pPr indent="0" marL="0">
-              <a:buNone/>
-            </a:pPr>
-            <a:r>
-              <a:rPr lang="en-US" sz="1200" b="1" dirty="0">
-                <a:solidFill>
-                  <a:srgbClr val="434A63"/>
-                </a:solidFill>
-                <a:latin typeface="Arial" pitchFamily="34" charset="0"/>
-                <a:ea typeface="Arial" pitchFamily="34" charset="-122"/>
-                <a:cs typeface="Arial" pitchFamily="34" charset="-120"/>
-              </a:rPr>
-              <a:t>In Station 1 rechnet ihr genauso, mit den Zahlen von Voltrad.</a:t>
-            </a:r>
-            <a:endParaRPr lang="en-US" sz="1200" dirty="0"/>
-          </a:p>
-        </p:txBody>
-      </p:sp>
-      <p:sp>
-        <p:nvSpPr>
-          <p:cNvPr id="8" name="Shape 5"/>
-          <p:cNvSpPr/>
-          <p:nvPr/>
-        </p:nvSpPr>
-        <p:spPr>
-          <a:xfrm>
-            <a:off x="566928" y="4631436"/>
-            <a:ext cx="8010144" cy="0"/>
-          </a:xfrm>
-          <a:prstGeom prst="line">
-            <a:avLst/>
-          </a:prstGeom>
-          <a:noFill/>
-          <a:ln w="9525">
-            <a:solidFill>
-              <a:srgbClr val="DFE3F0"/>
-            </a:solidFill>
-            <a:prstDash val="solid"/>
-          </a:ln>
-        </p:spPr>
-      </p:sp>
-      <p:sp>
-        <p:nvSpPr>
-          <p:cNvPr id="9" name="Text 6"/>
-          <p:cNvSpPr/>
-          <p:nvPr/>
-        </p:nvSpPr>
-        <p:spPr>
-          <a:xfrm>
-            <a:off x="566928" y="4722876"/>
-            <a:ext cx="5029200" cy="237744"/>
-          </a:xfrm>
-          <a:prstGeom prst="rect">
-            <a:avLst/>
-          </a:prstGeom>
-          <a:noFill/>
-          <a:ln/>
-        </p:spPr>
-        <p:txBody>
-          <a:bodyPr wrap="square" lIns="0" tIns="0" rIns="0" bIns="0" rtlCol="0" anchor="ctr"/>
-          <a:lstStyle/>
-          <a:p>
-            <a:pPr indent="0" marL="0">
-              <a:buNone/>
-            </a:pPr>
-            <a:r>
-              <a:rPr lang="en-US" sz="1050" spc="30" kern="0" dirty="0">
+          <p:cNvPr id="6" name="Text 4"/>
+          <p:cNvSpPr/>
+          <p:nvPr/>
+        </p:nvSpPr>
+        <p:spPr>
+          <a:xfrm>
+            <a:off x="566928" y="2084832"/>
+            <a:ext cx="5394960" cy="868680"/>
+          </a:xfrm>
+          <a:prstGeom prst="rect">
+            <a:avLst/>
+          </a:prstGeom>
+          <a:noFill/>
+          <a:ln/>
+        </p:spPr>
+        <p:txBody>
+          <a:bodyPr wrap="square" lIns="0" tIns="0" rIns="0" bIns="0" rtlCol="0" anchor="t"/>
+          <a:lstStyle/>
+          <a:p>
+            <a:pPr indent="0" marL="0">
+              <a:buNone/>
+            </a:pPr>
+            <a:r>
+              <a:rPr lang="en-US" sz="3000" b="1" dirty="0">
+                <a:solidFill>
+                  <a:srgbClr val="272E52"/>
+                </a:solidFill>
+                <a:latin typeface="Arial" pitchFamily="34" charset="0"/>
+                <a:ea typeface="Arial" pitchFamily="34" charset="-122"/>
+                <a:cs typeface="Arial" pitchFamily="34" charset="-120"/>
+              </a:rPr>
+              <a:t>Speicher planen</a:t>
+            </a:r>
+            <a:endParaRPr lang="en-US" sz="3000" dirty="0"/>
+          </a:p>
+        </p:txBody>
+      </p:sp>
+      <p:sp>
+        <p:nvSpPr>
+          <p:cNvPr id="7" name="Text 5"/>
+          <p:cNvSpPr/>
+          <p:nvPr/>
+        </p:nvSpPr>
+        <p:spPr>
+          <a:xfrm>
+            <a:off x="566928" y="3017520"/>
+            <a:ext cx="5394960" cy="548640"/>
+          </a:xfrm>
+          <a:prstGeom prst="rect">
+            <a:avLst/>
+          </a:prstGeom>
+          <a:noFill/>
+          <a:ln/>
+        </p:spPr>
+        <p:txBody>
+          <a:bodyPr wrap="square" lIns="0" tIns="0" rIns="0" bIns="0" rtlCol="0" anchor="t"/>
+          <a:lstStyle/>
+          <a:p>
+            <a:pPr indent="0" marL="0">
+              <a:buNone/>
+            </a:pPr>
+            <a:r>
+              <a:rPr lang="en-US" sz="1350" dirty="0">
                 <a:solidFill>
                   <a:srgbClr val="5C6377"/>
                 </a:solidFill>
@@ -7702,48 +10021,9 @@
                 <a:ea typeface="Arial" pitchFamily="34" charset="-122"/>
                 <a:cs typeface="Arial" pitchFamily="34" charset="-120"/>
               </a:rPr>
-              <a:t>Speicher planen</a:t>
-            </a:r>
-            <a:endParaRPr lang="en-US" sz="1050" dirty="0"/>
-          </a:p>
-        </p:txBody>
-      </p:sp>
-      <p:sp>
-        <p:nvSpPr>
-          <p:cNvPr id="10" name="Text 7"/>
-          <p:cNvSpPr/>
-          <p:nvPr/>
-        </p:nvSpPr>
-        <p:spPr>
-          <a:xfrm>
-            <a:off x="8028432" y="4722876"/>
-            <a:ext cx="548640" cy="237744"/>
-          </a:xfrm>
-          <a:prstGeom prst="rect">
-            <a:avLst/>
-          </a:prstGeom>
-          <a:noFill/>
-          <a:ln/>
-        </p:spPr>
-        <p:txBody>
-          <a:bodyPr wrap="square" lIns="0" tIns="0" rIns="0" bIns="0" rtlCol="0" anchor="ctr"/>
-          <a:lstStyle/>
-          <a:p>
-            <a:pPr algn="r" indent="0" marL="0">
-              <a:buNone/>
-            </a:pPr>
-            <a:r>
-              <a:rPr lang="en-US" sz="1050" dirty="0">
-                <a:solidFill>
-                  <a:srgbClr val="5C6377"/>
-                </a:solidFill>
-                <a:latin typeface="Arial" pitchFamily="34" charset="0"/>
-                <a:ea typeface="Arial" pitchFamily="34" charset="-122"/>
-                <a:cs typeface="Arial" pitchFamily="34" charset="-120"/>
-              </a:rPr>
-              <a:t>3/13</a:t>
-            </a:r>
-            <a:endParaRPr lang="en-US" sz="1050" dirty="0"/>
+              <a:t>Wie viel, wie sicher, wie angebunden?</a:t>
+            </a:r>
+            <a:endParaRPr lang="en-US" sz="1350" dirty="0"/>
           </a:p>
         </p:txBody>
       </p:sp>
@@ -7832,7 +10112,7 @@
                 <a:ea typeface="Arial" pitchFamily="34" charset="-122"/>
                 <a:cs typeface="Arial" pitchFamily="34" charset="-120"/>
               </a:rPr>
-              <a:t>RAID: BRUTTO UND NETTO</a:t>
+              <a:t>KAPAZITÄT PLANEN</a:t>
             </a:r>
             <a:endParaRPr lang="en-US" sz="1150" dirty="0"/>
           </a:p>
@@ -7871,7 +10151,7 @@
                 <a:ea typeface="Arial" pitchFamily="34" charset="-122"/>
                 <a:cs typeface="Arial" pitchFamily="34" charset="-120"/>
               </a:rPr>
-              <a:t>Wie sicher?</a:t>
+              <a:t>Wie viel Speicher?</a:t>
             </a:r>
             <a:endParaRPr lang="en-US" sz="2600" dirty="0"/>
           </a:p>
@@ -7879,7 +10159,7 @@
       </p:sp>
       <p:pic>
         <p:nvPicPr>
-          <p:cNvPr id="5" name="Image 0" descr="/Users/jacobmenge/Desktop/kurs-26.2b-orga/folienwerkstatt/assets/diagramme/speicher-raid.png">    </p:cNvPr>
+          <p:cNvPr id="5" name="Image 0" descr="/Users/jacobmenge/Desktop/kurs-26.2b-orga/folienwerkstatt/assets/diagramme/speicher-kapazitaet.png">    </p:cNvPr>
           <p:cNvPicPr>
             <a:picLocks noChangeAspect="1"/>
           </p:cNvPicPr>
@@ -7894,7 +10174,7 @@
         <p:spPr>
           <a:xfrm>
             <a:off x="566928" y="1335024"/>
-            <a:ext cx="8010144" cy="2743200"/>
+            <a:ext cx="8010144" cy="2670048"/>
           </a:xfrm>
           <a:prstGeom prst="rect">
             <a:avLst/>
@@ -7954,7 +10234,7 @@
                 <a:ea typeface="Arial" pitchFamily="34" charset="-122"/>
                 <a:cs typeface="Arial" pitchFamily="34" charset="-120"/>
               </a:rPr>
-              <a:t>RAID heißt: mehrere Platten im Verbund. Fällt eine aus, läuft der Betrieb weiter.</a:t>
+              <a:t>In Station 1 rechnet ihr genauso, mit den Zahlen von Voltrad.</a:t>
             </a:r>
             <a:endParaRPr lang="en-US" sz="1200" dirty="0"/>
           </a:p>
@@ -8055,7 +10335,7 @@
                 <a:ea typeface="Arial" pitchFamily="34" charset="-122"/>
                 <a:cs typeface="Arial" pitchFamily="34" charset="-120"/>
               </a:rPr>
-              <a:t>4/13</a:t>
+              <a:t>4/16</a:t>
             </a:r>
             <a:endParaRPr lang="en-US" sz="1050" dirty="0"/>
           </a:p>
@@ -8146,7 +10426,7 @@
                 <a:ea typeface="Arial" pitchFamily="34" charset="-122"/>
                 <a:cs typeface="Arial" pitchFamily="34" charset="-120"/>
               </a:rPr>
-              <a:t>DIE REGEL 3-2-1</a:t>
+              <a:t>RAID: BRUTTO UND NETTO</a:t>
             </a:r>
             <a:endParaRPr lang="en-US" sz="1150" dirty="0"/>
           </a:p>
@@ -8185,7 +10465,7 @@
                 <a:ea typeface="Arial" pitchFamily="34" charset="-122"/>
                 <a:cs typeface="Arial" pitchFamily="34" charset="-120"/>
               </a:rPr>
-              <a:t>RAID ist keine Datensicherung</a:t>
+              <a:t>Wie sicher?</a:t>
             </a:r>
             <a:endParaRPr lang="en-US" sz="2600" dirty="0"/>
           </a:p>
@@ -8193,7 +10473,7 @@
       </p:sp>
       <p:pic>
         <p:nvPicPr>
-          <p:cNvPr id="5" name="Image 0" descr="/Users/jacobmenge/Desktop/kurs-26.2b-orga/folienwerkstatt/assets/diagramme/speicher-backup.png">    </p:cNvPr>
+          <p:cNvPr id="5" name="Image 0" descr="/Users/jacobmenge/Desktop/kurs-26.2b-orga/folienwerkstatt/assets/diagramme/speicher-raid.png">    </p:cNvPr>
           <p:cNvPicPr>
             <a:picLocks noChangeAspect="1"/>
           </p:cNvPicPr>
@@ -8208,7 +10488,7 @@
         <p:spPr>
           <a:xfrm>
             <a:off x="566928" y="1335024"/>
-            <a:ext cx="8010144" cy="2688336"/>
+            <a:ext cx="8010144" cy="2743200"/>
           </a:xfrm>
           <a:prstGeom prst="rect">
             <a:avLst/>
@@ -8223,7 +10503,7 @@
         </p:nvSpPr>
         <p:spPr>
           <a:xfrm>
-            <a:off x="566928" y="4160520"/>
+            <a:off x="566928" y="4215384"/>
             <a:ext cx="32004" cy="256032"/>
           </a:xfrm>
           <a:prstGeom prst="rect">
@@ -8243,7 +10523,7 @@
         </p:nvSpPr>
         <p:spPr>
           <a:xfrm>
-            <a:off x="749808" y="4114800"/>
+            <a:off x="749808" y="4169664"/>
             <a:ext cx="7827264" cy="402336"/>
           </a:xfrm>
           <a:prstGeom prst="rect">
@@ -8268,7 +10548,7 @@
                 <a:ea typeface="Arial" pitchFamily="34" charset="-122"/>
                 <a:cs typeface="Arial" pitchFamily="34" charset="-120"/>
               </a:rPr>
-              <a:t>Bei Voltrad hatte niemand die Rücksicherung geprüft. Das war Befund 9 der Bestandsaufnahme.</a:t>
+              <a:t>RAID heißt: mehrere Platten im Verbund. Fällt eine aus, läuft der Betrieb weiter.</a:t>
             </a:r>
             <a:endParaRPr lang="en-US" sz="1200" dirty="0"/>
           </a:p>
@@ -8369,7 +10649,7 @@
                 <a:ea typeface="Arial" pitchFamily="34" charset="-122"/>
                 <a:cs typeface="Arial" pitchFamily="34" charset="-120"/>
               </a:rPr>
-              <a:t>5/13</a:t>
+              <a:t>5/16</a:t>
             </a:r>
             <a:endParaRPr lang="en-US" sz="1050" dirty="0"/>
           </a:p>
@@ -8460,7 +10740,7 @@
                 <a:ea typeface="Arial" pitchFamily="34" charset="-122"/>
                 <a:cs typeface="Arial" pitchFamily="34" charset="-120"/>
               </a:rPr>
-              <a:t>DAS, NAS UND SAN</a:t>
+              <a:t>DIE REGEL 3-2-1</a:t>
             </a:r>
             <a:endParaRPr lang="en-US" sz="1150" dirty="0"/>
           </a:p>
@@ -8499,7 +10779,7 @@
                 <a:ea typeface="Arial" pitchFamily="34" charset="-122"/>
                 <a:cs typeface="Arial" pitchFamily="34" charset="-120"/>
               </a:rPr>
-              <a:t>Wie angebunden?</a:t>
+              <a:t>RAID ist keine Datensicherung</a:t>
             </a:r>
             <a:endParaRPr lang="en-US" sz="2600" dirty="0"/>
           </a:p>
@@ -8507,7 +10787,7 @@
       </p:sp>
       <p:pic>
         <p:nvPicPr>
-          <p:cNvPr id="5" name="Image 0" descr="/Users/jacobmenge/Desktop/kurs-26.2b-orga/folienwerkstatt/assets/diagramme/speicher-anbindung.png">    </p:cNvPr>
+          <p:cNvPr id="5" name="Image 0" descr="/Users/jacobmenge/Desktop/kurs-26.2b-orga/folienwerkstatt/assets/diagramme/speicher-backup.png">    </p:cNvPr>
           <p:cNvPicPr>
             <a:picLocks noChangeAspect="1"/>
           </p:cNvPicPr>
@@ -8522,7 +10802,7 @@
         <p:spPr>
           <a:xfrm>
             <a:off x="566928" y="1335024"/>
-            <a:ext cx="8010144" cy="2743200"/>
+            <a:ext cx="8010144" cy="2688336"/>
           </a:xfrm>
           <a:prstGeom prst="rect">
             <a:avLst/>
@@ -8537,7 +10817,7 @@
         </p:nvSpPr>
         <p:spPr>
           <a:xfrm>
-            <a:off x="566928" y="4215384"/>
+            <a:off x="566928" y="4160520"/>
             <a:ext cx="32004" cy="256032"/>
           </a:xfrm>
           <a:prstGeom prst="rect">
@@ -8557,7 +10837,7 @@
         </p:nvSpPr>
         <p:spPr>
           <a:xfrm>
-            <a:off x="749808" y="4169664"/>
+            <a:off x="749808" y="4114800"/>
             <a:ext cx="7827264" cy="402336"/>
           </a:xfrm>
           <a:prstGeom prst="rect">
@@ -8582,7 +10862,7 @@
                 <a:ea typeface="Arial" pitchFamily="34" charset="-122"/>
                 <a:cs typeface="Arial" pitchFamily="34" charset="-120"/>
               </a:rPr>
-              <a:t>Bei Voltrad sollen sich zwei Hosts vertreten können. Welche Anbindung braucht das?</a:t>
+              <a:t>Bei Voltrad hatte seit drei Jahren niemand die Rücksicherung geprüft. Das war Befund 9.</a:t>
             </a:r>
             <a:endParaRPr lang="en-US" sz="1200" dirty="0"/>
           </a:p>
@@ -8683,7 +10963,7 @@
                 <a:ea typeface="Arial" pitchFamily="34" charset="-122"/>
                 <a:cs typeface="Arial" pitchFamily="34" charset="-120"/>
               </a:rPr>
-              <a:t>6/13</a:t>
+              <a:t>6/16</a:t>
             </a:r>
             <a:endParaRPr lang="en-US" sz="1050" dirty="0"/>
           </a:p>
@@ -8729,48 +11009,150 @@
         </p:nvSpPr>
         <p:spPr>
           <a:xfrm>
-            <a:off x="6355080" y="0"/>
-            <a:ext cx="2788920" cy="5143500"/>
+            <a:off x="566928" y="201168"/>
+            <a:ext cx="475488" cy="50292"/>
           </a:xfrm>
           <a:prstGeom prst="rect">
             <a:avLst/>
           </a:prstGeom>
           <a:solidFill>
-            <a:srgbClr val="EEF0FB"/>
+            <a:srgbClr val="0F7C86"/>
           </a:solidFill>
           <a:ln/>
         </p:spPr>
       </p:sp>
       <p:sp>
         <p:nvSpPr>
-          <p:cNvPr id="3" name="Shape 1"/>
-          <p:cNvSpPr/>
-          <p:nvPr/>
-        </p:nvSpPr>
-        <p:spPr>
-          <a:xfrm>
-            <a:off x="6355080" y="0"/>
-            <a:ext cx="45720" cy="5143500"/>
+          <p:cNvPr id="3" name="Text 1"/>
+          <p:cNvSpPr/>
+          <p:nvPr/>
+        </p:nvSpPr>
+        <p:spPr>
+          <a:xfrm>
+            <a:off x="566928" y="384048"/>
+            <a:ext cx="8010144" cy="237744"/>
+          </a:xfrm>
+          <a:prstGeom prst="rect">
+            <a:avLst/>
+          </a:prstGeom>
+          <a:noFill/>
+          <a:ln/>
+        </p:spPr>
+        <p:txBody>
+          <a:bodyPr wrap="square" lIns="0" tIns="0" rIns="0" bIns="0" rtlCol="0" anchor="ctr"/>
+          <a:lstStyle/>
+          <a:p>
+            <a:pPr indent="0" marL="0">
+              <a:buNone/>
+            </a:pPr>
+            <a:r>
+              <a:rPr lang="en-US" sz="1150" b="1" spc="180" kern="0" dirty="0">
+                <a:solidFill>
+                  <a:srgbClr val="0F7C86"/>
+                </a:solidFill>
+                <a:latin typeface="Arial" pitchFamily="34" charset="0"/>
+                <a:ea typeface="Arial" pitchFamily="34" charset="-122"/>
+                <a:cs typeface="Arial" pitchFamily="34" charset="-120"/>
+              </a:rPr>
+              <a:t>DAS, NAS UND SAN</a:t>
+            </a:r>
+            <a:endParaRPr lang="en-US" sz="1150" dirty="0"/>
+          </a:p>
+        </p:txBody>
+      </p:sp>
+      <p:sp>
+        <p:nvSpPr>
+          <p:cNvPr id="4" name="Text 2"/>
+          <p:cNvSpPr/>
+          <p:nvPr/>
+        </p:nvSpPr>
+        <p:spPr>
+          <a:xfrm>
+            <a:off x="566928" y="731520"/>
+            <a:ext cx="8010144" cy="603504"/>
+          </a:xfrm>
+          <a:prstGeom prst="rect">
+            <a:avLst/>
+          </a:prstGeom>
+          <a:noFill/>
+          <a:ln/>
+        </p:spPr>
+        <p:txBody>
+          <a:bodyPr wrap="square" lIns="0" tIns="0" rIns="0" bIns="0" rtlCol="0" anchor="t"/>
+          <a:lstStyle/>
+          <a:p>
+            <a:pPr indent="0" marL="0">
+              <a:buNone/>
+            </a:pPr>
+            <a:r>
+              <a:rPr lang="en-US" sz="2600" b="1" dirty="0">
+                <a:solidFill>
+                  <a:srgbClr val="272E52"/>
+                </a:solidFill>
+                <a:latin typeface="Arial" pitchFamily="34" charset="0"/>
+                <a:ea typeface="Arial" pitchFamily="34" charset="-122"/>
+                <a:cs typeface="Arial" pitchFamily="34" charset="-120"/>
+              </a:rPr>
+              <a:t>Wie angebunden?</a:t>
+            </a:r>
+            <a:endParaRPr lang="en-US" sz="2600" dirty="0"/>
+          </a:p>
+        </p:txBody>
+      </p:sp>
+      <p:pic>
+        <p:nvPicPr>
+          <p:cNvPr id="5" name="Image 0" descr="/Users/jacobmenge/Desktop/kurs-26.2b-orga/folienwerkstatt/assets/diagramme/speicher-anbindung.png">    </p:cNvPr>
+          <p:cNvPicPr>
+            <a:picLocks noChangeAspect="1"/>
+          </p:cNvPicPr>
+          <p:nvPr/>
+        </p:nvPicPr>
+        <p:blipFill>
+          <a:blip r:embed="rId1"/>
+          <a:stretch>
+            <a:fillRect/>
+          </a:stretch>
+        </p:blipFill>
+        <p:spPr>
+          <a:xfrm>
+            <a:off x="566928" y="1335024"/>
+            <a:ext cx="8010144" cy="2743200"/>
+          </a:xfrm>
+          <a:prstGeom prst="rect">
+            <a:avLst/>
+          </a:prstGeom>
+        </p:spPr>
+      </p:pic>
+      <p:sp>
+        <p:nvSpPr>
+          <p:cNvPr id="6" name="Shape 3"/>
+          <p:cNvSpPr/>
+          <p:nvPr/>
+        </p:nvSpPr>
+        <p:spPr>
+          <a:xfrm>
+            <a:off x="566928" y="4215384"/>
+            <a:ext cx="32004" cy="256032"/>
           </a:xfrm>
           <a:prstGeom prst="rect">
             <a:avLst/>
           </a:prstGeom>
           <a:solidFill>
-            <a:srgbClr val="3843AF"/>
+            <a:srgbClr val="0F7C86"/>
           </a:solidFill>
           <a:ln/>
         </p:spPr>
       </p:sp>
       <p:sp>
         <p:nvSpPr>
-          <p:cNvPr id="4" name="Text 2"/>
-          <p:cNvSpPr/>
-          <p:nvPr/>
-        </p:nvSpPr>
-        <p:spPr>
-          <a:xfrm>
-            <a:off x="6629400" y="1463040"/>
-            <a:ext cx="2194560" cy="1737360"/>
+          <p:cNvPr id="7" name="Text 4"/>
+          <p:cNvSpPr/>
+          <p:nvPr/>
+        </p:nvSpPr>
+        <p:spPr>
+          <a:xfrm>
+            <a:off x="749808" y="4169664"/>
+            <a:ext cx="7827264" cy="402336"/>
           </a:xfrm>
           <a:prstGeom prst="rect">
             <a:avLst/>
@@ -8782,109 +11164,73 @@
           <a:bodyPr wrap="square" lIns="0" tIns="0" rIns="0" bIns="0" rtlCol="0" anchor="ctr"/>
           <a:lstStyle/>
           <a:p>
-            <a:pPr algn="ctr" indent="0" marL="0">
-              <a:buNone/>
-            </a:pPr>
-            <a:r>
-              <a:rPr lang="en-US" sz="8400" b="1" dirty="0">
-                <a:solidFill>
-                  <a:srgbClr val="3843AF"/>
-                </a:solidFill>
-                <a:latin typeface="Arial" pitchFamily="34" charset="0"/>
-                <a:ea typeface="Arial" pitchFamily="34" charset="-122"/>
-                <a:cs typeface="Arial" pitchFamily="34" charset="-120"/>
-              </a:rPr>
-              <a:t>02</a:t>
-            </a:r>
-            <a:endParaRPr lang="en-US" sz="8400" dirty="0"/>
-          </a:p>
-        </p:txBody>
-      </p:sp>
-      <p:sp>
-        <p:nvSpPr>
-          <p:cNvPr id="5" name="Shape 3"/>
-          <p:cNvSpPr/>
-          <p:nvPr/>
-        </p:nvSpPr>
-        <p:spPr>
-          <a:xfrm>
-            <a:off x="566928" y="1883664"/>
-            <a:ext cx="475488" cy="50292"/>
-          </a:xfrm>
-          <a:prstGeom prst="rect">
-            <a:avLst/>
-          </a:prstGeom>
-          <a:solidFill>
-            <a:srgbClr val="3843AF"/>
-          </a:solidFill>
-          <a:ln/>
-        </p:spPr>
-      </p:sp>
-      <p:sp>
-        <p:nvSpPr>
-          <p:cNvPr id="6" name="Text 4"/>
-          <p:cNvSpPr/>
-          <p:nvPr/>
-        </p:nvSpPr>
-        <p:spPr>
-          <a:xfrm>
-            <a:off x="566928" y="2084832"/>
-            <a:ext cx="5394960" cy="868680"/>
-          </a:xfrm>
-          <a:prstGeom prst="rect">
-            <a:avLst/>
-          </a:prstGeom>
-          <a:noFill/>
-          <a:ln/>
-        </p:spPr>
-        <p:txBody>
-          <a:bodyPr wrap="square" lIns="0" tIns="0" rIns="0" bIns="0" rtlCol="0" anchor="t"/>
-          <a:lstStyle/>
-          <a:p>
-            <a:pPr indent="0" marL="0">
-              <a:buNone/>
-            </a:pPr>
-            <a:r>
-              <a:rPr lang="en-US" sz="3000" b="1" dirty="0">
-                <a:solidFill>
-                  <a:srgbClr val="272E52"/>
-                </a:solidFill>
-                <a:latin typeface="Arial" pitchFamily="34" charset="0"/>
-                <a:ea typeface="Arial" pitchFamily="34" charset="-122"/>
-                <a:cs typeface="Arial" pitchFamily="34" charset="-120"/>
-              </a:rPr>
-              <a:t>Heute plant ihr</a:t>
-            </a:r>
-            <a:endParaRPr lang="en-US" sz="3000" dirty="0"/>
-          </a:p>
-        </p:txBody>
-      </p:sp>
-      <p:sp>
-        <p:nvSpPr>
-          <p:cNvPr id="7" name="Text 5"/>
-          <p:cNvSpPr/>
-          <p:nvPr/>
-        </p:nvSpPr>
-        <p:spPr>
-          <a:xfrm>
-            <a:off x="566928" y="3017520"/>
-            <a:ext cx="5394960" cy="548640"/>
-          </a:xfrm>
-          <a:prstGeom prst="rect">
-            <a:avLst/>
-          </a:prstGeom>
-          <a:noFill/>
-          <a:ln/>
-        </p:spPr>
-        <p:txBody>
-          <a:bodyPr wrap="square" lIns="0" tIns="0" rIns="0" bIns="0" rtlCol="0" anchor="t"/>
-          <a:lstStyle/>
-          <a:p>
-            <a:pPr indent="0" marL="0">
-              <a:buNone/>
-            </a:pPr>
-            <a:r>
-              <a:rPr lang="en-US" sz="1350" dirty="0">
+            <a:pPr indent="0" marL="0">
+              <a:buNone/>
+            </a:pPr>
+            <a:r>
+              <a:rPr lang="en-US" sz="1200" b="1" dirty="0">
+                <a:solidFill>
+                  <a:srgbClr val="434A63"/>
+                </a:solidFill>
+                <a:latin typeface="Arial" pitchFamily="34" charset="0"/>
+                <a:ea typeface="Arial" pitchFamily="34" charset="-122"/>
+                <a:cs typeface="Arial" pitchFamily="34" charset="-120"/>
+              </a:rPr>
+              <a:t>Bei Voltrad sollen sich zwei Hosts vertreten können. Welche Anbindung braucht das?</a:t>
+            </a:r>
+            <a:endParaRPr lang="en-US" sz="1200" dirty="0"/>
+          </a:p>
+        </p:txBody>
+      </p:sp>
+      <p:sp>
+        <p:nvSpPr>
+          <p:cNvPr id="8" name="Shape 5"/>
+          <p:cNvSpPr/>
+          <p:nvPr/>
+        </p:nvSpPr>
+        <p:spPr>
+          <a:xfrm>
+            <a:off x="566928" y="4631436"/>
+            <a:ext cx="8010144" cy="0"/>
+          </a:xfrm>
+          <a:prstGeom prst="line">
+            <a:avLst/>
+          </a:prstGeom>
+          <a:noFill/>
+          <a:ln w="9525">
+            <a:solidFill>
+              <a:srgbClr val="DFE3F0"/>
+            </a:solidFill>
+            <a:prstDash val="solid"/>
+          </a:ln>
+        </p:spPr>
+      </p:sp>
+      <p:sp>
+        <p:nvSpPr>
+          <p:cNvPr id="9" name="Text 6"/>
+          <p:cNvSpPr/>
+          <p:nvPr/>
+        </p:nvSpPr>
+        <p:spPr>
+          <a:xfrm>
+            <a:off x="566928" y="4722876"/>
+            <a:ext cx="5029200" cy="237744"/>
+          </a:xfrm>
+          <a:prstGeom prst="rect">
+            <a:avLst/>
+          </a:prstGeom>
+          <a:noFill/>
+          <a:ln/>
+        </p:spPr>
+        <p:txBody>
+          <a:bodyPr wrap="square" lIns="0" tIns="0" rIns="0" bIns="0" rtlCol="0" anchor="ctr"/>
+          <a:lstStyle/>
+          <a:p>
+            <a:pPr indent="0" marL="0">
+              <a:buNone/>
+            </a:pPr>
+            <a:r>
+              <a:rPr lang="en-US" sz="1050" spc="30" kern="0" dirty="0">
                 <a:solidFill>
                   <a:srgbClr val="5C6377"/>
                 </a:solidFill>
@@ -8892,9 +11238,48 @@
                 <a:ea typeface="Arial" pitchFamily="34" charset="-122"/>
                 <a:cs typeface="Arial" pitchFamily="34" charset="-120"/>
               </a:rPr>
-              <a:t>Speicher für Voltrad</a:t>
-            </a:r>
-            <a:endParaRPr lang="en-US" sz="1350" dirty="0"/>
+              <a:t>Speicher planen</a:t>
+            </a:r>
+            <a:endParaRPr lang="en-US" sz="1050" dirty="0"/>
+          </a:p>
+        </p:txBody>
+      </p:sp>
+      <p:sp>
+        <p:nvSpPr>
+          <p:cNvPr id="10" name="Text 7"/>
+          <p:cNvSpPr/>
+          <p:nvPr/>
+        </p:nvSpPr>
+        <p:spPr>
+          <a:xfrm>
+            <a:off x="8028432" y="4722876"/>
+            <a:ext cx="548640" cy="237744"/>
+          </a:xfrm>
+          <a:prstGeom prst="rect">
+            <a:avLst/>
+          </a:prstGeom>
+          <a:noFill/>
+          <a:ln/>
+        </p:spPr>
+        <p:txBody>
+          <a:bodyPr wrap="square" lIns="0" tIns="0" rIns="0" bIns="0" rtlCol="0" anchor="ctr"/>
+          <a:lstStyle/>
+          <a:p>
+            <a:pPr algn="r" indent="0" marL="0">
+              <a:buNone/>
+            </a:pPr>
+            <a:r>
+              <a:rPr lang="en-US" sz="1050" dirty="0">
+                <a:solidFill>
+                  <a:srgbClr val="5C6377"/>
+                </a:solidFill>
+                <a:latin typeface="Arial" pitchFamily="34" charset="0"/>
+                <a:ea typeface="Arial" pitchFamily="34" charset="-122"/>
+                <a:cs typeface="Arial" pitchFamily="34" charset="-120"/>
+              </a:rPr>
+              <a:t>7/16</a:t>
+            </a:r>
+            <a:endParaRPr lang="en-US" sz="1050" dirty="0"/>
           </a:p>
         </p:txBody>
       </p:sp>

--- a/folien/14-speicher.pptx
+++ b/folien/14-speicher.pptx
@@ -25,9 +25,12 @@
     <p:sldId id="273" r:id="rId19"/>
     <p:sldId id="274" r:id="rId20"/>
     <p:sldId id="275" r:id="rId21"/>
+    <p:sldId id="276" r:id="rId22"/>
+    <p:sldId id="277" r:id="rId23"/>
+    <p:sldId id="278" r:id="rId24"/>
   </p:sldIdLst>
   <p:notesMasterIdLst>
-    <p:notesMasterId r:id="rId22"/>
+    <p:notesMasterId r:id="rId25"/>
   </p:notesMasterIdLst>
   <p:sldSz cx="9144000" cy="5143500"/>
   <p:notesSz cx="5143500" cy="9144000"/>
@@ -1601,6 +1604,270 @@
             <a:fld id="{F7021451-1387-4CA6-816F-3879F97B5CBC}" type="slidenum">
               <a:rPr lang="en-US"/>
               <a:t>20</a:t>
+            </a:fld>
+            <a:endParaRPr lang="en-US"/>
+          </a:p>
+        </p:txBody>
+      </p:sp>
+    </p:spTree>
+    <p:extLst>
+      <p:ext uri="{BB962C8B-B14F-4D97-AF65-F5344CB8AC3E}">
+        <p14:creationId xmlns:p14="http://schemas.microsoft.com/office/powerpoint/2010/main" val="1024086991"/>
+      </p:ext>
+    </p:extLst>
+  </p:cSld>
+  <p:clrMapOvr>
+    <a:masterClrMapping/>
+  </p:clrMapOvr>
+</p:notes>
+</file>
+
+<file path=ppt/notesSlides/notesSlide21.xml><?xml version="1.0" encoding="utf-8"?>
+<p:notes xmlns:a="http://schemas.openxmlformats.org/drawingml/2006/main" xmlns:r="http://schemas.openxmlformats.org/officeDocument/2006/relationships" xmlns:p="http://schemas.openxmlformats.org/presentationml/2006/main">
+  <p:cSld>
+    <p:spTree>
+      <p:nvGrpSpPr>
+        <p:cNvPr id="1" name=""/>
+        <p:cNvGrpSpPr/>
+        <p:nvPr/>
+      </p:nvGrpSpPr>
+      <p:grpSpPr>
+        <a:xfrm>
+          <a:off x="0" y="0"/>
+          <a:ext cx="0" cy="0"/>
+          <a:chOff x="0" y="0"/>
+          <a:chExt cx="0" cy="0"/>
+        </a:xfrm>
+      </p:grpSpPr>
+      <p:sp>
+        <p:nvSpPr>
+          <p:cNvPr id="2" name="Slide Image Placeholder 1"/>
+          <p:cNvSpPr>
+            <a:spLocks noGrp="1" noRot="1" noChangeAspect="1"/>
+          </p:cNvSpPr>
+          <p:nvPr>
+            <p:ph type="sldImg"/>
+          </p:nvPr>
+        </p:nvSpPr>
+        <p:spPr/>
+      </p:sp>
+      <p:sp>
+        <p:nvSpPr>
+          <p:cNvPr id="3" name="Notes Placeholder 2"/>
+          <p:cNvSpPr>
+            <a:spLocks noGrp="1"/>
+          </p:cNvSpPr>
+          <p:nvPr>
+            <p:ph type="body" idx="1"/>
+          </p:nvPr>
+        </p:nvSpPr>
+        <p:spPr/>
+        <p:txBody>
+          <a:bodyPr/>
+          <a:lstStyle/>
+          <a:p>
+            <a:r>
+              <a:rPr lang="en-US" dirty="0"/>
+              <a:t/>
+            </a:r>
+            <a:endParaRPr lang="en-US" dirty="0"/>
+          </a:p>
+        </p:txBody>
+      </p:sp>
+      <p:sp>
+        <p:nvSpPr>
+          <p:cNvPr id="4" name="Slide Number Placeholder 3"/>
+          <p:cNvSpPr>
+            <a:spLocks noGrp="1"/>
+          </p:cNvSpPr>
+          <p:nvPr>
+            <p:ph type="sldNum" sz="quarter" idx="10"/>
+          </p:nvPr>
+        </p:nvSpPr>
+        <p:spPr/>
+        <p:txBody>
+          <a:bodyPr/>
+          <a:lstStyle/>
+          <a:p>
+            <a:fld id="{F7021451-1387-4CA6-816F-3879F97B5CBC}" type="slidenum">
+              <a:rPr lang="en-US"/>
+              <a:t>21</a:t>
+            </a:fld>
+            <a:endParaRPr lang="en-US"/>
+          </a:p>
+        </p:txBody>
+      </p:sp>
+    </p:spTree>
+    <p:extLst>
+      <p:ext uri="{BB962C8B-B14F-4D97-AF65-F5344CB8AC3E}">
+        <p14:creationId xmlns:p14="http://schemas.microsoft.com/office/powerpoint/2010/main" val="1024086991"/>
+      </p:ext>
+    </p:extLst>
+  </p:cSld>
+  <p:clrMapOvr>
+    <a:masterClrMapping/>
+  </p:clrMapOvr>
+</p:notes>
+</file>
+
+<file path=ppt/notesSlides/notesSlide22.xml><?xml version="1.0" encoding="utf-8"?>
+<p:notes xmlns:a="http://schemas.openxmlformats.org/drawingml/2006/main" xmlns:r="http://schemas.openxmlformats.org/officeDocument/2006/relationships" xmlns:p="http://schemas.openxmlformats.org/presentationml/2006/main">
+  <p:cSld>
+    <p:spTree>
+      <p:nvGrpSpPr>
+        <p:cNvPr id="1" name=""/>
+        <p:cNvGrpSpPr/>
+        <p:nvPr/>
+      </p:nvGrpSpPr>
+      <p:grpSpPr>
+        <a:xfrm>
+          <a:off x="0" y="0"/>
+          <a:ext cx="0" cy="0"/>
+          <a:chOff x="0" y="0"/>
+          <a:chExt cx="0" cy="0"/>
+        </a:xfrm>
+      </p:grpSpPr>
+      <p:sp>
+        <p:nvSpPr>
+          <p:cNvPr id="2" name="Slide Image Placeholder 1"/>
+          <p:cNvSpPr>
+            <a:spLocks noGrp="1" noRot="1" noChangeAspect="1"/>
+          </p:cNvSpPr>
+          <p:nvPr>
+            <p:ph type="sldImg"/>
+          </p:nvPr>
+        </p:nvSpPr>
+        <p:spPr/>
+      </p:sp>
+      <p:sp>
+        <p:nvSpPr>
+          <p:cNvPr id="3" name="Notes Placeholder 2"/>
+          <p:cNvSpPr>
+            <a:spLocks noGrp="1"/>
+          </p:cNvSpPr>
+          <p:nvPr>
+            <p:ph type="body" idx="1"/>
+          </p:nvPr>
+        </p:nvSpPr>
+        <p:spPr/>
+        <p:txBody>
+          <a:bodyPr/>
+          <a:lstStyle/>
+          <a:p>
+            <a:r>
+              <a:rPr lang="en-US" dirty="0"/>
+              <a:t/>
+            </a:r>
+            <a:endParaRPr lang="en-US" dirty="0"/>
+          </a:p>
+        </p:txBody>
+      </p:sp>
+      <p:sp>
+        <p:nvSpPr>
+          <p:cNvPr id="4" name="Slide Number Placeholder 3"/>
+          <p:cNvSpPr>
+            <a:spLocks noGrp="1"/>
+          </p:cNvSpPr>
+          <p:nvPr>
+            <p:ph type="sldNum" sz="quarter" idx="10"/>
+          </p:nvPr>
+        </p:nvSpPr>
+        <p:spPr/>
+        <p:txBody>
+          <a:bodyPr/>
+          <a:lstStyle/>
+          <a:p>
+            <a:fld id="{F7021451-1387-4CA6-816F-3879F97B5CBC}" type="slidenum">
+              <a:rPr lang="en-US"/>
+              <a:t>22</a:t>
+            </a:fld>
+            <a:endParaRPr lang="en-US"/>
+          </a:p>
+        </p:txBody>
+      </p:sp>
+    </p:spTree>
+    <p:extLst>
+      <p:ext uri="{BB962C8B-B14F-4D97-AF65-F5344CB8AC3E}">
+        <p14:creationId xmlns:p14="http://schemas.microsoft.com/office/powerpoint/2010/main" val="1024086991"/>
+      </p:ext>
+    </p:extLst>
+  </p:cSld>
+  <p:clrMapOvr>
+    <a:masterClrMapping/>
+  </p:clrMapOvr>
+</p:notes>
+</file>
+
+<file path=ppt/notesSlides/notesSlide23.xml><?xml version="1.0" encoding="utf-8"?>
+<p:notes xmlns:a="http://schemas.openxmlformats.org/drawingml/2006/main" xmlns:r="http://schemas.openxmlformats.org/officeDocument/2006/relationships" xmlns:p="http://schemas.openxmlformats.org/presentationml/2006/main">
+  <p:cSld>
+    <p:spTree>
+      <p:nvGrpSpPr>
+        <p:cNvPr id="1" name=""/>
+        <p:cNvGrpSpPr/>
+        <p:nvPr/>
+      </p:nvGrpSpPr>
+      <p:grpSpPr>
+        <a:xfrm>
+          <a:off x="0" y="0"/>
+          <a:ext cx="0" cy="0"/>
+          <a:chOff x="0" y="0"/>
+          <a:chExt cx="0" cy="0"/>
+        </a:xfrm>
+      </p:grpSpPr>
+      <p:sp>
+        <p:nvSpPr>
+          <p:cNvPr id="2" name="Slide Image Placeholder 1"/>
+          <p:cNvSpPr>
+            <a:spLocks noGrp="1" noRot="1" noChangeAspect="1"/>
+          </p:cNvSpPr>
+          <p:nvPr>
+            <p:ph type="sldImg"/>
+          </p:nvPr>
+        </p:nvSpPr>
+        <p:spPr/>
+      </p:sp>
+      <p:sp>
+        <p:nvSpPr>
+          <p:cNvPr id="3" name="Notes Placeholder 2"/>
+          <p:cNvSpPr>
+            <a:spLocks noGrp="1"/>
+          </p:cNvSpPr>
+          <p:nvPr>
+            <p:ph type="body" idx="1"/>
+          </p:nvPr>
+        </p:nvSpPr>
+        <p:spPr/>
+        <p:txBody>
+          <a:bodyPr/>
+          <a:lstStyle/>
+          <a:p>
+            <a:r>
+              <a:rPr lang="en-US" dirty="0"/>
+              <a:t/>
+            </a:r>
+            <a:endParaRPr lang="en-US" dirty="0"/>
+          </a:p>
+        </p:txBody>
+      </p:sp>
+      <p:sp>
+        <p:nvSpPr>
+          <p:cNvPr id="4" name="Slide Number Placeholder 3"/>
+          <p:cNvSpPr>
+            <a:spLocks noGrp="1"/>
+          </p:cNvSpPr>
+          <p:nvPr>
+            <p:ph type="sldNum" sz="quarter" idx="10"/>
+          </p:nvPr>
+        </p:nvSpPr>
+        <p:spPr/>
+        <p:txBody>
+          <a:bodyPr/>
+          <a:lstStyle/>
+          <a:p>
+            <a:fld id="{F7021451-1387-4CA6-816F-3879F97B5CBC}" type="slidenum">
+              <a:rPr lang="en-US"/>
+              <a:t>23</a:t>
             </a:fld>
             <a:endParaRPr lang="en-US"/>
           </a:p>
@@ -2874,7 +3141,7 @@
                 <a:ea typeface="Arial" pitchFamily="34" charset="-122"/>
                 <a:cs typeface="Arial" pitchFamily="34" charset="-120"/>
               </a:rPr>
-              <a:t>DAS, NAS ODER SAN? ANTWORTEN IN DEN CHAT</a:t>
+              <a:t>DIE REGEL 3-2-1</a:t>
             </a:r>
             <a:endParaRPr lang="en-US" sz="1150" dirty="0"/>
           </a:p>
@@ -2913,588 +3180,45 @@
                 <a:ea typeface="Arial" pitchFamily="34" charset="-122"/>
                 <a:cs typeface="Arial" pitchFamily="34" charset="-120"/>
               </a:rPr>
-              <a:t>Zuordnungsrunde</a:t>
+              <a:t>RAID ist keine Datensicherung</a:t>
             </a:r>
             <a:endParaRPr lang="en-US" sz="2600" dirty="0"/>
           </a:p>
         </p:txBody>
       </p:sp>
-      <p:sp>
-        <p:nvSpPr>
-          <p:cNvPr id="5" name="Text 3"/>
-          <p:cNvSpPr/>
-          <p:nvPr/>
-        </p:nvSpPr>
-        <p:spPr>
-          <a:xfrm>
-            <a:off x="566928" y="1444752"/>
-            <a:ext cx="8010144" cy="438912"/>
-          </a:xfrm>
-          <a:prstGeom prst="rect">
-            <a:avLst/>
-          </a:prstGeom>
-          <a:noFill/>
-          <a:ln/>
-        </p:spPr>
-        <p:txBody>
-          <a:bodyPr wrap="square" lIns="0" tIns="0" rIns="0" bIns="0" rtlCol="0" anchor="t"/>
-          <a:lstStyle/>
-          <a:p>
-            <a:pPr indent="0" marL="0">
-              <a:buNone/>
-            </a:pPr>
-            <a:r>
-              <a:rPr lang="en-US" sz="1300" dirty="0">
-                <a:solidFill>
-                  <a:srgbClr val="5C6377"/>
-                </a:solidFill>
-                <a:latin typeface="Arial" pitchFamily="34" charset="0"/>
-                <a:ea typeface="Arial" pitchFamily="34" charset="-122"/>
-                <a:cs typeface="Arial" pitchFamily="34" charset="-120"/>
-              </a:rPr>
-              <a:t>Schreibt zu jedem Buchstaben DAS, NAS oder SAN in den Chat.</a:t>
-            </a:r>
-            <a:endParaRPr lang="en-US" sz="1300" dirty="0"/>
-          </a:p>
-        </p:txBody>
-      </p:sp>
-      <p:sp>
-        <p:nvSpPr>
-          <p:cNvPr id="6" name="Shape 4"/>
-          <p:cNvSpPr/>
-          <p:nvPr/>
-        </p:nvSpPr>
-        <p:spPr>
-          <a:xfrm>
-            <a:off x="438912" y="1920240"/>
-            <a:ext cx="8266176" cy="329184"/>
-          </a:xfrm>
-          <a:prstGeom prst="rect">
-            <a:avLst/>
-          </a:prstGeom>
-          <a:solidFill>
-            <a:srgbClr val="F5F6FC"/>
-          </a:solidFill>
-          <a:ln/>
-        </p:spPr>
-      </p:sp>
-      <p:sp>
-        <p:nvSpPr>
-          <p:cNvPr id="7" name="Text 5"/>
-          <p:cNvSpPr/>
-          <p:nvPr/>
-        </p:nvSpPr>
-        <p:spPr>
-          <a:xfrm>
-            <a:off x="566928" y="1920240"/>
-            <a:ext cx="548640" cy="329184"/>
-          </a:xfrm>
-          <a:prstGeom prst="rect">
-            <a:avLst/>
-          </a:prstGeom>
-          <a:noFill/>
-          <a:ln/>
-        </p:spPr>
-        <p:txBody>
-          <a:bodyPr wrap="square" lIns="0" tIns="0" rIns="0" bIns="0" rtlCol="0" anchor="ctr"/>
-          <a:lstStyle/>
-          <a:p>
-            <a:pPr indent="0" marL="0">
-              <a:buNone/>
-            </a:pPr>
-            <a:r>
-              <a:rPr lang="en-US" sz="1200" b="1" dirty="0">
-                <a:solidFill>
-                  <a:srgbClr val="0F7C86"/>
-                </a:solidFill>
-                <a:latin typeface="Courier New" pitchFamily="34" charset="0"/>
-                <a:ea typeface="Courier New" pitchFamily="34" charset="-122"/>
-                <a:cs typeface="Courier New" pitchFamily="34" charset="-120"/>
-              </a:rPr>
-              <a:t>A</a:t>
-            </a:r>
-            <a:endParaRPr lang="en-US" sz="1200" dirty="0"/>
-          </a:p>
-        </p:txBody>
-      </p:sp>
-      <p:sp>
-        <p:nvSpPr>
-          <p:cNvPr id="8" name="Text 6"/>
-          <p:cNvSpPr/>
-          <p:nvPr/>
-        </p:nvSpPr>
-        <p:spPr>
-          <a:xfrm>
-            <a:off x="1115568" y="1920240"/>
-            <a:ext cx="7461504" cy="329184"/>
-          </a:xfrm>
-          <a:prstGeom prst="rect">
-            <a:avLst/>
-          </a:prstGeom>
-          <a:noFill/>
-          <a:ln/>
-        </p:spPr>
-        <p:txBody>
-          <a:bodyPr wrap="square" lIns="0" tIns="0" rIns="0" bIns="0" rtlCol="0" anchor="ctr"/>
-          <a:lstStyle/>
-          <a:p>
-            <a:pPr indent="0" marL="0">
-              <a:buNone/>
-            </a:pPr>
-            <a:r>
-              <a:rPr lang="en-US" sz="1200" dirty="0">
-                <a:solidFill>
-                  <a:srgbClr val="434A63"/>
-                </a:solidFill>
-                <a:latin typeface="Arial" pitchFamily="34" charset="0"/>
-                <a:ea typeface="Arial" pitchFamily="34" charset="-122"/>
-                <a:cs typeface="Arial" pitchFamily="34" charset="-120"/>
-              </a:rPr>
-              <a:t>Eine USB-Festplatte am Laptop der Geschäftsführerin</a:t>
-            </a:r>
-            <a:endParaRPr lang="en-US" sz="1200" dirty="0"/>
-          </a:p>
-        </p:txBody>
-      </p:sp>
-      <p:sp>
-        <p:nvSpPr>
-          <p:cNvPr id="9" name="Text 7"/>
-          <p:cNvSpPr/>
-          <p:nvPr/>
-        </p:nvSpPr>
-        <p:spPr>
-          <a:xfrm>
-            <a:off x="566928" y="2249424"/>
-            <a:ext cx="548640" cy="329184"/>
-          </a:xfrm>
-          <a:prstGeom prst="rect">
-            <a:avLst/>
-          </a:prstGeom>
-          <a:noFill/>
-          <a:ln/>
-        </p:spPr>
-        <p:txBody>
-          <a:bodyPr wrap="square" lIns="0" tIns="0" rIns="0" bIns="0" rtlCol="0" anchor="ctr"/>
-          <a:lstStyle/>
-          <a:p>
-            <a:pPr indent="0" marL="0">
-              <a:buNone/>
-            </a:pPr>
-            <a:r>
-              <a:rPr lang="en-US" sz="1200" b="1" dirty="0">
-                <a:solidFill>
-                  <a:srgbClr val="0F7C86"/>
-                </a:solidFill>
-                <a:latin typeface="Courier New" pitchFamily="34" charset="0"/>
-                <a:ea typeface="Courier New" pitchFamily="34" charset="-122"/>
-                <a:cs typeface="Courier New" pitchFamily="34" charset="-120"/>
-              </a:rPr>
-              <a:t>B</a:t>
-            </a:r>
-            <a:endParaRPr lang="en-US" sz="1200" dirty="0"/>
-          </a:p>
-        </p:txBody>
-      </p:sp>
-      <p:sp>
-        <p:nvSpPr>
-          <p:cNvPr id="10" name="Text 8"/>
-          <p:cNvSpPr/>
-          <p:nvPr/>
-        </p:nvSpPr>
-        <p:spPr>
-          <a:xfrm>
-            <a:off x="1115568" y="2249424"/>
-            <a:ext cx="7461504" cy="329184"/>
-          </a:xfrm>
-          <a:prstGeom prst="rect">
-            <a:avLst/>
-          </a:prstGeom>
-          <a:noFill/>
-          <a:ln/>
-        </p:spPr>
-        <p:txBody>
-          <a:bodyPr wrap="square" lIns="0" tIns="0" rIns="0" bIns="0" rtlCol="0" anchor="ctr"/>
-          <a:lstStyle/>
-          <a:p>
-            <a:pPr indent="0" marL="0">
-              <a:buNone/>
-            </a:pPr>
-            <a:r>
-              <a:rPr lang="en-US" sz="1200" dirty="0">
-                <a:solidFill>
-                  <a:srgbClr val="434A63"/>
-                </a:solidFill>
-                <a:latin typeface="Arial" pitchFamily="34" charset="0"/>
-                <a:ea typeface="Arial" pitchFamily="34" charset="-122"/>
-                <a:cs typeface="Arial" pitchFamily="34" charset="-120"/>
-              </a:rPr>
-              <a:t>Ein gemeinsamer Ordner im Büronetz, auf den ein ganzes Team zugreift</a:t>
-            </a:r>
-            <a:endParaRPr lang="en-US" sz="1200" dirty="0"/>
-          </a:p>
-        </p:txBody>
-      </p:sp>
-      <p:sp>
-        <p:nvSpPr>
-          <p:cNvPr id="11" name="Shape 9"/>
-          <p:cNvSpPr/>
-          <p:nvPr/>
-        </p:nvSpPr>
-        <p:spPr>
-          <a:xfrm>
-            <a:off x="438912" y="2578608"/>
-            <a:ext cx="8266176" cy="329184"/>
-          </a:xfrm>
-          <a:prstGeom prst="rect">
-            <a:avLst/>
-          </a:prstGeom>
-          <a:solidFill>
-            <a:srgbClr val="F5F6FC"/>
-          </a:solidFill>
-          <a:ln/>
-        </p:spPr>
-      </p:sp>
-      <p:sp>
-        <p:nvSpPr>
-          <p:cNvPr id="12" name="Text 10"/>
-          <p:cNvSpPr/>
-          <p:nvPr/>
-        </p:nvSpPr>
-        <p:spPr>
-          <a:xfrm>
-            <a:off x="566928" y="2578608"/>
-            <a:ext cx="548640" cy="329184"/>
-          </a:xfrm>
-          <a:prstGeom prst="rect">
-            <a:avLst/>
-          </a:prstGeom>
-          <a:noFill/>
-          <a:ln/>
-        </p:spPr>
-        <p:txBody>
-          <a:bodyPr wrap="square" lIns="0" tIns="0" rIns="0" bIns="0" rtlCol="0" anchor="ctr"/>
-          <a:lstStyle/>
-          <a:p>
-            <a:pPr indent="0" marL="0">
-              <a:buNone/>
-            </a:pPr>
-            <a:r>
-              <a:rPr lang="en-US" sz="1200" b="1" dirty="0">
-                <a:solidFill>
-                  <a:srgbClr val="0F7C86"/>
-                </a:solidFill>
-                <a:latin typeface="Courier New" pitchFamily="34" charset="0"/>
-                <a:ea typeface="Courier New" pitchFamily="34" charset="-122"/>
-                <a:cs typeface="Courier New" pitchFamily="34" charset="-120"/>
-              </a:rPr>
-              <a:t>C</a:t>
-            </a:r>
-            <a:endParaRPr lang="en-US" sz="1200" dirty="0"/>
-          </a:p>
-        </p:txBody>
-      </p:sp>
-      <p:sp>
-        <p:nvSpPr>
-          <p:cNvPr id="13" name="Text 11"/>
-          <p:cNvSpPr/>
-          <p:nvPr/>
-        </p:nvSpPr>
-        <p:spPr>
-          <a:xfrm>
-            <a:off x="1115568" y="2578608"/>
-            <a:ext cx="7461504" cy="329184"/>
-          </a:xfrm>
-          <a:prstGeom prst="rect">
-            <a:avLst/>
-          </a:prstGeom>
-          <a:noFill/>
-          <a:ln/>
-        </p:spPr>
-        <p:txBody>
-          <a:bodyPr wrap="square" lIns="0" tIns="0" rIns="0" bIns="0" rtlCol="0" anchor="ctr"/>
-          <a:lstStyle/>
-          <a:p>
-            <a:pPr indent="0" marL="0">
-              <a:buNone/>
-            </a:pPr>
-            <a:r>
-              <a:rPr lang="en-US" sz="1200" dirty="0">
-                <a:solidFill>
-                  <a:srgbClr val="434A63"/>
-                </a:solidFill>
-                <a:latin typeface="Arial" pitchFamily="34" charset="0"/>
-                <a:ea typeface="Arial" pitchFamily="34" charset="-122"/>
-                <a:cs typeface="Arial" pitchFamily="34" charset="-120"/>
-              </a:rPr>
-              <a:t>Drei Hosts, deren virtuelle Maschinen bei einem Ausfall auf einen anderen Host wechseln</a:t>
-            </a:r>
-            <a:endParaRPr lang="en-US" sz="1200" dirty="0"/>
-          </a:p>
-        </p:txBody>
-      </p:sp>
-      <p:sp>
-        <p:nvSpPr>
-          <p:cNvPr id="14" name="Text 12"/>
-          <p:cNvSpPr/>
-          <p:nvPr/>
-        </p:nvSpPr>
-        <p:spPr>
-          <a:xfrm>
-            <a:off x="566928" y="2907792"/>
-            <a:ext cx="548640" cy="329184"/>
-          </a:xfrm>
-          <a:prstGeom prst="rect">
-            <a:avLst/>
-          </a:prstGeom>
-          <a:noFill/>
-          <a:ln/>
-        </p:spPr>
-        <p:txBody>
-          <a:bodyPr wrap="square" lIns="0" tIns="0" rIns="0" bIns="0" rtlCol="0" anchor="ctr"/>
-          <a:lstStyle/>
-          <a:p>
-            <a:pPr indent="0" marL="0">
-              <a:buNone/>
-            </a:pPr>
-            <a:r>
-              <a:rPr lang="en-US" sz="1200" b="1" dirty="0">
-                <a:solidFill>
-                  <a:srgbClr val="0F7C86"/>
-                </a:solidFill>
-                <a:latin typeface="Courier New" pitchFamily="34" charset="0"/>
-                <a:ea typeface="Courier New" pitchFamily="34" charset="-122"/>
-                <a:cs typeface="Courier New" pitchFamily="34" charset="-120"/>
-              </a:rPr>
-              <a:t>D</a:t>
-            </a:r>
-            <a:endParaRPr lang="en-US" sz="1200" dirty="0"/>
-          </a:p>
-        </p:txBody>
-      </p:sp>
-      <p:sp>
-        <p:nvSpPr>
-          <p:cNvPr id="15" name="Text 13"/>
-          <p:cNvSpPr/>
-          <p:nvPr/>
-        </p:nvSpPr>
-        <p:spPr>
-          <a:xfrm>
-            <a:off x="1115568" y="2907792"/>
-            <a:ext cx="7461504" cy="329184"/>
-          </a:xfrm>
-          <a:prstGeom prst="rect">
-            <a:avLst/>
-          </a:prstGeom>
-          <a:noFill/>
-          <a:ln/>
-        </p:spPr>
-        <p:txBody>
-          <a:bodyPr wrap="square" lIns="0" tIns="0" rIns="0" bIns="0" rtlCol="0" anchor="ctr"/>
-          <a:lstStyle/>
-          <a:p>
-            <a:pPr indent="0" marL="0">
-              <a:buNone/>
-            </a:pPr>
-            <a:r>
-              <a:rPr lang="en-US" sz="1200" dirty="0">
-                <a:solidFill>
-                  <a:srgbClr val="434A63"/>
-                </a:solidFill>
-                <a:latin typeface="Arial" pitchFamily="34" charset="0"/>
-                <a:ea typeface="Arial" pitchFamily="34" charset="-122"/>
-                <a:cs typeface="Arial" pitchFamily="34" charset="-120"/>
-              </a:rPr>
-              <a:t>Zwei gespiegelte Festplatten fest im Datenbankserver eingebaut</a:t>
-            </a:r>
-            <a:endParaRPr lang="en-US" sz="1200" dirty="0"/>
-          </a:p>
-        </p:txBody>
-      </p:sp>
-      <p:sp>
-        <p:nvSpPr>
-          <p:cNvPr id="16" name="Shape 14"/>
-          <p:cNvSpPr/>
-          <p:nvPr/>
-        </p:nvSpPr>
-        <p:spPr>
-          <a:xfrm>
-            <a:off x="438912" y="3236976"/>
-            <a:ext cx="8266176" cy="329184"/>
-          </a:xfrm>
-          <a:prstGeom prst="rect">
-            <a:avLst/>
-          </a:prstGeom>
-          <a:solidFill>
-            <a:srgbClr val="F5F6FC"/>
-          </a:solidFill>
-          <a:ln/>
-        </p:spPr>
-      </p:sp>
-      <p:sp>
-        <p:nvSpPr>
-          <p:cNvPr id="17" name="Text 15"/>
-          <p:cNvSpPr/>
-          <p:nvPr/>
-        </p:nvSpPr>
-        <p:spPr>
-          <a:xfrm>
-            <a:off x="566928" y="3236976"/>
-            <a:ext cx="548640" cy="329184"/>
-          </a:xfrm>
-          <a:prstGeom prst="rect">
-            <a:avLst/>
-          </a:prstGeom>
-          <a:noFill/>
-          <a:ln/>
-        </p:spPr>
-        <p:txBody>
-          <a:bodyPr wrap="square" lIns="0" tIns="0" rIns="0" bIns="0" rtlCol="0" anchor="ctr"/>
-          <a:lstStyle/>
-          <a:p>
-            <a:pPr indent="0" marL="0">
-              <a:buNone/>
-            </a:pPr>
-            <a:r>
-              <a:rPr lang="en-US" sz="1200" b="1" dirty="0">
-                <a:solidFill>
-                  <a:srgbClr val="0F7C86"/>
-                </a:solidFill>
-                <a:latin typeface="Courier New" pitchFamily="34" charset="0"/>
-                <a:ea typeface="Courier New" pitchFamily="34" charset="-122"/>
-                <a:cs typeface="Courier New" pitchFamily="34" charset="-120"/>
-              </a:rPr>
-              <a:t>E</a:t>
-            </a:r>
-            <a:endParaRPr lang="en-US" sz="1200" dirty="0"/>
-          </a:p>
-        </p:txBody>
-      </p:sp>
-      <p:sp>
-        <p:nvSpPr>
-          <p:cNvPr id="18" name="Text 16"/>
-          <p:cNvSpPr/>
-          <p:nvPr/>
-        </p:nvSpPr>
-        <p:spPr>
-          <a:xfrm>
-            <a:off x="1115568" y="3236976"/>
-            <a:ext cx="7461504" cy="329184"/>
-          </a:xfrm>
-          <a:prstGeom prst="rect">
-            <a:avLst/>
-          </a:prstGeom>
-          <a:noFill/>
-          <a:ln/>
-        </p:spPr>
-        <p:txBody>
-          <a:bodyPr wrap="square" lIns="0" tIns="0" rIns="0" bIns="0" rtlCol="0" anchor="ctr"/>
-          <a:lstStyle/>
-          <a:p>
-            <a:pPr indent="0" marL="0">
-              <a:buNone/>
-            </a:pPr>
-            <a:r>
-              <a:rPr lang="en-US" sz="1200" dirty="0">
-                <a:solidFill>
-                  <a:srgbClr val="434A63"/>
-                </a:solidFill>
-                <a:latin typeface="Arial" pitchFamily="34" charset="0"/>
-                <a:ea typeface="Arial" pitchFamily="34" charset="-122"/>
-                <a:cs typeface="Arial" pitchFamily="34" charset="-120"/>
-              </a:rPr>
-              <a:t>Ein kleines Gerät im Büro, auf dem alle ihre Scans in Ordnern ablegen</a:t>
-            </a:r>
-            <a:endParaRPr lang="en-US" sz="1200" dirty="0"/>
-          </a:p>
-        </p:txBody>
-      </p:sp>
-      <p:sp>
-        <p:nvSpPr>
-          <p:cNvPr id="19" name="Text 17"/>
-          <p:cNvSpPr/>
-          <p:nvPr/>
-        </p:nvSpPr>
-        <p:spPr>
-          <a:xfrm>
-            <a:off x="566928" y="3566160"/>
-            <a:ext cx="548640" cy="329184"/>
-          </a:xfrm>
-          <a:prstGeom prst="rect">
-            <a:avLst/>
-          </a:prstGeom>
-          <a:noFill/>
-          <a:ln/>
-        </p:spPr>
-        <p:txBody>
-          <a:bodyPr wrap="square" lIns="0" tIns="0" rIns="0" bIns="0" rtlCol="0" anchor="ctr"/>
-          <a:lstStyle/>
-          <a:p>
-            <a:pPr indent="0" marL="0">
-              <a:buNone/>
-            </a:pPr>
-            <a:r>
-              <a:rPr lang="en-US" sz="1200" b="1" dirty="0">
-                <a:solidFill>
-                  <a:srgbClr val="0F7C86"/>
-                </a:solidFill>
-                <a:latin typeface="Courier New" pitchFamily="34" charset="0"/>
-                <a:ea typeface="Courier New" pitchFamily="34" charset="-122"/>
-                <a:cs typeface="Courier New" pitchFamily="34" charset="-120"/>
-              </a:rPr>
-              <a:t>F</a:t>
-            </a:r>
-            <a:endParaRPr lang="en-US" sz="1200" dirty="0"/>
-          </a:p>
-        </p:txBody>
-      </p:sp>
-      <p:sp>
-        <p:nvSpPr>
-          <p:cNvPr id="20" name="Text 18"/>
-          <p:cNvSpPr/>
-          <p:nvPr/>
-        </p:nvSpPr>
-        <p:spPr>
-          <a:xfrm>
-            <a:off x="1115568" y="3566160"/>
-            <a:ext cx="7461504" cy="329184"/>
-          </a:xfrm>
-          <a:prstGeom prst="rect">
-            <a:avLst/>
-          </a:prstGeom>
-          <a:noFill/>
-          <a:ln/>
-        </p:spPr>
-        <p:txBody>
-          <a:bodyPr wrap="square" lIns="0" tIns="0" rIns="0" bIns="0" rtlCol="0" anchor="ctr"/>
-          <a:lstStyle/>
-          <a:p>
-            <a:pPr indent="0" marL="0">
-              <a:buNone/>
-            </a:pPr>
-            <a:r>
-              <a:rPr lang="en-US" sz="1200" dirty="0">
-                <a:solidFill>
-                  <a:srgbClr val="434A63"/>
-                </a:solidFill>
-                <a:latin typeface="Arial" pitchFamily="34" charset="0"/>
-                <a:ea typeface="Arial" pitchFamily="34" charset="-122"/>
-                <a:cs typeface="Arial" pitchFamily="34" charset="-120"/>
-              </a:rPr>
-              <a:t>Ein Speicher, den ein Server über iSCSI als eigenes Laufwerk sieht</a:t>
-            </a:r>
-            <a:endParaRPr lang="en-US" sz="1200" dirty="0"/>
-          </a:p>
-        </p:txBody>
-      </p:sp>
-      <p:sp>
-        <p:nvSpPr>
-          <p:cNvPr id="21" name="Shape 19"/>
-          <p:cNvSpPr/>
-          <p:nvPr/>
-        </p:nvSpPr>
-        <p:spPr>
-          <a:xfrm>
-            <a:off x="566928" y="4123944"/>
+      <p:pic>
+        <p:nvPicPr>
+          <p:cNvPr id="5" name="Image 0" descr="/Users/jacobmenge/Desktop/kurs-26.2b-orga/folienwerkstatt/assets/diagramme/speicher-backup.png">    </p:cNvPr>
+          <p:cNvPicPr>
+            <a:picLocks noChangeAspect="1"/>
+          </p:cNvPicPr>
+          <p:nvPr/>
+        </p:nvPicPr>
+        <p:blipFill>
+          <a:blip r:embed="rId1"/>
+          <a:stretch>
+            <a:fillRect/>
+          </a:stretch>
+        </p:blipFill>
+        <p:spPr>
+          <a:xfrm>
+            <a:off x="566928" y="1335024"/>
+            <a:ext cx="8010144" cy="2688336"/>
+          </a:xfrm>
+          <a:prstGeom prst="rect">
+            <a:avLst/>
+          </a:prstGeom>
+        </p:spPr>
+      </p:pic>
+      <p:sp>
+        <p:nvSpPr>
+          <p:cNvPr id="6" name="Shape 3"/>
+          <p:cNvSpPr/>
+          <p:nvPr/>
+        </p:nvSpPr>
+        <p:spPr>
+          <a:xfrm>
+            <a:off x="566928" y="4160520"/>
             <a:ext cx="32004" cy="256032"/>
           </a:xfrm>
           <a:prstGeom prst="rect">
@@ -3508,13 +3232,13 @@
       </p:sp>
       <p:sp>
         <p:nvSpPr>
-          <p:cNvPr id="22" name="Text 20"/>
-          <p:cNvSpPr/>
-          <p:nvPr/>
-        </p:nvSpPr>
-        <p:spPr>
-          <a:xfrm>
-            <a:off x="749808" y="4078224"/>
+          <p:cNvPr id="7" name="Text 4"/>
+          <p:cNvSpPr/>
+          <p:nvPr/>
+        </p:nvSpPr>
+        <p:spPr>
+          <a:xfrm>
+            <a:off x="749808" y="4114800"/>
             <a:ext cx="7827264" cy="402336"/>
           </a:xfrm>
           <a:prstGeom prst="rect">
@@ -3533,13 +3257,13 @@
             <a:r>
               <a:rPr lang="en-US" sz="1200" b="1" dirty="0">
                 <a:solidFill>
-                  <a:srgbClr val="5C6377"/>
-                </a:solidFill>
-                <a:latin typeface="Arial" pitchFamily="34" charset="0"/>
-                <a:ea typeface="Arial" pitchFamily="34" charset="-122"/>
-                <a:cs typeface="Arial" pitchFamily="34" charset="-120"/>
-              </a:rPr>
-              <a:t>Tipp: Fragt euch, wer zugreift und ob Dateien oder Blöcke ankommen.</a:t>
+                  <a:srgbClr val="434A63"/>
+                </a:solidFill>
+                <a:latin typeface="Arial" pitchFamily="34" charset="0"/>
+                <a:ea typeface="Arial" pitchFamily="34" charset="-122"/>
+                <a:cs typeface="Arial" pitchFamily="34" charset="-120"/>
+              </a:rPr>
+              <a:t>Bei Voltrad hatte seit drei Jahren niemand die Rücksicherung geprüft. Das war Befund 9.</a:t>
             </a:r>
             <a:endParaRPr lang="en-US" sz="1200" dirty="0"/>
           </a:p>
@@ -3547,7 +3271,7 @@
       </p:sp>
       <p:sp>
         <p:nvSpPr>
-          <p:cNvPr id="23" name="Shape 21"/>
+          <p:cNvPr id="8" name="Shape 5"/>
           <p:cNvSpPr/>
           <p:nvPr/>
         </p:nvSpPr>
@@ -3570,7 +3294,7 @@
       </p:sp>
       <p:sp>
         <p:nvSpPr>
-          <p:cNvPr id="24" name="Text 22"/>
+          <p:cNvPr id="9" name="Text 6"/>
           <p:cNvSpPr/>
           <p:nvPr/>
         </p:nvSpPr>
@@ -3609,7 +3333,7 @@
       </p:sp>
       <p:sp>
         <p:nvSpPr>
-          <p:cNvPr id="25" name="Text 23"/>
+          <p:cNvPr id="10" name="Text 7"/>
           <p:cNvSpPr/>
           <p:nvPr/>
         </p:nvSpPr>
@@ -3640,7 +3364,7 @@
                 <a:ea typeface="Arial" pitchFamily="34" charset="-122"/>
                 <a:cs typeface="Arial" pitchFamily="34" charset="-120"/>
               </a:rPr>
-              <a:t>8/16</a:t>
+              <a:t>8/19</a:t>
             </a:r>
             <a:endParaRPr lang="en-US" sz="1050" dirty="0"/>
           </a:p>
@@ -3731,7 +3455,7 @@
                 <a:ea typeface="Arial" pitchFamily="34" charset="-122"/>
                 <a:cs typeface="Arial" pitchFamily="34" charset="-120"/>
               </a:rPr>
-              <a:t>AUFLÖSUNG</a:t>
+              <a:t>DAS, NAS UND SAN</a:t>
             </a:r>
             <a:endParaRPr lang="en-US" sz="1150" dirty="0"/>
           </a:p>
@@ -3770,584 +3494,39 @@
                 <a:ea typeface="Arial" pitchFamily="34" charset="-122"/>
                 <a:cs typeface="Arial" pitchFamily="34" charset="-120"/>
               </a:rPr>
-              <a:t>Zuordnungsrunde</a:t>
+              <a:t>Wie angebunden?</a:t>
             </a:r>
             <a:endParaRPr lang="en-US" sz="2600" dirty="0"/>
           </a:p>
         </p:txBody>
       </p:sp>
-      <p:sp>
-        <p:nvSpPr>
-          <p:cNvPr id="5" name="Shape 3"/>
-          <p:cNvSpPr/>
-          <p:nvPr/>
-        </p:nvSpPr>
-        <p:spPr>
-          <a:xfrm>
-            <a:off x="566928" y="1572768"/>
-            <a:ext cx="2523744" cy="2048256"/>
-          </a:xfrm>
-          <a:prstGeom prst="rect">
-            <a:avLst/>
-          </a:prstGeom>
-          <a:solidFill>
-            <a:srgbClr val="F5F6FC"/>
-          </a:solidFill>
-          <a:ln/>
-        </p:spPr>
-      </p:sp>
-      <p:sp>
-        <p:nvSpPr>
-          <p:cNvPr id="6" name="Shape 4"/>
-          <p:cNvSpPr/>
-          <p:nvPr/>
-        </p:nvSpPr>
-        <p:spPr>
-          <a:xfrm>
-            <a:off x="566928" y="1572768"/>
-            <a:ext cx="41148" cy="2048256"/>
-          </a:xfrm>
-          <a:prstGeom prst="rect">
-            <a:avLst/>
-          </a:prstGeom>
-          <a:solidFill>
-            <a:srgbClr val="9A6310"/>
-          </a:solidFill>
-          <a:ln/>
-        </p:spPr>
-      </p:sp>
-      <p:sp>
-        <p:nvSpPr>
-          <p:cNvPr id="7" name="Text 5"/>
-          <p:cNvSpPr/>
-          <p:nvPr/>
-        </p:nvSpPr>
-        <p:spPr>
-          <a:xfrm>
-            <a:off x="804672" y="1719072"/>
-            <a:ext cx="2121408" cy="274320"/>
-          </a:xfrm>
-          <a:prstGeom prst="rect">
-            <a:avLst/>
-          </a:prstGeom>
-          <a:noFill/>
-          <a:ln/>
-        </p:spPr>
-        <p:txBody>
-          <a:bodyPr wrap="square" lIns="0" tIns="0" rIns="0" bIns="0" rtlCol="0" anchor="t"/>
-          <a:lstStyle/>
-          <a:p>
-            <a:pPr indent="0" marL="0">
-              <a:buNone/>
-            </a:pPr>
-            <a:r>
-              <a:rPr lang="en-US" sz="1300" b="1" dirty="0">
-                <a:solidFill>
-                  <a:srgbClr val="272E52"/>
-                </a:solidFill>
-                <a:latin typeface="Arial" pitchFamily="34" charset="0"/>
-                <a:ea typeface="Arial" pitchFamily="34" charset="-122"/>
-                <a:cs typeface="Arial" pitchFamily="34" charset="-120"/>
-              </a:rPr>
-              <a:t>DAS: A und D</a:t>
-            </a:r>
-            <a:endParaRPr lang="en-US" sz="1300" dirty="0"/>
-          </a:p>
-        </p:txBody>
-      </p:sp>
-      <p:sp>
-        <p:nvSpPr>
-          <p:cNvPr id="8" name="Text 6"/>
-          <p:cNvSpPr/>
-          <p:nvPr/>
-        </p:nvSpPr>
-        <p:spPr>
-          <a:xfrm>
-            <a:off x="804672" y="2039112"/>
-            <a:ext cx="2121408" cy="1463040"/>
-          </a:xfrm>
-          <a:prstGeom prst="rect">
-            <a:avLst/>
-          </a:prstGeom>
-          <a:noFill/>
-          <a:ln/>
-        </p:spPr>
-        <p:txBody>
-          <a:bodyPr wrap="square" lIns="0" tIns="0" rIns="0" bIns="0" rtlCol="0" anchor="t"/>
-          <a:lstStyle/>
-          <a:p>
-            <a:pPr indent="0" marL="0">
-              <a:lnSpc>
-                <a:spcPct val="92000"/>
-              </a:lnSpc>
-              <a:spcAft>
-                <a:spcPts val="500"/>
-              </a:spcAft>
-              <a:buNone/>
-            </a:pPr>
-            <a:r>
-              <a:rPr lang="en-US" sz="1150" dirty="0">
-                <a:solidFill>
-                  <a:srgbClr val="434A63"/>
-                </a:solidFill>
-                <a:latin typeface="Arial" pitchFamily="34" charset="0"/>
-                <a:ea typeface="Arial" pitchFamily="34" charset="-122"/>
-                <a:cs typeface="Arial" pitchFamily="34" charset="-120"/>
-              </a:rPr>
-              <a:t>A: USB-Platte am Laptop</a:t>
-            </a:r>
-            <a:endParaRPr lang="en-US" sz="1150" dirty="0"/>
-          </a:p>
-          <a:p>
-            <a:pPr indent="0" marL="0">
-              <a:lnSpc>
-                <a:spcPct val="92000"/>
-              </a:lnSpc>
-              <a:spcAft>
-                <a:spcPts val="500"/>
-              </a:spcAft>
-              <a:buNone/>
-            </a:pPr>
-            <a:r>
-              <a:rPr lang="en-US" sz="1150" dirty="0">
-                <a:solidFill>
-                  <a:srgbClr val="434A63"/>
-                </a:solidFill>
-                <a:latin typeface="Arial" pitchFamily="34" charset="0"/>
-                <a:ea typeface="Arial" pitchFamily="34" charset="-122"/>
-                <a:cs typeface="Arial" pitchFamily="34" charset="-120"/>
-              </a:rPr>
-              <a:t>D: Platten im Datenbankserver</a:t>
-            </a:r>
-            <a:endParaRPr lang="en-US" sz="1150" dirty="0"/>
-          </a:p>
-          <a:p>
-            <a:pPr indent="0" marL="0">
-              <a:lnSpc>
-                <a:spcPct val="92000"/>
-              </a:lnSpc>
-              <a:spcAft>
-                <a:spcPts val="500"/>
-              </a:spcAft>
-              <a:buNone/>
-            </a:pPr>
-            <a:r>
-              <a:rPr lang="en-US" sz="1150" dirty="0">
-                <a:solidFill>
-                  <a:srgbClr val="434A63"/>
-                </a:solidFill>
-                <a:latin typeface="Arial" pitchFamily="34" charset="0"/>
-                <a:ea typeface="Arial" pitchFamily="34" charset="-122"/>
-                <a:cs typeface="Arial" pitchFamily="34" charset="-120"/>
-              </a:rPr>
-              <a:t>Direkt an einem Gerät. Nur dieses Gerät kommt an die Daten.</a:t>
-            </a:r>
-            <a:endParaRPr lang="en-US" sz="1150" dirty="0"/>
-          </a:p>
-        </p:txBody>
-      </p:sp>
-      <p:sp>
-        <p:nvSpPr>
-          <p:cNvPr id="9" name="Shape 7"/>
-          <p:cNvSpPr/>
-          <p:nvPr/>
-        </p:nvSpPr>
-        <p:spPr>
-          <a:xfrm>
-            <a:off x="3310128" y="1572768"/>
-            <a:ext cx="2523744" cy="2048256"/>
-          </a:xfrm>
-          <a:prstGeom prst="rect">
-            <a:avLst/>
-          </a:prstGeom>
-          <a:solidFill>
-            <a:srgbClr val="F5F6FC"/>
-          </a:solidFill>
-          <a:ln/>
-        </p:spPr>
-      </p:sp>
-      <p:sp>
-        <p:nvSpPr>
-          <p:cNvPr id="10" name="Shape 8"/>
-          <p:cNvSpPr/>
-          <p:nvPr/>
-        </p:nvSpPr>
-        <p:spPr>
-          <a:xfrm>
-            <a:off x="3310128" y="1572768"/>
-            <a:ext cx="41148" cy="2048256"/>
-          </a:xfrm>
-          <a:prstGeom prst="rect">
-            <a:avLst/>
-          </a:prstGeom>
-          <a:solidFill>
-            <a:srgbClr val="0F7C86"/>
-          </a:solidFill>
-          <a:ln/>
-        </p:spPr>
-      </p:sp>
-      <p:sp>
-        <p:nvSpPr>
-          <p:cNvPr id="11" name="Text 9"/>
-          <p:cNvSpPr/>
-          <p:nvPr/>
-        </p:nvSpPr>
-        <p:spPr>
-          <a:xfrm>
-            <a:off x="3547872" y="1719072"/>
-            <a:ext cx="2121408" cy="274320"/>
-          </a:xfrm>
-          <a:prstGeom prst="rect">
-            <a:avLst/>
-          </a:prstGeom>
-          <a:noFill/>
-          <a:ln/>
-        </p:spPr>
-        <p:txBody>
-          <a:bodyPr wrap="square" lIns="0" tIns="0" rIns="0" bIns="0" rtlCol="0" anchor="t"/>
-          <a:lstStyle/>
-          <a:p>
-            <a:pPr indent="0" marL="0">
-              <a:buNone/>
-            </a:pPr>
-            <a:r>
-              <a:rPr lang="en-US" sz="1300" b="1" dirty="0">
-                <a:solidFill>
-                  <a:srgbClr val="272E52"/>
-                </a:solidFill>
-                <a:latin typeface="Arial" pitchFamily="34" charset="0"/>
-                <a:ea typeface="Arial" pitchFamily="34" charset="-122"/>
-                <a:cs typeface="Arial" pitchFamily="34" charset="-120"/>
-              </a:rPr>
-              <a:t>NAS: B und E</a:t>
-            </a:r>
-            <a:endParaRPr lang="en-US" sz="1300" dirty="0"/>
-          </a:p>
-        </p:txBody>
-      </p:sp>
-      <p:sp>
-        <p:nvSpPr>
-          <p:cNvPr id="12" name="Text 10"/>
-          <p:cNvSpPr/>
-          <p:nvPr/>
-        </p:nvSpPr>
-        <p:spPr>
-          <a:xfrm>
-            <a:off x="3547872" y="2039112"/>
-            <a:ext cx="2121408" cy="1463040"/>
-          </a:xfrm>
-          <a:prstGeom prst="rect">
-            <a:avLst/>
-          </a:prstGeom>
-          <a:noFill/>
-          <a:ln/>
-        </p:spPr>
-        <p:txBody>
-          <a:bodyPr wrap="square" lIns="0" tIns="0" rIns="0" bIns="0" rtlCol="0" anchor="t"/>
-          <a:lstStyle/>
-          <a:p>
-            <a:pPr indent="0" marL="0">
-              <a:lnSpc>
-                <a:spcPct val="92000"/>
-              </a:lnSpc>
-              <a:spcAft>
-                <a:spcPts val="500"/>
-              </a:spcAft>
-              <a:buNone/>
-            </a:pPr>
-            <a:r>
-              <a:rPr lang="en-US" sz="1150" dirty="0">
-                <a:solidFill>
-                  <a:srgbClr val="434A63"/>
-                </a:solidFill>
-                <a:latin typeface="Arial" pitchFamily="34" charset="0"/>
-                <a:ea typeface="Arial" pitchFamily="34" charset="-122"/>
-                <a:cs typeface="Arial" pitchFamily="34" charset="-120"/>
-              </a:rPr>
-              <a:t>B: Team-Ordner im Büronetz</a:t>
-            </a:r>
-            <a:endParaRPr lang="en-US" sz="1150" dirty="0"/>
-          </a:p>
-          <a:p>
-            <a:pPr indent="0" marL="0">
-              <a:lnSpc>
-                <a:spcPct val="92000"/>
-              </a:lnSpc>
-              <a:spcAft>
-                <a:spcPts val="500"/>
-              </a:spcAft>
-              <a:buNone/>
-            </a:pPr>
-            <a:r>
-              <a:rPr lang="en-US" sz="1150" dirty="0">
-                <a:solidFill>
-                  <a:srgbClr val="434A63"/>
-                </a:solidFill>
-                <a:latin typeface="Arial" pitchFamily="34" charset="0"/>
-                <a:ea typeface="Arial" pitchFamily="34" charset="-122"/>
-                <a:cs typeface="Arial" pitchFamily="34" charset="-120"/>
-              </a:rPr>
-              <a:t>E: Scans im Büro</a:t>
-            </a:r>
-            <a:endParaRPr lang="en-US" sz="1150" dirty="0"/>
-          </a:p>
-          <a:p>
-            <a:pPr indent="0" marL="0">
-              <a:lnSpc>
-                <a:spcPct val="92000"/>
-              </a:lnSpc>
-              <a:spcAft>
-                <a:spcPts val="500"/>
-              </a:spcAft>
-              <a:buNone/>
-            </a:pPr>
-            <a:r>
-              <a:rPr lang="en-US" sz="1150" dirty="0">
-                <a:solidFill>
-                  <a:srgbClr val="434A63"/>
-                </a:solidFill>
-                <a:latin typeface="Arial" pitchFamily="34" charset="0"/>
-                <a:ea typeface="Arial" pitchFamily="34" charset="-122"/>
-                <a:cs typeface="Arial" pitchFamily="34" charset="-120"/>
-              </a:rPr>
-              <a:t>Ein Gerät im normalen Netz gibt Ordner frei. Viele teilen sich Dateien.</a:t>
-            </a:r>
-            <a:endParaRPr lang="en-US" sz="1150" dirty="0"/>
-          </a:p>
-        </p:txBody>
-      </p:sp>
-      <p:sp>
-        <p:nvSpPr>
-          <p:cNvPr id="13" name="Shape 11"/>
-          <p:cNvSpPr/>
-          <p:nvPr/>
-        </p:nvSpPr>
-        <p:spPr>
-          <a:xfrm>
-            <a:off x="6053328" y="1572768"/>
-            <a:ext cx="2523744" cy="2048256"/>
-          </a:xfrm>
-          <a:prstGeom prst="rect">
-            <a:avLst/>
-          </a:prstGeom>
-          <a:solidFill>
-            <a:srgbClr val="F5F6FC"/>
-          </a:solidFill>
-          <a:ln/>
-        </p:spPr>
-      </p:sp>
-      <p:sp>
-        <p:nvSpPr>
-          <p:cNvPr id="14" name="Shape 12"/>
-          <p:cNvSpPr/>
-          <p:nvPr/>
-        </p:nvSpPr>
-        <p:spPr>
-          <a:xfrm>
-            <a:off x="6053328" y="1572768"/>
-            <a:ext cx="41148" cy="2048256"/>
-          </a:xfrm>
-          <a:prstGeom prst="rect">
-            <a:avLst/>
-          </a:prstGeom>
-          <a:solidFill>
-            <a:srgbClr val="3843AF"/>
-          </a:solidFill>
-          <a:ln/>
-        </p:spPr>
-      </p:sp>
-      <p:sp>
-        <p:nvSpPr>
-          <p:cNvPr id="15" name="Text 13"/>
-          <p:cNvSpPr/>
-          <p:nvPr/>
-        </p:nvSpPr>
-        <p:spPr>
-          <a:xfrm>
-            <a:off x="6291072" y="1719072"/>
-            <a:ext cx="2121408" cy="274320"/>
-          </a:xfrm>
-          <a:prstGeom prst="rect">
-            <a:avLst/>
-          </a:prstGeom>
-          <a:noFill/>
-          <a:ln/>
-        </p:spPr>
-        <p:txBody>
-          <a:bodyPr wrap="square" lIns="0" tIns="0" rIns="0" bIns="0" rtlCol="0" anchor="t"/>
-          <a:lstStyle/>
-          <a:p>
-            <a:pPr indent="0" marL="0">
-              <a:buNone/>
-            </a:pPr>
-            <a:r>
-              <a:rPr lang="en-US" sz="1300" b="1" dirty="0">
-                <a:solidFill>
-                  <a:srgbClr val="272E52"/>
-                </a:solidFill>
-                <a:latin typeface="Arial" pitchFamily="34" charset="0"/>
-                <a:ea typeface="Arial" pitchFamily="34" charset="-122"/>
-                <a:cs typeface="Arial" pitchFamily="34" charset="-120"/>
-              </a:rPr>
-              <a:t>SAN: C und F</a:t>
-            </a:r>
-            <a:endParaRPr lang="en-US" sz="1300" dirty="0"/>
-          </a:p>
-        </p:txBody>
-      </p:sp>
-      <p:sp>
-        <p:nvSpPr>
-          <p:cNvPr id="16" name="Text 14"/>
-          <p:cNvSpPr/>
-          <p:nvPr/>
-        </p:nvSpPr>
-        <p:spPr>
-          <a:xfrm>
-            <a:off x="6291072" y="2039112"/>
-            <a:ext cx="2121408" cy="1463040"/>
-          </a:xfrm>
-          <a:prstGeom prst="rect">
-            <a:avLst/>
-          </a:prstGeom>
-          <a:noFill/>
-          <a:ln/>
-        </p:spPr>
-        <p:txBody>
-          <a:bodyPr wrap="square" lIns="0" tIns="0" rIns="0" bIns="0" rtlCol="0" anchor="t"/>
-          <a:lstStyle/>
-          <a:p>
-            <a:pPr indent="0" marL="0">
-              <a:lnSpc>
-                <a:spcPct val="92000"/>
-              </a:lnSpc>
-              <a:spcAft>
-                <a:spcPts val="500"/>
-              </a:spcAft>
-              <a:buNone/>
-            </a:pPr>
-            <a:r>
-              <a:rPr lang="en-US" sz="1150" dirty="0">
-                <a:solidFill>
-                  <a:srgbClr val="434A63"/>
-                </a:solidFill>
-                <a:latin typeface="Arial" pitchFamily="34" charset="0"/>
-                <a:ea typeface="Arial" pitchFamily="34" charset="-122"/>
-                <a:cs typeface="Arial" pitchFamily="34" charset="-120"/>
-              </a:rPr>
-              <a:t>C: Hosts mit wechselnden VMs</a:t>
-            </a:r>
-            <a:endParaRPr lang="en-US" sz="1150" dirty="0"/>
-          </a:p>
-          <a:p>
-            <a:pPr indent="0" marL="0">
-              <a:lnSpc>
-                <a:spcPct val="92000"/>
-              </a:lnSpc>
-              <a:spcAft>
-                <a:spcPts val="500"/>
-              </a:spcAft>
-              <a:buNone/>
-            </a:pPr>
-            <a:r>
-              <a:rPr lang="en-US" sz="1150" dirty="0">
-                <a:solidFill>
-                  <a:srgbClr val="434A63"/>
-                </a:solidFill>
-                <a:latin typeface="Arial" pitchFamily="34" charset="0"/>
-                <a:ea typeface="Arial" pitchFamily="34" charset="-122"/>
-                <a:cs typeface="Arial" pitchFamily="34" charset="-120"/>
-              </a:rPr>
-              <a:t>F: Laufwerk über iSCSI</a:t>
-            </a:r>
-            <a:endParaRPr lang="en-US" sz="1150" dirty="0"/>
-          </a:p>
-          <a:p>
-            <a:pPr indent="0" marL="0">
-              <a:lnSpc>
-                <a:spcPct val="92000"/>
-              </a:lnSpc>
-              <a:spcAft>
-                <a:spcPts val="500"/>
-              </a:spcAft>
-              <a:buNone/>
-            </a:pPr>
-            <a:r>
-              <a:rPr lang="en-US" sz="1150" dirty="0">
-                <a:solidFill>
-                  <a:srgbClr val="434A63"/>
-                </a:solidFill>
-                <a:latin typeface="Arial" pitchFamily="34" charset="0"/>
-                <a:ea typeface="Arial" pitchFamily="34" charset="-122"/>
-                <a:cs typeface="Arial" pitchFamily="34" charset="-120"/>
-              </a:rPr>
-              <a:t>Eigenes Speichernetz. Jeder Host sieht Blöcke wie eine eigene Platte.</a:t>
-            </a:r>
-            <a:endParaRPr lang="en-US" sz="1150" dirty="0"/>
-          </a:p>
-        </p:txBody>
-      </p:sp>
-      <p:sp>
-        <p:nvSpPr>
-          <p:cNvPr id="17" name="Shape 15"/>
-          <p:cNvSpPr/>
-          <p:nvPr/>
-        </p:nvSpPr>
-        <p:spPr>
-          <a:xfrm>
-            <a:off x="566928" y="3922776"/>
-            <a:ext cx="32004" cy="256032"/>
-          </a:xfrm>
-          <a:prstGeom prst="rect">
-            <a:avLst/>
-          </a:prstGeom>
-          <a:solidFill>
-            <a:srgbClr val="0F7C86"/>
-          </a:solidFill>
-          <a:ln/>
-        </p:spPr>
-      </p:sp>
-      <p:sp>
-        <p:nvSpPr>
-          <p:cNvPr id="18" name="Text 16"/>
-          <p:cNvSpPr/>
-          <p:nvPr/>
-        </p:nvSpPr>
-        <p:spPr>
-          <a:xfrm>
-            <a:off x="749808" y="3877056"/>
-            <a:ext cx="7827264" cy="402336"/>
-          </a:xfrm>
-          <a:prstGeom prst="rect">
-            <a:avLst/>
-          </a:prstGeom>
-          <a:noFill/>
-          <a:ln/>
-        </p:spPr>
-        <p:txBody>
-          <a:bodyPr wrap="square" lIns="0" tIns="0" rIns="0" bIns="0" rtlCol="0" anchor="ctr"/>
-          <a:lstStyle/>
-          <a:p>
-            <a:pPr indent="0" marL="0">
-              <a:buNone/>
-            </a:pPr>
-            <a:r>
-              <a:rPr lang="en-US" sz="1200" b="1" dirty="0">
-                <a:solidFill>
-                  <a:srgbClr val="434A63"/>
-                </a:solidFill>
-                <a:latin typeface="Arial" pitchFamily="34" charset="0"/>
-                <a:ea typeface="Arial" pitchFamily="34" charset="-122"/>
-                <a:cs typeface="Arial" pitchFamily="34" charset="-120"/>
-              </a:rPr>
-              <a:t>Streitfälle: C geht auch mit NFS-Freigaben, F kann ein NAS mit iSCSI sein. Es zählt, was ankommt: Blöcke oder Dateien.</a:t>
-            </a:r>
-            <a:endParaRPr lang="en-US" sz="1200" dirty="0"/>
-          </a:p>
-        </p:txBody>
-      </p:sp>
-      <p:sp>
-        <p:nvSpPr>
-          <p:cNvPr id="19" name="Shape 17"/>
+      <p:pic>
+        <p:nvPicPr>
+          <p:cNvPr id="5" name="Image 0" descr="/Users/jacobmenge/Desktop/kurs-26.2b-orga/folienwerkstatt/assets/diagramme/speicher-anbindung-klar.png">    </p:cNvPr>
+          <p:cNvPicPr>
+            <a:picLocks noChangeAspect="1"/>
+          </p:cNvPicPr>
+          <p:nvPr/>
+        </p:nvPicPr>
+        <p:blipFill>
+          <a:blip r:embed="rId1"/>
+          <a:stretch>
+            <a:fillRect/>
+          </a:stretch>
+        </p:blipFill>
+        <p:spPr>
+          <a:xfrm>
+            <a:off x="566928" y="1316736"/>
+            <a:ext cx="8010144" cy="2743200"/>
+          </a:xfrm>
+          <a:prstGeom prst="rect">
+            <a:avLst/>
+          </a:prstGeom>
+        </p:spPr>
+      </p:pic>
+      <p:sp>
+        <p:nvSpPr>
+          <p:cNvPr id="6" name="Shape 3"/>
           <p:cNvSpPr/>
           <p:nvPr/>
         </p:nvSpPr>
@@ -4370,7 +3549,7 @@
       </p:sp>
       <p:sp>
         <p:nvSpPr>
-          <p:cNvPr id="20" name="Text 18"/>
+          <p:cNvPr id="7" name="Text 4"/>
           <p:cNvSpPr/>
           <p:nvPr/>
         </p:nvSpPr>
@@ -4409,7 +3588,7 @@
       </p:sp>
       <p:sp>
         <p:nvSpPr>
-          <p:cNvPr id="21" name="Text 19"/>
+          <p:cNvPr id="8" name="Text 5"/>
           <p:cNvSpPr/>
           <p:nvPr/>
         </p:nvSpPr>
@@ -4440,7 +3619,7 @@
                 <a:ea typeface="Arial" pitchFamily="34" charset="-122"/>
                 <a:cs typeface="Arial" pitchFamily="34" charset="-120"/>
               </a:rPr>
-              <a:t>9/16</a:t>
+              <a:t>9/19</a:t>
             </a:r>
             <a:endParaRPr lang="en-US" sz="1050" dirty="0"/>
           </a:p>
@@ -4486,48 +3665,150 @@
         </p:nvSpPr>
         <p:spPr>
           <a:xfrm>
-            <a:off x="6355080" y="0"/>
-            <a:ext cx="2788920" cy="5143500"/>
+            <a:off x="566928" y="201168"/>
+            <a:ext cx="475488" cy="50292"/>
           </a:xfrm>
           <a:prstGeom prst="rect">
             <a:avLst/>
           </a:prstGeom>
           <a:solidFill>
-            <a:srgbClr val="EEF0FB"/>
+            <a:srgbClr val="0F7C86"/>
           </a:solidFill>
           <a:ln/>
         </p:spPr>
       </p:sp>
       <p:sp>
         <p:nvSpPr>
-          <p:cNvPr id="3" name="Shape 1"/>
-          <p:cNvSpPr/>
-          <p:nvPr/>
-        </p:nvSpPr>
-        <p:spPr>
-          <a:xfrm>
-            <a:off x="6355080" y="0"/>
-            <a:ext cx="45720" cy="5143500"/>
+          <p:cNvPr id="3" name="Text 1"/>
+          <p:cNvSpPr/>
+          <p:nvPr/>
+        </p:nvSpPr>
+        <p:spPr>
+          <a:xfrm>
+            <a:off x="566928" y="384048"/>
+            <a:ext cx="8010144" cy="237744"/>
+          </a:xfrm>
+          <a:prstGeom prst="rect">
+            <a:avLst/>
+          </a:prstGeom>
+          <a:noFill/>
+          <a:ln/>
+        </p:spPr>
+        <p:txBody>
+          <a:bodyPr wrap="square" lIns="0" tIns="0" rIns="0" bIns="0" rtlCol="0" anchor="ctr"/>
+          <a:lstStyle/>
+          <a:p>
+            <a:pPr indent="0" marL="0">
+              <a:buNone/>
+            </a:pPr>
+            <a:r>
+              <a:rPr lang="en-US" sz="1150" b="1" spc="180" kern="0" dirty="0">
+                <a:solidFill>
+                  <a:srgbClr val="0F7C86"/>
+                </a:solidFill>
+                <a:latin typeface="Arial" pitchFamily="34" charset="0"/>
+                <a:ea typeface="Arial" pitchFamily="34" charset="-122"/>
+                <a:cs typeface="Arial" pitchFamily="34" charset="-120"/>
+              </a:rPr>
+              <a:t>DER EIGENTLICHE UNTERSCHIED ZWISCHEN NAS UND SAN</a:t>
+            </a:r>
+            <a:endParaRPr lang="en-US" sz="1150" dirty="0"/>
+          </a:p>
+        </p:txBody>
+      </p:sp>
+      <p:sp>
+        <p:nvSpPr>
+          <p:cNvPr id="4" name="Text 2"/>
+          <p:cNvSpPr/>
+          <p:nvPr/>
+        </p:nvSpPr>
+        <p:spPr>
+          <a:xfrm>
+            <a:off x="566928" y="731520"/>
+            <a:ext cx="8010144" cy="603504"/>
+          </a:xfrm>
+          <a:prstGeom prst="rect">
+            <a:avLst/>
+          </a:prstGeom>
+          <a:noFill/>
+          <a:ln/>
+        </p:spPr>
+        <p:txBody>
+          <a:bodyPr wrap="square" lIns="0" tIns="0" rIns="0" bIns="0" rtlCol="0" anchor="t"/>
+          <a:lstStyle/>
+          <a:p>
+            <a:pPr indent="0" marL="0">
+              <a:buNone/>
+            </a:pPr>
+            <a:r>
+              <a:rPr lang="en-US" sz="2600" b="1" dirty="0">
+                <a:solidFill>
+                  <a:srgbClr val="272E52"/>
+                </a:solidFill>
+                <a:latin typeface="Arial" pitchFamily="34" charset="0"/>
+                <a:ea typeface="Arial" pitchFamily="34" charset="-122"/>
+                <a:cs typeface="Arial" pitchFamily="34" charset="-120"/>
+              </a:rPr>
+              <a:t>Dateien oder Blöcke?</a:t>
+            </a:r>
+            <a:endParaRPr lang="en-US" sz="2600" dirty="0"/>
+          </a:p>
+        </p:txBody>
+      </p:sp>
+      <p:pic>
+        <p:nvPicPr>
+          <p:cNvPr id="5" name="Image 0" descr="/Users/jacobmenge/Desktop/kurs-26.2b-orga/folienwerkstatt/assets/diagramme/speicher-dateien-bloecke.png">    </p:cNvPr>
+          <p:cNvPicPr>
+            <a:picLocks noChangeAspect="1"/>
+          </p:cNvPicPr>
+          <p:nvPr/>
+        </p:nvPicPr>
+        <p:blipFill>
+          <a:blip r:embed="rId1"/>
+          <a:stretch>
+            <a:fillRect/>
+          </a:stretch>
+        </p:blipFill>
+        <p:spPr>
+          <a:xfrm>
+            <a:off x="566928" y="1335024"/>
+            <a:ext cx="8010144" cy="2651760"/>
+          </a:xfrm>
+          <a:prstGeom prst="rect">
+            <a:avLst/>
+          </a:prstGeom>
+        </p:spPr>
+      </p:pic>
+      <p:sp>
+        <p:nvSpPr>
+          <p:cNvPr id="6" name="Shape 3"/>
+          <p:cNvSpPr/>
+          <p:nvPr/>
+        </p:nvSpPr>
+        <p:spPr>
+          <a:xfrm>
+            <a:off x="566928" y="4160520"/>
+            <a:ext cx="32004" cy="256032"/>
           </a:xfrm>
           <a:prstGeom prst="rect">
             <a:avLst/>
           </a:prstGeom>
           <a:solidFill>
-            <a:srgbClr val="3843AF"/>
+            <a:srgbClr val="0F7C86"/>
           </a:solidFill>
           <a:ln/>
         </p:spPr>
       </p:sp>
       <p:sp>
         <p:nvSpPr>
-          <p:cNvPr id="4" name="Text 2"/>
-          <p:cNvSpPr/>
-          <p:nvPr/>
-        </p:nvSpPr>
-        <p:spPr>
-          <a:xfrm>
-            <a:off x="6629400" y="1463040"/>
-            <a:ext cx="2194560" cy="1737360"/>
+          <p:cNvPr id="7" name="Text 4"/>
+          <p:cNvSpPr/>
+          <p:nvPr/>
+        </p:nvSpPr>
+        <p:spPr>
+          <a:xfrm>
+            <a:off x="749808" y="4114800"/>
+            <a:ext cx="7827264" cy="402336"/>
           </a:xfrm>
           <a:prstGeom prst="rect">
             <a:avLst/>
@@ -4539,109 +3820,73 @@
           <a:bodyPr wrap="square" lIns="0" tIns="0" rIns="0" bIns="0" rtlCol="0" anchor="ctr"/>
           <a:lstStyle/>
           <a:p>
-            <a:pPr algn="ctr" indent="0" marL="0">
-              <a:buNone/>
-            </a:pPr>
-            <a:r>
-              <a:rPr lang="en-US" sz="8400" b="1" dirty="0">
-                <a:solidFill>
-                  <a:srgbClr val="3843AF"/>
-                </a:solidFill>
-                <a:latin typeface="Arial" pitchFamily="34" charset="0"/>
-                <a:ea typeface="Arial" pitchFamily="34" charset="-122"/>
-                <a:cs typeface="Arial" pitchFamily="34" charset="-120"/>
-              </a:rPr>
-              <a:t>02</a:t>
-            </a:r>
-            <a:endParaRPr lang="en-US" sz="8400" dirty="0"/>
-          </a:p>
-        </p:txBody>
-      </p:sp>
-      <p:sp>
-        <p:nvSpPr>
-          <p:cNvPr id="5" name="Shape 3"/>
-          <p:cNvSpPr/>
-          <p:nvPr/>
-        </p:nvSpPr>
-        <p:spPr>
-          <a:xfrm>
-            <a:off x="566928" y="1883664"/>
-            <a:ext cx="475488" cy="50292"/>
-          </a:xfrm>
-          <a:prstGeom prst="rect">
-            <a:avLst/>
-          </a:prstGeom>
-          <a:solidFill>
-            <a:srgbClr val="3843AF"/>
-          </a:solidFill>
-          <a:ln/>
-        </p:spPr>
-      </p:sp>
-      <p:sp>
-        <p:nvSpPr>
-          <p:cNvPr id="6" name="Text 4"/>
-          <p:cNvSpPr/>
-          <p:nvPr/>
-        </p:nvSpPr>
-        <p:spPr>
-          <a:xfrm>
-            <a:off x="566928" y="2084832"/>
-            <a:ext cx="5394960" cy="868680"/>
-          </a:xfrm>
-          <a:prstGeom prst="rect">
-            <a:avLst/>
-          </a:prstGeom>
-          <a:noFill/>
-          <a:ln/>
-        </p:spPr>
-        <p:txBody>
-          <a:bodyPr wrap="square" lIns="0" tIns="0" rIns="0" bIns="0" rtlCol="0" anchor="t"/>
-          <a:lstStyle/>
-          <a:p>
-            <a:pPr indent="0" marL="0">
-              <a:buNone/>
-            </a:pPr>
-            <a:r>
-              <a:rPr lang="en-US" sz="3000" b="1" dirty="0">
-                <a:solidFill>
-                  <a:srgbClr val="272E52"/>
-                </a:solidFill>
-                <a:latin typeface="Arial" pitchFamily="34" charset="0"/>
-                <a:ea typeface="Arial" pitchFamily="34" charset="-122"/>
-                <a:cs typeface="Arial" pitchFamily="34" charset="-120"/>
-              </a:rPr>
-              <a:t>Heute plant ihr</a:t>
-            </a:r>
-            <a:endParaRPr lang="en-US" sz="3000" dirty="0"/>
-          </a:p>
-        </p:txBody>
-      </p:sp>
-      <p:sp>
-        <p:nvSpPr>
-          <p:cNvPr id="7" name="Text 5"/>
-          <p:cNvSpPr/>
-          <p:nvPr/>
-        </p:nvSpPr>
-        <p:spPr>
-          <a:xfrm>
-            <a:off x="566928" y="3017520"/>
-            <a:ext cx="5394960" cy="548640"/>
-          </a:xfrm>
-          <a:prstGeom prst="rect">
-            <a:avLst/>
-          </a:prstGeom>
-          <a:noFill/>
-          <a:ln/>
-        </p:spPr>
-        <p:txBody>
-          <a:bodyPr wrap="square" lIns="0" tIns="0" rIns="0" bIns="0" rtlCol="0" anchor="t"/>
-          <a:lstStyle/>
-          <a:p>
-            <a:pPr indent="0" marL="0">
-              <a:buNone/>
-            </a:pPr>
-            <a:r>
-              <a:rPr lang="en-US" sz="1350" dirty="0">
+            <a:pPr indent="0" marL="0">
+              <a:buNone/>
+            </a:pPr>
+            <a:r>
+              <a:rPr lang="en-US" sz="1200" b="1" dirty="0">
+                <a:solidFill>
+                  <a:srgbClr val="434A63"/>
+                </a:solidFill>
+                <a:latin typeface="Arial" pitchFamily="34" charset="0"/>
+                <a:ea typeface="Arial" pitchFamily="34" charset="-122"/>
+                <a:cs typeface="Arial" pitchFamily="34" charset="-120"/>
+              </a:rPr>
+              <a:t>Bei Voltrad sollen sich zwei Hosts vertreten können. Was brauchen sie: Dateien oder Blöcke?</a:t>
+            </a:r>
+            <a:endParaRPr lang="en-US" sz="1200" dirty="0"/>
+          </a:p>
+        </p:txBody>
+      </p:sp>
+      <p:sp>
+        <p:nvSpPr>
+          <p:cNvPr id="8" name="Shape 5"/>
+          <p:cNvSpPr/>
+          <p:nvPr/>
+        </p:nvSpPr>
+        <p:spPr>
+          <a:xfrm>
+            <a:off x="566928" y="4631436"/>
+            <a:ext cx="8010144" cy="0"/>
+          </a:xfrm>
+          <a:prstGeom prst="line">
+            <a:avLst/>
+          </a:prstGeom>
+          <a:noFill/>
+          <a:ln w="9525">
+            <a:solidFill>
+              <a:srgbClr val="DFE3F0"/>
+            </a:solidFill>
+            <a:prstDash val="solid"/>
+          </a:ln>
+        </p:spPr>
+      </p:sp>
+      <p:sp>
+        <p:nvSpPr>
+          <p:cNvPr id="9" name="Text 6"/>
+          <p:cNvSpPr/>
+          <p:nvPr/>
+        </p:nvSpPr>
+        <p:spPr>
+          <a:xfrm>
+            <a:off x="566928" y="4722876"/>
+            <a:ext cx="5029200" cy="237744"/>
+          </a:xfrm>
+          <a:prstGeom prst="rect">
+            <a:avLst/>
+          </a:prstGeom>
+          <a:noFill/>
+          <a:ln/>
+        </p:spPr>
+        <p:txBody>
+          <a:bodyPr wrap="square" lIns="0" tIns="0" rIns="0" bIns="0" rtlCol="0" anchor="ctr"/>
+          <a:lstStyle/>
+          <a:p>
+            <a:pPr indent="0" marL="0">
+              <a:buNone/>
+            </a:pPr>
+            <a:r>
+              <a:rPr lang="en-US" sz="1050" spc="30" kern="0" dirty="0">
                 <a:solidFill>
                   <a:srgbClr val="5C6377"/>
                 </a:solidFill>
@@ -4649,9 +3894,48 @@
                 <a:ea typeface="Arial" pitchFamily="34" charset="-122"/>
                 <a:cs typeface="Arial" pitchFamily="34" charset="-120"/>
               </a:rPr>
-              <a:t>Speicher für Voltrad</a:t>
-            </a:r>
-            <a:endParaRPr lang="en-US" sz="1350" dirty="0"/>
+              <a:t>Speicher planen</a:t>
+            </a:r>
+            <a:endParaRPr lang="en-US" sz="1050" dirty="0"/>
+          </a:p>
+        </p:txBody>
+      </p:sp>
+      <p:sp>
+        <p:nvSpPr>
+          <p:cNvPr id="10" name="Text 7"/>
+          <p:cNvSpPr/>
+          <p:nvPr/>
+        </p:nvSpPr>
+        <p:spPr>
+          <a:xfrm>
+            <a:off x="8028432" y="4722876"/>
+            <a:ext cx="548640" cy="237744"/>
+          </a:xfrm>
+          <a:prstGeom prst="rect">
+            <a:avLst/>
+          </a:prstGeom>
+          <a:noFill/>
+          <a:ln/>
+        </p:spPr>
+        <p:txBody>
+          <a:bodyPr wrap="square" lIns="0" tIns="0" rIns="0" bIns="0" rtlCol="0" anchor="ctr"/>
+          <a:lstStyle/>
+          <a:p>
+            <a:pPr algn="r" indent="0" marL="0">
+              <a:buNone/>
+            </a:pPr>
+            <a:r>
+              <a:rPr lang="en-US" sz="1050" dirty="0">
+                <a:solidFill>
+                  <a:srgbClr val="5C6377"/>
+                </a:solidFill>
+                <a:latin typeface="Arial" pitchFamily="34" charset="0"/>
+                <a:ea typeface="Arial" pitchFamily="34" charset="-122"/>
+                <a:cs typeface="Arial" pitchFamily="34" charset="-120"/>
+              </a:rPr>
+              <a:t>10/19</a:t>
+            </a:r>
+            <a:endParaRPr lang="en-US" sz="1050" dirty="0"/>
           </a:p>
         </p:txBody>
       </p:sp>
@@ -4702,7 +3986,7 @@
             <a:avLst/>
           </a:prstGeom>
           <a:solidFill>
-            <a:srgbClr val="3843AF"/>
+            <a:srgbClr val="0F7C86"/>
           </a:solidFill>
           <a:ln/>
         </p:spPr>
@@ -4734,13 +4018,13 @@
             <a:r>
               <a:rPr lang="en-US" sz="1150" b="1" spc="180" kern="0" dirty="0">
                 <a:solidFill>
-                  <a:srgbClr val="3843AF"/>
-                </a:solidFill>
-                <a:latin typeface="Arial" pitchFamily="34" charset="0"/>
-                <a:ea typeface="Arial" pitchFamily="34" charset="-122"/>
-                <a:cs typeface="Arial" pitchFamily="34" charset="-120"/>
-              </a:rPr>
-              <a:t>EINE KARTE, DREI FRAGEN</a:t>
+                  <a:srgbClr val="0F7C86"/>
+                </a:solidFill>
+                <a:latin typeface="Arial" pitchFamily="34" charset="0"/>
+                <a:ea typeface="Arial" pitchFamily="34" charset="-122"/>
+                <a:cs typeface="Arial" pitchFamily="34" charset="-120"/>
+              </a:rPr>
+              <a:t>DAS, NAS ODER SAN? ANTWORTEN IN DEN CHAT</a:t>
             </a:r>
             <a:endParaRPr lang="en-US" sz="1150" dirty="0"/>
           </a:p>
@@ -4779,39 +4063,726 @@
                 <a:ea typeface="Arial" pitchFamily="34" charset="-122"/>
                 <a:cs typeface="Arial" pitchFamily="34" charset="-120"/>
               </a:rPr>
-              <a:t>Euer Auftrag</a:t>
+              <a:t>Zuordnungsrunde</a:t>
             </a:r>
             <a:endParaRPr lang="en-US" sz="2600" dirty="0"/>
           </a:p>
         </p:txBody>
       </p:sp>
-      <p:pic>
-        <p:nvPicPr>
-          <p:cNvPr id="5" name="Image 0" descr="/Users/jacobmenge/Desktop/kurs-26.2b-orga/folienwerkstatt/assets/diagramme/speicher-auftrag.png">    </p:cNvPr>
-          <p:cNvPicPr>
-            <a:picLocks noChangeAspect="1"/>
-          </p:cNvPicPr>
-          <p:nvPr/>
-        </p:nvPicPr>
-        <p:blipFill>
-          <a:blip r:embed="rId1"/>
-          <a:stretch>
-            <a:fillRect/>
-          </a:stretch>
-        </p:blipFill>
-        <p:spPr>
-          <a:xfrm>
-            <a:off x="566928" y="1335024"/>
-            <a:ext cx="8010144" cy="2743200"/>
-          </a:xfrm>
-          <a:prstGeom prst="rect">
-            <a:avLst/>
-          </a:prstGeom>
-        </p:spPr>
-      </p:pic>
-      <p:sp>
-        <p:nvSpPr>
-          <p:cNvPr id="6" name="Shape 3"/>
+      <p:sp>
+        <p:nvSpPr>
+          <p:cNvPr id="5" name="Text 3"/>
+          <p:cNvSpPr/>
+          <p:nvPr/>
+        </p:nvSpPr>
+        <p:spPr>
+          <a:xfrm>
+            <a:off x="566928" y="1444752"/>
+            <a:ext cx="8010144" cy="438912"/>
+          </a:xfrm>
+          <a:prstGeom prst="rect">
+            <a:avLst/>
+          </a:prstGeom>
+          <a:noFill/>
+          <a:ln/>
+        </p:spPr>
+        <p:txBody>
+          <a:bodyPr wrap="square" lIns="0" tIns="0" rIns="0" bIns="0" rtlCol="0" anchor="t"/>
+          <a:lstStyle/>
+          <a:p>
+            <a:pPr indent="0" marL="0">
+              <a:buNone/>
+            </a:pPr>
+            <a:r>
+              <a:rPr lang="en-US" sz="1300" dirty="0">
+                <a:solidFill>
+                  <a:srgbClr val="5C6377"/>
+                </a:solidFill>
+                <a:latin typeface="Arial" pitchFamily="34" charset="0"/>
+                <a:ea typeface="Arial" pitchFamily="34" charset="-122"/>
+                <a:cs typeface="Arial" pitchFamily="34" charset="-120"/>
+              </a:rPr>
+              <a:t>Ordnet jeden Fall zu: DAS, NAS oder SAN. Alles in eine Nachricht.</a:t>
+            </a:r>
+            <a:endParaRPr lang="en-US" sz="1300" dirty="0"/>
+          </a:p>
+        </p:txBody>
+      </p:sp>
+      <p:sp>
+        <p:nvSpPr>
+          <p:cNvPr id="6" name="Shape 4"/>
+          <p:cNvSpPr/>
+          <p:nvPr/>
+        </p:nvSpPr>
+        <p:spPr>
+          <a:xfrm>
+            <a:off x="438912" y="1901952"/>
+            <a:ext cx="8266176" cy="283464"/>
+          </a:xfrm>
+          <a:prstGeom prst="rect">
+            <a:avLst/>
+          </a:prstGeom>
+          <a:solidFill>
+            <a:srgbClr val="F5F6FC"/>
+          </a:solidFill>
+          <a:ln/>
+        </p:spPr>
+      </p:sp>
+      <p:sp>
+        <p:nvSpPr>
+          <p:cNvPr id="7" name="Text 5"/>
+          <p:cNvSpPr/>
+          <p:nvPr/>
+        </p:nvSpPr>
+        <p:spPr>
+          <a:xfrm>
+            <a:off x="566928" y="1901952"/>
+            <a:ext cx="548640" cy="283464"/>
+          </a:xfrm>
+          <a:prstGeom prst="rect">
+            <a:avLst/>
+          </a:prstGeom>
+          <a:noFill/>
+          <a:ln/>
+        </p:spPr>
+        <p:txBody>
+          <a:bodyPr wrap="square" lIns="0" tIns="0" rIns="0" bIns="0" rtlCol="0" anchor="ctr"/>
+          <a:lstStyle/>
+          <a:p>
+            <a:pPr indent="0" marL="0">
+              <a:buNone/>
+            </a:pPr>
+            <a:r>
+              <a:rPr lang="en-US" sz="1150" b="1" dirty="0">
+                <a:solidFill>
+                  <a:srgbClr val="0F7C86"/>
+                </a:solidFill>
+                <a:latin typeface="Courier New" pitchFamily="34" charset="0"/>
+                <a:ea typeface="Courier New" pitchFamily="34" charset="-122"/>
+                <a:cs typeface="Courier New" pitchFamily="34" charset="-120"/>
+              </a:rPr>
+              <a:t>A</a:t>
+            </a:r>
+            <a:endParaRPr lang="en-US" sz="1150" dirty="0"/>
+          </a:p>
+        </p:txBody>
+      </p:sp>
+      <p:sp>
+        <p:nvSpPr>
+          <p:cNvPr id="8" name="Text 6"/>
+          <p:cNvSpPr/>
+          <p:nvPr/>
+        </p:nvSpPr>
+        <p:spPr>
+          <a:xfrm>
+            <a:off x="1115568" y="1901952"/>
+            <a:ext cx="7461504" cy="283464"/>
+          </a:xfrm>
+          <a:prstGeom prst="rect">
+            <a:avLst/>
+          </a:prstGeom>
+          <a:noFill/>
+          <a:ln/>
+        </p:spPr>
+        <p:txBody>
+          <a:bodyPr wrap="square" lIns="0" tIns="0" rIns="0" bIns="0" rtlCol="0" anchor="ctr"/>
+          <a:lstStyle/>
+          <a:p>
+            <a:pPr indent="0" marL="0">
+              <a:buNone/>
+            </a:pPr>
+            <a:r>
+              <a:rPr lang="en-US" sz="1150" dirty="0">
+                <a:solidFill>
+                  <a:srgbClr val="434A63"/>
+                </a:solidFill>
+                <a:latin typeface="Arial" pitchFamily="34" charset="0"/>
+                <a:ea typeface="Arial" pitchFamily="34" charset="-122"/>
+                <a:cs typeface="Arial" pitchFamily="34" charset="-120"/>
+              </a:rPr>
+              <a:t>Eine USB-Festplatte am Laptop der Geschäftsführerin</a:t>
+            </a:r>
+            <a:endParaRPr lang="en-US" sz="1150" dirty="0"/>
+          </a:p>
+        </p:txBody>
+      </p:sp>
+      <p:sp>
+        <p:nvSpPr>
+          <p:cNvPr id="9" name="Text 7"/>
+          <p:cNvSpPr/>
+          <p:nvPr/>
+        </p:nvSpPr>
+        <p:spPr>
+          <a:xfrm>
+            <a:off x="566928" y="2185416"/>
+            <a:ext cx="548640" cy="283464"/>
+          </a:xfrm>
+          <a:prstGeom prst="rect">
+            <a:avLst/>
+          </a:prstGeom>
+          <a:noFill/>
+          <a:ln/>
+        </p:spPr>
+        <p:txBody>
+          <a:bodyPr wrap="square" lIns="0" tIns="0" rIns="0" bIns="0" rtlCol="0" anchor="ctr"/>
+          <a:lstStyle/>
+          <a:p>
+            <a:pPr indent="0" marL="0">
+              <a:buNone/>
+            </a:pPr>
+            <a:r>
+              <a:rPr lang="en-US" sz="1150" b="1" dirty="0">
+                <a:solidFill>
+                  <a:srgbClr val="0F7C86"/>
+                </a:solidFill>
+                <a:latin typeface="Courier New" pitchFamily="34" charset="0"/>
+                <a:ea typeface="Courier New" pitchFamily="34" charset="-122"/>
+                <a:cs typeface="Courier New" pitchFamily="34" charset="-120"/>
+              </a:rPr>
+              <a:t>B</a:t>
+            </a:r>
+            <a:endParaRPr lang="en-US" sz="1150" dirty="0"/>
+          </a:p>
+        </p:txBody>
+      </p:sp>
+      <p:sp>
+        <p:nvSpPr>
+          <p:cNvPr id="10" name="Text 8"/>
+          <p:cNvSpPr/>
+          <p:nvPr/>
+        </p:nvSpPr>
+        <p:spPr>
+          <a:xfrm>
+            <a:off x="1115568" y="2185416"/>
+            <a:ext cx="7461504" cy="283464"/>
+          </a:xfrm>
+          <a:prstGeom prst="rect">
+            <a:avLst/>
+          </a:prstGeom>
+          <a:noFill/>
+          <a:ln/>
+        </p:spPr>
+        <p:txBody>
+          <a:bodyPr wrap="square" lIns="0" tIns="0" rIns="0" bIns="0" rtlCol="0" anchor="ctr"/>
+          <a:lstStyle/>
+          <a:p>
+            <a:pPr indent="0" marL="0">
+              <a:buNone/>
+            </a:pPr>
+            <a:r>
+              <a:rPr lang="en-US" sz="1150" dirty="0">
+                <a:solidFill>
+                  <a:srgbClr val="434A63"/>
+                </a:solidFill>
+                <a:latin typeface="Arial" pitchFamily="34" charset="0"/>
+                <a:ea typeface="Arial" pitchFamily="34" charset="-122"/>
+                <a:cs typeface="Arial" pitchFamily="34" charset="-120"/>
+              </a:rPr>
+              <a:t>Ein gemeinsamer Ordner im Büronetz, auf den ein ganzes Team zugreift</a:t>
+            </a:r>
+            <a:endParaRPr lang="en-US" sz="1150" dirty="0"/>
+          </a:p>
+        </p:txBody>
+      </p:sp>
+      <p:sp>
+        <p:nvSpPr>
+          <p:cNvPr id="11" name="Shape 9"/>
+          <p:cNvSpPr/>
+          <p:nvPr/>
+        </p:nvSpPr>
+        <p:spPr>
+          <a:xfrm>
+            <a:off x="438912" y="2468880"/>
+            <a:ext cx="8266176" cy="283464"/>
+          </a:xfrm>
+          <a:prstGeom prst="rect">
+            <a:avLst/>
+          </a:prstGeom>
+          <a:solidFill>
+            <a:srgbClr val="F5F6FC"/>
+          </a:solidFill>
+          <a:ln/>
+        </p:spPr>
+      </p:sp>
+      <p:sp>
+        <p:nvSpPr>
+          <p:cNvPr id="12" name="Text 10"/>
+          <p:cNvSpPr/>
+          <p:nvPr/>
+        </p:nvSpPr>
+        <p:spPr>
+          <a:xfrm>
+            <a:off x="566928" y="2468880"/>
+            <a:ext cx="548640" cy="283464"/>
+          </a:xfrm>
+          <a:prstGeom prst="rect">
+            <a:avLst/>
+          </a:prstGeom>
+          <a:noFill/>
+          <a:ln/>
+        </p:spPr>
+        <p:txBody>
+          <a:bodyPr wrap="square" lIns="0" tIns="0" rIns="0" bIns="0" rtlCol="0" anchor="ctr"/>
+          <a:lstStyle/>
+          <a:p>
+            <a:pPr indent="0" marL="0">
+              <a:buNone/>
+            </a:pPr>
+            <a:r>
+              <a:rPr lang="en-US" sz="1150" b="1" dirty="0">
+                <a:solidFill>
+                  <a:srgbClr val="0F7C86"/>
+                </a:solidFill>
+                <a:latin typeface="Courier New" pitchFamily="34" charset="0"/>
+                <a:ea typeface="Courier New" pitchFamily="34" charset="-122"/>
+                <a:cs typeface="Courier New" pitchFamily="34" charset="-120"/>
+              </a:rPr>
+              <a:t>C</a:t>
+            </a:r>
+            <a:endParaRPr lang="en-US" sz="1150" dirty="0"/>
+          </a:p>
+        </p:txBody>
+      </p:sp>
+      <p:sp>
+        <p:nvSpPr>
+          <p:cNvPr id="13" name="Text 11"/>
+          <p:cNvSpPr/>
+          <p:nvPr/>
+        </p:nvSpPr>
+        <p:spPr>
+          <a:xfrm>
+            <a:off x="1115568" y="2468880"/>
+            <a:ext cx="7461504" cy="283464"/>
+          </a:xfrm>
+          <a:prstGeom prst="rect">
+            <a:avLst/>
+          </a:prstGeom>
+          <a:noFill/>
+          <a:ln/>
+        </p:spPr>
+        <p:txBody>
+          <a:bodyPr wrap="square" lIns="0" tIns="0" rIns="0" bIns="0" rtlCol="0" anchor="ctr"/>
+          <a:lstStyle/>
+          <a:p>
+            <a:pPr indent="0" marL="0">
+              <a:buNone/>
+            </a:pPr>
+            <a:r>
+              <a:rPr lang="en-US" sz="1150" dirty="0">
+                <a:solidFill>
+                  <a:srgbClr val="434A63"/>
+                </a:solidFill>
+                <a:latin typeface="Arial" pitchFamily="34" charset="0"/>
+                <a:ea typeface="Arial" pitchFamily="34" charset="-122"/>
+                <a:cs typeface="Arial" pitchFamily="34" charset="-120"/>
+              </a:rPr>
+              <a:t>Drei Hosts, deren virtuelle Maschinen bei einem Ausfall auf einen anderen Host wechseln</a:t>
+            </a:r>
+            <a:endParaRPr lang="en-US" sz="1150" dirty="0"/>
+          </a:p>
+        </p:txBody>
+      </p:sp>
+      <p:sp>
+        <p:nvSpPr>
+          <p:cNvPr id="14" name="Text 12"/>
+          <p:cNvSpPr/>
+          <p:nvPr/>
+        </p:nvSpPr>
+        <p:spPr>
+          <a:xfrm>
+            <a:off x="566928" y="2752344"/>
+            <a:ext cx="548640" cy="283464"/>
+          </a:xfrm>
+          <a:prstGeom prst="rect">
+            <a:avLst/>
+          </a:prstGeom>
+          <a:noFill/>
+          <a:ln/>
+        </p:spPr>
+        <p:txBody>
+          <a:bodyPr wrap="square" lIns="0" tIns="0" rIns="0" bIns="0" rtlCol="0" anchor="ctr"/>
+          <a:lstStyle/>
+          <a:p>
+            <a:pPr indent="0" marL="0">
+              <a:buNone/>
+            </a:pPr>
+            <a:r>
+              <a:rPr lang="en-US" sz="1150" b="1" dirty="0">
+                <a:solidFill>
+                  <a:srgbClr val="0F7C86"/>
+                </a:solidFill>
+                <a:latin typeface="Courier New" pitchFamily="34" charset="0"/>
+                <a:ea typeface="Courier New" pitchFamily="34" charset="-122"/>
+                <a:cs typeface="Courier New" pitchFamily="34" charset="-120"/>
+              </a:rPr>
+              <a:t>D</a:t>
+            </a:r>
+            <a:endParaRPr lang="en-US" sz="1150" dirty="0"/>
+          </a:p>
+        </p:txBody>
+      </p:sp>
+      <p:sp>
+        <p:nvSpPr>
+          <p:cNvPr id="15" name="Text 13"/>
+          <p:cNvSpPr/>
+          <p:nvPr/>
+        </p:nvSpPr>
+        <p:spPr>
+          <a:xfrm>
+            <a:off x="1115568" y="2752344"/>
+            <a:ext cx="7461504" cy="283464"/>
+          </a:xfrm>
+          <a:prstGeom prst="rect">
+            <a:avLst/>
+          </a:prstGeom>
+          <a:noFill/>
+          <a:ln/>
+        </p:spPr>
+        <p:txBody>
+          <a:bodyPr wrap="square" lIns="0" tIns="0" rIns="0" bIns="0" rtlCol="0" anchor="ctr"/>
+          <a:lstStyle/>
+          <a:p>
+            <a:pPr indent="0" marL="0">
+              <a:buNone/>
+            </a:pPr>
+            <a:r>
+              <a:rPr lang="en-US" sz="1150" dirty="0">
+                <a:solidFill>
+                  <a:srgbClr val="434A63"/>
+                </a:solidFill>
+                <a:latin typeface="Arial" pitchFamily="34" charset="0"/>
+                <a:ea typeface="Arial" pitchFamily="34" charset="-122"/>
+                <a:cs typeface="Arial" pitchFamily="34" charset="-120"/>
+              </a:rPr>
+              <a:t>Zwei gespiegelte Festplatten fest im Datenbankserver eingebaut</a:t>
+            </a:r>
+            <a:endParaRPr lang="en-US" sz="1150" dirty="0"/>
+          </a:p>
+        </p:txBody>
+      </p:sp>
+      <p:sp>
+        <p:nvSpPr>
+          <p:cNvPr id="16" name="Shape 14"/>
+          <p:cNvSpPr/>
+          <p:nvPr/>
+        </p:nvSpPr>
+        <p:spPr>
+          <a:xfrm>
+            <a:off x="438912" y="3035808"/>
+            <a:ext cx="8266176" cy="283464"/>
+          </a:xfrm>
+          <a:prstGeom prst="rect">
+            <a:avLst/>
+          </a:prstGeom>
+          <a:solidFill>
+            <a:srgbClr val="F5F6FC"/>
+          </a:solidFill>
+          <a:ln/>
+        </p:spPr>
+      </p:sp>
+      <p:sp>
+        <p:nvSpPr>
+          <p:cNvPr id="17" name="Text 15"/>
+          <p:cNvSpPr/>
+          <p:nvPr/>
+        </p:nvSpPr>
+        <p:spPr>
+          <a:xfrm>
+            <a:off x="566928" y="3035808"/>
+            <a:ext cx="548640" cy="283464"/>
+          </a:xfrm>
+          <a:prstGeom prst="rect">
+            <a:avLst/>
+          </a:prstGeom>
+          <a:noFill/>
+          <a:ln/>
+        </p:spPr>
+        <p:txBody>
+          <a:bodyPr wrap="square" lIns="0" tIns="0" rIns="0" bIns="0" rtlCol="0" anchor="ctr"/>
+          <a:lstStyle/>
+          <a:p>
+            <a:pPr indent="0" marL="0">
+              <a:buNone/>
+            </a:pPr>
+            <a:r>
+              <a:rPr lang="en-US" sz="1150" b="1" dirty="0">
+                <a:solidFill>
+                  <a:srgbClr val="0F7C86"/>
+                </a:solidFill>
+                <a:latin typeface="Courier New" pitchFamily="34" charset="0"/>
+                <a:ea typeface="Courier New" pitchFamily="34" charset="-122"/>
+                <a:cs typeface="Courier New" pitchFamily="34" charset="-120"/>
+              </a:rPr>
+              <a:t>E</a:t>
+            </a:r>
+            <a:endParaRPr lang="en-US" sz="1150" dirty="0"/>
+          </a:p>
+        </p:txBody>
+      </p:sp>
+      <p:sp>
+        <p:nvSpPr>
+          <p:cNvPr id="18" name="Text 16"/>
+          <p:cNvSpPr/>
+          <p:nvPr/>
+        </p:nvSpPr>
+        <p:spPr>
+          <a:xfrm>
+            <a:off x="1115568" y="3035808"/>
+            <a:ext cx="7461504" cy="283464"/>
+          </a:xfrm>
+          <a:prstGeom prst="rect">
+            <a:avLst/>
+          </a:prstGeom>
+          <a:noFill/>
+          <a:ln/>
+        </p:spPr>
+        <p:txBody>
+          <a:bodyPr wrap="square" lIns="0" tIns="0" rIns="0" bIns="0" rtlCol="0" anchor="ctr"/>
+          <a:lstStyle/>
+          <a:p>
+            <a:pPr indent="0" marL="0">
+              <a:buNone/>
+            </a:pPr>
+            <a:r>
+              <a:rPr lang="en-US" sz="1150" dirty="0">
+                <a:solidFill>
+                  <a:srgbClr val="434A63"/>
+                </a:solidFill>
+                <a:latin typeface="Arial" pitchFamily="34" charset="0"/>
+                <a:ea typeface="Arial" pitchFamily="34" charset="-122"/>
+                <a:cs typeface="Arial" pitchFamily="34" charset="-120"/>
+              </a:rPr>
+              <a:t>Ein kleines Gerät im Büro, auf dem alle ihre Scans in Ordnern ablegen</a:t>
+            </a:r>
+            <a:endParaRPr lang="en-US" sz="1150" dirty="0"/>
+          </a:p>
+        </p:txBody>
+      </p:sp>
+      <p:sp>
+        <p:nvSpPr>
+          <p:cNvPr id="19" name="Text 17"/>
+          <p:cNvSpPr/>
+          <p:nvPr/>
+        </p:nvSpPr>
+        <p:spPr>
+          <a:xfrm>
+            <a:off x="566928" y="3319272"/>
+            <a:ext cx="548640" cy="283464"/>
+          </a:xfrm>
+          <a:prstGeom prst="rect">
+            <a:avLst/>
+          </a:prstGeom>
+          <a:noFill/>
+          <a:ln/>
+        </p:spPr>
+        <p:txBody>
+          <a:bodyPr wrap="square" lIns="0" tIns="0" rIns="0" bIns="0" rtlCol="0" anchor="ctr"/>
+          <a:lstStyle/>
+          <a:p>
+            <a:pPr indent="0" marL="0">
+              <a:buNone/>
+            </a:pPr>
+            <a:r>
+              <a:rPr lang="en-US" sz="1150" b="1" dirty="0">
+                <a:solidFill>
+                  <a:srgbClr val="0F7C86"/>
+                </a:solidFill>
+                <a:latin typeface="Courier New" pitchFamily="34" charset="0"/>
+                <a:ea typeface="Courier New" pitchFamily="34" charset="-122"/>
+                <a:cs typeface="Courier New" pitchFamily="34" charset="-120"/>
+              </a:rPr>
+              <a:t>F</a:t>
+            </a:r>
+            <a:endParaRPr lang="en-US" sz="1150" dirty="0"/>
+          </a:p>
+        </p:txBody>
+      </p:sp>
+      <p:sp>
+        <p:nvSpPr>
+          <p:cNvPr id="20" name="Text 18"/>
+          <p:cNvSpPr/>
+          <p:nvPr/>
+        </p:nvSpPr>
+        <p:spPr>
+          <a:xfrm>
+            <a:off x="1115568" y="3319272"/>
+            <a:ext cx="7461504" cy="283464"/>
+          </a:xfrm>
+          <a:prstGeom prst="rect">
+            <a:avLst/>
+          </a:prstGeom>
+          <a:noFill/>
+          <a:ln/>
+        </p:spPr>
+        <p:txBody>
+          <a:bodyPr wrap="square" lIns="0" tIns="0" rIns="0" bIns="0" rtlCol="0" anchor="ctr"/>
+          <a:lstStyle/>
+          <a:p>
+            <a:pPr indent="0" marL="0">
+              <a:buNone/>
+            </a:pPr>
+            <a:r>
+              <a:rPr lang="en-US" sz="1150" dirty="0">
+                <a:solidFill>
+                  <a:srgbClr val="434A63"/>
+                </a:solidFill>
+                <a:latin typeface="Arial" pitchFamily="34" charset="0"/>
+                <a:ea typeface="Arial" pitchFamily="34" charset="-122"/>
+                <a:cs typeface="Arial" pitchFamily="34" charset="-120"/>
+              </a:rPr>
+              <a:t>Ein Speicher, den ein Server über iSCSI als eigenes Laufwerk sieht</a:t>
+            </a:r>
+            <a:endParaRPr lang="en-US" sz="1150" dirty="0"/>
+          </a:p>
+        </p:txBody>
+      </p:sp>
+      <p:sp>
+        <p:nvSpPr>
+          <p:cNvPr id="21" name="Text 19"/>
+          <p:cNvSpPr/>
+          <p:nvPr/>
+        </p:nvSpPr>
+        <p:spPr>
+          <a:xfrm>
+            <a:off x="566928" y="3730752"/>
+            <a:ext cx="2377440" cy="292608"/>
+          </a:xfrm>
+          <a:prstGeom prst="rect">
+            <a:avLst/>
+          </a:prstGeom>
+          <a:noFill/>
+          <a:ln/>
+        </p:spPr>
+        <p:txBody>
+          <a:bodyPr wrap="square" lIns="0" tIns="0" rIns="0" bIns="0" rtlCol="0" anchor="ctr"/>
+          <a:lstStyle/>
+          <a:p>
+            <a:pPr indent="0" marL="0">
+              <a:buNone/>
+            </a:pPr>
+            <a:r>
+              <a:rPr lang="en-US" sz="1100" dirty="0">
+                <a:solidFill>
+                  <a:srgbClr val="5C6377"/>
+                </a:solidFill>
+                <a:latin typeface="Arial" pitchFamily="34" charset="0"/>
+                <a:ea typeface="Arial" pitchFamily="34" charset="-122"/>
+                <a:cs typeface="Arial" pitchFamily="34" charset="-120"/>
+              </a:rPr>
+              <a:t>So sieht eure Nachricht aus:</a:t>
+            </a:r>
+            <a:endParaRPr lang="en-US" sz="1100" dirty="0"/>
+          </a:p>
+        </p:txBody>
+      </p:sp>
+      <p:sp>
+        <p:nvSpPr>
+          <p:cNvPr id="22" name="Shape 20"/>
+          <p:cNvSpPr/>
+          <p:nvPr/>
+        </p:nvSpPr>
+        <p:spPr>
+          <a:xfrm>
+            <a:off x="2944368" y="3694176"/>
+            <a:ext cx="4023360" cy="365760"/>
+          </a:xfrm>
+          <a:prstGeom prst="roundRect">
+            <a:avLst>
+              <a:gd name="adj" fmla="val 20000"/>
+            </a:avLst>
+          </a:prstGeom>
+          <a:solidFill>
+            <a:srgbClr val="FFFFFF"/>
+          </a:solidFill>
+          <a:ln w="15875">
+            <a:solidFill>
+              <a:srgbClr val="0F7C86"/>
+            </a:solidFill>
+            <a:prstDash val="solid"/>
+          </a:ln>
+        </p:spPr>
+      </p:sp>
+      <p:sp>
+        <p:nvSpPr>
+          <p:cNvPr id="23" name="Text 21"/>
+          <p:cNvSpPr/>
+          <p:nvPr/>
+        </p:nvSpPr>
+        <p:spPr>
+          <a:xfrm>
+            <a:off x="3035808" y="3694176"/>
+            <a:ext cx="3840480" cy="365760"/>
+          </a:xfrm>
+          <a:prstGeom prst="rect">
+            <a:avLst/>
+          </a:prstGeom>
+          <a:noFill/>
+          <a:ln/>
+        </p:spPr>
+        <p:txBody>
+          <a:bodyPr wrap="square" lIns="0" tIns="0" rIns="0" bIns="0" rtlCol="0" anchor="ctr"/>
+          <a:lstStyle/>
+          <a:p>
+            <a:pPr indent="0" marL="0">
+              <a:buNone/>
+            </a:pPr>
+            <a:r>
+              <a:rPr lang="en-US" sz="1200" b="1" dirty="0">
+                <a:solidFill>
+                  <a:srgbClr val="434A63"/>
+                </a:solidFill>
+                <a:latin typeface="Courier New" pitchFamily="34" charset="0"/>
+                <a:ea typeface="Courier New" pitchFamily="34" charset="-122"/>
+                <a:cs typeface="Courier New" pitchFamily="34" charset="-120"/>
+              </a:rPr>
+              <a:t>A: …   B: …   C: …   D: …   E: …   F: …</a:t>
+            </a:r>
+            <a:endParaRPr lang="en-US" sz="1200" dirty="0"/>
+          </a:p>
+        </p:txBody>
+      </p:sp>
+      <p:sp>
+        <p:nvSpPr>
+          <p:cNvPr id="24" name="Text 22"/>
+          <p:cNvSpPr/>
+          <p:nvPr/>
+        </p:nvSpPr>
+        <p:spPr>
+          <a:xfrm>
+            <a:off x="566928" y="4160520"/>
+            <a:ext cx="8010144" cy="256032"/>
+          </a:xfrm>
+          <a:prstGeom prst="rect">
+            <a:avLst/>
+          </a:prstGeom>
+          <a:noFill/>
+          <a:ln/>
+        </p:spPr>
+        <p:txBody>
+          <a:bodyPr wrap="square" lIns="0" tIns="0" rIns="0" bIns="0" rtlCol="0" anchor="ctr"/>
+          <a:lstStyle/>
+          <a:p>
+            <a:pPr indent="0" marL="0">
+              <a:buNone/>
+            </a:pPr>
+            <a:r>
+              <a:rPr lang="en-US" sz="1100" dirty="0">
+                <a:solidFill>
+                  <a:srgbClr val="5C6377"/>
+                </a:solidFill>
+                <a:latin typeface="Arial" pitchFamily="34" charset="0"/>
+                <a:ea typeface="Arial" pitchFamily="34" charset="-122"/>
+                <a:cs typeface="Arial" pitchFamily="34" charset="-120"/>
+              </a:rPr>
+              <a:t>Tipp: Wer greift zu, kommen Dateien oder Blöcke an?</a:t>
+            </a:r>
+            <a:endParaRPr lang="en-US" sz="1100" dirty="0"/>
+          </a:p>
+        </p:txBody>
+      </p:sp>
+      <p:sp>
+        <p:nvSpPr>
+          <p:cNvPr id="25" name="Shape 23"/>
           <p:cNvSpPr/>
           <p:nvPr/>
         </p:nvSpPr>
@@ -4834,7 +4805,7 @@
       </p:sp>
       <p:sp>
         <p:nvSpPr>
-          <p:cNvPr id="7" name="Text 4"/>
+          <p:cNvPr id="26" name="Text 24"/>
           <p:cNvSpPr/>
           <p:nvPr/>
         </p:nvSpPr>
@@ -4865,7 +4836,7 @@
                 <a:ea typeface="Arial" pitchFamily="34" charset="-122"/>
                 <a:cs typeface="Arial" pitchFamily="34" charset="-120"/>
               </a:rPr>
-              <a:t>Heute plant ihr</a:t>
+              <a:t>Speicher planen</a:t>
             </a:r>
             <a:endParaRPr lang="en-US" sz="1050" dirty="0"/>
           </a:p>
@@ -4873,7 +4844,7 @@
       </p:sp>
       <p:sp>
         <p:nvSpPr>
-          <p:cNvPr id="8" name="Text 5"/>
+          <p:cNvPr id="27" name="Text 25"/>
           <p:cNvSpPr/>
           <p:nvPr/>
         </p:nvSpPr>
@@ -4904,7 +4875,7 @@
                 <a:ea typeface="Arial" pitchFamily="34" charset="-122"/>
                 <a:cs typeface="Arial" pitchFamily="34" charset="-120"/>
               </a:rPr>
-              <a:t>10/16</a:t>
+              <a:t>11/19</a:t>
             </a:r>
             <a:endParaRPr lang="en-US" sz="1050" dirty="0"/>
           </a:p>
@@ -4957,7 +4928,7 @@
             <a:avLst/>
           </a:prstGeom>
           <a:solidFill>
-            <a:srgbClr val="3843AF"/>
+            <a:srgbClr val="0F7C86"/>
           </a:solidFill>
           <a:ln/>
         </p:spPr>
@@ -4989,13 +4960,13 @@
             <a:r>
               <a:rPr lang="en-US" sz="1150" b="1" spc="180" kern="0" dirty="0">
                 <a:solidFill>
-                  <a:srgbClr val="3843AF"/>
-                </a:solidFill>
-                <a:latin typeface="Arial" pitchFamily="34" charset="0"/>
-                <a:ea typeface="Arial" pitchFamily="34" charset="-122"/>
-                <a:cs typeface="Arial" pitchFamily="34" charset="-120"/>
-              </a:rPr>
-              <a:t>BREAKOUT · 19:10 BIS 20:10</a:t>
+                  <a:srgbClr val="0F7C86"/>
+                </a:solidFill>
+                <a:latin typeface="Arial" pitchFamily="34" charset="0"/>
+                <a:ea typeface="Arial" pitchFamily="34" charset="-122"/>
+                <a:cs typeface="Arial" pitchFamily="34" charset="-120"/>
+              </a:rPr>
+              <a:t>AUFLÖSUNG</a:t>
             </a:r>
             <a:endParaRPr lang="en-US" sz="1150" dirty="0"/>
           </a:p>
@@ -5034,7 +5005,7 @@
                 <a:ea typeface="Arial" pitchFamily="34" charset="-122"/>
                 <a:cs typeface="Arial" pitchFamily="34" charset="-120"/>
               </a:rPr>
-              <a:t>So läuft die Praxiszeit</a:t>
+              <a:t>Zuordnungsrunde</a:t>
             </a:r>
             <a:endParaRPr lang="en-US" sz="2600" dirty="0"/>
           </a:p>
@@ -5048,8 +5019,8 @@
         </p:nvSpPr>
         <p:spPr>
           <a:xfrm>
-            <a:off x="438912" y="1572768"/>
-            <a:ext cx="8266176" cy="274320"/>
+            <a:off x="566928" y="1572768"/>
+            <a:ext cx="2523744" cy="2048256"/>
           </a:xfrm>
           <a:prstGeom prst="rect">
             <a:avLst/>
@@ -5062,464 +5033,14 @@
       </p:sp>
       <p:sp>
         <p:nvSpPr>
-          <p:cNvPr id="6" name="Text 4"/>
+          <p:cNvPr id="6" name="Shape 4"/>
           <p:cNvSpPr/>
           <p:nvPr/>
         </p:nvSpPr>
         <p:spPr>
           <a:xfrm>
             <a:off x="566928" y="1572768"/>
-            <a:ext cx="1097280" cy="274320"/>
-          </a:xfrm>
-          <a:prstGeom prst="rect">
-            <a:avLst/>
-          </a:prstGeom>
-          <a:noFill/>
-          <a:ln/>
-        </p:spPr>
-        <p:txBody>
-          <a:bodyPr wrap="square" lIns="0" tIns="0" rIns="0" bIns="0" rtlCol="0" anchor="ctr"/>
-          <a:lstStyle/>
-          <a:p>
-            <a:pPr indent="0" marL="0">
-              <a:buNone/>
-            </a:pPr>
-            <a:r>
-              <a:rPr lang="en-US" sz="1050" b="1" dirty="0">
-                <a:solidFill>
-                  <a:srgbClr val="3843AF"/>
-                </a:solidFill>
-                <a:latin typeface="Courier New" pitchFamily="34" charset="0"/>
-                <a:ea typeface="Courier New" pitchFamily="34" charset="-122"/>
-                <a:cs typeface="Courier New" pitchFamily="34" charset="-120"/>
-              </a:rPr>
-              <a:t>Station 1</a:t>
-            </a:r>
-            <a:endParaRPr lang="en-US" sz="1050" dirty="0"/>
-          </a:p>
-        </p:txBody>
-      </p:sp>
-      <p:sp>
-        <p:nvSpPr>
-          <p:cNvPr id="7" name="Text 5"/>
-          <p:cNvSpPr/>
-          <p:nvPr/>
-        </p:nvSpPr>
-        <p:spPr>
-          <a:xfrm>
-            <a:off x="1664208" y="1572768"/>
-            <a:ext cx="6912864" cy="274320"/>
-          </a:xfrm>
-          <a:prstGeom prst="rect">
-            <a:avLst/>
-          </a:prstGeom>
-          <a:noFill/>
-          <a:ln/>
-        </p:spPr>
-        <p:txBody>
-          <a:bodyPr wrap="square" lIns="0" tIns="0" rIns="0" bIns="0" rtlCol="0" anchor="ctr"/>
-          <a:lstStyle/>
-          <a:p>
-            <a:pPr indent="0" marL="0">
-              <a:buNone/>
-            </a:pPr>
-            <a:r>
-              <a:rPr lang="en-US" sz="1050" dirty="0">
-                <a:solidFill>
-                  <a:srgbClr val="434A63"/>
-                </a:solidFill>
-                <a:latin typeface="Arial" pitchFamily="34" charset="0"/>
-                <a:ea typeface="Arial" pitchFamily="34" charset="-122"/>
-                <a:cs typeface="Arial" pitchFamily="34" charset="-120"/>
-              </a:rPr>
-              <a:t>Wie viel? Den Netto-Bedarf in drei Jahren ausrechnen · 15 Min.</a:t>
-            </a:r>
-            <a:endParaRPr lang="en-US" sz="1050" dirty="0"/>
-          </a:p>
-        </p:txBody>
-      </p:sp>
-      <p:sp>
-        <p:nvSpPr>
-          <p:cNvPr id="8" name="Text 6"/>
-          <p:cNvSpPr/>
-          <p:nvPr/>
-        </p:nvSpPr>
-        <p:spPr>
-          <a:xfrm>
-            <a:off x="566928" y="1847088"/>
-            <a:ext cx="1097280" cy="274320"/>
-          </a:xfrm>
-          <a:prstGeom prst="rect">
-            <a:avLst/>
-          </a:prstGeom>
-          <a:noFill/>
-          <a:ln/>
-        </p:spPr>
-        <p:txBody>
-          <a:bodyPr wrap="square" lIns="0" tIns="0" rIns="0" bIns="0" rtlCol="0" anchor="ctr"/>
-          <a:lstStyle/>
-          <a:p>
-            <a:pPr indent="0" marL="0">
-              <a:buNone/>
-            </a:pPr>
-            <a:r>
-              <a:rPr lang="en-US" sz="1050" b="1" dirty="0">
-                <a:solidFill>
-                  <a:srgbClr val="3843AF"/>
-                </a:solidFill>
-                <a:latin typeface="Courier New" pitchFamily="34" charset="0"/>
-                <a:ea typeface="Courier New" pitchFamily="34" charset="-122"/>
-                <a:cs typeface="Courier New" pitchFamily="34" charset="-120"/>
-              </a:rPr>
-              <a:t>Station 2</a:t>
-            </a:r>
-            <a:endParaRPr lang="en-US" sz="1050" dirty="0"/>
-          </a:p>
-        </p:txBody>
-      </p:sp>
-      <p:sp>
-        <p:nvSpPr>
-          <p:cNvPr id="9" name="Text 7"/>
-          <p:cNvSpPr/>
-          <p:nvPr/>
-        </p:nvSpPr>
-        <p:spPr>
-          <a:xfrm>
-            <a:off x="1664208" y="1847088"/>
-            <a:ext cx="6912864" cy="274320"/>
-          </a:xfrm>
-          <a:prstGeom prst="rect">
-            <a:avLst/>
-          </a:prstGeom>
-          <a:noFill/>
-          <a:ln/>
-        </p:spPr>
-        <p:txBody>
-          <a:bodyPr wrap="square" lIns="0" tIns="0" rIns="0" bIns="0" rtlCol="0" anchor="ctr"/>
-          <a:lstStyle/>
-          <a:p>
-            <a:pPr indent="0" marL="0">
-              <a:buNone/>
-            </a:pPr>
-            <a:r>
-              <a:rPr lang="en-US" sz="1050" dirty="0">
-                <a:solidFill>
-                  <a:srgbClr val="434A63"/>
-                </a:solidFill>
-                <a:latin typeface="Arial" pitchFamily="34" charset="0"/>
-                <a:ea typeface="Arial" pitchFamily="34" charset="-122"/>
-                <a:cs typeface="Arial" pitchFamily="34" charset="-120"/>
-              </a:rPr>
-              <a:t>Wie sicher? Ein RAID-Level wählen und die Platten zählen · 15 Min.</a:t>
-            </a:r>
-            <a:endParaRPr lang="en-US" sz="1050" dirty="0"/>
-          </a:p>
-        </p:txBody>
-      </p:sp>
-      <p:sp>
-        <p:nvSpPr>
-          <p:cNvPr id="10" name="Shape 8"/>
-          <p:cNvSpPr/>
-          <p:nvPr/>
-        </p:nvSpPr>
-        <p:spPr>
-          <a:xfrm>
-            <a:off x="438912" y="2121408"/>
-            <a:ext cx="8266176" cy="274320"/>
-          </a:xfrm>
-          <a:prstGeom prst="rect">
-            <a:avLst/>
-          </a:prstGeom>
-          <a:solidFill>
-            <a:srgbClr val="F5F6FC"/>
-          </a:solidFill>
-          <a:ln/>
-        </p:spPr>
-      </p:sp>
-      <p:sp>
-        <p:nvSpPr>
-          <p:cNvPr id="11" name="Text 9"/>
-          <p:cNvSpPr/>
-          <p:nvPr/>
-        </p:nvSpPr>
-        <p:spPr>
-          <a:xfrm>
-            <a:off x="566928" y="2121408"/>
-            <a:ext cx="1097280" cy="274320"/>
-          </a:xfrm>
-          <a:prstGeom prst="rect">
-            <a:avLst/>
-          </a:prstGeom>
-          <a:noFill/>
-          <a:ln/>
-        </p:spPr>
-        <p:txBody>
-          <a:bodyPr wrap="square" lIns="0" tIns="0" rIns="0" bIns="0" rtlCol="0" anchor="ctr"/>
-          <a:lstStyle/>
-          <a:p>
-            <a:pPr indent="0" marL="0">
-              <a:buNone/>
-            </a:pPr>
-            <a:r>
-              <a:rPr lang="en-US" sz="1050" b="1" dirty="0">
-                <a:solidFill>
-                  <a:srgbClr val="3843AF"/>
-                </a:solidFill>
-                <a:latin typeface="Courier New" pitchFamily="34" charset="0"/>
-                <a:ea typeface="Courier New" pitchFamily="34" charset="-122"/>
-                <a:cs typeface="Courier New" pitchFamily="34" charset="-120"/>
-              </a:rPr>
-              <a:t>Station 3</a:t>
-            </a:r>
-            <a:endParaRPr lang="en-US" sz="1050" dirty="0"/>
-          </a:p>
-        </p:txBody>
-      </p:sp>
-      <p:sp>
-        <p:nvSpPr>
-          <p:cNvPr id="12" name="Text 10"/>
-          <p:cNvSpPr/>
-          <p:nvPr/>
-        </p:nvSpPr>
-        <p:spPr>
-          <a:xfrm>
-            <a:off x="1664208" y="2121408"/>
-            <a:ext cx="6912864" cy="274320"/>
-          </a:xfrm>
-          <a:prstGeom prst="rect">
-            <a:avLst/>
-          </a:prstGeom>
-          <a:noFill/>
-          <a:ln/>
-        </p:spPr>
-        <p:txBody>
-          <a:bodyPr wrap="square" lIns="0" tIns="0" rIns="0" bIns="0" rtlCol="0" anchor="ctr"/>
-          <a:lstStyle/>
-          <a:p>
-            <a:pPr indent="0" marL="0">
-              <a:buNone/>
-            </a:pPr>
-            <a:r>
-              <a:rPr lang="en-US" sz="1050" dirty="0">
-                <a:solidFill>
-                  <a:srgbClr val="434A63"/>
-                </a:solidFill>
-                <a:latin typeface="Arial" pitchFamily="34" charset="0"/>
-                <a:ea typeface="Arial" pitchFamily="34" charset="-122"/>
-                <a:cs typeface="Arial" pitchFamily="34" charset="-120"/>
-              </a:rPr>
-              <a:t>Wie angebunden? Für drei Bedarfe DAS, NAS oder SAN wählen · 10 Min.</a:t>
-            </a:r>
-            <a:endParaRPr lang="en-US" sz="1050" dirty="0"/>
-          </a:p>
-        </p:txBody>
-      </p:sp>
-      <p:sp>
-        <p:nvSpPr>
-          <p:cNvPr id="13" name="Text 11"/>
-          <p:cNvSpPr/>
-          <p:nvPr/>
-        </p:nvSpPr>
-        <p:spPr>
-          <a:xfrm>
-            <a:off x="566928" y="2395728"/>
-            <a:ext cx="1097280" cy="274320"/>
-          </a:xfrm>
-          <a:prstGeom prst="rect">
-            <a:avLst/>
-          </a:prstGeom>
-          <a:noFill/>
-          <a:ln/>
-        </p:spPr>
-        <p:txBody>
-          <a:bodyPr wrap="square" lIns="0" tIns="0" rIns="0" bIns="0" rtlCol="0" anchor="ctr"/>
-          <a:lstStyle/>
-          <a:p>
-            <a:pPr indent="0" marL="0">
-              <a:buNone/>
-            </a:pPr>
-            <a:r>
-              <a:rPr lang="en-US" sz="1050" b="1" dirty="0">
-                <a:solidFill>
-                  <a:srgbClr val="3843AF"/>
-                </a:solidFill>
-                <a:latin typeface="Courier New" pitchFamily="34" charset="0"/>
-                <a:ea typeface="Courier New" pitchFamily="34" charset="-122"/>
-                <a:cs typeface="Courier New" pitchFamily="34" charset="-120"/>
-              </a:rPr>
-              <a:t>Danach</a:t>
-            </a:r>
-            <a:endParaRPr lang="en-US" sz="1050" dirty="0"/>
-          </a:p>
-        </p:txBody>
-      </p:sp>
-      <p:sp>
-        <p:nvSpPr>
-          <p:cNvPr id="14" name="Text 12"/>
-          <p:cNvSpPr/>
-          <p:nvPr/>
-        </p:nvSpPr>
-        <p:spPr>
-          <a:xfrm>
-            <a:off x="1664208" y="2395728"/>
-            <a:ext cx="6912864" cy="274320"/>
-          </a:xfrm>
-          <a:prstGeom prst="rect">
-            <a:avLst/>
-          </a:prstGeom>
-          <a:noFill/>
-          <a:ln/>
-        </p:spPr>
-        <p:txBody>
-          <a:bodyPr wrap="square" lIns="0" tIns="0" rIns="0" bIns="0" rtlCol="0" anchor="ctr"/>
-          <a:lstStyle/>
-          <a:p>
-            <a:pPr indent="0" marL="0">
-              <a:buNone/>
-            </a:pPr>
-            <a:r>
-              <a:rPr lang="en-US" sz="1050" dirty="0">
-                <a:solidFill>
-                  <a:srgbClr val="434A63"/>
-                </a:solidFill>
-                <a:latin typeface="Arial" pitchFamily="34" charset="0"/>
-                <a:ea typeface="Arial" pitchFamily="34" charset="-122"/>
-                <a:cs typeface="Arial" pitchFamily="34" charset="-120"/>
-              </a:rPr>
-              <a:t>Vorstellung vorbereiten: drei Antworten für fünf Minuten Vortrag · 5 Min.</a:t>
-            </a:r>
-            <a:endParaRPr lang="en-US" sz="1050" dirty="0"/>
-          </a:p>
-        </p:txBody>
-      </p:sp>
-      <p:sp>
-        <p:nvSpPr>
-          <p:cNvPr id="15" name="Shape 13"/>
-          <p:cNvSpPr/>
-          <p:nvPr/>
-        </p:nvSpPr>
-        <p:spPr>
-          <a:xfrm>
-            <a:off x="438912" y="2670048"/>
-            <a:ext cx="8266176" cy="274320"/>
-          </a:xfrm>
-          <a:prstGeom prst="rect">
-            <a:avLst/>
-          </a:prstGeom>
-          <a:solidFill>
-            <a:srgbClr val="F5F6FC"/>
-          </a:solidFill>
-          <a:ln/>
-        </p:spPr>
-      </p:sp>
-      <p:sp>
-        <p:nvSpPr>
-          <p:cNvPr id="16" name="Text 14"/>
-          <p:cNvSpPr/>
-          <p:nvPr/>
-        </p:nvSpPr>
-        <p:spPr>
-          <a:xfrm>
-            <a:off x="566928" y="2670048"/>
-            <a:ext cx="1097280" cy="274320"/>
-          </a:xfrm>
-          <a:prstGeom prst="rect">
-            <a:avLst/>
-          </a:prstGeom>
-          <a:noFill/>
-          <a:ln/>
-        </p:spPr>
-        <p:txBody>
-          <a:bodyPr wrap="square" lIns="0" tIns="0" rIns="0" bIns="0" rtlCol="0" anchor="ctr"/>
-          <a:lstStyle/>
-          <a:p>
-            <a:pPr indent="0" marL="0">
-              <a:buNone/>
-            </a:pPr>
-            <a:r>
-              <a:rPr lang="en-US" sz="1050" b="1" dirty="0">
-                <a:solidFill>
-                  <a:srgbClr val="3843AF"/>
-                </a:solidFill>
-                <a:latin typeface="Courier New" pitchFamily="34" charset="0"/>
-                <a:ea typeface="Courier New" pitchFamily="34" charset="-122"/>
-                <a:cs typeface="Courier New" pitchFamily="34" charset="-120"/>
-              </a:rPr>
-              <a:t>Bonus</a:t>
-            </a:r>
-            <a:endParaRPr lang="en-US" sz="1050" dirty="0"/>
-          </a:p>
-        </p:txBody>
-      </p:sp>
-      <p:sp>
-        <p:nvSpPr>
-          <p:cNvPr id="17" name="Text 15"/>
-          <p:cNvSpPr/>
-          <p:nvPr/>
-        </p:nvSpPr>
-        <p:spPr>
-          <a:xfrm>
-            <a:off x="1664208" y="2670048"/>
-            <a:ext cx="6912864" cy="274320"/>
-          </a:xfrm>
-          <a:prstGeom prst="rect">
-            <a:avLst/>
-          </a:prstGeom>
-          <a:noFill/>
-          <a:ln/>
-        </p:spPr>
-        <p:txBody>
-          <a:bodyPr wrap="square" lIns="0" tIns="0" rIns="0" bIns="0" rtlCol="0" anchor="ctr"/>
-          <a:lstStyle/>
-          <a:p>
-            <a:pPr indent="0" marL="0">
-              <a:buNone/>
-            </a:pPr>
-            <a:r>
-              <a:rPr lang="en-US" sz="1050" dirty="0">
-                <a:solidFill>
-                  <a:srgbClr val="434A63"/>
-                </a:solidFill>
-                <a:latin typeface="Arial" pitchFamily="34" charset="0"/>
-                <a:ea typeface="Arial" pitchFamily="34" charset="-122"/>
-                <a:cs typeface="Arial" pitchFamily="34" charset="-120"/>
-              </a:rPr>
-              <a:t>Prozentuales Wachstum, Hot Spare, 3-2-1 für Voltrad, die Frage der Chefin</a:t>
-            </a:r>
-            <a:endParaRPr lang="en-US" sz="1050" dirty="0"/>
-          </a:p>
-        </p:txBody>
-      </p:sp>
-      <p:sp>
-        <p:nvSpPr>
-          <p:cNvPr id="18" name="Shape 16"/>
-          <p:cNvSpPr/>
-          <p:nvPr/>
-        </p:nvSpPr>
-        <p:spPr>
-          <a:xfrm>
-            <a:off x="566928" y="3200400"/>
-            <a:ext cx="8010144" cy="1243584"/>
-          </a:xfrm>
-          <a:prstGeom prst="rect">
-            <a:avLst/>
-          </a:prstGeom>
-          <a:solidFill>
-            <a:srgbClr val="EEF0FB"/>
-          </a:solidFill>
-          <a:ln/>
-        </p:spPr>
-      </p:sp>
-      <p:sp>
-        <p:nvSpPr>
-          <p:cNvPr id="19" name="Shape 17"/>
-          <p:cNvSpPr/>
-          <p:nvPr/>
-        </p:nvSpPr>
-        <p:spPr>
-          <a:xfrm>
-            <a:off x="566928" y="3200400"/>
-            <a:ext cx="41148" cy="1243584"/>
+            <a:ext cx="41148" cy="2048256"/>
           </a:xfrm>
           <a:prstGeom prst="rect">
             <a:avLst/>
@@ -5532,14 +5053,14 @@
       </p:sp>
       <p:sp>
         <p:nvSpPr>
-          <p:cNvPr id="20" name="Text 18"/>
-          <p:cNvSpPr/>
-          <p:nvPr/>
-        </p:nvSpPr>
-        <p:spPr>
-          <a:xfrm>
-            <a:off x="804672" y="3346704"/>
-            <a:ext cx="7607808" cy="242062"/>
+          <p:cNvPr id="7" name="Text 5"/>
+          <p:cNvSpPr/>
+          <p:nvPr/>
+        </p:nvSpPr>
+        <p:spPr>
+          <a:xfrm>
+            <a:off x="804672" y="1719072"/>
+            <a:ext cx="2121408" cy="274320"/>
           </a:xfrm>
           <a:prstGeom prst="rect">
             <a:avLst/>
@@ -5563,7 +5084,7 @@
                 <a:ea typeface="Arial" pitchFamily="34" charset="-122"/>
                 <a:cs typeface="Arial" pitchFamily="34" charset="-120"/>
               </a:rPr>
-              <a:t>Jetzt öffnen, alles steht auf der Kursseite</a:t>
+              <a:t>DAS: A und D</a:t>
             </a:r>
             <a:endParaRPr lang="en-US" sz="1300" dirty="0"/>
           </a:p>
@@ -5571,14 +5092,14 @@
       </p:sp>
       <p:sp>
         <p:nvSpPr>
-          <p:cNvPr id="21" name="Text 19"/>
-          <p:cNvSpPr/>
-          <p:nvPr/>
-        </p:nvSpPr>
-        <p:spPr>
-          <a:xfrm>
-            <a:off x="804672" y="3634486"/>
-            <a:ext cx="7607808" cy="690626"/>
+          <p:cNvPr id="8" name="Text 6"/>
+          <p:cNvSpPr/>
+          <p:nvPr/>
+        </p:nvSpPr>
+        <p:spPr>
+          <a:xfrm>
+            <a:off x="804672" y="2039112"/>
+            <a:ext cx="2121408" cy="1463040"/>
           </a:xfrm>
           <a:prstGeom prst="rect">
             <a:avLst/>
@@ -5600,7 +5121,7 @@
               <a:buNone/>
             </a:pPr>
             <a:r>
-              <a:rPr lang="en-US" sz="1000" dirty="0">
+              <a:rPr lang="en-US" sz="1150" dirty="0">
                 <a:solidFill>
                   <a:srgbClr val="434A63"/>
                 </a:solidFill>
@@ -5608,9 +5129,9 @@
                 <a:ea typeface="Arial" pitchFamily="34" charset="-122"/>
                 <a:cs typeface="Arial" pitchFamily="34" charset="-120"/>
               </a:rPr>
-              <a:t>Übung:  jacobmenge.github.io/kurs-unterlagen/infrastruktur-planung/praxis-speicher/</a:t>
-            </a:r>
-            <a:endParaRPr lang="en-US" sz="1000" dirty="0"/>
+              <a:t>A: USB-Platte am Laptop</a:t>
+            </a:r>
+            <a:endParaRPr lang="en-US" sz="1150" dirty="0"/>
           </a:p>
           <a:p>
             <a:pPr indent="0" marL="0">
@@ -5623,7 +5144,7 @@
               <a:buNone/>
             </a:pPr>
             <a:r>
-              <a:rPr lang="en-US" sz="1000" dirty="0">
+              <a:rPr lang="en-US" sz="1150" dirty="0">
                 <a:solidFill>
                   <a:srgbClr val="434A63"/>
                 </a:solidFill>
@@ -5631,9 +5152,9 @@
                 <a:ea typeface="Arial" pitchFamily="34" charset="-122"/>
                 <a:cs typeface="Arial" pitchFamily="34" charset="-120"/>
               </a:rPr>
-              <a:t>Theorie:  jacobmenge.github.io/kurs-unterlagen/infrastruktur-planung/speicherloesungen/</a:t>
-            </a:r>
-            <a:endParaRPr lang="en-US" sz="1000" dirty="0"/>
+              <a:t>D: Platten im Datenbankserver</a:t>
+            </a:r>
+            <a:endParaRPr lang="en-US" sz="1150" dirty="0"/>
           </a:p>
           <a:p>
             <a:pPr indent="0" marL="0">
@@ -5646,7 +5167,7 @@
               <a:buNone/>
             </a:pPr>
             <a:r>
-              <a:rPr lang="en-US" sz="1000" dirty="0">
+              <a:rPr lang="en-US" sz="1150" dirty="0">
                 <a:solidFill>
                   <a:srgbClr val="434A63"/>
                 </a:solidFill>
@@ -5654,15 +5175,414 @@
                 <a:ea typeface="Arial" pitchFamily="34" charset="-122"/>
                 <a:cs typeface="Arial" pitchFamily="34" charset="-120"/>
               </a:rPr>
-              <a:t>Um 20:10 sind alle wieder hier. Jede Gruppe stellt ihre drei Antworten in fünf Minuten vor.</a:t>
-            </a:r>
-            <a:endParaRPr lang="en-US" sz="1000" dirty="0"/>
-          </a:p>
-        </p:txBody>
-      </p:sp>
-      <p:sp>
-        <p:nvSpPr>
-          <p:cNvPr id="22" name="Shape 20"/>
+              <a:t>Direkt an einem Gerät. Nur dieses Gerät kommt an die Daten.</a:t>
+            </a:r>
+            <a:endParaRPr lang="en-US" sz="1150" dirty="0"/>
+          </a:p>
+        </p:txBody>
+      </p:sp>
+      <p:sp>
+        <p:nvSpPr>
+          <p:cNvPr id="9" name="Shape 7"/>
+          <p:cNvSpPr/>
+          <p:nvPr/>
+        </p:nvSpPr>
+        <p:spPr>
+          <a:xfrm>
+            <a:off x="3310128" y="1572768"/>
+            <a:ext cx="2523744" cy="2048256"/>
+          </a:xfrm>
+          <a:prstGeom prst="rect">
+            <a:avLst/>
+          </a:prstGeom>
+          <a:solidFill>
+            <a:srgbClr val="F5F6FC"/>
+          </a:solidFill>
+          <a:ln/>
+        </p:spPr>
+      </p:sp>
+      <p:sp>
+        <p:nvSpPr>
+          <p:cNvPr id="10" name="Shape 8"/>
+          <p:cNvSpPr/>
+          <p:nvPr/>
+        </p:nvSpPr>
+        <p:spPr>
+          <a:xfrm>
+            <a:off x="3310128" y="1572768"/>
+            <a:ext cx="41148" cy="2048256"/>
+          </a:xfrm>
+          <a:prstGeom prst="rect">
+            <a:avLst/>
+          </a:prstGeom>
+          <a:solidFill>
+            <a:srgbClr val="0F7C86"/>
+          </a:solidFill>
+          <a:ln/>
+        </p:spPr>
+      </p:sp>
+      <p:sp>
+        <p:nvSpPr>
+          <p:cNvPr id="11" name="Text 9"/>
+          <p:cNvSpPr/>
+          <p:nvPr/>
+        </p:nvSpPr>
+        <p:spPr>
+          <a:xfrm>
+            <a:off x="3547872" y="1719072"/>
+            <a:ext cx="2121408" cy="274320"/>
+          </a:xfrm>
+          <a:prstGeom prst="rect">
+            <a:avLst/>
+          </a:prstGeom>
+          <a:noFill/>
+          <a:ln/>
+        </p:spPr>
+        <p:txBody>
+          <a:bodyPr wrap="square" lIns="0" tIns="0" rIns="0" bIns="0" rtlCol="0" anchor="t"/>
+          <a:lstStyle/>
+          <a:p>
+            <a:pPr indent="0" marL="0">
+              <a:buNone/>
+            </a:pPr>
+            <a:r>
+              <a:rPr lang="en-US" sz="1300" b="1" dirty="0">
+                <a:solidFill>
+                  <a:srgbClr val="272E52"/>
+                </a:solidFill>
+                <a:latin typeface="Arial" pitchFamily="34" charset="0"/>
+                <a:ea typeface="Arial" pitchFamily="34" charset="-122"/>
+                <a:cs typeface="Arial" pitchFamily="34" charset="-120"/>
+              </a:rPr>
+              <a:t>NAS: B und E</a:t>
+            </a:r>
+            <a:endParaRPr lang="en-US" sz="1300" dirty="0"/>
+          </a:p>
+        </p:txBody>
+      </p:sp>
+      <p:sp>
+        <p:nvSpPr>
+          <p:cNvPr id="12" name="Text 10"/>
+          <p:cNvSpPr/>
+          <p:nvPr/>
+        </p:nvSpPr>
+        <p:spPr>
+          <a:xfrm>
+            <a:off x="3547872" y="2039112"/>
+            <a:ext cx="2121408" cy="1463040"/>
+          </a:xfrm>
+          <a:prstGeom prst="rect">
+            <a:avLst/>
+          </a:prstGeom>
+          <a:noFill/>
+          <a:ln/>
+        </p:spPr>
+        <p:txBody>
+          <a:bodyPr wrap="square" lIns="0" tIns="0" rIns="0" bIns="0" rtlCol="0" anchor="t"/>
+          <a:lstStyle/>
+          <a:p>
+            <a:pPr indent="0" marL="0">
+              <a:lnSpc>
+                <a:spcPct val="92000"/>
+              </a:lnSpc>
+              <a:spcAft>
+                <a:spcPts val="500"/>
+              </a:spcAft>
+              <a:buNone/>
+            </a:pPr>
+            <a:r>
+              <a:rPr lang="en-US" sz="1150" dirty="0">
+                <a:solidFill>
+                  <a:srgbClr val="434A63"/>
+                </a:solidFill>
+                <a:latin typeface="Arial" pitchFamily="34" charset="0"/>
+                <a:ea typeface="Arial" pitchFamily="34" charset="-122"/>
+                <a:cs typeface="Arial" pitchFamily="34" charset="-120"/>
+              </a:rPr>
+              <a:t>B: Team-Ordner im Büronetz</a:t>
+            </a:r>
+            <a:endParaRPr lang="en-US" sz="1150" dirty="0"/>
+          </a:p>
+          <a:p>
+            <a:pPr indent="0" marL="0">
+              <a:lnSpc>
+                <a:spcPct val="92000"/>
+              </a:lnSpc>
+              <a:spcAft>
+                <a:spcPts val="500"/>
+              </a:spcAft>
+              <a:buNone/>
+            </a:pPr>
+            <a:r>
+              <a:rPr lang="en-US" sz="1150" dirty="0">
+                <a:solidFill>
+                  <a:srgbClr val="434A63"/>
+                </a:solidFill>
+                <a:latin typeface="Arial" pitchFamily="34" charset="0"/>
+                <a:ea typeface="Arial" pitchFamily="34" charset="-122"/>
+                <a:cs typeface="Arial" pitchFamily="34" charset="-120"/>
+              </a:rPr>
+              <a:t>E: Scans im Büro</a:t>
+            </a:r>
+            <a:endParaRPr lang="en-US" sz="1150" dirty="0"/>
+          </a:p>
+          <a:p>
+            <a:pPr indent="0" marL="0">
+              <a:lnSpc>
+                <a:spcPct val="92000"/>
+              </a:lnSpc>
+              <a:spcAft>
+                <a:spcPts val="500"/>
+              </a:spcAft>
+              <a:buNone/>
+            </a:pPr>
+            <a:r>
+              <a:rPr lang="en-US" sz="1150" dirty="0">
+                <a:solidFill>
+                  <a:srgbClr val="434A63"/>
+                </a:solidFill>
+                <a:latin typeface="Arial" pitchFamily="34" charset="0"/>
+                <a:ea typeface="Arial" pitchFamily="34" charset="-122"/>
+                <a:cs typeface="Arial" pitchFamily="34" charset="-120"/>
+              </a:rPr>
+              <a:t>Ein Gerät im normalen Netz gibt Ordner frei. Viele teilen sich Dateien.</a:t>
+            </a:r>
+            <a:endParaRPr lang="en-US" sz="1150" dirty="0"/>
+          </a:p>
+        </p:txBody>
+      </p:sp>
+      <p:sp>
+        <p:nvSpPr>
+          <p:cNvPr id="13" name="Shape 11"/>
+          <p:cNvSpPr/>
+          <p:nvPr/>
+        </p:nvSpPr>
+        <p:spPr>
+          <a:xfrm>
+            <a:off x="6053328" y="1572768"/>
+            <a:ext cx="2523744" cy="2048256"/>
+          </a:xfrm>
+          <a:prstGeom prst="rect">
+            <a:avLst/>
+          </a:prstGeom>
+          <a:solidFill>
+            <a:srgbClr val="F5F6FC"/>
+          </a:solidFill>
+          <a:ln/>
+        </p:spPr>
+      </p:sp>
+      <p:sp>
+        <p:nvSpPr>
+          <p:cNvPr id="14" name="Shape 12"/>
+          <p:cNvSpPr/>
+          <p:nvPr/>
+        </p:nvSpPr>
+        <p:spPr>
+          <a:xfrm>
+            <a:off x="6053328" y="1572768"/>
+            <a:ext cx="41148" cy="2048256"/>
+          </a:xfrm>
+          <a:prstGeom prst="rect">
+            <a:avLst/>
+          </a:prstGeom>
+          <a:solidFill>
+            <a:srgbClr val="3843AF"/>
+          </a:solidFill>
+          <a:ln/>
+        </p:spPr>
+      </p:sp>
+      <p:sp>
+        <p:nvSpPr>
+          <p:cNvPr id="15" name="Text 13"/>
+          <p:cNvSpPr/>
+          <p:nvPr/>
+        </p:nvSpPr>
+        <p:spPr>
+          <a:xfrm>
+            <a:off x="6291072" y="1719072"/>
+            <a:ext cx="2121408" cy="274320"/>
+          </a:xfrm>
+          <a:prstGeom prst="rect">
+            <a:avLst/>
+          </a:prstGeom>
+          <a:noFill/>
+          <a:ln/>
+        </p:spPr>
+        <p:txBody>
+          <a:bodyPr wrap="square" lIns="0" tIns="0" rIns="0" bIns="0" rtlCol="0" anchor="t"/>
+          <a:lstStyle/>
+          <a:p>
+            <a:pPr indent="0" marL="0">
+              <a:buNone/>
+            </a:pPr>
+            <a:r>
+              <a:rPr lang="en-US" sz="1300" b="1" dirty="0">
+                <a:solidFill>
+                  <a:srgbClr val="272E52"/>
+                </a:solidFill>
+                <a:latin typeface="Arial" pitchFamily="34" charset="0"/>
+                <a:ea typeface="Arial" pitchFamily="34" charset="-122"/>
+                <a:cs typeface="Arial" pitchFamily="34" charset="-120"/>
+              </a:rPr>
+              <a:t>SAN: C und F</a:t>
+            </a:r>
+            <a:endParaRPr lang="en-US" sz="1300" dirty="0"/>
+          </a:p>
+        </p:txBody>
+      </p:sp>
+      <p:sp>
+        <p:nvSpPr>
+          <p:cNvPr id="16" name="Text 14"/>
+          <p:cNvSpPr/>
+          <p:nvPr/>
+        </p:nvSpPr>
+        <p:spPr>
+          <a:xfrm>
+            <a:off x="6291072" y="2039112"/>
+            <a:ext cx="2121408" cy="1463040"/>
+          </a:xfrm>
+          <a:prstGeom prst="rect">
+            <a:avLst/>
+          </a:prstGeom>
+          <a:noFill/>
+          <a:ln/>
+        </p:spPr>
+        <p:txBody>
+          <a:bodyPr wrap="square" lIns="0" tIns="0" rIns="0" bIns="0" rtlCol="0" anchor="t"/>
+          <a:lstStyle/>
+          <a:p>
+            <a:pPr indent="0" marL="0">
+              <a:lnSpc>
+                <a:spcPct val="92000"/>
+              </a:lnSpc>
+              <a:spcAft>
+                <a:spcPts val="500"/>
+              </a:spcAft>
+              <a:buNone/>
+            </a:pPr>
+            <a:r>
+              <a:rPr lang="en-US" sz="1150" dirty="0">
+                <a:solidFill>
+                  <a:srgbClr val="434A63"/>
+                </a:solidFill>
+                <a:latin typeface="Arial" pitchFamily="34" charset="0"/>
+                <a:ea typeface="Arial" pitchFamily="34" charset="-122"/>
+                <a:cs typeface="Arial" pitchFamily="34" charset="-120"/>
+              </a:rPr>
+              <a:t>C: Hosts mit wechselnden VMs</a:t>
+            </a:r>
+            <a:endParaRPr lang="en-US" sz="1150" dirty="0"/>
+          </a:p>
+          <a:p>
+            <a:pPr indent="0" marL="0">
+              <a:lnSpc>
+                <a:spcPct val="92000"/>
+              </a:lnSpc>
+              <a:spcAft>
+                <a:spcPts val="500"/>
+              </a:spcAft>
+              <a:buNone/>
+            </a:pPr>
+            <a:r>
+              <a:rPr lang="en-US" sz="1150" dirty="0">
+                <a:solidFill>
+                  <a:srgbClr val="434A63"/>
+                </a:solidFill>
+                <a:latin typeface="Arial" pitchFamily="34" charset="0"/>
+                <a:ea typeface="Arial" pitchFamily="34" charset="-122"/>
+                <a:cs typeface="Arial" pitchFamily="34" charset="-120"/>
+              </a:rPr>
+              <a:t>F: Laufwerk über iSCSI</a:t>
+            </a:r>
+            <a:endParaRPr lang="en-US" sz="1150" dirty="0"/>
+          </a:p>
+          <a:p>
+            <a:pPr indent="0" marL="0">
+              <a:lnSpc>
+                <a:spcPct val="92000"/>
+              </a:lnSpc>
+              <a:spcAft>
+                <a:spcPts val="500"/>
+              </a:spcAft>
+              <a:buNone/>
+            </a:pPr>
+            <a:r>
+              <a:rPr lang="en-US" sz="1150" dirty="0">
+                <a:solidFill>
+                  <a:srgbClr val="434A63"/>
+                </a:solidFill>
+                <a:latin typeface="Arial" pitchFamily="34" charset="0"/>
+                <a:ea typeface="Arial" pitchFamily="34" charset="-122"/>
+                <a:cs typeface="Arial" pitchFamily="34" charset="-120"/>
+              </a:rPr>
+              <a:t>Eigenes Speichernetz. Jeder Host sieht Blöcke wie eine eigene Platte.</a:t>
+            </a:r>
+            <a:endParaRPr lang="en-US" sz="1150" dirty="0"/>
+          </a:p>
+        </p:txBody>
+      </p:sp>
+      <p:sp>
+        <p:nvSpPr>
+          <p:cNvPr id="17" name="Shape 15"/>
+          <p:cNvSpPr/>
+          <p:nvPr/>
+        </p:nvSpPr>
+        <p:spPr>
+          <a:xfrm>
+            <a:off x="566928" y="3922776"/>
+            <a:ext cx="32004" cy="256032"/>
+          </a:xfrm>
+          <a:prstGeom prst="rect">
+            <a:avLst/>
+          </a:prstGeom>
+          <a:solidFill>
+            <a:srgbClr val="0F7C86"/>
+          </a:solidFill>
+          <a:ln/>
+        </p:spPr>
+      </p:sp>
+      <p:sp>
+        <p:nvSpPr>
+          <p:cNvPr id="18" name="Text 16"/>
+          <p:cNvSpPr/>
+          <p:nvPr/>
+        </p:nvSpPr>
+        <p:spPr>
+          <a:xfrm>
+            <a:off x="749808" y="3877056"/>
+            <a:ext cx="7827264" cy="402336"/>
+          </a:xfrm>
+          <a:prstGeom prst="rect">
+            <a:avLst/>
+          </a:prstGeom>
+          <a:noFill/>
+          <a:ln/>
+        </p:spPr>
+        <p:txBody>
+          <a:bodyPr wrap="square" lIns="0" tIns="0" rIns="0" bIns="0" rtlCol="0" anchor="ctr"/>
+          <a:lstStyle/>
+          <a:p>
+            <a:pPr indent="0" marL="0">
+              <a:buNone/>
+            </a:pPr>
+            <a:r>
+              <a:rPr lang="en-US" sz="1200" b="1" dirty="0">
+                <a:solidFill>
+                  <a:srgbClr val="434A63"/>
+                </a:solidFill>
+                <a:latin typeface="Arial" pitchFamily="34" charset="0"/>
+                <a:ea typeface="Arial" pitchFamily="34" charset="-122"/>
+                <a:cs typeface="Arial" pitchFamily="34" charset="-120"/>
+              </a:rPr>
+              <a:t>Streitfälle: C geht auch mit NFS-Freigaben, F kann ein NAS mit iSCSI sein. Es zählt, was ankommt: Blöcke oder Dateien.</a:t>
+            </a:r>
+            <a:endParaRPr lang="en-US" sz="1200" dirty="0"/>
+          </a:p>
+        </p:txBody>
+      </p:sp>
+      <p:sp>
+        <p:nvSpPr>
+          <p:cNvPr id="19" name="Shape 17"/>
           <p:cNvSpPr/>
           <p:nvPr/>
         </p:nvSpPr>
@@ -5685,7 +5605,7 @@
       </p:sp>
       <p:sp>
         <p:nvSpPr>
-          <p:cNvPr id="23" name="Text 21"/>
+          <p:cNvPr id="20" name="Text 18"/>
           <p:cNvSpPr/>
           <p:nvPr/>
         </p:nvSpPr>
@@ -5716,7 +5636,7 @@
                 <a:ea typeface="Arial" pitchFamily="34" charset="-122"/>
                 <a:cs typeface="Arial" pitchFamily="34" charset="-120"/>
               </a:rPr>
-              <a:t>Heute plant ihr</a:t>
+              <a:t>Speicher planen</a:t>
             </a:r>
             <a:endParaRPr lang="en-US" sz="1050" dirty="0"/>
           </a:p>
@@ -5724,7 +5644,7 @@
       </p:sp>
       <p:sp>
         <p:nvSpPr>
-          <p:cNvPr id="24" name="Text 22"/>
+          <p:cNvPr id="21" name="Text 19"/>
           <p:cNvSpPr/>
           <p:nvPr/>
         </p:nvSpPr>
@@ -5755,7 +5675,7 @@
                 <a:ea typeface="Arial" pitchFamily="34" charset="-122"/>
                 <a:cs typeface="Arial" pitchFamily="34" charset="-120"/>
               </a:rPr>
-              <a:t>11/16</a:t>
+              <a:t>12/19</a:t>
             </a:r>
             <a:endParaRPr lang="en-US" sz="1050" dirty="0"/>
           </a:p>
@@ -5801,67 +5721,107 @@
         </p:nvSpPr>
         <p:spPr>
           <a:xfrm>
-            <a:off x="566928" y="201168"/>
+            <a:off x="6355080" y="0"/>
+            <a:ext cx="2788920" cy="5143500"/>
+          </a:xfrm>
+          <a:prstGeom prst="rect">
+            <a:avLst/>
+          </a:prstGeom>
+          <a:solidFill>
+            <a:srgbClr val="EEF0FB"/>
+          </a:solidFill>
+          <a:ln/>
+        </p:spPr>
+      </p:sp>
+      <p:sp>
+        <p:nvSpPr>
+          <p:cNvPr id="3" name="Shape 1"/>
+          <p:cNvSpPr/>
+          <p:nvPr/>
+        </p:nvSpPr>
+        <p:spPr>
+          <a:xfrm>
+            <a:off x="6355080" y="0"/>
+            <a:ext cx="45720" cy="5143500"/>
+          </a:xfrm>
+          <a:prstGeom prst="rect">
+            <a:avLst/>
+          </a:prstGeom>
+          <a:solidFill>
+            <a:srgbClr val="3843AF"/>
+          </a:solidFill>
+          <a:ln/>
+        </p:spPr>
+      </p:sp>
+      <p:sp>
+        <p:nvSpPr>
+          <p:cNvPr id="4" name="Text 2"/>
+          <p:cNvSpPr/>
+          <p:nvPr/>
+        </p:nvSpPr>
+        <p:spPr>
+          <a:xfrm>
+            <a:off x="6629400" y="1463040"/>
+            <a:ext cx="2194560" cy="1737360"/>
+          </a:xfrm>
+          <a:prstGeom prst="rect">
+            <a:avLst/>
+          </a:prstGeom>
+          <a:noFill/>
+          <a:ln/>
+        </p:spPr>
+        <p:txBody>
+          <a:bodyPr wrap="square" lIns="0" tIns="0" rIns="0" bIns="0" rtlCol="0" anchor="ctr"/>
+          <a:lstStyle/>
+          <a:p>
+            <a:pPr algn="ctr" indent="0" marL="0">
+              <a:buNone/>
+            </a:pPr>
+            <a:r>
+              <a:rPr lang="en-US" sz="8400" b="1" dirty="0">
+                <a:solidFill>
+                  <a:srgbClr val="3843AF"/>
+                </a:solidFill>
+                <a:latin typeface="Arial" pitchFamily="34" charset="0"/>
+                <a:ea typeface="Arial" pitchFamily="34" charset="-122"/>
+                <a:cs typeface="Arial" pitchFamily="34" charset="-120"/>
+              </a:rPr>
+              <a:t>02</a:t>
+            </a:r>
+            <a:endParaRPr lang="en-US" sz="8400" dirty="0"/>
+          </a:p>
+        </p:txBody>
+      </p:sp>
+      <p:sp>
+        <p:nvSpPr>
+          <p:cNvPr id="5" name="Shape 3"/>
+          <p:cNvSpPr/>
+          <p:nvPr/>
+        </p:nvSpPr>
+        <p:spPr>
+          <a:xfrm>
+            <a:off x="566928" y="1883664"/>
             <a:ext cx="475488" cy="50292"/>
           </a:xfrm>
           <a:prstGeom prst="rect">
             <a:avLst/>
           </a:prstGeom>
           <a:solidFill>
-            <a:srgbClr val="0F7C86"/>
+            <a:srgbClr val="3843AF"/>
           </a:solidFill>
           <a:ln/>
         </p:spPr>
       </p:sp>
       <p:sp>
         <p:nvSpPr>
-          <p:cNvPr id="3" name="Text 1"/>
-          <p:cNvSpPr/>
-          <p:nvPr/>
-        </p:nvSpPr>
-        <p:spPr>
-          <a:xfrm>
-            <a:off x="566928" y="384048"/>
-            <a:ext cx="8010144" cy="237744"/>
-          </a:xfrm>
-          <a:prstGeom prst="rect">
-            <a:avLst/>
-          </a:prstGeom>
-          <a:noFill/>
-          <a:ln/>
-        </p:spPr>
-        <p:txBody>
-          <a:bodyPr wrap="square" lIns="0" tIns="0" rIns="0" bIns="0" rtlCol="0" anchor="ctr"/>
-          <a:lstStyle/>
-          <a:p>
-            <a:pPr indent="0" marL="0">
-              <a:buNone/>
-            </a:pPr>
-            <a:r>
-              <a:rPr lang="en-US" sz="1150" b="1" spc="180" kern="0" dirty="0">
-                <a:solidFill>
-                  <a:srgbClr val="0F7C86"/>
-                </a:solidFill>
-                <a:latin typeface="Arial" pitchFamily="34" charset="0"/>
-                <a:ea typeface="Arial" pitchFamily="34" charset="-122"/>
-                <a:cs typeface="Arial" pitchFamily="34" charset="-120"/>
-              </a:rPr>
-              <a:t>FÜNF MINUTEN JE GRUPPE</a:t>
-            </a:r>
-            <a:endParaRPr lang="en-US" sz="1150" dirty="0"/>
-          </a:p>
-        </p:txBody>
-      </p:sp>
-      <p:sp>
-        <p:nvSpPr>
-          <p:cNvPr id="4" name="Text 2"/>
-          <p:cNvSpPr/>
-          <p:nvPr/>
-        </p:nvSpPr>
-        <p:spPr>
-          <a:xfrm>
-            <a:off x="566928" y="731520"/>
-            <a:ext cx="8010144" cy="603504"/>
+          <p:cNvPr id="6" name="Text 4"/>
+          <p:cNvSpPr/>
+          <p:nvPr/>
+        </p:nvSpPr>
+        <p:spPr>
+          <a:xfrm>
+            <a:off x="566928" y="2084832"/>
+            <a:ext cx="5394960" cy="868680"/>
           </a:xfrm>
           <a:prstGeom prst="rect">
             <a:avLst/>
@@ -5877,7 +5837,7 @@
               <a:buNone/>
             </a:pPr>
             <a:r>
-              <a:rPr lang="en-US" sz="2600" b="1" dirty="0">
+              <a:rPr lang="en-US" sz="3000" b="1" dirty="0">
                 <a:solidFill>
                   <a:srgbClr val="272E52"/>
                 </a:solidFill>
@@ -5885,68 +5845,9 @@
                 <a:ea typeface="Arial" pitchFamily="34" charset="-122"/>
                 <a:cs typeface="Arial" pitchFamily="34" charset="-120"/>
               </a:rPr>
-              <a:t>Jede Gruppe stellt vor</a:t>
-            </a:r>
-            <a:endParaRPr lang="en-US" sz="2600" dirty="0"/>
-          </a:p>
-        </p:txBody>
-      </p:sp>
-      <p:sp>
-        <p:nvSpPr>
-          <p:cNvPr id="5" name="Shape 3"/>
-          <p:cNvSpPr/>
-          <p:nvPr/>
-        </p:nvSpPr>
-        <p:spPr>
-          <a:xfrm>
-            <a:off x="438912" y="1737360"/>
-            <a:ext cx="8266176" cy="438912"/>
-          </a:xfrm>
-          <a:prstGeom prst="rect">
-            <a:avLst/>
-          </a:prstGeom>
-          <a:solidFill>
-            <a:srgbClr val="F5F6FC"/>
-          </a:solidFill>
-          <a:ln/>
-        </p:spPr>
-      </p:sp>
-      <p:sp>
-        <p:nvSpPr>
-          <p:cNvPr id="6" name="Text 4"/>
-          <p:cNvSpPr/>
-          <p:nvPr/>
-        </p:nvSpPr>
-        <p:spPr>
-          <a:xfrm>
-            <a:off x="566928" y="1737360"/>
-            <a:ext cx="914400" cy="438912"/>
-          </a:xfrm>
-          <a:prstGeom prst="rect">
-            <a:avLst/>
-          </a:prstGeom>
-          <a:noFill/>
-          <a:ln/>
-        </p:spPr>
-        <p:txBody>
-          <a:bodyPr wrap="square" lIns="0" tIns="0" rIns="0" bIns="0" rtlCol="0" anchor="ctr"/>
-          <a:lstStyle/>
-          <a:p>
-            <a:pPr indent="0" marL="0">
-              <a:buNone/>
-            </a:pPr>
-            <a:r>
-              <a:rPr lang="en-US" sz="1150" b="1" dirty="0">
-                <a:solidFill>
-                  <a:srgbClr val="0F7C86"/>
-                </a:solidFill>
-                <a:latin typeface="Courier New" pitchFamily="34" charset="0"/>
-                <a:ea typeface="Courier New" pitchFamily="34" charset="-122"/>
-                <a:cs typeface="Courier New" pitchFamily="34" charset="-120"/>
-              </a:rPr>
-              <a:t>1</a:t>
-            </a:r>
-            <a:endParaRPr lang="en-US" sz="1150" dirty="0"/>
+              <a:t>Heute plant ihr</a:t>
+            </a:r>
+            <a:endParaRPr lang="en-US" sz="3000" dirty="0"/>
           </a:p>
         </p:txBody>
       </p:sp>
@@ -5958,399 +5859,24 @@
         </p:nvSpPr>
         <p:spPr>
           <a:xfrm>
-            <a:off x="1481328" y="1737360"/>
-            <a:ext cx="7095744" cy="438912"/>
-          </a:xfrm>
-          <a:prstGeom prst="rect">
-            <a:avLst/>
-          </a:prstGeom>
-          <a:noFill/>
-          <a:ln/>
-        </p:spPr>
-        <p:txBody>
-          <a:bodyPr wrap="square" lIns="0" tIns="0" rIns="0" bIns="0" rtlCol="0" anchor="ctr"/>
-          <a:lstStyle/>
-          <a:p>
-            <a:pPr indent="0" marL="0">
-              <a:buNone/>
-            </a:pPr>
-            <a:r>
-              <a:rPr lang="en-US" sz="1150" dirty="0">
-                <a:solidFill>
-                  <a:srgbClr val="434A63"/>
-                </a:solidFill>
-                <a:latin typeface="Arial" pitchFamily="34" charset="0"/>
-                <a:ea typeface="Arial" pitchFamily="34" charset="-122"/>
-                <a:cs typeface="Arial" pitchFamily="34" charset="-120"/>
-              </a:rPr>
-              <a:t>Wie viel? Unser Netto-Bedarf in drei Jahren und wie wir gerechnet haben</a:t>
-            </a:r>
-            <a:endParaRPr lang="en-US" sz="1150" dirty="0"/>
-          </a:p>
-        </p:txBody>
-      </p:sp>
-      <p:sp>
-        <p:nvSpPr>
-          <p:cNvPr id="8" name="Text 6"/>
-          <p:cNvSpPr/>
-          <p:nvPr/>
-        </p:nvSpPr>
-        <p:spPr>
-          <a:xfrm>
-            <a:off x="566928" y="2176272"/>
-            <a:ext cx="914400" cy="438912"/>
-          </a:xfrm>
-          <a:prstGeom prst="rect">
-            <a:avLst/>
-          </a:prstGeom>
-          <a:noFill/>
-          <a:ln/>
-        </p:spPr>
-        <p:txBody>
-          <a:bodyPr wrap="square" lIns="0" tIns="0" rIns="0" bIns="0" rtlCol="0" anchor="ctr"/>
-          <a:lstStyle/>
-          <a:p>
-            <a:pPr indent="0" marL="0">
-              <a:buNone/>
-            </a:pPr>
-            <a:r>
-              <a:rPr lang="en-US" sz="1150" b="1" dirty="0">
-                <a:solidFill>
-                  <a:srgbClr val="0F7C86"/>
-                </a:solidFill>
-                <a:latin typeface="Courier New" pitchFamily="34" charset="0"/>
-                <a:ea typeface="Courier New" pitchFamily="34" charset="-122"/>
-                <a:cs typeface="Courier New" pitchFamily="34" charset="-120"/>
-              </a:rPr>
-              <a:t>2</a:t>
-            </a:r>
-            <a:endParaRPr lang="en-US" sz="1150" dirty="0"/>
-          </a:p>
-        </p:txBody>
-      </p:sp>
-      <p:sp>
-        <p:nvSpPr>
-          <p:cNvPr id="9" name="Text 7"/>
-          <p:cNvSpPr/>
-          <p:nvPr/>
-        </p:nvSpPr>
-        <p:spPr>
-          <a:xfrm>
-            <a:off x="1481328" y="2176272"/>
-            <a:ext cx="7095744" cy="438912"/>
-          </a:xfrm>
-          <a:prstGeom prst="rect">
-            <a:avLst/>
-          </a:prstGeom>
-          <a:noFill/>
-          <a:ln/>
-        </p:spPr>
-        <p:txBody>
-          <a:bodyPr wrap="square" lIns="0" tIns="0" rIns="0" bIns="0" rtlCol="0" anchor="ctr"/>
-          <a:lstStyle/>
-          <a:p>
-            <a:pPr indent="0" marL="0">
-              <a:buNone/>
-            </a:pPr>
-            <a:r>
-              <a:rPr lang="en-US" sz="1150" dirty="0">
-                <a:solidFill>
-                  <a:srgbClr val="434A63"/>
-                </a:solidFill>
-                <a:latin typeface="Arial" pitchFamily="34" charset="0"/>
-                <a:ea typeface="Arial" pitchFamily="34" charset="-122"/>
-                <a:cs typeface="Arial" pitchFamily="34" charset="-120"/>
-              </a:rPr>
-              <a:t>Wie sicher? Unser RAID-Level, wie viele Platten, wie viel Voltrad brutto kauft</a:t>
-            </a:r>
-            <a:endParaRPr lang="en-US" sz="1150" dirty="0"/>
-          </a:p>
-        </p:txBody>
-      </p:sp>
-      <p:sp>
-        <p:nvSpPr>
-          <p:cNvPr id="10" name="Shape 8"/>
-          <p:cNvSpPr/>
-          <p:nvPr/>
-        </p:nvSpPr>
-        <p:spPr>
-          <a:xfrm>
-            <a:off x="438912" y="2615184"/>
-            <a:ext cx="8266176" cy="438912"/>
-          </a:xfrm>
-          <a:prstGeom prst="rect">
-            <a:avLst/>
-          </a:prstGeom>
-          <a:solidFill>
-            <a:srgbClr val="F5F6FC"/>
-          </a:solidFill>
-          <a:ln/>
-        </p:spPr>
-      </p:sp>
-      <p:sp>
-        <p:nvSpPr>
-          <p:cNvPr id="11" name="Text 9"/>
-          <p:cNvSpPr/>
-          <p:nvPr/>
-        </p:nvSpPr>
-        <p:spPr>
-          <a:xfrm>
-            <a:off x="566928" y="2615184"/>
-            <a:ext cx="914400" cy="438912"/>
-          </a:xfrm>
-          <a:prstGeom prst="rect">
-            <a:avLst/>
-          </a:prstGeom>
-          <a:noFill/>
-          <a:ln/>
-        </p:spPr>
-        <p:txBody>
-          <a:bodyPr wrap="square" lIns="0" tIns="0" rIns="0" bIns="0" rtlCol="0" anchor="ctr"/>
-          <a:lstStyle/>
-          <a:p>
-            <a:pPr indent="0" marL="0">
-              <a:buNone/>
-            </a:pPr>
-            <a:r>
-              <a:rPr lang="en-US" sz="1150" b="1" dirty="0">
-                <a:solidFill>
-                  <a:srgbClr val="0F7C86"/>
-                </a:solidFill>
-                <a:latin typeface="Courier New" pitchFamily="34" charset="0"/>
-                <a:ea typeface="Courier New" pitchFamily="34" charset="-122"/>
-                <a:cs typeface="Courier New" pitchFamily="34" charset="-120"/>
-              </a:rPr>
-              <a:t>3</a:t>
-            </a:r>
-            <a:endParaRPr lang="en-US" sz="1150" dirty="0"/>
-          </a:p>
-        </p:txBody>
-      </p:sp>
-      <p:sp>
-        <p:nvSpPr>
-          <p:cNvPr id="12" name="Text 10"/>
-          <p:cNvSpPr/>
-          <p:nvPr/>
-        </p:nvSpPr>
-        <p:spPr>
-          <a:xfrm>
-            <a:off x="1481328" y="2615184"/>
-            <a:ext cx="7095744" cy="438912"/>
-          </a:xfrm>
-          <a:prstGeom prst="rect">
-            <a:avLst/>
-          </a:prstGeom>
-          <a:noFill/>
-          <a:ln/>
-        </p:spPr>
-        <p:txBody>
-          <a:bodyPr wrap="square" lIns="0" tIns="0" rIns="0" bIns="0" rtlCol="0" anchor="ctr"/>
-          <a:lstStyle/>
-          <a:p>
-            <a:pPr indent="0" marL="0">
-              <a:buNone/>
-            </a:pPr>
-            <a:r>
-              <a:rPr lang="en-US" sz="1150" dirty="0">
-                <a:solidFill>
-                  <a:srgbClr val="434A63"/>
-                </a:solidFill>
-                <a:latin typeface="Arial" pitchFamily="34" charset="0"/>
-                <a:ea typeface="Arial" pitchFamily="34" charset="-122"/>
-                <a:cs typeface="Arial" pitchFamily="34" charset="-120"/>
-              </a:rPr>
-              <a:t>Wie angebunden? Unsere Wahl für die Maschinen, die Zeichnungen und die Sicherung</a:t>
-            </a:r>
-            <a:endParaRPr lang="en-US" sz="1150" dirty="0"/>
-          </a:p>
-        </p:txBody>
-      </p:sp>
-      <p:sp>
-        <p:nvSpPr>
-          <p:cNvPr id="13" name="Text 11"/>
-          <p:cNvSpPr/>
-          <p:nvPr/>
-        </p:nvSpPr>
-        <p:spPr>
-          <a:xfrm>
-            <a:off x="566928" y="3054096"/>
-            <a:ext cx="914400" cy="438912"/>
-          </a:xfrm>
-          <a:prstGeom prst="rect">
-            <a:avLst/>
-          </a:prstGeom>
-          <a:noFill/>
-          <a:ln/>
-        </p:spPr>
-        <p:txBody>
-          <a:bodyPr wrap="square" lIns="0" tIns="0" rIns="0" bIns="0" rtlCol="0" anchor="ctr"/>
-          <a:lstStyle/>
-          <a:p>
-            <a:pPr indent="0" marL="0">
-              <a:buNone/>
-            </a:pPr>
-            <a:r>
-              <a:rPr lang="en-US" sz="1150" b="1" dirty="0">
-                <a:solidFill>
-                  <a:srgbClr val="0F7C86"/>
-                </a:solidFill>
-                <a:latin typeface="Courier New" pitchFamily="34" charset="0"/>
-                <a:ea typeface="Courier New" pitchFamily="34" charset="-122"/>
-                <a:cs typeface="Courier New" pitchFamily="34" charset="-120"/>
-              </a:rPr>
-              <a:t>Offen</a:t>
-            </a:r>
-            <a:endParaRPr lang="en-US" sz="1150" dirty="0"/>
-          </a:p>
-        </p:txBody>
-      </p:sp>
-      <p:sp>
-        <p:nvSpPr>
-          <p:cNvPr id="14" name="Text 12"/>
-          <p:cNvSpPr/>
-          <p:nvPr/>
-        </p:nvSpPr>
-        <p:spPr>
-          <a:xfrm>
-            <a:off x="1481328" y="3054096"/>
-            <a:ext cx="7095744" cy="438912"/>
-          </a:xfrm>
-          <a:prstGeom prst="rect">
-            <a:avLst/>
-          </a:prstGeom>
-          <a:noFill/>
-          <a:ln/>
-        </p:spPr>
-        <p:txBody>
-          <a:bodyPr wrap="square" lIns="0" tIns="0" rIns="0" bIns="0" rtlCol="0" anchor="ctr"/>
-          <a:lstStyle/>
-          <a:p>
-            <a:pPr indent="0" marL="0">
-              <a:buNone/>
-            </a:pPr>
-            <a:r>
-              <a:rPr lang="en-US" sz="1150" dirty="0">
-                <a:solidFill>
-                  <a:srgbClr val="434A63"/>
-                </a:solidFill>
-                <a:latin typeface="Arial" pitchFamily="34" charset="0"/>
-                <a:ea typeface="Arial" pitchFamily="34" charset="-122"/>
-                <a:cs typeface="Arial" pitchFamily="34" charset="-120"/>
-              </a:rPr>
-              <a:t>Was kostet das alles? Wer baut es mit zwei Personen in der IT auf?</a:t>
-            </a:r>
-            <a:endParaRPr lang="en-US" sz="1150" dirty="0"/>
-          </a:p>
-        </p:txBody>
-      </p:sp>
-      <p:sp>
-        <p:nvSpPr>
-          <p:cNvPr id="15" name="Shape 13"/>
-          <p:cNvSpPr/>
-          <p:nvPr/>
-        </p:nvSpPr>
-        <p:spPr>
-          <a:xfrm>
-            <a:off x="566928" y="3977640"/>
-            <a:ext cx="32004" cy="256032"/>
-          </a:xfrm>
-          <a:prstGeom prst="rect">
-            <a:avLst/>
-          </a:prstGeom>
-          <a:solidFill>
-            <a:srgbClr val="0F7C86"/>
-          </a:solidFill>
-          <a:ln/>
-        </p:spPr>
-      </p:sp>
-      <p:sp>
-        <p:nvSpPr>
-          <p:cNvPr id="16" name="Text 14"/>
-          <p:cNvSpPr/>
-          <p:nvPr/>
-        </p:nvSpPr>
-        <p:spPr>
-          <a:xfrm>
-            <a:off x="749808" y="3931920"/>
-            <a:ext cx="7827264" cy="402336"/>
-          </a:xfrm>
-          <a:prstGeom prst="rect">
-            <a:avLst/>
-          </a:prstGeom>
-          <a:noFill/>
-          <a:ln/>
-        </p:spPr>
-        <p:txBody>
-          <a:bodyPr wrap="square" lIns="0" tIns="0" rIns="0" bIns="0" rtlCol="0" anchor="ctr"/>
-          <a:lstStyle/>
-          <a:p>
-            <a:pPr indent="0" marL="0">
-              <a:buNone/>
-            </a:pPr>
-            <a:r>
-              <a:rPr lang="en-US" sz="1200" b="1" dirty="0">
-                <a:solidFill>
-                  <a:srgbClr val="434A63"/>
-                </a:solidFill>
-                <a:latin typeface="Arial" pitchFamily="34" charset="0"/>
-                <a:ea typeface="Arial" pitchFamily="34" charset="-122"/>
-                <a:cs typeface="Arial" pitchFamily="34" charset="-120"/>
-              </a:rPr>
-              <a:t>Ab der zweiten Gruppe nur noch: Was habt ihr anders entschieden und warum? Die letzte Frage bleibt offen für Mittwoch.</a:t>
-            </a:r>
-            <a:endParaRPr lang="en-US" sz="1200" dirty="0"/>
-          </a:p>
-        </p:txBody>
-      </p:sp>
-      <p:sp>
-        <p:nvSpPr>
-          <p:cNvPr id="17" name="Shape 15"/>
-          <p:cNvSpPr/>
-          <p:nvPr/>
-        </p:nvSpPr>
-        <p:spPr>
-          <a:xfrm>
-            <a:off x="566928" y="4631436"/>
-            <a:ext cx="8010144" cy="0"/>
-          </a:xfrm>
-          <a:prstGeom prst="line">
-            <a:avLst/>
-          </a:prstGeom>
-          <a:noFill/>
-          <a:ln w="9525">
-            <a:solidFill>
-              <a:srgbClr val="DFE3F0"/>
-            </a:solidFill>
-            <a:prstDash val="solid"/>
-          </a:ln>
-        </p:spPr>
-      </p:sp>
-      <p:sp>
-        <p:nvSpPr>
-          <p:cNvPr id="18" name="Text 16"/>
-          <p:cNvSpPr/>
-          <p:nvPr/>
-        </p:nvSpPr>
-        <p:spPr>
-          <a:xfrm>
-            <a:off x="566928" y="4722876"/>
-            <a:ext cx="5029200" cy="237744"/>
-          </a:xfrm>
-          <a:prstGeom prst="rect">
-            <a:avLst/>
-          </a:prstGeom>
-          <a:noFill/>
-          <a:ln/>
-        </p:spPr>
-        <p:txBody>
-          <a:bodyPr wrap="square" lIns="0" tIns="0" rIns="0" bIns="0" rtlCol="0" anchor="ctr"/>
-          <a:lstStyle/>
-          <a:p>
-            <a:pPr indent="0" marL="0">
-              <a:buNone/>
-            </a:pPr>
-            <a:r>
-              <a:rPr lang="en-US" sz="1050" spc="30" kern="0" dirty="0">
+            <a:off x="566928" y="3017520"/>
+            <a:ext cx="5394960" cy="548640"/>
+          </a:xfrm>
+          <a:prstGeom prst="rect">
+            <a:avLst/>
+          </a:prstGeom>
+          <a:noFill/>
+          <a:ln/>
+        </p:spPr>
+        <p:txBody>
+          <a:bodyPr wrap="square" lIns="0" tIns="0" rIns="0" bIns="0" rtlCol="0" anchor="t"/>
+          <a:lstStyle/>
+          <a:p>
+            <a:pPr indent="0" marL="0">
+              <a:buNone/>
+            </a:pPr>
+            <a:r>
+              <a:rPr lang="en-US" sz="1350" dirty="0">
                 <a:solidFill>
                   <a:srgbClr val="5C6377"/>
                 </a:solidFill>
@@ -6358,48 +5884,9 @@
                 <a:ea typeface="Arial" pitchFamily="34" charset="-122"/>
                 <a:cs typeface="Arial" pitchFamily="34" charset="-120"/>
               </a:rPr>
-              <a:t>Auswertung</a:t>
-            </a:r>
-            <a:endParaRPr lang="en-US" sz="1050" dirty="0"/>
-          </a:p>
-        </p:txBody>
-      </p:sp>
-      <p:sp>
-        <p:nvSpPr>
-          <p:cNvPr id="19" name="Text 17"/>
-          <p:cNvSpPr/>
-          <p:nvPr/>
-        </p:nvSpPr>
-        <p:spPr>
-          <a:xfrm>
-            <a:off x="8028432" y="4722876"/>
-            <a:ext cx="548640" cy="237744"/>
-          </a:xfrm>
-          <a:prstGeom prst="rect">
-            <a:avLst/>
-          </a:prstGeom>
-          <a:noFill/>
-          <a:ln/>
-        </p:spPr>
-        <p:txBody>
-          <a:bodyPr wrap="square" lIns="0" tIns="0" rIns="0" bIns="0" rtlCol="0" anchor="ctr"/>
-          <a:lstStyle/>
-          <a:p>
-            <a:pPr algn="r" indent="0" marL="0">
-              <a:buNone/>
-            </a:pPr>
-            <a:r>
-              <a:rPr lang="en-US" sz="1050" dirty="0">
-                <a:solidFill>
-                  <a:srgbClr val="5C6377"/>
-                </a:solidFill>
-                <a:latin typeface="Arial" pitchFamily="34" charset="0"/>
-                <a:ea typeface="Arial" pitchFamily="34" charset="-122"/>
-                <a:cs typeface="Arial" pitchFamily="34" charset="-120"/>
-              </a:rPr>
-              <a:t>12/16</a:t>
-            </a:r>
-            <a:endParaRPr lang="en-US" sz="1050" dirty="0"/>
+              <a:t>Speicher für Voltrad</a:t>
+            </a:r>
+            <a:endParaRPr lang="en-US" sz="1350" dirty="0"/>
           </a:p>
         </p:txBody>
       </p:sp>
@@ -6450,7 +5937,7 @@
             <a:avLst/>
           </a:prstGeom>
           <a:solidFill>
-            <a:srgbClr val="0F7C86"/>
+            <a:srgbClr val="3843AF"/>
           </a:solidFill>
           <a:ln/>
         </p:spPr>
@@ -6482,13 +5969,13 @@
             <a:r>
               <a:rPr lang="en-US" sz="1150" b="1" spc="180" kern="0" dirty="0">
                 <a:solidFill>
-                  <a:srgbClr val="0F7C86"/>
-                </a:solidFill>
-                <a:latin typeface="Arial" pitchFamily="34" charset="0"/>
-                <a:ea typeface="Arial" pitchFamily="34" charset="-122"/>
-                <a:cs typeface="Arial" pitchFamily="34" charset="-120"/>
-              </a:rPr>
-              <a:t>STATION 1 · LÖSUNG</a:t>
+                  <a:srgbClr val="3843AF"/>
+                </a:solidFill>
+                <a:latin typeface="Arial" pitchFamily="34" charset="0"/>
+                <a:ea typeface="Arial" pitchFamily="34" charset="-122"/>
+                <a:cs typeface="Arial" pitchFamily="34" charset="-120"/>
+              </a:rPr>
+              <a:t>EINE KARTE, DREI FRAGEN</a:t>
             </a:r>
             <a:endParaRPr lang="en-US" sz="1150" dirty="0"/>
           </a:p>
@@ -6527,7 +6014,7 @@
                 <a:ea typeface="Arial" pitchFamily="34" charset="-122"/>
                 <a:cs typeface="Arial" pitchFamily="34" charset="-120"/>
               </a:rPr>
-              <a:t>Wie viel?</a:t>
+              <a:t>Euer Auftrag</a:t>
             </a:r>
             <a:endParaRPr lang="en-US" sz="2600" dirty="0"/>
           </a:p>
@@ -6535,7 +6022,7 @@
       </p:sp>
       <p:pic>
         <p:nvPicPr>
-          <p:cNvPr id="5" name="Image 0" descr="/Users/jacobmenge/Desktop/kurs-26.2b-orga/folienwerkstatt/assets/diagramme/speicher-loesung-rechnung.png">    </p:cNvPr>
+          <p:cNvPr id="5" name="Image 0" descr="/Users/jacobmenge/Desktop/kurs-26.2b-orga/folienwerkstatt/assets/diagramme/speicher-auftrag.png">    </p:cNvPr>
           <p:cNvPicPr>
             <a:picLocks noChangeAspect="1"/>
           </p:cNvPicPr>
@@ -6549,8 +6036,8 @@
         </p:blipFill>
         <p:spPr>
           <a:xfrm>
-            <a:off x="566928" y="1371600"/>
-            <a:ext cx="8010144" cy="2468880"/>
+            <a:off x="566928" y="1335024"/>
+            <a:ext cx="8010144" cy="2743200"/>
           </a:xfrm>
           <a:prstGeom prst="rect">
             <a:avLst/>
@@ -6560,65 +6047,6 @@
       <p:sp>
         <p:nvSpPr>
           <p:cNvPr id="6" name="Shape 3"/>
-          <p:cNvSpPr/>
-          <p:nvPr/>
-        </p:nvSpPr>
-        <p:spPr>
-          <a:xfrm>
-            <a:off x="566928" y="4069080"/>
-            <a:ext cx="32004" cy="256032"/>
-          </a:xfrm>
-          <a:prstGeom prst="rect">
-            <a:avLst/>
-          </a:prstGeom>
-          <a:solidFill>
-            <a:srgbClr val="0F7C86"/>
-          </a:solidFill>
-          <a:ln/>
-        </p:spPr>
-      </p:sp>
-      <p:sp>
-        <p:nvSpPr>
-          <p:cNvPr id="7" name="Text 4"/>
-          <p:cNvSpPr/>
-          <p:nvPr/>
-        </p:nvSpPr>
-        <p:spPr>
-          <a:xfrm>
-            <a:off x="749808" y="4023360"/>
-            <a:ext cx="7827264" cy="402336"/>
-          </a:xfrm>
-          <a:prstGeom prst="rect">
-            <a:avLst/>
-          </a:prstGeom>
-          <a:noFill/>
-          <a:ln/>
-        </p:spPr>
-        <p:txBody>
-          <a:bodyPr wrap="square" lIns="0" tIns="0" rIns="0" bIns="0" rtlCol="0" anchor="ctr"/>
-          <a:lstStyle/>
-          <a:p>
-            <a:pPr indent="0" marL="0">
-              <a:buNone/>
-            </a:pPr>
-            <a:r>
-              <a:rPr lang="en-US" sz="1200" b="1" dirty="0">
-                <a:solidFill>
-                  <a:srgbClr val="434A63"/>
-                </a:solidFill>
-                <a:latin typeface="Arial" pitchFamily="34" charset="0"/>
-                <a:ea typeface="Arial" pitchFamily="34" charset="-122"/>
-                <a:cs typeface="Arial" pitchFamily="34" charset="-120"/>
-              </a:rPr>
-              <a:t>Wer Maschinen und Zeichnungen einzeln rechnet und dann addiert, kommt auf dasselbe Ergebnis.</a:t>
-            </a:r>
-            <a:endParaRPr lang="en-US" sz="1200" dirty="0"/>
-          </a:p>
-        </p:txBody>
-      </p:sp>
-      <p:sp>
-        <p:nvSpPr>
-          <p:cNvPr id="8" name="Shape 5"/>
           <p:cNvSpPr/>
           <p:nvPr/>
         </p:nvSpPr>
@@ -6641,7 +6069,7 @@
       </p:sp>
       <p:sp>
         <p:nvSpPr>
-          <p:cNvPr id="9" name="Text 6"/>
+          <p:cNvPr id="7" name="Text 4"/>
           <p:cNvSpPr/>
           <p:nvPr/>
         </p:nvSpPr>
@@ -6672,7 +6100,7 @@
                 <a:ea typeface="Arial" pitchFamily="34" charset="-122"/>
                 <a:cs typeface="Arial" pitchFamily="34" charset="-120"/>
               </a:rPr>
-              <a:t>Auswertung</a:t>
+              <a:t>Heute plant ihr</a:t>
             </a:r>
             <a:endParaRPr lang="en-US" sz="1050" dirty="0"/>
           </a:p>
@@ -6680,7 +6108,7 @@
       </p:sp>
       <p:sp>
         <p:nvSpPr>
-          <p:cNvPr id="10" name="Text 7"/>
+          <p:cNvPr id="8" name="Text 5"/>
           <p:cNvSpPr/>
           <p:nvPr/>
         </p:nvSpPr>
@@ -6711,7 +6139,7 @@
                 <a:ea typeface="Arial" pitchFamily="34" charset="-122"/>
                 <a:cs typeface="Arial" pitchFamily="34" charset="-120"/>
               </a:rPr>
-              <a:t>13/16</a:t>
+              <a:t>13/19</a:t>
             </a:r>
             <a:endParaRPr lang="en-US" sz="1050" dirty="0"/>
           </a:p>
@@ -6764,7 +6192,7 @@
             <a:avLst/>
           </a:prstGeom>
           <a:solidFill>
-            <a:srgbClr val="0F7C86"/>
+            <a:srgbClr val="3843AF"/>
           </a:solidFill>
           <a:ln/>
         </p:spPr>
@@ -6796,13 +6224,13 @@
             <a:r>
               <a:rPr lang="en-US" sz="1150" b="1" spc="180" kern="0" dirty="0">
                 <a:solidFill>
-                  <a:srgbClr val="0F7C86"/>
-                </a:solidFill>
-                <a:latin typeface="Arial" pitchFamily="34" charset="0"/>
-                <a:ea typeface="Arial" pitchFamily="34" charset="-122"/>
-                <a:cs typeface="Arial" pitchFamily="34" charset="-120"/>
-              </a:rPr>
-              <a:t>STATION 2 · LÖSUNG</a:t>
+                  <a:srgbClr val="3843AF"/>
+                </a:solidFill>
+                <a:latin typeface="Arial" pitchFamily="34" charset="0"/>
+                <a:ea typeface="Arial" pitchFamily="34" charset="-122"/>
+                <a:cs typeface="Arial" pitchFamily="34" charset="-120"/>
+              </a:rPr>
+              <a:t>BREAKOUT · 19:10 BIS 20:10</a:t>
             </a:r>
             <a:endParaRPr lang="en-US" sz="1150" dirty="0"/>
           </a:p>
@@ -6841,39 +6269,635 @@
                 <a:ea typeface="Arial" pitchFamily="34" charset="-122"/>
                 <a:cs typeface="Arial" pitchFamily="34" charset="-120"/>
               </a:rPr>
-              <a:t>Wie sicher?</a:t>
+              <a:t>So läuft die Praxiszeit</a:t>
             </a:r>
             <a:endParaRPr lang="en-US" sz="2600" dirty="0"/>
           </a:p>
         </p:txBody>
       </p:sp>
-      <p:pic>
-        <p:nvPicPr>
-          <p:cNvPr id="5" name="Image 0" descr="/Users/jacobmenge/Desktop/kurs-26.2b-orga/folienwerkstatt/assets/diagramme/speicher-loesung-raid.png">    </p:cNvPr>
-          <p:cNvPicPr>
-            <a:picLocks noChangeAspect="1"/>
-          </p:cNvPicPr>
-          <p:nvPr/>
-        </p:nvPicPr>
-        <p:blipFill>
-          <a:blip r:embed="rId1"/>
-          <a:stretch>
-            <a:fillRect/>
-          </a:stretch>
-        </p:blipFill>
-        <p:spPr>
-          <a:xfrm>
-            <a:off x="566928" y="1335024"/>
-            <a:ext cx="8010144" cy="2651760"/>
-          </a:xfrm>
-          <a:prstGeom prst="rect">
-            <a:avLst/>
-          </a:prstGeom>
-        </p:spPr>
-      </p:pic>
-      <p:sp>
-        <p:nvSpPr>
-          <p:cNvPr id="6" name="Shape 3"/>
+      <p:sp>
+        <p:nvSpPr>
+          <p:cNvPr id="5" name="Shape 3"/>
+          <p:cNvSpPr/>
+          <p:nvPr/>
+        </p:nvSpPr>
+        <p:spPr>
+          <a:xfrm>
+            <a:off x="438912" y="1572768"/>
+            <a:ext cx="8266176" cy="274320"/>
+          </a:xfrm>
+          <a:prstGeom prst="rect">
+            <a:avLst/>
+          </a:prstGeom>
+          <a:solidFill>
+            <a:srgbClr val="F5F6FC"/>
+          </a:solidFill>
+          <a:ln/>
+        </p:spPr>
+      </p:sp>
+      <p:sp>
+        <p:nvSpPr>
+          <p:cNvPr id="6" name="Text 4"/>
+          <p:cNvSpPr/>
+          <p:nvPr/>
+        </p:nvSpPr>
+        <p:spPr>
+          <a:xfrm>
+            <a:off x="566928" y="1572768"/>
+            <a:ext cx="1097280" cy="274320"/>
+          </a:xfrm>
+          <a:prstGeom prst="rect">
+            <a:avLst/>
+          </a:prstGeom>
+          <a:noFill/>
+          <a:ln/>
+        </p:spPr>
+        <p:txBody>
+          <a:bodyPr wrap="square" lIns="0" tIns="0" rIns="0" bIns="0" rtlCol="0" anchor="ctr"/>
+          <a:lstStyle/>
+          <a:p>
+            <a:pPr indent="0" marL="0">
+              <a:buNone/>
+            </a:pPr>
+            <a:r>
+              <a:rPr lang="en-US" sz="1050" b="1" dirty="0">
+                <a:solidFill>
+                  <a:srgbClr val="3843AF"/>
+                </a:solidFill>
+                <a:latin typeface="Courier New" pitchFamily="34" charset="0"/>
+                <a:ea typeface="Courier New" pitchFamily="34" charset="-122"/>
+                <a:cs typeface="Courier New" pitchFamily="34" charset="-120"/>
+              </a:rPr>
+              <a:t>Station 1</a:t>
+            </a:r>
+            <a:endParaRPr lang="en-US" sz="1050" dirty="0"/>
+          </a:p>
+        </p:txBody>
+      </p:sp>
+      <p:sp>
+        <p:nvSpPr>
+          <p:cNvPr id="7" name="Text 5"/>
+          <p:cNvSpPr/>
+          <p:nvPr/>
+        </p:nvSpPr>
+        <p:spPr>
+          <a:xfrm>
+            <a:off x="1664208" y="1572768"/>
+            <a:ext cx="6912864" cy="274320"/>
+          </a:xfrm>
+          <a:prstGeom prst="rect">
+            <a:avLst/>
+          </a:prstGeom>
+          <a:noFill/>
+          <a:ln/>
+        </p:spPr>
+        <p:txBody>
+          <a:bodyPr wrap="square" lIns="0" tIns="0" rIns="0" bIns="0" rtlCol="0" anchor="ctr"/>
+          <a:lstStyle/>
+          <a:p>
+            <a:pPr indent="0" marL="0">
+              <a:buNone/>
+            </a:pPr>
+            <a:r>
+              <a:rPr lang="en-US" sz="1050" dirty="0">
+                <a:solidFill>
+                  <a:srgbClr val="434A63"/>
+                </a:solidFill>
+                <a:latin typeface="Arial" pitchFamily="34" charset="0"/>
+                <a:ea typeface="Arial" pitchFamily="34" charset="-122"/>
+                <a:cs typeface="Arial" pitchFamily="34" charset="-120"/>
+              </a:rPr>
+              <a:t>Wie viel? Den Netto-Bedarf in drei Jahren ausrechnen · 15 Min.</a:t>
+            </a:r>
+            <a:endParaRPr lang="en-US" sz="1050" dirty="0"/>
+          </a:p>
+        </p:txBody>
+      </p:sp>
+      <p:sp>
+        <p:nvSpPr>
+          <p:cNvPr id="8" name="Text 6"/>
+          <p:cNvSpPr/>
+          <p:nvPr/>
+        </p:nvSpPr>
+        <p:spPr>
+          <a:xfrm>
+            <a:off x="566928" y="1847088"/>
+            <a:ext cx="1097280" cy="274320"/>
+          </a:xfrm>
+          <a:prstGeom prst="rect">
+            <a:avLst/>
+          </a:prstGeom>
+          <a:noFill/>
+          <a:ln/>
+        </p:spPr>
+        <p:txBody>
+          <a:bodyPr wrap="square" lIns="0" tIns="0" rIns="0" bIns="0" rtlCol="0" anchor="ctr"/>
+          <a:lstStyle/>
+          <a:p>
+            <a:pPr indent="0" marL="0">
+              <a:buNone/>
+            </a:pPr>
+            <a:r>
+              <a:rPr lang="en-US" sz="1050" b="1" dirty="0">
+                <a:solidFill>
+                  <a:srgbClr val="3843AF"/>
+                </a:solidFill>
+                <a:latin typeface="Courier New" pitchFamily="34" charset="0"/>
+                <a:ea typeface="Courier New" pitchFamily="34" charset="-122"/>
+                <a:cs typeface="Courier New" pitchFamily="34" charset="-120"/>
+              </a:rPr>
+              <a:t>Station 2</a:t>
+            </a:r>
+            <a:endParaRPr lang="en-US" sz="1050" dirty="0"/>
+          </a:p>
+        </p:txBody>
+      </p:sp>
+      <p:sp>
+        <p:nvSpPr>
+          <p:cNvPr id="9" name="Text 7"/>
+          <p:cNvSpPr/>
+          <p:nvPr/>
+        </p:nvSpPr>
+        <p:spPr>
+          <a:xfrm>
+            <a:off x="1664208" y="1847088"/>
+            <a:ext cx="6912864" cy="274320"/>
+          </a:xfrm>
+          <a:prstGeom prst="rect">
+            <a:avLst/>
+          </a:prstGeom>
+          <a:noFill/>
+          <a:ln/>
+        </p:spPr>
+        <p:txBody>
+          <a:bodyPr wrap="square" lIns="0" tIns="0" rIns="0" bIns="0" rtlCol="0" anchor="ctr"/>
+          <a:lstStyle/>
+          <a:p>
+            <a:pPr indent="0" marL="0">
+              <a:buNone/>
+            </a:pPr>
+            <a:r>
+              <a:rPr lang="en-US" sz="1050" dirty="0">
+                <a:solidFill>
+                  <a:srgbClr val="434A63"/>
+                </a:solidFill>
+                <a:latin typeface="Arial" pitchFamily="34" charset="0"/>
+                <a:ea typeface="Arial" pitchFamily="34" charset="-122"/>
+                <a:cs typeface="Arial" pitchFamily="34" charset="-120"/>
+              </a:rPr>
+              <a:t>Wie sicher? Ein RAID-Level wählen und die Platten zählen · 15 Min.</a:t>
+            </a:r>
+            <a:endParaRPr lang="en-US" sz="1050" dirty="0"/>
+          </a:p>
+        </p:txBody>
+      </p:sp>
+      <p:sp>
+        <p:nvSpPr>
+          <p:cNvPr id="10" name="Shape 8"/>
+          <p:cNvSpPr/>
+          <p:nvPr/>
+        </p:nvSpPr>
+        <p:spPr>
+          <a:xfrm>
+            <a:off x="438912" y="2121408"/>
+            <a:ext cx="8266176" cy="274320"/>
+          </a:xfrm>
+          <a:prstGeom prst="rect">
+            <a:avLst/>
+          </a:prstGeom>
+          <a:solidFill>
+            <a:srgbClr val="F5F6FC"/>
+          </a:solidFill>
+          <a:ln/>
+        </p:spPr>
+      </p:sp>
+      <p:sp>
+        <p:nvSpPr>
+          <p:cNvPr id="11" name="Text 9"/>
+          <p:cNvSpPr/>
+          <p:nvPr/>
+        </p:nvSpPr>
+        <p:spPr>
+          <a:xfrm>
+            <a:off x="566928" y="2121408"/>
+            <a:ext cx="1097280" cy="274320"/>
+          </a:xfrm>
+          <a:prstGeom prst="rect">
+            <a:avLst/>
+          </a:prstGeom>
+          <a:noFill/>
+          <a:ln/>
+        </p:spPr>
+        <p:txBody>
+          <a:bodyPr wrap="square" lIns="0" tIns="0" rIns="0" bIns="0" rtlCol="0" anchor="ctr"/>
+          <a:lstStyle/>
+          <a:p>
+            <a:pPr indent="0" marL="0">
+              <a:buNone/>
+            </a:pPr>
+            <a:r>
+              <a:rPr lang="en-US" sz="1050" b="1" dirty="0">
+                <a:solidFill>
+                  <a:srgbClr val="3843AF"/>
+                </a:solidFill>
+                <a:latin typeface="Courier New" pitchFamily="34" charset="0"/>
+                <a:ea typeface="Courier New" pitchFamily="34" charset="-122"/>
+                <a:cs typeface="Courier New" pitchFamily="34" charset="-120"/>
+              </a:rPr>
+              <a:t>Station 3</a:t>
+            </a:r>
+            <a:endParaRPr lang="en-US" sz="1050" dirty="0"/>
+          </a:p>
+        </p:txBody>
+      </p:sp>
+      <p:sp>
+        <p:nvSpPr>
+          <p:cNvPr id="12" name="Text 10"/>
+          <p:cNvSpPr/>
+          <p:nvPr/>
+        </p:nvSpPr>
+        <p:spPr>
+          <a:xfrm>
+            <a:off x="1664208" y="2121408"/>
+            <a:ext cx="6912864" cy="274320"/>
+          </a:xfrm>
+          <a:prstGeom prst="rect">
+            <a:avLst/>
+          </a:prstGeom>
+          <a:noFill/>
+          <a:ln/>
+        </p:spPr>
+        <p:txBody>
+          <a:bodyPr wrap="square" lIns="0" tIns="0" rIns="0" bIns="0" rtlCol="0" anchor="ctr"/>
+          <a:lstStyle/>
+          <a:p>
+            <a:pPr indent="0" marL="0">
+              <a:buNone/>
+            </a:pPr>
+            <a:r>
+              <a:rPr lang="en-US" sz="1050" dirty="0">
+                <a:solidFill>
+                  <a:srgbClr val="434A63"/>
+                </a:solidFill>
+                <a:latin typeface="Arial" pitchFamily="34" charset="0"/>
+                <a:ea typeface="Arial" pitchFamily="34" charset="-122"/>
+                <a:cs typeface="Arial" pitchFamily="34" charset="-120"/>
+              </a:rPr>
+              <a:t>Wie angebunden? Für drei Bedarfe DAS, NAS oder SAN wählen · 10 Min.</a:t>
+            </a:r>
+            <a:endParaRPr lang="en-US" sz="1050" dirty="0"/>
+          </a:p>
+        </p:txBody>
+      </p:sp>
+      <p:sp>
+        <p:nvSpPr>
+          <p:cNvPr id="13" name="Text 11"/>
+          <p:cNvSpPr/>
+          <p:nvPr/>
+        </p:nvSpPr>
+        <p:spPr>
+          <a:xfrm>
+            <a:off x="566928" y="2395728"/>
+            <a:ext cx="1097280" cy="274320"/>
+          </a:xfrm>
+          <a:prstGeom prst="rect">
+            <a:avLst/>
+          </a:prstGeom>
+          <a:noFill/>
+          <a:ln/>
+        </p:spPr>
+        <p:txBody>
+          <a:bodyPr wrap="square" lIns="0" tIns="0" rIns="0" bIns="0" rtlCol="0" anchor="ctr"/>
+          <a:lstStyle/>
+          <a:p>
+            <a:pPr indent="0" marL="0">
+              <a:buNone/>
+            </a:pPr>
+            <a:r>
+              <a:rPr lang="en-US" sz="1050" b="1" dirty="0">
+                <a:solidFill>
+                  <a:srgbClr val="3843AF"/>
+                </a:solidFill>
+                <a:latin typeface="Courier New" pitchFamily="34" charset="0"/>
+                <a:ea typeface="Courier New" pitchFamily="34" charset="-122"/>
+                <a:cs typeface="Courier New" pitchFamily="34" charset="-120"/>
+              </a:rPr>
+              <a:t>Danach</a:t>
+            </a:r>
+            <a:endParaRPr lang="en-US" sz="1050" dirty="0"/>
+          </a:p>
+        </p:txBody>
+      </p:sp>
+      <p:sp>
+        <p:nvSpPr>
+          <p:cNvPr id="14" name="Text 12"/>
+          <p:cNvSpPr/>
+          <p:nvPr/>
+        </p:nvSpPr>
+        <p:spPr>
+          <a:xfrm>
+            <a:off x="1664208" y="2395728"/>
+            <a:ext cx="6912864" cy="274320"/>
+          </a:xfrm>
+          <a:prstGeom prst="rect">
+            <a:avLst/>
+          </a:prstGeom>
+          <a:noFill/>
+          <a:ln/>
+        </p:spPr>
+        <p:txBody>
+          <a:bodyPr wrap="square" lIns="0" tIns="0" rIns="0" bIns="0" rtlCol="0" anchor="ctr"/>
+          <a:lstStyle/>
+          <a:p>
+            <a:pPr indent="0" marL="0">
+              <a:buNone/>
+            </a:pPr>
+            <a:r>
+              <a:rPr lang="en-US" sz="1050" dirty="0">
+                <a:solidFill>
+                  <a:srgbClr val="434A63"/>
+                </a:solidFill>
+                <a:latin typeface="Arial" pitchFamily="34" charset="0"/>
+                <a:ea typeface="Arial" pitchFamily="34" charset="-122"/>
+                <a:cs typeface="Arial" pitchFamily="34" charset="-120"/>
+              </a:rPr>
+              <a:t>Vorstellung vorbereiten: drei Antworten für fünf Minuten Vortrag · 5 Min.</a:t>
+            </a:r>
+            <a:endParaRPr lang="en-US" sz="1050" dirty="0"/>
+          </a:p>
+        </p:txBody>
+      </p:sp>
+      <p:sp>
+        <p:nvSpPr>
+          <p:cNvPr id="15" name="Shape 13"/>
+          <p:cNvSpPr/>
+          <p:nvPr/>
+        </p:nvSpPr>
+        <p:spPr>
+          <a:xfrm>
+            <a:off x="438912" y="2670048"/>
+            <a:ext cx="8266176" cy="274320"/>
+          </a:xfrm>
+          <a:prstGeom prst="rect">
+            <a:avLst/>
+          </a:prstGeom>
+          <a:solidFill>
+            <a:srgbClr val="F5F6FC"/>
+          </a:solidFill>
+          <a:ln/>
+        </p:spPr>
+      </p:sp>
+      <p:sp>
+        <p:nvSpPr>
+          <p:cNvPr id="16" name="Text 14"/>
+          <p:cNvSpPr/>
+          <p:nvPr/>
+        </p:nvSpPr>
+        <p:spPr>
+          <a:xfrm>
+            <a:off x="566928" y="2670048"/>
+            <a:ext cx="1097280" cy="274320"/>
+          </a:xfrm>
+          <a:prstGeom prst="rect">
+            <a:avLst/>
+          </a:prstGeom>
+          <a:noFill/>
+          <a:ln/>
+        </p:spPr>
+        <p:txBody>
+          <a:bodyPr wrap="square" lIns="0" tIns="0" rIns="0" bIns="0" rtlCol="0" anchor="ctr"/>
+          <a:lstStyle/>
+          <a:p>
+            <a:pPr indent="0" marL="0">
+              <a:buNone/>
+            </a:pPr>
+            <a:r>
+              <a:rPr lang="en-US" sz="1050" b="1" dirty="0">
+                <a:solidFill>
+                  <a:srgbClr val="3843AF"/>
+                </a:solidFill>
+                <a:latin typeface="Courier New" pitchFamily="34" charset="0"/>
+                <a:ea typeface="Courier New" pitchFamily="34" charset="-122"/>
+                <a:cs typeface="Courier New" pitchFamily="34" charset="-120"/>
+              </a:rPr>
+              <a:t>Bonus</a:t>
+            </a:r>
+            <a:endParaRPr lang="en-US" sz="1050" dirty="0"/>
+          </a:p>
+        </p:txBody>
+      </p:sp>
+      <p:sp>
+        <p:nvSpPr>
+          <p:cNvPr id="17" name="Text 15"/>
+          <p:cNvSpPr/>
+          <p:nvPr/>
+        </p:nvSpPr>
+        <p:spPr>
+          <a:xfrm>
+            <a:off x="1664208" y="2670048"/>
+            <a:ext cx="6912864" cy="274320"/>
+          </a:xfrm>
+          <a:prstGeom prst="rect">
+            <a:avLst/>
+          </a:prstGeom>
+          <a:noFill/>
+          <a:ln/>
+        </p:spPr>
+        <p:txBody>
+          <a:bodyPr wrap="square" lIns="0" tIns="0" rIns="0" bIns="0" rtlCol="0" anchor="ctr"/>
+          <a:lstStyle/>
+          <a:p>
+            <a:pPr indent="0" marL="0">
+              <a:buNone/>
+            </a:pPr>
+            <a:r>
+              <a:rPr lang="en-US" sz="1050" dirty="0">
+                <a:solidFill>
+                  <a:srgbClr val="434A63"/>
+                </a:solidFill>
+                <a:latin typeface="Arial" pitchFamily="34" charset="0"/>
+                <a:ea typeface="Arial" pitchFamily="34" charset="-122"/>
+                <a:cs typeface="Arial" pitchFamily="34" charset="-120"/>
+              </a:rPr>
+              <a:t>Prozentuales Wachstum, Hot Spare, 3-2-1 für Voltrad, die Frage der Chefin</a:t>
+            </a:r>
+            <a:endParaRPr lang="en-US" sz="1050" dirty="0"/>
+          </a:p>
+        </p:txBody>
+      </p:sp>
+      <p:sp>
+        <p:nvSpPr>
+          <p:cNvPr id="18" name="Shape 16"/>
+          <p:cNvSpPr/>
+          <p:nvPr/>
+        </p:nvSpPr>
+        <p:spPr>
+          <a:xfrm>
+            <a:off x="566928" y="3200400"/>
+            <a:ext cx="8010144" cy="1243584"/>
+          </a:xfrm>
+          <a:prstGeom prst="rect">
+            <a:avLst/>
+          </a:prstGeom>
+          <a:solidFill>
+            <a:srgbClr val="EEF0FB"/>
+          </a:solidFill>
+          <a:ln/>
+        </p:spPr>
+      </p:sp>
+      <p:sp>
+        <p:nvSpPr>
+          <p:cNvPr id="19" name="Shape 17"/>
+          <p:cNvSpPr/>
+          <p:nvPr/>
+        </p:nvSpPr>
+        <p:spPr>
+          <a:xfrm>
+            <a:off x="566928" y="3200400"/>
+            <a:ext cx="41148" cy="1243584"/>
+          </a:xfrm>
+          <a:prstGeom prst="rect">
+            <a:avLst/>
+          </a:prstGeom>
+          <a:solidFill>
+            <a:srgbClr val="9A6310"/>
+          </a:solidFill>
+          <a:ln/>
+        </p:spPr>
+      </p:sp>
+      <p:sp>
+        <p:nvSpPr>
+          <p:cNvPr id="20" name="Text 18"/>
+          <p:cNvSpPr/>
+          <p:nvPr/>
+        </p:nvSpPr>
+        <p:spPr>
+          <a:xfrm>
+            <a:off x="804672" y="3346704"/>
+            <a:ext cx="7607808" cy="242062"/>
+          </a:xfrm>
+          <a:prstGeom prst="rect">
+            <a:avLst/>
+          </a:prstGeom>
+          <a:noFill/>
+          <a:ln/>
+        </p:spPr>
+        <p:txBody>
+          <a:bodyPr wrap="square" lIns="0" tIns="0" rIns="0" bIns="0" rtlCol="0" anchor="t"/>
+          <a:lstStyle/>
+          <a:p>
+            <a:pPr indent="0" marL="0">
+              <a:buNone/>
+            </a:pPr>
+            <a:r>
+              <a:rPr lang="en-US" sz="1300" b="1" dirty="0">
+                <a:solidFill>
+                  <a:srgbClr val="272E52"/>
+                </a:solidFill>
+                <a:latin typeface="Arial" pitchFamily="34" charset="0"/>
+                <a:ea typeface="Arial" pitchFamily="34" charset="-122"/>
+                <a:cs typeface="Arial" pitchFamily="34" charset="-120"/>
+              </a:rPr>
+              <a:t>Jetzt öffnen, alles steht auf der Kursseite</a:t>
+            </a:r>
+            <a:endParaRPr lang="en-US" sz="1300" dirty="0"/>
+          </a:p>
+        </p:txBody>
+      </p:sp>
+      <p:sp>
+        <p:nvSpPr>
+          <p:cNvPr id="21" name="Text 19"/>
+          <p:cNvSpPr/>
+          <p:nvPr/>
+        </p:nvSpPr>
+        <p:spPr>
+          <a:xfrm>
+            <a:off x="804672" y="3634486"/>
+            <a:ext cx="7607808" cy="690626"/>
+          </a:xfrm>
+          <a:prstGeom prst="rect">
+            <a:avLst/>
+          </a:prstGeom>
+          <a:noFill/>
+          <a:ln/>
+        </p:spPr>
+        <p:txBody>
+          <a:bodyPr wrap="square" lIns="0" tIns="0" rIns="0" bIns="0" rtlCol="0" anchor="t"/>
+          <a:lstStyle/>
+          <a:p>
+            <a:pPr indent="0" marL="0">
+              <a:lnSpc>
+                <a:spcPct val="92000"/>
+              </a:lnSpc>
+              <a:spcAft>
+                <a:spcPts val="500"/>
+              </a:spcAft>
+              <a:buNone/>
+            </a:pPr>
+            <a:r>
+              <a:rPr lang="en-US" sz="1000" dirty="0">
+                <a:solidFill>
+                  <a:srgbClr val="434A63"/>
+                </a:solidFill>
+                <a:latin typeface="Arial" pitchFamily="34" charset="0"/>
+                <a:ea typeface="Arial" pitchFamily="34" charset="-122"/>
+                <a:cs typeface="Arial" pitchFamily="34" charset="-120"/>
+              </a:rPr>
+              <a:t>Übung:  jacobmenge.github.io/kurs-unterlagen/infrastruktur-planung/praxis-speicher/</a:t>
+            </a:r>
+            <a:endParaRPr lang="en-US" sz="1000" dirty="0"/>
+          </a:p>
+          <a:p>
+            <a:pPr indent="0" marL="0">
+              <a:lnSpc>
+                <a:spcPct val="92000"/>
+              </a:lnSpc>
+              <a:spcAft>
+                <a:spcPts val="500"/>
+              </a:spcAft>
+              <a:buNone/>
+            </a:pPr>
+            <a:r>
+              <a:rPr lang="en-US" sz="1000" dirty="0">
+                <a:solidFill>
+                  <a:srgbClr val="434A63"/>
+                </a:solidFill>
+                <a:latin typeface="Arial" pitchFamily="34" charset="0"/>
+                <a:ea typeface="Arial" pitchFamily="34" charset="-122"/>
+                <a:cs typeface="Arial" pitchFamily="34" charset="-120"/>
+              </a:rPr>
+              <a:t>Theorie:  jacobmenge.github.io/kurs-unterlagen/infrastruktur-planung/speicherloesungen/</a:t>
+            </a:r>
+            <a:endParaRPr lang="en-US" sz="1000" dirty="0"/>
+          </a:p>
+          <a:p>
+            <a:pPr indent="0" marL="0">
+              <a:lnSpc>
+                <a:spcPct val="92000"/>
+              </a:lnSpc>
+              <a:spcAft>
+                <a:spcPts val="500"/>
+              </a:spcAft>
+              <a:buNone/>
+            </a:pPr>
+            <a:r>
+              <a:rPr lang="en-US" sz="1000" dirty="0">
+                <a:solidFill>
+                  <a:srgbClr val="434A63"/>
+                </a:solidFill>
+                <a:latin typeface="Arial" pitchFamily="34" charset="0"/>
+                <a:ea typeface="Arial" pitchFamily="34" charset="-122"/>
+                <a:cs typeface="Arial" pitchFamily="34" charset="-120"/>
+              </a:rPr>
+              <a:t>Um 20:10 sind alle wieder hier. Jede Gruppe stellt ihre drei Antworten in fünf Minuten vor.</a:t>
+            </a:r>
+            <a:endParaRPr lang="en-US" sz="1000" dirty="0"/>
+          </a:p>
+        </p:txBody>
+      </p:sp>
+      <p:sp>
+        <p:nvSpPr>
+          <p:cNvPr id="22" name="Shape 20"/>
           <p:cNvSpPr/>
           <p:nvPr/>
         </p:nvSpPr>
@@ -6896,7 +6920,7 @@
       </p:sp>
       <p:sp>
         <p:nvSpPr>
-          <p:cNvPr id="7" name="Text 4"/>
+          <p:cNvPr id="23" name="Text 21"/>
           <p:cNvSpPr/>
           <p:nvPr/>
         </p:nvSpPr>
@@ -6927,7 +6951,7 @@
                 <a:ea typeface="Arial" pitchFamily="34" charset="-122"/>
                 <a:cs typeface="Arial" pitchFamily="34" charset="-120"/>
               </a:rPr>
-              <a:t>Auswertung</a:t>
+              <a:t>Heute plant ihr</a:t>
             </a:r>
             <a:endParaRPr lang="en-US" sz="1050" dirty="0"/>
           </a:p>
@@ -6935,7 +6959,7 @@
       </p:sp>
       <p:sp>
         <p:nvSpPr>
-          <p:cNvPr id="8" name="Text 5"/>
+          <p:cNvPr id="24" name="Text 22"/>
           <p:cNvSpPr/>
           <p:nvPr/>
         </p:nvSpPr>
@@ -6966,7 +6990,7 @@
                 <a:ea typeface="Arial" pitchFamily="34" charset="-122"/>
                 <a:cs typeface="Arial" pitchFamily="34" charset="-120"/>
               </a:rPr>
-              <a:t>14/16</a:t>
+              <a:t>14/19</a:t>
             </a:r>
             <a:endParaRPr lang="en-US" sz="1050" dirty="0"/>
           </a:p>
@@ -7057,7 +7081,7 @@
                 <a:ea typeface="Arial" pitchFamily="34" charset="-122"/>
                 <a:cs typeface="Arial" pitchFamily="34" charset="-120"/>
               </a:rPr>
-              <a:t>STATION 3 · LÖSUNG</a:t>
+              <a:t>FÜNF MINUTEN JE GRUPPE</a:t>
             </a:r>
             <a:endParaRPr lang="en-US" sz="1150" dirty="0"/>
           </a:p>
@@ -7096,45 +7120,373 @@
                 <a:ea typeface="Arial" pitchFamily="34" charset="-122"/>
                 <a:cs typeface="Arial" pitchFamily="34" charset="-120"/>
               </a:rPr>
-              <a:t>Wie angebunden?</a:t>
+              <a:t>Jede Gruppe stellt vor</a:t>
             </a:r>
             <a:endParaRPr lang="en-US" sz="2600" dirty="0"/>
           </a:p>
         </p:txBody>
       </p:sp>
-      <p:pic>
-        <p:nvPicPr>
-          <p:cNvPr id="5" name="Image 0" descr="/Users/jacobmenge/Desktop/kurs-26.2b-orga/folienwerkstatt/assets/diagramme/speicher-loesung-anbindung.png">    </p:cNvPr>
-          <p:cNvPicPr>
-            <a:picLocks noChangeAspect="1"/>
-          </p:cNvPicPr>
-          <p:nvPr/>
-        </p:nvPicPr>
-        <p:blipFill>
-          <a:blip r:embed="rId1"/>
-          <a:stretch>
-            <a:fillRect/>
-          </a:stretch>
-        </p:blipFill>
-        <p:spPr>
-          <a:xfrm>
-            <a:off x="566928" y="1371600"/>
-            <a:ext cx="8010144" cy="2523744"/>
-          </a:xfrm>
-          <a:prstGeom prst="rect">
-            <a:avLst/>
-          </a:prstGeom>
-        </p:spPr>
-      </p:pic>
-      <p:sp>
-        <p:nvSpPr>
-          <p:cNvPr id="6" name="Shape 3"/>
-          <p:cNvSpPr/>
-          <p:nvPr/>
-        </p:nvSpPr>
-        <p:spPr>
-          <a:xfrm>
-            <a:off x="566928" y="4105656"/>
+      <p:sp>
+        <p:nvSpPr>
+          <p:cNvPr id="5" name="Shape 3"/>
+          <p:cNvSpPr/>
+          <p:nvPr/>
+        </p:nvSpPr>
+        <p:spPr>
+          <a:xfrm>
+            <a:off x="438912" y="1737360"/>
+            <a:ext cx="8266176" cy="438912"/>
+          </a:xfrm>
+          <a:prstGeom prst="rect">
+            <a:avLst/>
+          </a:prstGeom>
+          <a:solidFill>
+            <a:srgbClr val="F5F6FC"/>
+          </a:solidFill>
+          <a:ln/>
+        </p:spPr>
+      </p:sp>
+      <p:sp>
+        <p:nvSpPr>
+          <p:cNvPr id="6" name="Text 4"/>
+          <p:cNvSpPr/>
+          <p:nvPr/>
+        </p:nvSpPr>
+        <p:spPr>
+          <a:xfrm>
+            <a:off x="566928" y="1737360"/>
+            <a:ext cx="914400" cy="438912"/>
+          </a:xfrm>
+          <a:prstGeom prst="rect">
+            <a:avLst/>
+          </a:prstGeom>
+          <a:noFill/>
+          <a:ln/>
+        </p:spPr>
+        <p:txBody>
+          <a:bodyPr wrap="square" lIns="0" tIns="0" rIns="0" bIns="0" rtlCol="0" anchor="ctr"/>
+          <a:lstStyle/>
+          <a:p>
+            <a:pPr indent="0" marL="0">
+              <a:buNone/>
+            </a:pPr>
+            <a:r>
+              <a:rPr lang="en-US" sz="1150" b="1" dirty="0">
+                <a:solidFill>
+                  <a:srgbClr val="0F7C86"/>
+                </a:solidFill>
+                <a:latin typeface="Courier New" pitchFamily="34" charset="0"/>
+                <a:ea typeface="Courier New" pitchFamily="34" charset="-122"/>
+                <a:cs typeface="Courier New" pitchFamily="34" charset="-120"/>
+              </a:rPr>
+              <a:t>1</a:t>
+            </a:r>
+            <a:endParaRPr lang="en-US" sz="1150" dirty="0"/>
+          </a:p>
+        </p:txBody>
+      </p:sp>
+      <p:sp>
+        <p:nvSpPr>
+          <p:cNvPr id="7" name="Text 5"/>
+          <p:cNvSpPr/>
+          <p:nvPr/>
+        </p:nvSpPr>
+        <p:spPr>
+          <a:xfrm>
+            <a:off x="1481328" y="1737360"/>
+            <a:ext cx="7095744" cy="438912"/>
+          </a:xfrm>
+          <a:prstGeom prst="rect">
+            <a:avLst/>
+          </a:prstGeom>
+          <a:noFill/>
+          <a:ln/>
+        </p:spPr>
+        <p:txBody>
+          <a:bodyPr wrap="square" lIns="0" tIns="0" rIns="0" bIns="0" rtlCol="0" anchor="ctr"/>
+          <a:lstStyle/>
+          <a:p>
+            <a:pPr indent="0" marL="0">
+              <a:buNone/>
+            </a:pPr>
+            <a:r>
+              <a:rPr lang="en-US" sz="1150" dirty="0">
+                <a:solidFill>
+                  <a:srgbClr val="434A63"/>
+                </a:solidFill>
+                <a:latin typeface="Arial" pitchFamily="34" charset="0"/>
+                <a:ea typeface="Arial" pitchFamily="34" charset="-122"/>
+                <a:cs typeface="Arial" pitchFamily="34" charset="-120"/>
+              </a:rPr>
+              <a:t>Wie viel? Unser Netto-Bedarf in drei Jahren und wie wir gerechnet haben</a:t>
+            </a:r>
+            <a:endParaRPr lang="en-US" sz="1150" dirty="0"/>
+          </a:p>
+        </p:txBody>
+      </p:sp>
+      <p:sp>
+        <p:nvSpPr>
+          <p:cNvPr id="8" name="Text 6"/>
+          <p:cNvSpPr/>
+          <p:nvPr/>
+        </p:nvSpPr>
+        <p:spPr>
+          <a:xfrm>
+            <a:off x="566928" y="2176272"/>
+            <a:ext cx="914400" cy="438912"/>
+          </a:xfrm>
+          <a:prstGeom prst="rect">
+            <a:avLst/>
+          </a:prstGeom>
+          <a:noFill/>
+          <a:ln/>
+        </p:spPr>
+        <p:txBody>
+          <a:bodyPr wrap="square" lIns="0" tIns="0" rIns="0" bIns="0" rtlCol="0" anchor="ctr"/>
+          <a:lstStyle/>
+          <a:p>
+            <a:pPr indent="0" marL="0">
+              <a:buNone/>
+            </a:pPr>
+            <a:r>
+              <a:rPr lang="en-US" sz="1150" b="1" dirty="0">
+                <a:solidFill>
+                  <a:srgbClr val="0F7C86"/>
+                </a:solidFill>
+                <a:latin typeface="Courier New" pitchFamily="34" charset="0"/>
+                <a:ea typeface="Courier New" pitchFamily="34" charset="-122"/>
+                <a:cs typeface="Courier New" pitchFamily="34" charset="-120"/>
+              </a:rPr>
+              <a:t>2</a:t>
+            </a:r>
+            <a:endParaRPr lang="en-US" sz="1150" dirty="0"/>
+          </a:p>
+        </p:txBody>
+      </p:sp>
+      <p:sp>
+        <p:nvSpPr>
+          <p:cNvPr id="9" name="Text 7"/>
+          <p:cNvSpPr/>
+          <p:nvPr/>
+        </p:nvSpPr>
+        <p:spPr>
+          <a:xfrm>
+            <a:off x="1481328" y="2176272"/>
+            <a:ext cx="7095744" cy="438912"/>
+          </a:xfrm>
+          <a:prstGeom prst="rect">
+            <a:avLst/>
+          </a:prstGeom>
+          <a:noFill/>
+          <a:ln/>
+        </p:spPr>
+        <p:txBody>
+          <a:bodyPr wrap="square" lIns="0" tIns="0" rIns="0" bIns="0" rtlCol="0" anchor="ctr"/>
+          <a:lstStyle/>
+          <a:p>
+            <a:pPr indent="0" marL="0">
+              <a:buNone/>
+            </a:pPr>
+            <a:r>
+              <a:rPr lang="en-US" sz="1150" dirty="0">
+                <a:solidFill>
+                  <a:srgbClr val="434A63"/>
+                </a:solidFill>
+                <a:latin typeface="Arial" pitchFamily="34" charset="0"/>
+                <a:ea typeface="Arial" pitchFamily="34" charset="-122"/>
+                <a:cs typeface="Arial" pitchFamily="34" charset="-120"/>
+              </a:rPr>
+              <a:t>Wie sicher? Unser RAID-Level, wie viele Platten, wie viel Voltrad brutto kauft</a:t>
+            </a:r>
+            <a:endParaRPr lang="en-US" sz="1150" dirty="0"/>
+          </a:p>
+        </p:txBody>
+      </p:sp>
+      <p:sp>
+        <p:nvSpPr>
+          <p:cNvPr id="10" name="Shape 8"/>
+          <p:cNvSpPr/>
+          <p:nvPr/>
+        </p:nvSpPr>
+        <p:spPr>
+          <a:xfrm>
+            <a:off x="438912" y="2615184"/>
+            <a:ext cx="8266176" cy="438912"/>
+          </a:xfrm>
+          <a:prstGeom prst="rect">
+            <a:avLst/>
+          </a:prstGeom>
+          <a:solidFill>
+            <a:srgbClr val="F5F6FC"/>
+          </a:solidFill>
+          <a:ln/>
+        </p:spPr>
+      </p:sp>
+      <p:sp>
+        <p:nvSpPr>
+          <p:cNvPr id="11" name="Text 9"/>
+          <p:cNvSpPr/>
+          <p:nvPr/>
+        </p:nvSpPr>
+        <p:spPr>
+          <a:xfrm>
+            <a:off x="566928" y="2615184"/>
+            <a:ext cx="914400" cy="438912"/>
+          </a:xfrm>
+          <a:prstGeom prst="rect">
+            <a:avLst/>
+          </a:prstGeom>
+          <a:noFill/>
+          <a:ln/>
+        </p:spPr>
+        <p:txBody>
+          <a:bodyPr wrap="square" lIns="0" tIns="0" rIns="0" bIns="0" rtlCol="0" anchor="ctr"/>
+          <a:lstStyle/>
+          <a:p>
+            <a:pPr indent="0" marL="0">
+              <a:buNone/>
+            </a:pPr>
+            <a:r>
+              <a:rPr lang="en-US" sz="1150" b="1" dirty="0">
+                <a:solidFill>
+                  <a:srgbClr val="0F7C86"/>
+                </a:solidFill>
+                <a:latin typeface="Courier New" pitchFamily="34" charset="0"/>
+                <a:ea typeface="Courier New" pitchFamily="34" charset="-122"/>
+                <a:cs typeface="Courier New" pitchFamily="34" charset="-120"/>
+              </a:rPr>
+              <a:t>3</a:t>
+            </a:r>
+            <a:endParaRPr lang="en-US" sz="1150" dirty="0"/>
+          </a:p>
+        </p:txBody>
+      </p:sp>
+      <p:sp>
+        <p:nvSpPr>
+          <p:cNvPr id="12" name="Text 10"/>
+          <p:cNvSpPr/>
+          <p:nvPr/>
+        </p:nvSpPr>
+        <p:spPr>
+          <a:xfrm>
+            <a:off x="1481328" y="2615184"/>
+            <a:ext cx="7095744" cy="438912"/>
+          </a:xfrm>
+          <a:prstGeom prst="rect">
+            <a:avLst/>
+          </a:prstGeom>
+          <a:noFill/>
+          <a:ln/>
+        </p:spPr>
+        <p:txBody>
+          <a:bodyPr wrap="square" lIns="0" tIns="0" rIns="0" bIns="0" rtlCol="0" anchor="ctr"/>
+          <a:lstStyle/>
+          <a:p>
+            <a:pPr indent="0" marL="0">
+              <a:buNone/>
+            </a:pPr>
+            <a:r>
+              <a:rPr lang="en-US" sz="1150" dirty="0">
+                <a:solidFill>
+                  <a:srgbClr val="434A63"/>
+                </a:solidFill>
+                <a:latin typeface="Arial" pitchFamily="34" charset="0"/>
+                <a:ea typeface="Arial" pitchFamily="34" charset="-122"/>
+                <a:cs typeface="Arial" pitchFamily="34" charset="-120"/>
+              </a:rPr>
+              <a:t>Wie angebunden? Unsere Wahl für die Maschinen, die Zeichnungen und die Sicherung</a:t>
+            </a:r>
+            <a:endParaRPr lang="en-US" sz="1150" dirty="0"/>
+          </a:p>
+        </p:txBody>
+      </p:sp>
+      <p:sp>
+        <p:nvSpPr>
+          <p:cNvPr id="13" name="Text 11"/>
+          <p:cNvSpPr/>
+          <p:nvPr/>
+        </p:nvSpPr>
+        <p:spPr>
+          <a:xfrm>
+            <a:off x="566928" y="3054096"/>
+            <a:ext cx="914400" cy="438912"/>
+          </a:xfrm>
+          <a:prstGeom prst="rect">
+            <a:avLst/>
+          </a:prstGeom>
+          <a:noFill/>
+          <a:ln/>
+        </p:spPr>
+        <p:txBody>
+          <a:bodyPr wrap="square" lIns="0" tIns="0" rIns="0" bIns="0" rtlCol="0" anchor="ctr"/>
+          <a:lstStyle/>
+          <a:p>
+            <a:pPr indent="0" marL="0">
+              <a:buNone/>
+            </a:pPr>
+            <a:r>
+              <a:rPr lang="en-US" sz="1150" b="1" dirty="0">
+                <a:solidFill>
+                  <a:srgbClr val="0F7C86"/>
+                </a:solidFill>
+                <a:latin typeface="Courier New" pitchFamily="34" charset="0"/>
+                <a:ea typeface="Courier New" pitchFamily="34" charset="-122"/>
+                <a:cs typeface="Courier New" pitchFamily="34" charset="-120"/>
+              </a:rPr>
+              <a:t>Offen</a:t>
+            </a:r>
+            <a:endParaRPr lang="en-US" sz="1150" dirty="0"/>
+          </a:p>
+        </p:txBody>
+      </p:sp>
+      <p:sp>
+        <p:nvSpPr>
+          <p:cNvPr id="14" name="Text 12"/>
+          <p:cNvSpPr/>
+          <p:nvPr/>
+        </p:nvSpPr>
+        <p:spPr>
+          <a:xfrm>
+            <a:off x="1481328" y="3054096"/>
+            <a:ext cx="7095744" cy="438912"/>
+          </a:xfrm>
+          <a:prstGeom prst="rect">
+            <a:avLst/>
+          </a:prstGeom>
+          <a:noFill/>
+          <a:ln/>
+        </p:spPr>
+        <p:txBody>
+          <a:bodyPr wrap="square" lIns="0" tIns="0" rIns="0" bIns="0" rtlCol="0" anchor="ctr"/>
+          <a:lstStyle/>
+          <a:p>
+            <a:pPr indent="0" marL="0">
+              <a:buNone/>
+            </a:pPr>
+            <a:r>
+              <a:rPr lang="en-US" sz="1150" dirty="0">
+                <a:solidFill>
+                  <a:srgbClr val="434A63"/>
+                </a:solidFill>
+                <a:latin typeface="Arial" pitchFamily="34" charset="0"/>
+                <a:ea typeface="Arial" pitchFamily="34" charset="-122"/>
+                <a:cs typeface="Arial" pitchFamily="34" charset="-120"/>
+              </a:rPr>
+              <a:t>Was kostet das alles? Wer baut es mit zwei Personen in der IT auf?</a:t>
+            </a:r>
+            <a:endParaRPr lang="en-US" sz="1150" dirty="0"/>
+          </a:p>
+        </p:txBody>
+      </p:sp>
+      <p:sp>
+        <p:nvSpPr>
+          <p:cNvPr id="15" name="Shape 13"/>
+          <p:cNvSpPr/>
+          <p:nvPr/>
+        </p:nvSpPr>
+        <p:spPr>
+          <a:xfrm>
+            <a:off x="566928" y="3977640"/>
             <a:ext cx="32004" cy="256032"/>
           </a:xfrm>
           <a:prstGeom prst="rect">
@@ -7148,13 +7500,13 @@
       </p:sp>
       <p:sp>
         <p:nvSpPr>
-          <p:cNvPr id="7" name="Text 4"/>
-          <p:cNvSpPr/>
-          <p:nvPr/>
-        </p:nvSpPr>
-        <p:spPr>
-          <a:xfrm>
-            <a:off x="749808" y="4059936"/>
+          <p:cNvPr id="16" name="Text 14"/>
+          <p:cNvSpPr/>
+          <p:nvPr/>
+        </p:nvSpPr>
+        <p:spPr>
+          <a:xfrm>
+            <a:off x="749808" y="3931920"/>
             <a:ext cx="7827264" cy="402336"/>
           </a:xfrm>
           <a:prstGeom prst="rect">
@@ -7179,7 +7531,7 @@
                 <a:ea typeface="Arial" pitchFamily="34" charset="-122"/>
                 <a:cs typeface="Arial" pitchFamily="34" charset="-120"/>
               </a:rPr>
-              <a:t>Befund 9: Eine Sicherung zählt erst, wenn sie getrennt liegt und geprüft ist.</a:t>
+              <a:t>Ab der zweiten Gruppe nur noch: Was habt ihr anders entschieden und warum? Die letzte Frage bleibt offen für Mittwoch.</a:t>
             </a:r>
             <a:endParaRPr lang="en-US" sz="1200" dirty="0"/>
           </a:p>
@@ -7187,7 +7539,7 @@
       </p:sp>
       <p:sp>
         <p:nvSpPr>
-          <p:cNvPr id="8" name="Shape 5"/>
+          <p:cNvPr id="17" name="Shape 15"/>
           <p:cNvSpPr/>
           <p:nvPr/>
         </p:nvSpPr>
@@ -7210,7 +7562,7 @@
       </p:sp>
       <p:sp>
         <p:nvSpPr>
-          <p:cNvPr id="9" name="Text 6"/>
+          <p:cNvPr id="18" name="Text 16"/>
           <p:cNvSpPr/>
           <p:nvPr/>
         </p:nvSpPr>
@@ -7249,7 +7601,7 @@
       </p:sp>
       <p:sp>
         <p:nvSpPr>
-          <p:cNvPr id="10" name="Text 7"/>
+          <p:cNvPr id="19" name="Text 17"/>
           <p:cNvSpPr/>
           <p:nvPr/>
         </p:nvSpPr>
@@ -7280,7 +7632,7 @@
                 <a:ea typeface="Arial" pitchFamily="34" charset="-122"/>
                 <a:cs typeface="Arial" pitchFamily="34" charset="-120"/>
               </a:rPr>
-              <a:t>15/16</a:t>
+              <a:t>15/19</a:t>
             </a:r>
             <a:endParaRPr lang="en-US" sz="1050" dirty="0"/>
           </a:p>
@@ -7371,7 +7723,7 @@
                 <a:ea typeface="Arial" pitchFamily="34" charset="-122"/>
                 <a:cs typeface="Arial" pitchFamily="34" charset="-120"/>
               </a:rPr>
-              <a:t>AUSBLICK</a:t>
+              <a:t>STATION 1 · LÖSUNG</a:t>
             </a:r>
             <a:endParaRPr lang="en-US" sz="1150" dirty="0"/>
           </a:p>
@@ -7410,81 +7762,46 @@
                 <a:ea typeface="Arial" pitchFamily="34" charset="-122"/>
                 <a:cs typeface="Arial" pitchFamily="34" charset="-120"/>
               </a:rPr>
-              <a:t>Bis Mittwoch</a:t>
+              <a:t>Wie viel?</a:t>
             </a:r>
             <a:endParaRPr lang="en-US" sz="2600" dirty="0"/>
           </a:p>
         </p:txBody>
       </p:sp>
-      <p:sp>
-        <p:nvSpPr>
-          <p:cNvPr id="5" name="Text 3"/>
-          <p:cNvSpPr/>
-          <p:nvPr/>
-        </p:nvSpPr>
-        <p:spPr>
-          <a:xfrm>
-            <a:off x="566928" y="1444752"/>
-            <a:ext cx="8010144" cy="438912"/>
-          </a:xfrm>
-          <a:prstGeom prst="rect">
-            <a:avLst/>
-          </a:prstGeom>
-          <a:noFill/>
-          <a:ln/>
-        </p:spPr>
-        <p:txBody>
-          <a:bodyPr wrap="square" lIns="0" tIns="0" rIns="0" bIns="0" rtlCol="0" anchor="t"/>
-          <a:lstStyle/>
-          <a:p>
-            <a:pPr indent="0" marL="0">
-              <a:buNone/>
-            </a:pPr>
-            <a:r>
-              <a:rPr lang="en-US" sz="1300" dirty="0">
-                <a:solidFill>
-                  <a:srgbClr val="5C6377"/>
-                </a:solidFill>
-                <a:latin typeface="Arial" pitchFamily="34" charset="0"/>
-                <a:ea typeface="Arial" pitchFamily="34" charset="-122"/>
-                <a:cs typeface="Arial" pitchFamily="34" charset="-120"/>
-              </a:rPr>
-              <a:t>Am Mittwoch geht es um das Geld und die Menschen hinter dem Konzept: Ressourcen und Lizenzen.</a:t>
-            </a:r>
-            <a:endParaRPr lang="en-US" sz="1300" dirty="0"/>
-          </a:p>
-        </p:txBody>
-      </p:sp>
-      <p:sp>
-        <p:nvSpPr>
-          <p:cNvPr id="6" name="Shape 4"/>
-          <p:cNvSpPr/>
-          <p:nvPr/>
-        </p:nvSpPr>
-        <p:spPr>
-          <a:xfrm>
-            <a:off x="566928" y="1975104"/>
-            <a:ext cx="2523744" cy="1645920"/>
-          </a:xfrm>
-          <a:prstGeom prst="rect">
-            <a:avLst/>
-          </a:prstGeom>
-          <a:solidFill>
-            <a:srgbClr val="F5F6FC"/>
-          </a:solidFill>
-          <a:ln/>
-        </p:spPr>
-      </p:sp>
-      <p:sp>
-        <p:nvSpPr>
-          <p:cNvPr id="7" name="Shape 5"/>
-          <p:cNvSpPr/>
-          <p:nvPr/>
-        </p:nvSpPr>
-        <p:spPr>
-          <a:xfrm>
-            <a:off x="566928" y="1975104"/>
-            <a:ext cx="41148" cy="1645920"/>
+      <p:pic>
+        <p:nvPicPr>
+          <p:cNvPr id="5" name="Image 0" descr="/Users/jacobmenge/Desktop/kurs-26.2b-orga/folienwerkstatt/assets/diagramme/speicher-loesung-rechnung.png">    </p:cNvPr>
+          <p:cNvPicPr>
+            <a:picLocks noChangeAspect="1"/>
+          </p:cNvPicPr>
+          <p:nvPr/>
+        </p:nvPicPr>
+        <p:blipFill>
+          <a:blip r:embed="rId1"/>
+          <a:stretch>
+            <a:fillRect/>
+          </a:stretch>
+        </p:blipFill>
+        <p:spPr>
+          <a:xfrm>
+            <a:off x="566928" y="1371600"/>
+            <a:ext cx="8010144" cy="2468880"/>
+          </a:xfrm>
+          <a:prstGeom prst="rect">
+            <a:avLst/>
+          </a:prstGeom>
+        </p:spPr>
+      </p:pic>
+      <p:sp>
+        <p:nvSpPr>
+          <p:cNvPr id="6" name="Shape 3"/>
+          <p:cNvSpPr/>
+          <p:nvPr/>
+        </p:nvSpPr>
+        <p:spPr>
+          <a:xfrm>
+            <a:off x="566928" y="4069080"/>
+            <a:ext cx="32004" cy="256032"/>
           </a:xfrm>
           <a:prstGeom prst="rect">
             <a:avLst/>
@@ -7497,72 +7814,30 @@
       </p:sp>
       <p:sp>
         <p:nvSpPr>
-          <p:cNvPr id="8" name="Text 6"/>
-          <p:cNvSpPr/>
-          <p:nvPr/>
-        </p:nvSpPr>
-        <p:spPr>
-          <a:xfrm>
-            <a:off x="804672" y="2121408"/>
-            <a:ext cx="2121408" cy="457200"/>
-          </a:xfrm>
-          <a:prstGeom prst="rect">
-            <a:avLst/>
-          </a:prstGeom>
-          <a:noFill/>
-          <a:ln/>
-        </p:spPr>
-        <p:txBody>
-          <a:bodyPr wrap="square" lIns="0" tIns="0" rIns="0" bIns="0" rtlCol="0" anchor="t"/>
-          <a:lstStyle/>
-          <a:p>
-            <a:pPr indent="0" marL="0">
-              <a:buNone/>
-            </a:pPr>
-            <a:r>
-              <a:rPr lang="en-US" sz="1300" b="1" dirty="0">
-                <a:solidFill>
-                  <a:srgbClr val="272E52"/>
-                </a:solidFill>
-                <a:latin typeface="Arial" pitchFamily="34" charset="0"/>
-                <a:ea typeface="Arial" pitchFamily="34" charset="-122"/>
-                <a:cs typeface="Arial" pitchFamily="34" charset="-120"/>
-              </a:rPr>
-              <a:t>Zum Nachlesen</a:t>
-            </a:r>
-            <a:endParaRPr lang="en-US" sz="1300" dirty="0"/>
-          </a:p>
-        </p:txBody>
-      </p:sp>
-      <p:sp>
-        <p:nvSpPr>
-          <p:cNvPr id="9" name="Text 7"/>
-          <p:cNvSpPr/>
-          <p:nvPr/>
-        </p:nvSpPr>
-        <p:spPr>
-          <a:xfrm>
-            <a:off x="804672" y="2624328"/>
-            <a:ext cx="2121408" cy="877824"/>
-          </a:xfrm>
-          <a:prstGeom prst="rect">
-            <a:avLst/>
-          </a:prstGeom>
-          <a:noFill/>
-          <a:ln/>
-        </p:spPr>
-        <p:txBody>
-          <a:bodyPr wrap="square" lIns="0" tIns="0" rIns="0" bIns="0" rtlCol="0" anchor="t"/>
-          <a:lstStyle/>
-          <a:p>
-            <a:pPr indent="0" marL="0">
-              <a:lnSpc>
-                <a:spcPct val="92000"/>
-              </a:lnSpc>
-              <a:buNone/>
-            </a:pPr>
-            <a:r>
-              <a:rPr lang="en-US" sz="1100" dirty="0">
+          <p:cNvPr id="7" name="Text 4"/>
+          <p:cNvSpPr/>
+          <p:nvPr/>
+        </p:nvSpPr>
+        <p:spPr>
+          <a:xfrm>
+            <a:off x="749808" y="4023360"/>
+            <a:ext cx="7827264" cy="402336"/>
+          </a:xfrm>
+          <a:prstGeom prst="rect">
+            <a:avLst/>
+          </a:prstGeom>
+          <a:noFill/>
+          <a:ln/>
+        </p:spPr>
+        <p:txBody>
+          <a:bodyPr wrap="square" lIns="0" tIns="0" rIns="0" bIns="0" rtlCol="0" anchor="ctr"/>
+          <a:lstStyle/>
+          <a:p>
+            <a:pPr indent="0" marL="0">
+              <a:buNone/>
+            </a:pPr>
+            <a:r>
+              <a:rPr lang="en-US" sz="1200" b="1" dirty="0">
                 <a:solidFill>
                   <a:srgbClr val="434A63"/>
                 </a:solidFill>
@@ -7570,308 +7845,7 @@
                 <a:ea typeface="Arial" pitchFamily="34" charset="-122"/>
                 <a:cs typeface="Arial" pitchFamily="34" charset="-120"/>
               </a:rPr>
-              <a:t>Die Übung und die Theorie zu Speicherlösungen mit acht weiteren Aufgaben stehen auf der Kursseite.</a:t>
-            </a:r>
-            <a:endParaRPr lang="en-US" sz="1100" dirty="0"/>
-          </a:p>
-        </p:txBody>
-      </p:sp>
-      <p:sp>
-        <p:nvSpPr>
-          <p:cNvPr id="10" name="Shape 8"/>
-          <p:cNvSpPr/>
-          <p:nvPr/>
-        </p:nvSpPr>
-        <p:spPr>
-          <a:xfrm>
-            <a:off x="3310128" y="1975104"/>
-            <a:ext cx="2523744" cy="1645920"/>
-          </a:xfrm>
-          <a:prstGeom prst="rect">
-            <a:avLst/>
-          </a:prstGeom>
-          <a:solidFill>
-            <a:srgbClr val="F5F6FC"/>
-          </a:solidFill>
-          <a:ln/>
-        </p:spPr>
-      </p:sp>
-      <p:sp>
-        <p:nvSpPr>
-          <p:cNvPr id="11" name="Shape 9"/>
-          <p:cNvSpPr/>
-          <p:nvPr/>
-        </p:nvSpPr>
-        <p:spPr>
-          <a:xfrm>
-            <a:off x="3310128" y="1975104"/>
-            <a:ext cx="41148" cy="1645920"/>
-          </a:xfrm>
-          <a:prstGeom prst="rect">
-            <a:avLst/>
-          </a:prstGeom>
-          <a:solidFill>
-            <a:srgbClr val="0F7C86"/>
-          </a:solidFill>
-          <a:ln/>
-        </p:spPr>
-      </p:sp>
-      <p:sp>
-        <p:nvSpPr>
-          <p:cNvPr id="12" name="Text 10"/>
-          <p:cNvSpPr/>
-          <p:nvPr/>
-        </p:nvSpPr>
-        <p:spPr>
-          <a:xfrm>
-            <a:off x="3547872" y="2121408"/>
-            <a:ext cx="2121408" cy="457200"/>
-          </a:xfrm>
-          <a:prstGeom prst="rect">
-            <a:avLst/>
-          </a:prstGeom>
-          <a:noFill/>
-          <a:ln/>
-        </p:spPr>
-        <p:txBody>
-          <a:bodyPr wrap="square" lIns="0" tIns="0" rIns="0" bIns="0" rtlCol="0" anchor="t"/>
-          <a:lstStyle/>
-          <a:p>
-            <a:pPr indent="0" marL="0">
-              <a:buNone/>
-            </a:pPr>
-            <a:r>
-              <a:rPr lang="en-US" sz="1300" b="1" dirty="0">
-                <a:solidFill>
-                  <a:srgbClr val="272E52"/>
-                </a:solidFill>
-                <a:latin typeface="Arial" pitchFamily="34" charset="0"/>
-                <a:ea typeface="Arial" pitchFamily="34" charset="-122"/>
-                <a:cs typeface="Arial" pitchFamily="34" charset="-120"/>
-              </a:rPr>
-              <a:t>Das braucht ihr von heute</a:t>
-            </a:r>
-            <a:endParaRPr lang="en-US" sz="1300" dirty="0"/>
-          </a:p>
-        </p:txBody>
-      </p:sp>
-      <p:sp>
-        <p:nvSpPr>
-          <p:cNvPr id="13" name="Text 11"/>
-          <p:cNvSpPr/>
-          <p:nvPr/>
-        </p:nvSpPr>
-        <p:spPr>
-          <a:xfrm>
-            <a:off x="3547872" y="2624328"/>
-            <a:ext cx="2121408" cy="877824"/>
-          </a:xfrm>
-          <a:prstGeom prst="rect">
-            <a:avLst/>
-          </a:prstGeom>
-          <a:noFill/>
-          <a:ln/>
-        </p:spPr>
-        <p:txBody>
-          <a:bodyPr wrap="square" lIns="0" tIns="0" rIns="0" bIns="0" rtlCol="0" anchor="t"/>
-          <a:lstStyle/>
-          <a:p>
-            <a:pPr indent="0" marL="0">
-              <a:lnSpc>
-                <a:spcPct val="92000"/>
-              </a:lnSpc>
-              <a:buNone/>
-            </a:pPr>
-            <a:r>
-              <a:rPr lang="en-US" sz="1100" dirty="0">
-                <a:solidFill>
-                  <a:srgbClr val="434A63"/>
-                </a:solidFill>
-                <a:latin typeface="Arial" pitchFamily="34" charset="0"/>
-                <a:ea typeface="Arial" pitchFamily="34" charset="-122"/>
-                <a:cs typeface="Arial" pitchFamily="34" charset="-120"/>
-              </a:rPr>
-              <a:t>Rund 3,6 TB netto, vier Platten in RAID 6 oder 10 plus Hot Spare, eine eigene Sicherung mit Kopie außer Haus.</a:t>
-            </a:r>
-            <a:endParaRPr lang="en-US" sz="1100" dirty="0"/>
-          </a:p>
-        </p:txBody>
-      </p:sp>
-      <p:sp>
-        <p:nvSpPr>
-          <p:cNvPr id="14" name="Shape 12"/>
-          <p:cNvSpPr/>
-          <p:nvPr/>
-        </p:nvSpPr>
-        <p:spPr>
-          <a:xfrm>
-            <a:off x="6053328" y="1975104"/>
-            <a:ext cx="2523744" cy="1645920"/>
-          </a:xfrm>
-          <a:prstGeom prst="rect">
-            <a:avLst/>
-          </a:prstGeom>
-          <a:solidFill>
-            <a:srgbClr val="F5F6FC"/>
-          </a:solidFill>
-          <a:ln/>
-        </p:spPr>
-      </p:sp>
-      <p:sp>
-        <p:nvSpPr>
-          <p:cNvPr id="15" name="Shape 13"/>
-          <p:cNvSpPr/>
-          <p:nvPr/>
-        </p:nvSpPr>
-        <p:spPr>
-          <a:xfrm>
-            <a:off x="6053328" y="1975104"/>
-            <a:ext cx="41148" cy="1645920"/>
-          </a:xfrm>
-          <a:prstGeom prst="rect">
-            <a:avLst/>
-          </a:prstGeom>
-          <a:solidFill>
-            <a:srgbClr val="0F7C86"/>
-          </a:solidFill>
-          <a:ln/>
-        </p:spPr>
-      </p:sp>
-      <p:sp>
-        <p:nvSpPr>
-          <p:cNvPr id="16" name="Text 14"/>
-          <p:cNvSpPr/>
-          <p:nvPr/>
-        </p:nvSpPr>
-        <p:spPr>
-          <a:xfrm>
-            <a:off x="6291072" y="2121408"/>
-            <a:ext cx="2121408" cy="457200"/>
-          </a:xfrm>
-          <a:prstGeom prst="rect">
-            <a:avLst/>
-          </a:prstGeom>
-          <a:noFill/>
-          <a:ln/>
-        </p:spPr>
-        <p:txBody>
-          <a:bodyPr wrap="square" lIns="0" tIns="0" rIns="0" bIns="0" rtlCol="0" anchor="t"/>
-          <a:lstStyle/>
-          <a:p>
-            <a:pPr indent="0" marL="0">
-              <a:buNone/>
-            </a:pPr>
-            <a:r>
-              <a:rPr lang="en-US" sz="1300" b="1" dirty="0">
-                <a:solidFill>
-                  <a:srgbClr val="272E52"/>
-                </a:solidFill>
-                <a:latin typeface="Arial" pitchFamily="34" charset="0"/>
-                <a:ea typeface="Arial" pitchFamily="34" charset="-122"/>
-                <a:cs typeface="Arial" pitchFamily="34" charset="-120"/>
-              </a:rPr>
-              <a:t>Am Mittwoch</a:t>
-            </a:r>
-            <a:endParaRPr lang="en-US" sz="1300" dirty="0"/>
-          </a:p>
-        </p:txBody>
-      </p:sp>
-      <p:sp>
-        <p:nvSpPr>
-          <p:cNvPr id="17" name="Text 15"/>
-          <p:cNvSpPr/>
-          <p:nvPr/>
-        </p:nvSpPr>
-        <p:spPr>
-          <a:xfrm>
-            <a:off x="6291072" y="2624328"/>
-            <a:ext cx="2121408" cy="877824"/>
-          </a:xfrm>
-          <a:prstGeom prst="rect">
-            <a:avLst/>
-          </a:prstGeom>
-          <a:noFill/>
-          <a:ln/>
-        </p:spPr>
-        <p:txBody>
-          <a:bodyPr wrap="square" lIns="0" tIns="0" rIns="0" bIns="0" rtlCol="0" anchor="t"/>
-          <a:lstStyle/>
-          <a:p>
-            <a:pPr indent="0" marL="0">
-              <a:lnSpc>
-                <a:spcPct val="92000"/>
-              </a:lnSpc>
-              <a:buNone/>
-            </a:pPr>
-            <a:r>
-              <a:rPr lang="en-US" sz="1100" dirty="0">
-                <a:solidFill>
-                  <a:srgbClr val="434A63"/>
-                </a:solidFill>
-                <a:latin typeface="Arial" pitchFamily="34" charset="0"/>
-                <a:ea typeface="Arial" pitchFamily="34" charset="-122"/>
-                <a:cs typeface="Arial" pitchFamily="34" charset="-120"/>
-              </a:rPr>
-              <a:t>Was kostet das, wer baut es auf und welche Lizenzen braucht Voltrad dafür?</a:t>
-            </a:r>
-            <a:endParaRPr lang="en-US" sz="1100" dirty="0"/>
-          </a:p>
-        </p:txBody>
-      </p:sp>
-      <p:sp>
-        <p:nvSpPr>
-          <p:cNvPr id="18" name="Shape 16"/>
-          <p:cNvSpPr/>
-          <p:nvPr/>
-        </p:nvSpPr>
-        <p:spPr>
-          <a:xfrm>
-            <a:off x="566928" y="3886200"/>
-            <a:ext cx="32004" cy="256032"/>
-          </a:xfrm>
-          <a:prstGeom prst="rect">
-            <a:avLst/>
-          </a:prstGeom>
-          <a:solidFill>
-            <a:srgbClr val="0F7C86"/>
-          </a:solidFill>
-          <a:ln/>
-        </p:spPr>
-      </p:sp>
-      <p:sp>
-        <p:nvSpPr>
-          <p:cNvPr id="19" name="Text 17"/>
-          <p:cNvSpPr/>
-          <p:nvPr/>
-        </p:nvSpPr>
-        <p:spPr>
-          <a:xfrm>
-            <a:off x="749808" y="3840480"/>
-            <a:ext cx="7827264" cy="402336"/>
-          </a:xfrm>
-          <a:prstGeom prst="rect">
-            <a:avLst/>
-          </a:prstGeom>
-          <a:noFill/>
-          <a:ln/>
-        </p:spPr>
-        <p:txBody>
-          <a:bodyPr wrap="square" lIns="0" tIns="0" rIns="0" bIns="0" rtlCol="0" anchor="ctr"/>
-          <a:lstStyle/>
-          <a:p>
-            <a:pPr indent="0" marL="0">
-              <a:buNone/>
-            </a:pPr>
-            <a:r>
-              <a:rPr lang="en-US" sz="1200" b="1" dirty="0">
-                <a:solidFill>
-                  <a:srgbClr val="434A63"/>
-                </a:solidFill>
-                <a:latin typeface="Arial" pitchFamily="34" charset="0"/>
-                <a:ea typeface="Arial" pitchFamily="34" charset="-122"/>
-                <a:cs typeface="Arial" pitchFamily="34" charset="-120"/>
-              </a:rPr>
-              <a:t>Nächster Termin: Mittwoch, 21. Oktober um 18:00 Uhr.</a:t>
+              <a:t>Wer Maschinen und Zeichnungen einzeln rechnet und dann addiert, kommt auf dasselbe Ergebnis.</a:t>
             </a:r>
             <a:endParaRPr lang="en-US" sz="1200" dirty="0"/>
           </a:p>
@@ -7879,7 +7853,7 @@
       </p:sp>
       <p:sp>
         <p:nvSpPr>
-          <p:cNvPr id="20" name="Shape 18"/>
+          <p:cNvPr id="8" name="Shape 5"/>
           <p:cNvSpPr/>
           <p:nvPr/>
         </p:nvSpPr>
@@ -7902,7 +7876,7 @@
       </p:sp>
       <p:sp>
         <p:nvSpPr>
-          <p:cNvPr id="21" name="Text 19"/>
+          <p:cNvPr id="9" name="Text 6"/>
           <p:cNvSpPr/>
           <p:nvPr/>
         </p:nvSpPr>
@@ -7933,7 +7907,7 @@
                 <a:ea typeface="Arial" pitchFamily="34" charset="-122"/>
                 <a:cs typeface="Arial" pitchFamily="34" charset="-120"/>
               </a:rPr>
-              <a:t>Abschluss</a:t>
+              <a:t>Auswertung</a:t>
             </a:r>
             <a:endParaRPr lang="en-US" sz="1050" dirty="0"/>
           </a:p>
@@ -7941,7 +7915,7 @@
       </p:sp>
       <p:sp>
         <p:nvSpPr>
-          <p:cNvPr id="22" name="Text 20"/>
+          <p:cNvPr id="10" name="Text 7"/>
           <p:cNvSpPr/>
           <p:nvPr/>
         </p:nvSpPr>
@@ -7972,7 +7946,7 @@
                 <a:ea typeface="Arial" pitchFamily="34" charset="-122"/>
                 <a:cs typeface="Arial" pitchFamily="34" charset="-120"/>
               </a:rPr>
-              <a:t>16/16</a:t>
+              <a:t>16/19</a:t>
             </a:r>
             <a:endParaRPr lang="en-US" sz="1050" dirty="0"/>
           </a:p>
@@ -8415,7 +8389,7 @@
                 <a:ea typeface="Courier New" pitchFamily="34" charset="-122"/>
                 <a:cs typeface="Courier New" pitchFamily="34" charset="-120"/>
               </a:rPr>
-              <a:t>18:40</a:t>
+              <a:t>18:45</a:t>
             </a:r>
             <a:endParaRPr lang="en-US" sz="1050" dirty="0"/>
           </a:p>
@@ -8966,7 +8940,7 @@
                 <a:ea typeface="Arial" pitchFamily="34" charset="-122"/>
                 <a:cs typeface="Arial" pitchFamily="34" charset="-120"/>
               </a:rPr>
-              <a:t>1/16</a:t>
+              <a:t>1/19</a:t>
             </a:r>
             <a:endParaRPr lang="en-US" sz="1050" dirty="0"/>
           </a:p>
@@ -8983,6 +8957,1267 @@
 <file path=ppt/slides/slide20.xml><?xml version="1.0" encoding="utf-8"?>
 <p:sld xmlns:a="http://schemas.openxmlformats.org/drawingml/2006/main" xmlns:r="http://schemas.openxmlformats.org/officeDocument/2006/relationships" xmlns:p="http://schemas.openxmlformats.org/presentationml/2006/main">
   <p:cSld name="Slide 20">
+    <p:bg>
+      <p:bgPr>
+        <a:solidFill>
+          <a:srgbClr val="FFFFFF"/>
+        </a:solidFill>
+      </p:bgPr>
+    </p:bg>
+    <p:spTree>
+      <p:nvGrpSpPr>
+        <p:cNvPr id="1" name=""/>
+        <p:cNvGrpSpPr/>
+        <p:nvPr/>
+      </p:nvGrpSpPr>
+      <p:grpSpPr>
+        <a:xfrm>
+          <a:off x="0" y="0"/>
+          <a:ext cx="0" cy="0"/>
+          <a:chOff x="0" y="0"/>
+          <a:chExt cx="0" cy="0"/>
+        </a:xfrm>
+      </p:grpSpPr>
+      <p:sp>
+        <p:nvSpPr>
+          <p:cNvPr id="2" name="Shape 0"/>
+          <p:cNvSpPr/>
+          <p:nvPr/>
+        </p:nvSpPr>
+        <p:spPr>
+          <a:xfrm>
+            <a:off x="566928" y="201168"/>
+            <a:ext cx="475488" cy="50292"/>
+          </a:xfrm>
+          <a:prstGeom prst="rect">
+            <a:avLst/>
+          </a:prstGeom>
+          <a:solidFill>
+            <a:srgbClr val="0F7C86"/>
+          </a:solidFill>
+          <a:ln/>
+        </p:spPr>
+      </p:sp>
+      <p:sp>
+        <p:nvSpPr>
+          <p:cNvPr id="3" name="Text 1"/>
+          <p:cNvSpPr/>
+          <p:nvPr/>
+        </p:nvSpPr>
+        <p:spPr>
+          <a:xfrm>
+            <a:off x="566928" y="384048"/>
+            <a:ext cx="8010144" cy="237744"/>
+          </a:xfrm>
+          <a:prstGeom prst="rect">
+            <a:avLst/>
+          </a:prstGeom>
+          <a:noFill/>
+          <a:ln/>
+        </p:spPr>
+        <p:txBody>
+          <a:bodyPr wrap="square" lIns="0" tIns="0" rIns="0" bIns="0" rtlCol="0" anchor="ctr"/>
+          <a:lstStyle/>
+          <a:p>
+            <a:pPr indent="0" marL="0">
+              <a:buNone/>
+            </a:pPr>
+            <a:r>
+              <a:rPr lang="en-US" sz="1150" b="1" spc="180" kern="0" dirty="0">
+                <a:solidFill>
+                  <a:srgbClr val="0F7C86"/>
+                </a:solidFill>
+                <a:latin typeface="Arial" pitchFamily="34" charset="0"/>
+                <a:ea typeface="Arial" pitchFamily="34" charset="-122"/>
+                <a:cs typeface="Arial" pitchFamily="34" charset="-120"/>
+              </a:rPr>
+              <a:t>STATION 2 · LÖSUNG</a:t>
+            </a:r>
+            <a:endParaRPr lang="en-US" sz="1150" dirty="0"/>
+          </a:p>
+        </p:txBody>
+      </p:sp>
+      <p:sp>
+        <p:nvSpPr>
+          <p:cNvPr id="4" name="Text 2"/>
+          <p:cNvSpPr/>
+          <p:nvPr/>
+        </p:nvSpPr>
+        <p:spPr>
+          <a:xfrm>
+            <a:off x="566928" y="731520"/>
+            <a:ext cx="8010144" cy="603504"/>
+          </a:xfrm>
+          <a:prstGeom prst="rect">
+            <a:avLst/>
+          </a:prstGeom>
+          <a:noFill/>
+          <a:ln/>
+        </p:spPr>
+        <p:txBody>
+          <a:bodyPr wrap="square" lIns="0" tIns="0" rIns="0" bIns="0" rtlCol="0" anchor="t"/>
+          <a:lstStyle/>
+          <a:p>
+            <a:pPr indent="0" marL="0">
+              <a:buNone/>
+            </a:pPr>
+            <a:r>
+              <a:rPr lang="en-US" sz="2600" b="1" dirty="0">
+                <a:solidFill>
+                  <a:srgbClr val="272E52"/>
+                </a:solidFill>
+                <a:latin typeface="Arial" pitchFamily="34" charset="0"/>
+                <a:ea typeface="Arial" pitchFamily="34" charset="-122"/>
+                <a:cs typeface="Arial" pitchFamily="34" charset="-120"/>
+              </a:rPr>
+              <a:t>Wie sicher?</a:t>
+            </a:r>
+            <a:endParaRPr lang="en-US" sz="2600" dirty="0"/>
+          </a:p>
+        </p:txBody>
+      </p:sp>
+      <p:pic>
+        <p:nvPicPr>
+          <p:cNvPr id="5" name="Image 0" descr="/Users/jacobmenge/Desktop/kurs-26.2b-orga/folienwerkstatt/assets/diagramme/speicher-loesung-raid.png">    </p:cNvPr>
+          <p:cNvPicPr>
+            <a:picLocks noChangeAspect="1"/>
+          </p:cNvPicPr>
+          <p:nvPr/>
+        </p:nvPicPr>
+        <p:blipFill>
+          <a:blip r:embed="rId1"/>
+          <a:stretch>
+            <a:fillRect/>
+          </a:stretch>
+        </p:blipFill>
+        <p:spPr>
+          <a:xfrm>
+            <a:off x="566928" y="1335024"/>
+            <a:ext cx="8010144" cy="2651760"/>
+          </a:xfrm>
+          <a:prstGeom prst="rect">
+            <a:avLst/>
+          </a:prstGeom>
+        </p:spPr>
+      </p:pic>
+      <p:sp>
+        <p:nvSpPr>
+          <p:cNvPr id="6" name="Shape 3"/>
+          <p:cNvSpPr/>
+          <p:nvPr/>
+        </p:nvSpPr>
+        <p:spPr>
+          <a:xfrm>
+            <a:off x="566928" y="4631436"/>
+            <a:ext cx="8010144" cy="0"/>
+          </a:xfrm>
+          <a:prstGeom prst="line">
+            <a:avLst/>
+          </a:prstGeom>
+          <a:noFill/>
+          <a:ln w="9525">
+            <a:solidFill>
+              <a:srgbClr val="DFE3F0"/>
+            </a:solidFill>
+            <a:prstDash val="solid"/>
+          </a:ln>
+        </p:spPr>
+      </p:sp>
+      <p:sp>
+        <p:nvSpPr>
+          <p:cNvPr id="7" name="Text 4"/>
+          <p:cNvSpPr/>
+          <p:nvPr/>
+        </p:nvSpPr>
+        <p:spPr>
+          <a:xfrm>
+            <a:off x="566928" y="4722876"/>
+            <a:ext cx="5029200" cy="237744"/>
+          </a:xfrm>
+          <a:prstGeom prst="rect">
+            <a:avLst/>
+          </a:prstGeom>
+          <a:noFill/>
+          <a:ln/>
+        </p:spPr>
+        <p:txBody>
+          <a:bodyPr wrap="square" lIns="0" tIns="0" rIns="0" bIns="0" rtlCol="0" anchor="ctr"/>
+          <a:lstStyle/>
+          <a:p>
+            <a:pPr indent="0" marL="0">
+              <a:buNone/>
+            </a:pPr>
+            <a:r>
+              <a:rPr lang="en-US" sz="1050" spc="30" kern="0" dirty="0">
+                <a:solidFill>
+                  <a:srgbClr val="5C6377"/>
+                </a:solidFill>
+                <a:latin typeface="Arial" pitchFamily="34" charset="0"/>
+                <a:ea typeface="Arial" pitchFamily="34" charset="-122"/>
+                <a:cs typeface="Arial" pitchFamily="34" charset="-120"/>
+              </a:rPr>
+              <a:t>Auswertung</a:t>
+            </a:r>
+            <a:endParaRPr lang="en-US" sz="1050" dirty="0"/>
+          </a:p>
+        </p:txBody>
+      </p:sp>
+      <p:sp>
+        <p:nvSpPr>
+          <p:cNvPr id="8" name="Text 5"/>
+          <p:cNvSpPr/>
+          <p:nvPr/>
+        </p:nvSpPr>
+        <p:spPr>
+          <a:xfrm>
+            <a:off x="8028432" y="4722876"/>
+            <a:ext cx="548640" cy="237744"/>
+          </a:xfrm>
+          <a:prstGeom prst="rect">
+            <a:avLst/>
+          </a:prstGeom>
+          <a:noFill/>
+          <a:ln/>
+        </p:spPr>
+        <p:txBody>
+          <a:bodyPr wrap="square" lIns="0" tIns="0" rIns="0" bIns="0" rtlCol="0" anchor="ctr"/>
+          <a:lstStyle/>
+          <a:p>
+            <a:pPr algn="r" indent="0" marL="0">
+              <a:buNone/>
+            </a:pPr>
+            <a:r>
+              <a:rPr lang="en-US" sz="1050" dirty="0">
+                <a:solidFill>
+                  <a:srgbClr val="5C6377"/>
+                </a:solidFill>
+                <a:latin typeface="Arial" pitchFamily="34" charset="0"/>
+                <a:ea typeface="Arial" pitchFamily="34" charset="-122"/>
+                <a:cs typeface="Arial" pitchFamily="34" charset="-120"/>
+              </a:rPr>
+              <a:t>17/19</a:t>
+            </a:r>
+            <a:endParaRPr lang="en-US" sz="1050" dirty="0"/>
+          </a:p>
+        </p:txBody>
+      </p:sp>
+    </p:spTree>
+  </p:cSld>
+  <p:clrMapOvr>
+    <a:masterClrMapping/>
+  </p:clrMapOvr>
+</p:sld>
+</file>
+
+<file path=ppt/slides/slide21.xml><?xml version="1.0" encoding="utf-8"?>
+<p:sld xmlns:a="http://schemas.openxmlformats.org/drawingml/2006/main" xmlns:r="http://schemas.openxmlformats.org/officeDocument/2006/relationships" xmlns:p="http://schemas.openxmlformats.org/presentationml/2006/main">
+  <p:cSld name="Slide 21">
+    <p:bg>
+      <p:bgPr>
+        <a:solidFill>
+          <a:srgbClr val="FFFFFF"/>
+        </a:solidFill>
+      </p:bgPr>
+    </p:bg>
+    <p:spTree>
+      <p:nvGrpSpPr>
+        <p:cNvPr id="1" name=""/>
+        <p:cNvGrpSpPr/>
+        <p:nvPr/>
+      </p:nvGrpSpPr>
+      <p:grpSpPr>
+        <a:xfrm>
+          <a:off x="0" y="0"/>
+          <a:ext cx="0" cy="0"/>
+          <a:chOff x="0" y="0"/>
+          <a:chExt cx="0" cy="0"/>
+        </a:xfrm>
+      </p:grpSpPr>
+      <p:sp>
+        <p:nvSpPr>
+          <p:cNvPr id="2" name="Shape 0"/>
+          <p:cNvSpPr/>
+          <p:nvPr/>
+        </p:nvSpPr>
+        <p:spPr>
+          <a:xfrm>
+            <a:off x="566928" y="201168"/>
+            <a:ext cx="475488" cy="50292"/>
+          </a:xfrm>
+          <a:prstGeom prst="rect">
+            <a:avLst/>
+          </a:prstGeom>
+          <a:solidFill>
+            <a:srgbClr val="0F7C86"/>
+          </a:solidFill>
+          <a:ln/>
+        </p:spPr>
+      </p:sp>
+      <p:sp>
+        <p:nvSpPr>
+          <p:cNvPr id="3" name="Text 1"/>
+          <p:cNvSpPr/>
+          <p:nvPr/>
+        </p:nvSpPr>
+        <p:spPr>
+          <a:xfrm>
+            <a:off x="566928" y="384048"/>
+            <a:ext cx="8010144" cy="237744"/>
+          </a:xfrm>
+          <a:prstGeom prst="rect">
+            <a:avLst/>
+          </a:prstGeom>
+          <a:noFill/>
+          <a:ln/>
+        </p:spPr>
+        <p:txBody>
+          <a:bodyPr wrap="square" lIns="0" tIns="0" rIns="0" bIns="0" rtlCol="0" anchor="ctr"/>
+          <a:lstStyle/>
+          <a:p>
+            <a:pPr indent="0" marL="0">
+              <a:buNone/>
+            </a:pPr>
+            <a:r>
+              <a:rPr lang="en-US" sz="1150" b="1" spc="180" kern="0" dirty="0">
+                <a:solidFill>
+                  <a:srgbClr val="0F7C86"/>
+                </a:solidFill>
+                <a:latin typeface="Arial" pitchFamily="34" charset="0"/>
+                <a:ea typeface="Arial" pitchFamily="34" charset="-122"/>
+                <a:cs typeface="Arial" pitchFamily="34" charset="-120"/>
+              </a:rPr>
+              <a:t>STATION 3 · LÖSUNG</a:t>
+            </a:r>
+            <a:endParaRPr lang="en-US" sz="1150" dirty="0"/>
+          </a:p>
+        </p:txBody>
+      </p:sp>
+      <p:sp>
+        <p:nvSpPr>
+          <p:cNvPr id="4" name="Text 2"/>
+          <p:cNvSpPr/>
+          <p:nvPr/>
+        </p:nvSpPr>
+        <p:spPr>
+          <a:xfrm>
+            <a:off x="566928" y="731520"/>
+            <a:ext cx="8010144" cy="603504"/>
+          </a:xfrm>
+          <a:prstGeom prst="rect">
+            <a:avLst/>
+          </a:prstGeom>
+          <a:noFill/>
+          <a:ln/>
+        </p:spPr>
+        <p:txBody>
+          <a:bodyPr wrap="square" lIns="0" tIns="0" rIns="0" bIns="0" rtlCol="0" anchor="t"/>
+          <a:lstStyle/>
+          <a:p>
+            <a:pPr indent="0" marL="0">
+              <a:buNone/>
+            </a:pPr>
+            <a:r>
+              <a:rPr lang="en-US" sz="2600" b="1" dirty="0">
+                <a:solidFill>
+                  <a:srgbClr val="272E52"/>
+                </a:solidFill>
+                <a:latin typeface="Arial" pitchFamily="34" charset="0"/>
+                <a:ea typeface="Arial" pitchFamily="34" charset="-122"/>
+                <a:cs typeface="Arial" pitchFamily="34" charset="-120"/>
+              </a:rPr>
+              <a:t>Wie angebunden?</a:t>
+            </a:r>
+            <a:endParaRPr lang="en-US" sz="2600" dirty="0"/>
+          </a:p>
+        </p:txBody>
+      </p:sp>
+      <p:pic>
+        <p:nvPicPr>
+          <p:cNvPr id="5" name="Image 0" descr="/Users/jacobmenge/Desktop/kurs-26.2b-orga/folienwerkstatt/assets/diagramme/speicher-loesung-anbindung.png">    </p:cNvPr>
+          <p:cNvPicPr>
+            <a:picLocks noChangeAspect="1"/>
+          </p:cNvPicPr>
+          <p:nvPr/>
+        </p:nvPicPr>
+        <p:blipFill>
+          <a:blip r:embed="rId1"/>
+          <a:stretch>
+            <a:fillRect/>
+          </a:stretch>
+        </p:blipFill>
+        <p:spPr>
+          <a:xfrm>
+            <a:off x="566928" y="1371600"/>
+            <a:ext cx="8010144" cy="2523744"/>
+          </a:xfrm>
+          <a:prstGeom prst="rect">
+            <a:avLst/>
+          </a:prstGeom>
+        </p:spPr>
+      </p:pic>
+      <p:sp>
+        <p:nvSpPr>
+          <p:cNvPr id="6" name="Shape 3"/>
+          <p:cNvSpPr/>
+          <p:nvPr/>
+        </p:nvSpPr>
+        <p:spPr>
+          <a:xfrm>
+            <a:off x="566928" y="4105656"/>
+            <a:ext cx="32004" cy="256032"/>
+          </a:xfrm>
+          <a:prstGeom prst="rect">
+            <a:avLst/>
+          </a:prstGeom>
+          <a:solidFill>
+            <a:srgbClr val="0F7C86"/>
+          </a:solidFill>
+          <a:ln/>
+        </p:spPr>
+      </p:sp>
+      <p:sp>
+        <p:nvSpPr>
+          <p:cNvPr id="7" name="Text 4"/>
+          <p:cNvSpPr/>
+          <p:nvPr/>
+        </p:nvSpPr>
+        <p:spPr>
+          <a:xfrm>
+            <a:off x="749808" y="4059936"/>
+            <a:ext cx="7827264" cy="402336"/>
+          </a:xfrm>
+          <a:prstGeom prst="rect">
+            <a:avLst/>
+          </a:prstGeom>
+          <a:noFill/>
+          <a:ln/>
+        </p:spPr>
+        <p:txBody>
+          <a:bodyPr wrap="square" lIns="0" tIns="0" rIns="0" bIns="0" rtlCol="0" anchor="ctr"/>
+          <a:lstStyle/>
+          <a:p>
+            <a:pPr indent="0" marL="0">
+              <a:buNone/>
+            </a:pPr>
+            <a:r>
+              <a:rPr lang="en-US" sz="1200" b="1" dirty="0">
+                <a:solidFill>
+                  <a:srgbClr val="434A63"/>
+                </a:solidFill>
+                <a:latin typeface="Arial" pitchFamily="34" charset="0"/>
+                <a:ea typeface="Arial" pitchFamily="34" charset="-122"/>
+                <a:cs typeface="Arial" pitchFamily="34" charset="-120"/>
+              </a:rPr>
+              <a:t>Befund 9: Eine Sicherung zählt erst, wenn sie getrennt liegt und geprüft ist.</a:t>
+            </a:r>
+            <a:endParaRPr lang="en-US" sz="1200" dirty="0"/>
+          </a:p>
+        </p:txBody>
+      </p:sp>
+      <p:sp>
+        <p:nvSpPr>
+          <p:cNvPr id="8" name="Shape 5"/>
+          <p:cNvSpPr/>
+          <p:nvPr/>
+        </p:nvSpPr>
+        <p:spPr>
+          <a:xfrm>
+            <a:off x="566928" y="4631436"/>
+            <a:ext cx="8010144" cy="0"/>
+          </a:xfrm>
+          <a:prstGeom prst="line">
+            <a:avLst/>
+          </a:prstGeom>
+          <a:noFill/>
+          <a:ln w="9525">
+            <a:solidFill>
+              <a:srgbClr val="DFE3F0"/>
+            </a:solidFill>
+            <a:prstDash val="solid"/>
+          </a:ln>
+        </p:spPr>
+      </p:sp>
+      <p:sp>
+        <p:nvSpPr>
+          <p:cNvPr id="9" name="Text 6"/>
+          <p:cNvSpPr/>
+          <p:nvPr/>
+        </p:nvSpPr>
+        <p:spPr>
+          <a:xfrm>
+            <a:off x="566928" y="4722876"/>
+            <a:ext cx="5029200" cy="237744"/>
+          </a:xfrm>
+          <a:prstGeom prst="rect">
+            <a:avLst/>
+          </a:prstGeom>
+          <a:noFill/>
+          <a:ln/>
+        </p:spPr>
+        <p:txBody>
+          <a:bodyPr wrap="square" lIns="0" tIns="0" rIns="0" bIns="0" rtlCol="0" anchor="ctr"/>
+          <a:lstStyle/>
+          <a:p>
+            <a:pPr indent="0" marL="0">
+              <a:buNone/>
+            </a:pPr>
+            <a:r>
+              <a:rPr lang="en-US" sz="1050" spc="30" kern="0" dirty="0">
+                <a:solidFill>
+                  <a:srgbClr val="5C6377"/>
+                </a:solidFill>
+                <a:latin typeface="Arial" pitchFamily="34" charset="0"/>
+                <a:ea typeface="Arial" pitchFamily="34" charset="-122"/>
+                <a:cs typeface="Arial" pitchFamily="34" charset="-120"/>
+              </a:rPr>
+              <a:t>Auswertung</a:t>
+            </a:r>
+            <a:endParaRPr lang="en-US" sz="1050" dirty="0"/>
+          </a:p>
+        </p:txBody>
+      </p:sp>
+      <p:sp>
+        <p:nvSpPr>
+          <p:cNvPr id="10" name="Text 7"/>
+          <p:cNvSpPr/>
+          <p:nvPr/>
+        </p:nvSpPr>
+        <p:spPr>
+          <a:xfrm>
+            <a:off x="8028432" y="4722876"/>
+            <a:ext cx="548640" cy="237744"/>
+          </a:xfrm>
+          <a:prstGeom prst="rect">
+            <a:avLst/>
+          </a:prstGeom>
+          <a:noFill/>
+          <a:ln/>
+        </p:spPr>
+        <p:txBody>
+          <a:bodyPr wrap="square" lIns="0" tIns="0" rIns="0" bIns="0" rtlCol="0" anchor="ctr"/>
+          <a:lstStyle/>
+          <a:p>
+            <a:pPr algn="r" indent="0" marL="0">
+              <a:buNone/>
+            </a:pPr>
+            <a:r>
+              <a:rPr lang="en-US" sz="1050" dirty="0">
+                <a:solidFill>
+                  <a:srgbClr val="5C6377"/>
+                </a:solidFill>
+                <a:latin typeface="Arial" pitchFamily="34" charset="0"/>
+                <a:ea typeface="Arial" pitchFamily="34" charset="-122"/>
+                <a:cs typeface="Arial" pitchFamily="34" charset="-120"/>
+              </a:rPr>
+              <a:t>18/19</a:t>
+            </a:r>
+            <a:endParaRPr lang="en-US" sz="1050" dirty="0"/>
+          </a:p>
+        </p:txBody>
+      </p:sp>
+    </p:spTree>
+  </p:cSld>
+  <p:clrMapOvr>
+    <a:masterClrMapping/>
+  </p:clrMapOvr>
+</p:sld>
+</file>
+
+<file path=ppt/slides/slide22.xml><?xml version="1.0" encoding="utf-8"?>
+<p:sld xmlns:a="http://schemas.openxmlformats.org/drawingml/2006/main" xmlns:r="http://schemas.openxmlformats.org/officeDocument/2006/relationships" xmlns:p="http://schemas.openxmlformats.org/presentationml/2006/main">
+  <p:cSld name="Slide 22">
+    <p:bg>
+      <p:bgPr>
+        <a:solidFill>
+          <a:srgbClr val="FFFFFF"/>
+        </a:solidFill>
+      </p:bgPr>
+    </p:bg>
+    <p:spTree>
+      <p:nvGrpSpPr>
+        <p:cNvPr id="1" name=""/>
+        <p:cNvGrpSpPr/>
+        <p:nvPr/>
+      </p:nvGrpSpPr>
+      <p:grpSpPr>
+        <a:xfrm>
+          <a:off x="0" y="0"/>
+          <a:ext cx="0" cy="0"/>
+          <a:chOff x="0" y="0"/>
+          <a:chExt cx="0" cy="0"/>
+        </a:xfrm>
+      </p:grpSpPr>
+      <p:sp>
+        <p:nvSpPr>
+          <p:cNvPr id="2" name="Shape 0"/>
+          <p:cNvSpPr/>
+          <p:nvPr/>
+        </p:nvSpPr>
+        <p:spPr>
+          <a:xfrm>
+            <a:off x="566928" y="201168"/>
+            <a:ext cx="475488" cy="50292"/>
+          </a:xfrm>
+          <a:prstGeom prst="rect">
+            <a:avLst/>
+          </a:prstGeom>
+          <a:solidFill>
+            <a:srgbClr val="0F7C86"/>
+          </a:solidFill>
+          <a:ln/>
+        </p:spPr>
+      </p:sp>
+      <p:sp>
+        <p:nvSpPr>
+          <p:cNvPr id="3" name="Text 1"/>
+          <p:cNvSpPr/>
+          <p:nvPr/>
+        </p:nvSpPr>
+        <p:spPr>
+          <a:xfrm>
+            <a:off x="566928" y="384048"/>
+            <a:ext cx="8010144" cy="237744"/>
+          </a:xfrm>
+          <a:prstGeom prst="rect">
+            <a:avLst/>
+          </a:prstGeom>
+          <a:noFill/>
+          <a:ln/>
+        </p:spPr>
+        <p:txBody>
+          <a:bodyPr wrap="square" lIns="0" tIns="0" rIns="0" bIns="0" rtlCol="0" anchor="ctr"/>
+          <a:lstStyle/>
+          <a:p>
+            <a:pPr indent="0" marL="0">
+              <a:buNone/>
+            </a:pPr>
+            <a:r>
+              <a:rPr lang="en-US" sz="1150" b="1" spc="180" kern="0" dirty="0">
+                <a:solidFill>
+                  <a:srgbClr val="0F7C86"/>
+                </a:solidFill>
+                <a:latin typeface="Arial" pitchFamily="34" charset="0"/>
+                <a:ea typeface="Arial" pitchFamily="34" charset="-122"/>
+                <a:cs typeface="Arial" pitchFamily="34" charset="-120"/>
+              </a:rPr>
+              <a:t>AUSBLICK</a:t>
+            </a:r>
+            <a:endParaRPr lang="en-US" sz="1150" dirty="0"/>
+          </a:p>
+        </p:txBody>
+      </p:sp>
+      <p:sp>
+        <p:nvSpPr>
+          <p:cNvPr id="4" name="Text 2"/>
+          <p:cNvSpPr/>
+          <p:nvPr/>
+        </p:nvSpPr>
+        <p:spPr>
+          <a:xfrm>
+            <a:off x="566928" y="731520"/>
+            <a:ext cx="8010144" cy="603504"/>
+          </a:xfrm>
+          <a:prstGeom prst="rect">
+            <a:avLst/>
+          </a:prstGeom>
+          <a:noFill/>
+          <a:ln/>
+        </p:spPr>
+        <p:txBody>
+          <a:bodyPr wrap="square" lIns="0" tIns="0" rIns="0" bIns="0" rtlCol="0" anchor="t"/>
+          <a:lstStyle/>
+          <a:p>
+            <a:pPr indent="0" marL="0">
+              <a:buNone/>
+            </a:pPr>
+            <a:r>
+              <a:rPr lang="en-US" sz="2600" b="1" dirty="0">
+                <a:solidFill>
+                  <a:srgbClr val="272E52"/>
+                </a:solidFill>
+                <a:latin typeface="Arial" pitchFamily="34" charset="0"/>
+                <a:ea typeface="Arial" pitchFamily="34" charset="-122"/>
+                <a:cs typeface="Arial" pitchFamily="34" charset="-120"/>
+              </a:rPr>
+              <a:t>Bis Mittwoch</a:t>
+            </a:r>
+            <a:endParaRPr lang="en-US" sz="2600" dirty="0"/>
+          </a:p>
+        </p:txBody>
+      </p:sp>
+      <p:sp>
+        <p:nvSpPr>
+          <p:cNvPr id="5" name="Text 3"/>
+          <p:cNvSpPr/>
+          <p:nvPr/>
+        </p:nvSpPr>
+        <p:spPr>
+          <a:xfrm>
+            <a:off x="566928" y="1444752"/>
+            <a:ext cx="8010144" cy="438912"/>
+          </a:xfrm>
+          <a:prstGeom prst="rect">
+            <a:avLst/>
+          </a:prstGeom>
+          <a:noFill/>
+          <a:ln/>
+        </p:spPr>
+        <p:txBody>
+          <a:bodyPr wrap="square" lIns="0" tIns="0" rIns="0" bIns="0" rtlCol="0" anchor="t"/>
+          <a:lstStyle/>
+          <a:p>
+            <a:pPr indent="0" marL="0">
+              <a:buNone/>
+            </a:pPr>
+            <a:r>
+              <a:rPr lang="en-US" sz="1300" dirty="0">
+                <a:solidFill>
+                  <a:srgbClr val="5C6377"/>
+                </a:solidFill>
+                <a:latin typeface="Arial" pitchFamily="34" charset="0"/>
+                <a:ea typeface="Arial" pitchFamily="34" charset="-122"/>
+                <a:cs typeface="Arial" pitchFamily="34" charset="-120"/>
+              </a:rPr>
+              <a:t>Am Mittwoch geht es um das Geld und die Menschen hinter dem Konzept: Ressourcen und Lizenzen.</a:t>
+            </a:r>
+            <a:endParaRPr lang="en-US" sz="1300" dirty="0"/>
+          </a:p>
+        </p:txBody>
+      </p:sp>
+      <p:sp>
+        <p:nvSpPr>
+          <p:cNvPr id="6" name="Shape 4"/>
+          <p:cNvSpPr/>
+          <p:nvPr/>
+        </p:nvSpPr>
+        <p:spPr>
+          <a:xfrm>
+            <a:off x="566928" y="1975104"/>
+            <a:ext cx="2523744" cy="1645920"/>
+          </a:xfrm>
+          <a:prstGeom prst="rect">
+            <a:avLst/>
+          </a:prstGeom>
+          <a:solidFill>
+            <a:srgbClr val="F5F6FC"/>
+          </a:solidFill>
+          <a:ln/>
+        </p:spPr>
+      </p:sp>
+      <p:sp>
+        <p:nvSpPr>
+          <p:cNvPr id="7" name="Shape 5"/>
+          <p:cNvSpPr/>
+          <p:nvPr/>
+        </p:nvSpPr>
+        <p:spPr>
+          <a:xfrm>
+            <a:off x="566928" y="1975104"/>
+            <a:ext cx="41148" cy="1645920"/>
+          </a:xfrm>
+          <a:prstGeom prst="rect">
+            <a:avLst/>
+          </a:prstGeom>
+          <a:solidFill>
+            <a:srgbClr val="0F7C86"/>
+          </a:solidFill>
+          <a:ln/>
+        </p:spPr>
+      </p:sp>
+      <p:sp>
+        <p:nvSpPr>
+          <p:cNvPr id="8" name="Text 6"/>
+          <p:cNvSpPr/>
+          <p:nvPr/>
+        </p:nvSpPr>
+        <p:spPr>
+          <a:xfrm>
+            <a:off x="804672" y="2121408"/>
+            <a:ext cx="2121408" cy="457200"/>
+          </a:xfrm>
+          <a:prstGeom prst="rect">
+            <a:avLst/>
+          </a:prstGeom>
+          <a:noFill/>
+          <a:ln/>
+        </p:spPr>
+        <p:txBody>
+          <a:bodyPr wrap="square" lIns="0" tIns="0" rIns="0" bIns="0" rtlCol="0" anchor="t"/>
+          <a:lstStyle/>
+          <a:p>
+            <a:pPr indent="0" marL="0">
+              <a:buNone/>
+            </a:pPr>
+            <a:r>
+              <a:rPr lang="en-US" sz="1300" b="1" dirty="0">
+                <a:solidFill>
+                  <a:srgbClr val="272E52"/>
+                </a:solidFill>
+                <a:latin typeface="Arial" pitchFamily="34" charset="0"/>
+                <a:ea typeface="Arial" pitchFamily="34" charset="-122"/>
+                <a:cs typeface="Arial" pitchFamily="34" charset="-120"/>
+              </a:rPr>
+              <a:t>Zum Nachlesen</a:t>
+            </a:r>
+            <a:endParaRPr lang="en-US" sz="1300" dirty="0"/>
+          </a:p>
+        </p:txBody>
+      </p:sp>
+      <p:sp>
+        <p:nvSpPr>
+          <p:cNvPr id="9" name="Text 7"/>
+          <p:cNvSpPr/>
+          <p:nvPr/>
+        </p:nvSpPr>
+        <p:spPr>
+          <a:xfrm>
+            <a:off x="804672" y="2624328"/>
+            <a:ext cx="2121408" cy="877824"/>
+          </a:xfrm>
+          <a:prstGeom prst="rect">
+            <a:avLst/>
+          </a:prstGeom>
+          <a:noFill/>
+          <a:ln/>
+        </p:spPr>
+        <p:txBody>
+          <a:bodyPr wrap="square" lIns="0" tIns="0" rIns="0" bIns="0" rtlCol="0" anchor="t"/>
+          <a:lstStyle/>
+          <a:p>
+            <a:pPr indent="0" marL="0">
+              <a:lnSpc>
+                <a:spcPct val="92000"/>
+              </a:lnSpc>
+              <a:buNone/>
+            </a:pPr>
+            <a:r>
+              <a:rPr lang="en-US" sz="1100" dirty="0">
+                <a:solidFill>
+                  <a:srgbClr val="434A63"/>
+                </a:solidFill>
+                <a:latin typeface="Arial" pitchFamily="34" charset="0"/>
+                <a:ea typeface="Arial" pitchFamily="34" charset="-122"/>
+                <a:cs typeface="Arial" pitchFamily="34" charset="-120"/>
+              </a:rPr>
+              <a:t>Die Übung und die Theorie zu Speicherlösungen mit acht weiteren Aufgaben stehen auf der Kursseite.</a:t>
+            </a:r>
+            <a:endParaRPr lang="en-US" sz="1100" dirty="0"/>
+          </a:p>
+        </p:txBody>
+      </p:sp>
+      <p:sp>
+        <p:nvSpPr>
+          <p:cNvPr id="10" name="Shape 8"/>
+          <p:cNvSpPr/>
+          <p:nvPr/>
+        </p:nvSpPr>
+        <p:spPr>
+          <a:xfrm>
+            <a:off x="3310128" y="1975104"/>
+            <a:ext cx="2523744" cy="1645920"/>
+          </a:xfrm>
+          <a:prstGeom prst="rect">
+            <a:avLst/>
+          </a:prstGeom>
+          <a:solidFill>
+            <a:srgbClr val="F5F6FC"/>
+          </a:solidFill>
+          <a:ln/>
+        </p:spPr>
+      </p:sp>
+      <p:sp>
+        <p:nvSpPr>
+          <p:cNvPr id="11" name="Shape 9"/>
+          <p:cNvSpPr/>
+          <p:nvPr/>
+        </p:nvSpPr>
+        <p:spPr>
+          <a:xfrm>
+            <a:off x="3310128" y="1975104"/>
+            <a:ext cx="41148" cy="1645920"/>
+          </a:xfrm>
+          <a:prstGeom prst="rect">
+            <a:avLst/>
+          </a:prstGeom>
+          <a:solidFill>
+            <a:srgbClr val="0F7C86"/>
+          </a:solidFill>
+          <a:ln/>
+        </p:spPr>
+      </p:sp>
+      <p:sp>
+        <p:nvSpPr>
+          <p:cNvPr id="12" name="Text 10"/>
+          <p:cNvSpPr/>
+          <p:nvPr/>
+        </p:nvSpPr>
+        <p:spPr>
+          <a:xfrm>
+            <a:off x="3547872" y="2121408"/>
+            <a:ext cx="2121408" cy="457200"/>
+          </a:xfrm>
+          <a:prstGeom prst="rect">
+            <a:avLst/>
+          </a:prstGeom>
+          <a:noFill/>
+          <a:ln/>
+        </p:spPr>
+        <p:txBody>
+          <a:bodyPr wrap="square" lIns="0" tIns="0" rIns="0" bIns="0" rtlCol="0" anchor="t"/>
+          <a:lstStyle/>
+          <a:p>
+            <a:pPr indent="0" marL="0">
+              <a:buNone/>
+            </a:pPr>
+            <a:r>
+              <a:rPr lang="en-US" sz="1300" b="1" dirty="0">
+                <a:solidFill>
+                  <a:srgbClr val="272E52"/>
+                </a:solidFill>
+                <a:latin typeface="Arial" pitchFamily="34" charset="0"/>
+                <a:ea typeface="Arial" pitchFamily="34" charset="-122"/>
+                <a:cs typeface="Arial" pitchFamily="34" charset="-120"/>
+              </a:rPr>
+              <a:t>Das braucht ihr von heute</a:t>
+            </a:r>
+            <a:endParaRPr lang="en-US" sz="1300" dirty="0"/>
+          </a:p>
+        </p:txBody>
+      </p:sp>
+      <p:sp>
+        <p:nvSpPr>
+          <p:cNvPr id="13" name="Text 11"/>
+          <p:cNvSpPr/>
+          <p:nvPr/>
+        </p:nvSpPr>
+        <p:spPr>
+          <a:xfrm>
+            <a:off x="3547872" y="2624328"/>
+            <a:ext cx="2121408" cy="877824"/>
+          </a:xfrm>
+          <a:prstGeom prst="rect">
+            <a:avLst/>
+          </a:prstGeom>
+          <a:noFill/>
+          <a:ln/>
+        </p:spPr>
+        <p:txBody>
+          <a:bodyPr wrap="square" lIns="0" tIns="0" rIns="0" bIns="0" rtlCol="0" anchor="t"/>
+          <a:lstStyle/>
+          <a:p>
+            <a:pPr indent="0" marL="0">
+              <a:lnSpc>
+                <a:spcPct val="92000"/>
+              </a:lnSpc>
+              <a:buNone/>
+            </a:pPr>
+            <a:r>
+              <a:rPr lang="en-US" sz="1100" dirty="0">
+                <a:solidFill>
+                  <a:srgbClr val="434A63"/>
+                </a:solidFill>
+                <a:latin typeface="Arial" pitchFamily="34" charset="0"/>
+                <a:ea typeface="Arial" pitchFamily="34" charset="-122"/>
+                <a:cs typeface="Arial" pitchFamily="34" charset="-120"/>
+              </a:rPr>
+              <a:t>Rund 3,6 TB netto, vier Platten in RAID 6 oder 10 plus Hot Spare, eine eigene Sicherung mit Kopie außer Haus.</a:t>
+            </a:r>
+            <a:endParaRPr lang="en-US" sz="1100" dirty="0"/>
+          </a:p>
+        </p:txBody>
+      </p:sp>
+      <p:sp>
+        <p:nvSpPr>
+          <p:cNvPr id="14" name="Shape 12"/>
+          <p:cNvSpPr/>
+          <p:nvPr/>
+        </p:nvSpPr>
+        <p:spPr>
+          <a:xfrm>
+            <a:off x="6053328" y="1975104"/>
+            <a:ext cx="2523744" cy="1645920"/>
+          </a:xfrm>
+          <a:prstGeom prst="rect">
+            <a:avLst/>
+          </a:prstGeom>
+          <a:solidFill>
+            <a:srgbClr val="F5F6FC"/>
+          </a:solidFill>
+          <a:ln/>
+        </p:spPr>
+      </p:sp>
+      <p:sp>
+        <p:nvSpPr>
+          <p:cNvPr id="15" name="Shape 13"/>
+          <p:cNvSpPr/>
+          <p:nvPr/>
+        </p:nvSpPr>
+        <p:spPr>
+          <a:xfrm>
+            <a:off x="6053328" y="1975104"/>
+            <a:ext cx="41148" cy="1645920"/>
+          </a:xfrm>
+          <a:prstGeom prst="rect">
+            <a:avLst/>
+          </a:prstGeom>
+          <a:solidFill>
+            <a:srgbClr val="0F7C86"/>
+          </a:solidFill>
+          <a:ln/>
+        </p:spPr>
+      </p:sp>
+      <p:sp>
+        <p:nvSpPr>
+          <p:cNvPr id="16" name="Text 14"/>
+          <p:cNvSpPr/>
+          <p:nvPr/>
+        </p:nvSpPr>
+        <p:spPr>
+          <a:xfrm>
+            <a:off x="6291072" y="2121408"/>
+            <a:ext cx="2121408" cy="457200"/>
+          </a:xfrm>
+          <a:prstGeom prst="rect">
+            <a:avLst/>
+          </a:prstGeom>
+          <a:noFill/>
+          <a:ln/>
+        </p:spPr>
+        <p:txBody>
+          <a:bodyPr wrap="square" lIns="0" tIns="0" rIns="0" bIns="0" rtlCol="0" anchor="t"/>
+          <a:lstStyle/>
+          <a:p>
+            <a:pPr indent="0" marL="0">
+              <a:buNone/>
+            </a:pPr>
+            <a:r>
+              <a:rPr lang="en-US" sz="1300" b="1" dirty="0">
+                <a:solidFill>
+                  <a:srgbClr val="272E52"/>
+                </a:solidFill>
+                <a:latin typeface="Arial" pitchFamily="34" charset="0"/>
+                <a:ea typeface="Arial" pitchFamily="34" charset="-122"/>
+                <a:cs typeface="Arial" pitchFamily="34" charset="-120"/>
+              </a:rPr>
+              <a:t>Am Mittwoch</a:t>
+            </a:r>
+            <a:endParaRPr lang="en-US" sz="1300" dirty="0"/>
+          </a:p>
+        </p:txBody>
+      </p:sp>
+      <p:sp>
+        <p:nvSpPr>
+          <p:cNvPr id="17" name="Text 15"/>
+          <p:cNvSpPr/>
+          <p:nvPr/>
+        </p:nvSpPr>
+        <p:spPr>
+          <a:xfrm>
+            <a:off x="6291072" y="2624328"/>
+            <a:ext cx="2121408" cy="877824"/>
+          </a:xfrm>
+          <a:prstGeom prst="rect">
+            <a:avLst/>
+          </a:prstGeom>
+          <a:noFill/>
+          <a:ln/>
+        </p:spPr>
+        <p:txBody>
+          <a:bodyPr wrap="square" lIns="0" tIns="0" rIns="0" bIns="0" rtlCol="0" anchor="t"/>
+          <a:lstStyle/>
+          <a:p>
+            <a:pPr indent="0" marL="0">
+              <a:lnSpc>
+                <a:spcPct val="92000"/>
+              </a:lnSpc>
+              <a:buNone/>
+            </a:pPr>
+            <a:r>
+              <a:rPr lang="en-US" sz="1100" dirty="0">
+                <a:solidFill>
+                  <a:srgbClr val="434A63"/>
+                </a:solidFill>
+                <a:latin typeface="Arial" pitchFamily="34" charset="0"/>
+                <a:ea typeface="Arial" pitchFamily="34" charset="-122"/>
+                <a:cs typeface="Arial" pitchFamily="34" charset="-120"/>
+              </a:rPr>
+              <a:t>Was kostet das, wer baut es auf und welche Lizenzen braucht Voltrad dafür?</a:t>
+            </a:r>
+            <a:endParaRPr lang="en-US" sz="1100" dirty="0"/>
+          </a:p>
+        </p:txBody>
+      </p:sp>
+      <p:sp>
+        <p:nvSpPr>
+          <p:cNvPr id="18" name="Shape 16"/>
+          <p:cNvSpPr/>
+          <p:nvPr/>
+        </p:nvSpPr>
+        <p:spPr>
+          <a:xfrm>
+            <a:off x="566928" y="3886200"/>
+            <a:ext cx="32004" cy="256032"/>
+          </a:xfrm>
+          <a:prstGeom prst="rect">
+            <a:avLst/>
+          </a:prstGeom>
+          <a:solidFill>
+            <a:srgbClr val="0F7C86"/>
+          </a:solidFill>
+          <a:ln/>
+        </p:spPr>
+      </p:sp>
+      <p:sp>
+        <p:nvSpPr>
+          <p:cNvPr id="19" name="Text 17"/>
+          <p:cNvSpPr/>
+          <p:nvPr/>
+        </p:nvSpPr>
+        <p:spPr>
+          <a:xfrm>
+            <a:off x="749808" y="3840480"/>
+            <a:ext cx="7827264" cy="402336"/>
+          </a:xfrm>
+          <a:prstGeom prst="rect">
+            <a:avLst/>
+          </a:prstGeom>
+          <a:noFill/>
+          <a:ln/>
+        </p:spPr>
+        <p:txBody>
+          <a:bodyPr wrap="square" lIns="0" tIns="0" rIns="0" bIns="0" rtlCol="0" anchor="ctr"/>
+          <a:lstStyle/>
+          <a:p>
+            <a:pPr indent="0" marL="0">
+              <a:buNone/>
+            </a:pPr>
+            <a:r>
+              <a:rPr lang="en-US" sz="1200" b="1" dirty="0">
+                <a:solidFill>
+                  <a:srgbClr val="434A63"/>
+                </a:solidFill>
+                <a:latin typeface="Arial" pitchFamily="34" charset="0"/>
+                <a:ea typeface="Arial" pitchFamily="34" charset="-122"/>
+                <a:cs typeface="Arial" pitchFamily="34" charset="-120"/>
+              </a:rPr>
+              <a:t>Nächster Termin: Mittwoch, 21. Oktober um 18:00 Uhr.</a:t>
+            </a:r>
+            <a:endParaRPr lang="en-US" sz="1200" dirty="0"/>
+          </a:p>
+        </p:txBody>
+      </p:sp>
+      <p:sp>
+        <p:nvSpPr>
+          <p:cNvPr id="20" name="Shape 18"/>
+          <p:cNvSpPr/>
+          <p:nvPr/>
+        </p:nvSpPr>
+        <p:spPr>
+          <a:xfrm>
+            <a:off x="566928" y="4631436"/>
+            <a:ext cx="8010144" cy="0"/>
+          </a:xfrm>
+          <a:prstGeom prst="line">
+            <a:avLst/>
+          </a:prstGeom>
+          <a:noFill/>
+          <a:ln w="9525">
+            <a:solidFill>
+              <a:srgbClr val="DFE3F0"/>
+            </a:solidFill>
+            <a:prstDash val="solid"/>
+          </a:ln>
+        </p:spPr>
+      </p:sp>
+      <p:sp>
+        <p:nvSpPr>
+          <p:cNvPr id="21" name="Text 19"/>
+          <p:cNvSpPr/>
+          <p:nvPr/>
+        </p:nvSpPr>
+        <p:spPr>
+          <a:xfrm>
+            <a:off x="566928" y="4722876"/>
+            <a:ext cx="5029200" cy="237744"/>
+          </a:xfrm>
+          <a:prstGeom prst="rect">
+            <a:avLst/>
+          </a:prstGeom>
+          <a:noFill/>
+          <a:ln/>
+        </p:spPr>
+        <p:txBody>
+          <a:bodyPr wrap="square" lIns="0" tIns="0" rIns="0" bIns="0" rtlCol="0" anchor="ctr"/>
+          <a:lstStyle/>
+          <a:p>
+            <a:pPr indent="0" marL="0">
+              <a:buNone/>
+            </a:pPr>
+            <a:r>
+              <a:rPr lang="en-US" sz="1050" spc="30" kern="0" dirty="0">
+                <a:solidFill>
+                  <a:srgbClr val="5C6377"/>
+                </a:solidFill>
+                <a:latin typeface="Arial" pitchFamily="34" charset="0"/>
+                <a:ea typeface="Arial" pitchFamily="34" charset="-122"/>
+                <a:cs typeface="Arial" pitchFamily="34" charset="-120"/>
+              </a:rPr>
+              <a:t>Abschluss</a:t>
+            </a:r>
+            <a:endParaRPr lang="en-US" sz="1050" dirty="0"/>
+          </a:p>
+        </p:txBody>
+      </p:sp>
+      <p:sp>
+        <p:nvSpPr>
+          <p:cNvPr id="22" name="Text 20"/>
+          <p:cNvSpPr/>
+          <p:nvPr/>
+        </p:nvSpPr>
+        <p:spPr>
+          <a:xfrm>
+            <a:off x="8028432" y="4722876"/>
+            <a:ext cx="548640" cy="237744"/>
+          </a:xfrm>
+          <a:prstGeom prst="rect">
+            <a:avLst/>
+          </a:prstGeom>
+          <a:noFill/>
+          <a:ln/>
+        </p:spPr>
+        <p:txBody>
+          <a:bodyPr wrap="square" lIns="0" tIns="0" rIns="0" bIns="0" rtlCol="0" anchor="ctr"/>
+          <a:lstStyle/>
+          <a:p>
+            <a:pPr algn="r" indent="0" marL="0">
+              <a:buNone/>
+            </a:pPr>
+            <a:r>
+              <a:rPr lang="en-US" sz="1050" dirty="0">
+                <a:solidFill>
+                  <a:srgbClr val="5C6377"/>
+                </a:solidFill>
+                <a:latin typeface="Arial" pitchFamily="34" charset="0"/>
+                <a:ea typeface="Arial" pitchFamily="34" charset="-122"/>
+                <a:cs typeface="Arial" pitchFamily="34" charset="-120"/>
+              </a:rPr>
+              <a:t>19/19</a:t>
+            </a:r>
+            <a:endParaRPr lang="en-US" sz="1050" dirty="0"/>
+          </a:p>
+        </p:txBody>
+      </p:sp>
+    </p:spTree>
+  </p:cSld>
+  <p:clrMapOvr>
+    <a:masterClrMapping/>
+  </p:clrMapOvr>
+</p:sld>
+</file>
+
+<file path=ppt/slides/slide23.xml><?xml version="1.0" encoding="utf-8"?>
+<p:sld xmlns:a="http://schemas.openxmlformats.org/drawingml/2006/main" xmlns:r="http://schemas.openxmlformats.org/officeDocument/2006/relationships" xmlns:p="http://schemas.openxmlformats.org/presentationml/2006/main">
+  <p:cSld name="Slide 23">
     <p:bg>
       <p:bgPr>
         <a:solidFill>
@@ -9397,7 +10632,7 @@
                 <a:ea typeface="Arial" pitchFamily="34" charset="-122"/>
                 <a:cs typeface="Arial" pitchFamily="34" charset="-120"/>
               </a:rPr>
-              <a:t>Kleiner Tipp: Größere Platten kaufen ist eine Antwort. Ist es die beste?</a:t>
+              <a:t>Ein Stichwort reicht, zum Beispiel „größere Platten kaufen“. Ist das die beste Antwort?</a:t>
             </a:r>
             <a:endParaRPr lang="en-US" sz="1200" dirty="0"/>
           </a:p>
@@ -9498,7 +10733,7 @@
                 <a:ea typeface="Arial" pitchFamily="34" charset="-122"/>
                 <a:cs typeface="Arial" pitchFamily="34" charset="-120"/>
               </a:rPr>
-              <a:t>2/16</a:t>
+              <a:t>2/19</a:t>
             </a:r>
             <a:endParaRPr lang="en-US" sz="1050" dirty="0"/>
           </a:p>
@@ -9812,7 +11047,7 @@
                 <a:ea typeface="Arial" pitchFamily="34" charset="-122"/>
                 <a:cs typeface="Arial" pitchFamily="34" charset="-120"/>
               </a:rPr>
-              <a:t>3/16</a:t>
+              <a:t>3/19</a:t>
             </a:r>
             <a:endParaRPr lang="en-US" sz="1050" dirty="0"/>
           </a:p>
@@ -10335,7 +11570,7 @@
                 <a:ea typeface="Arial" pitchFamily="34" charset="-122"/>
                 <a:cs typeface="Arial" pitchFamily="34" charset="-120"/>
               </a:rPr>
-              <a:t>4/16</a:t>
+              <a:t>4/19</a:t>
             </a:r>
             <a:endParaRPr lang="en-US" sz="1050" dirty="0"/>
           </a:p>
@@ -10426,7 +11661,7 @@
                 <a:ea typeface="Arial" pitchFamily="34" charset="-122"/>
                 <a:cs typeface="Arial" pitchFamily="34" charset="-120"/>
               </a:rPr>
-              <a:t>RAID: BRUTTO UND NETTO</a:t>
+              <a:t>WIE SICHER? · RAID VERSTEHEN</a:t>
             </a:r>
             <a:endParaRPr lang="en-US" sz="1150" dirty="0"/>
           </a:p>
@@ -10465,7 +11700,7 @@
                 <a:ea typeface="Arial" pitchFamily="34" charset="-122"/>
                 <a:cs typeface="Arial" pitchFamily="34" charset="-120"/>
               </a:rPr>
-              <a:t>Wie sicher?</a:t>
+              <a:t>RAID 1 und RAID 5</a:t>
             </a:r>
             <a:endParaRPr lang="en-US" sz="2600" dirty="0"/>
           </a:p>
@@ -10473,7 +11708,7 @@
       </p:sp>
       <p:pic>
         <p:nvPicPr>
-          <p:cNvPr id="5" name="Image 0" descr="/Users/jacobmenge/Desktop/kurs-26.2b-orga/folienwerkstatt/assets/diagramme/speicher-raid.png">    </p:cNvPr>
+          <p:cNvPr id="5" name="Image 0" descr="/Users/jacobmenge/Desktop/kurs-26.2b-orga/folienwerkstatt/assets/diagramme/speicher-raid-erklaert-1.png">    </p:cNvPr>
           <p:cNvPicPr>
             <a:picLocks noChangeAspect="1"/>
           </p:cNvPicPr>
@@ -10487,8 +11722,8 @@
         </p:blipFill>
         <p:spPr>
           <a:xfrm>
-            <a:off x="566928" y="1335024"/>
-            <a:ext cx="8010144" cy="2743200"/>
+            <a:off x="566928" y="1316736"/>
+            <a:ext cx="8010144" cy="3017520"/>
           </a:xfrm>
           <a:prstGeom prst="rect">
             <a:avLst/>
@@ -10498,65 +11733,6 @@
       <p:sp>
         <p:nvSpPr>
           <p:cNvPr id="6" name="Shape 3"/>
-          <p:cNvSpPr/>
-          <p:nvPr/>
-        </p:nvSpPr>
-        <p:spPr>
-          <a:xfrm>
-            <a:off x="566928" y="4215384"/>
-            <a:ext cx="32004" cy="256032"/>
-          </a:xfrm>
-          <a:prstGeom prst="rect">
-            <a:avLst/>
-          </a:prstGeom>
-          <a:solidFill>
-            <a:srgbClr val="0F7C86"/>
-          </a:solidFill>
-          <a:ln/>
-        </p:spPr>
-      </p:sp>
-      <p:sp>
-        <p:nvSpPr>
-          <p:cNvPr id="7" name="Text 4"/>
-          <p:cNvSpPr/>
-          <p:nvPr/>
-        </p:nvSpPr>
-        <p:spPr>
-          <a:xfrm>
-            <a:off x="749808" y="4169664"/>
-            <a:ext cx="7827264" cy="402336"/>
-          </a:xfrm>
-          <a:prstGeom prst="rect">
-            <a:avLst/>
-          </a:prstGeom>
-          <a:noFill/>
-          <a:ln/>
-        </p:spPr>
-        <p:txBody>
-          <a:bodyPr wrap="square" lIns="0" tIns="0" rIns="0" bIns="0" rtlCol="0" anchor="ctr"/>
-          <a:lstStyle/>
-          <a:p>
-            <a:pPr indent="0" marL="0">
-              <a:buNone/>
-            </a:pPr>
-            <a:r>
-              <a:rPr lang="en-US" sz="1200" b="1" dirty="0">
-                <a:solidFill>
-                  <a:srgbClr val="434A63"/>
-                </a:solidFill>
-                <a:latin typeface="Arial" pitchFamily="34" charset="0"/>
-                <a:ea typeface="Arial" pitchFamily="34" charset="-122"/>
-                <a:cs typeface="Arial" pitchFamily="34" charset="-120"/>
-              </a:rPr>
-              <a:t>RAID heißt: mehrere Platten im Verbund. Fällt eine aus, läuft der Betrieb weiter.</a:t>
-            </a:r>
-            <a:endParaRPr lang="en-US" sz="1200" dirty="0"/>
-          </a:p>
-        </p:txBody>
-      </p:sp>
-      <p:sp>
-        <p:nvSpPr>
-          <p:cNvPr id="8" name="Shape 5"/>
           <p:cNvSpPr/>
           <p:nvPr/>
         </p:nvSpPr>
@@ -10579,7 +11755,7 @@
       </p:sp>
       <p:sp>
         <p:nvSpPr>
-          <p:cNvPr id="9" name="Text 6"/>
+          <p:cNvPr id="7" name="Text 4"/>
           <p:cNvSpPr/>
           <p:nvPr/>
         </p:nvSpPr>
@@ -10618,7 +11794,7 @@
       </p:sp>
       <p:sp>
         <p:nvSpPr>
-          <p:cNvPr id="10" name="Text 7"/>
+          <p:cNvPr id="8" name="Text 5"/>
           <p:cNvSpPr/>
           <p:nvPr/>
         </p:nvSpPr>
@@ -10649,7 +11825,7 @@
                 <a:ea typeface="Arial" pitchFamily="34" charset="-122"/>
                 <a:cs typeface="Arial" pitchFamily="34" charset="-120"/>
               </a:rPr>
-              <a:t>5/16</a:t>
+              <a:t>5/19</a:t>
             </a:r>
             <a:endParaRPr lang="en-US" sz="1050" dirty="0"/>
           </a:p>
@@ -10740,7 +11916,7 @@
                 <a:ea typeface="Arial" pitchFamily="34" charset="-122"/>
                 <a:cs typeface="Arial" pitchFamily="34" charset="-120"/>
               </a:rPr>
-              <a:t>DIE REGEL 3-2-1</a:t>
+              <a:t>WIE SICHER? · RAID VERSTEHEN</a:t>
             </a:r>
             <a:endParaRPr lang="en-US" sz="1150" dirty="0"/>
           </a:p>
@@ -10779,7 +11955,7 @@
                 <a:ea typeface="Arial" pitchFamily="34" charset="-122"/>
                 <a:cs typeface="Arial" pitchFamily="34" charset="-120"/>
               </a:rPr>
-              <a:t>RAID ist keine Datensicherung</a:t>
+              <a:t>RAID 6 und RAID 10</a:t>
             </a:r>
             <a:endParaRPr lang="en-US" sz="2600" dirty="0"/>
           </a:p>
@@ -10787,7 +11963,7 @@
       </p:sp>
       <p:pic>
         <p:nvPicPr>
-          <p:cNvPr id="5" name="Image 0" descr="/Users/jacobmenge/Desktop/kurs-26.2b-orga/folienwerkstatt/assets/diagramme/speicher-backup.png">    </p:cNvPr>
+          <p:cNvPr id="5" name="Image 0" descr="/Users/jacobmenge/Desktop/kurs-26.2b-orga/folienwerkstatt/assets/diagramme/speicher-raid-erklaert-2.png">    </p:cNvPr>
           <p:cNvPicPr>
             <a:picLocks noChangeAspect="1"/>
           </p:cNvPicPr>
@@ -10801,8 +11977,8 @@
         </p:blipFill>
         <p:spPr>
           <a:xfrm>
-            <a:off x="566928" y="1335024"/>
-            <a:ext cx="8010144" cy="2688336"/>
+            <a:off x="566928" y="1316736"/>
+            <a:ext cx="8010144" cy="3017520"/>
           </a:xfrm>
           <a:prstGeom prst="rect">
             <a:avLst/>
@@ -10812,65 +11988,6 @@
       <p:sp>
         <p:nvSpPr>
           <p:cNvPr id="6" name="Shape 3"/>
-          <p:cNvSpPr/>
-          <p:nvPr/>
-        </p:nvSpPr>
-        <p:spPr>
-          <a:xfrm>
-            <a:off x="566928" y="4160520"/>
-            <a:ext cx="32004" cy="256032"/>
-          </a:xfrm>
-          <a:prstGeom prst="rect">
-            <a:avLst/>
-          </a:prstGeom>
-          <a:solidFill>
-            <a:srgbClr val="0F7C86"/>
-          </a:solidFill>
-          <a:ln/>
-        </p:spPr>
-      </p:sp>
-      <p:sp>
-        <p:nvSpPr>
-          <p:cNvPr id="7" name="Text 4"/>
-          <p:cNvSpPr/>
-          <p:nvPr/>
-        </p:nvSpPr>
-        <p:spPr>
-          <a:xfrm>
-            <a:off x="749808" y="4114800"/>
-            <a:ext cx="7827264" cy="402336"/>
-          </a:xfrm>
-          <a:prstGeom prst="rect">
-            <a:avLst/>
-          </a:prstGeom>
-          <a:noFill/>
-          <a:ln/>
-        </p:spPr>
-        <p:txBody>
-          <a:bodyPr wrap="square" lIns="0" tIns="0" rIns="0" bIns="0" rtlCol="0" anchor="ctr"/>
-          <a:lstStyle/>
-          <a:p>
-            <a:pPr indent="0" marL="0">
-              <a:buNone/>
-            </a:pPr>
-            <a:r>
-              <a:rPr lang="en-US" sz="1200" b="1" dirty="0">
-                <a:solidFill>
-                  <a:srgbClr val="434A63"/>
-                </a:solidFill>
-                <a:latin typeface="Arial" pitchFamily="34" charset="0"/>
-                <a:ea typeface="Arial" pitchFamily="34" charset="-122"/>
-                <a:cs typeface="Arial" pitchFamily="34" charset="-120"/>
-              </a:rPr>
-              <a:t>Bei Voltrad hatte seit drei Jahren niemand die Rücksicherung geprüft. Das war Befund 9.</a:t>
-            </a:r>
-            <a:endParaRPr lang="en-US" sz="1200" dirty="0"/>
-          </a:p>
-        </p:txBody>
-      </p:sp>
-      <p:sp>
-        <p:nvSpPr>
-          <p:cNvPr id="8" name="Shape 5"/>
           <p:cNvSpPr/>
           <p:nvPr/>
         </p:nvSpPr>
@@ -10893,7 +12010,7 @@
       </p:sp>
       <p:sp>
         <p:nvSpPr>
-          <p:cNvPr id="9" name="Text 6"/>
+          <p:cNvPr id="7" name="Text 4"/>
           <p:cNvSpPr/>
           <p:nvPr/>
         </p:nvSpPr>
@@ -10932,7 +12049,7 @@
       </p:sp>
       <p:sp>
         <p:nvSpPr>
-          <p:cNvPr id="10" name="Text 7"/>
+          <p:cNvPr id="8" name="Text 5"/>
           <p:cNvSpPr/>
           <p:nvPr/>
         </p:nvSpPr>
@@ -10963,7 +12080,7 @@
                 <a:ea typeface="Arial" pitchFamily="34" charset="-122"/>
                 <a:cs typeface="Arial" pitchFamily="34" charset="-120"/>
               </a:rPr>
-              <a:t>6/16</a:t>
+              <a:t>6/19</a:t>
             </a:r>
             <a:endParaRPr lang="en-US" sz="1050" dirty="0"/>
           </a:p>
@@ -11054,7 +12171,7 @@
                 <a:ea typeface="Arial" pitchFamily="34" charset="-122"/>
                 <a:cs typeface="Arial" pitchFamily="34" charset="-120"/>
               </a:rPr>
-              <a:t>DAS, NAS UND SAN</a:t>
+              <a:t>WIE SICHER? · BRUTTO UND NETTO</a:t>
             </a:r>
             <a:endParaRPr lang="en-US" sz="1150" dirty="0"/>
           </a:p>
@@ -11093,7 +12210,7 @@
                 <a:ea typeface="Arial" pitchFamily="34" charset="-122"/>
                 <a:cs typeface="Arial" pitchFamily="34" charset="-120"/>
               </a:rPr>
-              <a:t>Wie angebunden?</a:t>
+              <a:t>Die vier Level im Vergleich</a:t>
             </a:r>
             <a:endParaRPr lang="en-US" sz="2600" dirty="0"/>
           </a:p>
@@ -11101,7 +12218,7 @@
       </p:sp>
       <p:pic>
         <p:nvPicPr>
-          <p:cNvPr id="5" name="Image 0" descr="/Users/jacobmenge/Desktop/kurs-26.2b-orga/folienwerkstatt/assets/diagramme/speicher-anbindung.png">    </p:cNvPr>
+          <p:cNvPr id="5" name="Image 0" descr="/Users/jacobmenge/Desktop/kurs-26.2b-orga/folienwerkstatt/assets/diagramme/speicher-raid.png">    </p:cNvPr>
           <p:cNvPicPr>
             <a:picLocks noChangeAspect="1"/>
           </p:cNvPicPr>
@@ -11176,7 +12293,7 @@
                 <a:ea typeface="Arial" pitchFamily="34" charset="-122"/>
                 <a:cs typeface="Arial" pitchFamily="34" charset="-120"/>
               </a:rPr>
-              <a:t>Bei Voltrad sollen sich zwei Hosts vertreten können. Welche Anbindung braucht das?</a:t>
+              <a:t>Gleiche vier Platten, sehr verschiedene Ergebnisse: Mehr Sicherheit kostet nutzbaren Platz.</a:t>
             </a:r>
             <a:endParaRPr lang="en-US" sz="1200" dirty="0"/>
           </a:p>
@@ -11277,7 +12394,7 @@
                 <a:ea typeface="Arial" pitchFamily="34" charset="-122"/>
                 <a:cs typeface="Arial" pitchFamily="34" charset="-120"/>
               </a:rPr>
-              <a:t>7/16</a:t>
+              <a:t>7/19</a:t>
             </a:r>
             <a:endParaRPr lang="en-US" sz="1050" dirty="0"/>
           </a:p>

--- a/folien/14-speicher.pptx
+++ b/folien/14-speicher.pptx
@@ -4677,7 +4677,7 @@
       </p:sp>
       <p:sp>
         <p:nvSpPr>
-          <p:cNvPr id="22" name="Shape 20"/>
+          <p:cNvPr id="22" name="Text 20"/>
           <p:cNvSpPr/>
           <p:nvPr/>
         </p:nvSpPr>
@@ -4686,10 +4686,8 @@
             <a:off x="2944368" y="3694176"/>
             <a:ext cx="4023360" cy="365760"/>
           </a:xfrm>
-          <a:prstGeom prst="roundRect">
-            <a:avLst>
-              <a:gd name="adj" fmla="val 20000"/>
-            </a:avLst>
+          <a:prstGeom prst="rect">
+            <a:avLst/>
           </a:prstGeom>
           <a:solidFill>
             <a:srgbClr val="FFFFFF"/>
@@ -4698,29 +4696,10 @@
             <a:solidFill>
               <a:srgbClr val="0F7C86"/>
             </a:solidFill>
-            <a:prstDash val="solid"/>
           </a:ln>
         </p:spPr>
-      </p:sp>
-      <p:sp>
-        <p:nvSpPr>
-          <p:cNvPr id="23" name="Text 21"/>
-          <p:cNvSpPr/>
-          <p:nvPr/>
-        </p:nvSpPr>
-        <p:spPr>
-          <a:xfrm>
-            <a:off x="3035808" y="3694176"/>
-            <a:ext cx="3840480" cy="365760"/>
-          </a:xfrm>
-          <a:prstGeom prst="rect">
-            <a:avLst/>
-          </a:prstGeom>
-          <a:noFill/>
-          <a:ln/>
-        </p:spPr>
-        <p:txBody>
-          <a:bodyPr wrap="square" lIns="0" tIns="0" rIns="0" bIns="0" rtlCol="0" anchor="ctr"/>
+        <p:txBody>
+          <a:bodyPr wrap="square" lIns="0" tIns="88900" rIns="88900" bIns="0" rtlCol="0" anchor="ctr"/>
           <a:lstStyle/>
           <a:p>
             <a:pPr indent="0" marL="0">
@@ -4743,7 +4722,7 @@
       </p:sp>
       <p:sp>
         <p:nvSpPr>
-          <p:cNvPr id="24" name="Text 22"/>
+          <p:cNvPr id="23" name="Text 21"/>
           <p:cNvSpPr/>
           <p:nvPr/>
         </p:nvSpPr>
@@ -4782,7 +4761,7 @@
       </p:sp>
       <p:sp>
         <p:nvSpPr>
-          <p:cNvPr id="25" name="Shape 23"/>
+          <p:cNvPr id="24" name="Shape 22"/>
           <p:cNvSpPr/>
           <p:nvPr/>
         </p:nvSpPr>
@@ -4805,7 +4784,7 @@
       </p:sp>
       <p:sp>
         <p:nvSpPr>
-          <p:cNvPr id="26" name="Text 24"/>
+          <p:cNvPr id="25" name="Text 23"/>
           <p:cNvSpPr/>
           <p:nvPr/>
         </p:nvSpPr>
@@ -4844,7 +4823,7 @@
       </p:sp>
       <p:sp>
         <p:nvSpPr>
-          <p:cNvPr id="27" name="Text 25"/>
+          <p:cNvPr id="26" name="Text 24"/>
           <p:cNvSpPr/>
           <p:nvPr/>
         </p:nvSpPr>
